--- a/docs/deck/SceneGapEdge_StageI_Proposal.pptx
+++ b/docs/deck/SceneGapEdge_StageI_Proposal.pptx
@@ -29,9 +29,10 @@
     <p:sldId id="277" r:id="rId23"/>
     <p:sldId id="278" r:id="rId24"/>
     <p:sldId id="279" r:id="rId25"/>
+    <p:sldId id="280" r:id="rId26"/>
   </p:sldIdLst>
   <p:notesMasterIdLst>
-    <p:notesMasterId r:id="rId26"/>
+    <p:notesMasterId r:id="rId27"/>
   </p:notesMasterIdLst>
   <p:sldSz cx="12192000" cy="6858000"/>
   <p:notesSz cx="6858000" cy="12192000"/>
@@ -130,13 +131,13 @@
   <p:extLst>
     <p:ext uri="{521415D9-36F7-43E2-AB2F-B90AF26B5E84}">
       <p14:sectionLst xmlns:p14="http://schemas.microsoft.com/office/powerpoint/2010/main">
-        <p14:section name="Problem" id="{6f085e8a-12d4-c436-4b6c-41c604d3908c}">
+        <p14:section name="Problem" id="{20e5a9ca-29c1-c199-e5e5-81d081f3afcc}">
           <p14:sldIdLst>
             <p14:sldId id="257"/>
             <p14:sldId id="258"/>
           </p14:sldIdLst>
         </p14:section>
-        <p14:section name="Solution" id="{84d295fb-fe41-90ce-4085-cb17c314c8df}">
+        <p14:section name="Solution" id="{51254f0d-8345-d7d6-6f60-171015cf08dc}">
           <p14:sldIdLst>
             <p14:sldId id="259"/>
             <p14:sldId id="260"/>
@@ -145,13 +146,13 @@
             <p14:sldId id="263"/>
           </p14:sldIdLst>
         </p14:section>
-        <p14:section name="Hardware" id="{46b69731-a644-1e32-8a0f-153ce8c651ae}">
+        <p14:section name="Hardware" id="{e1490248-59f3-7432-74f6-9cebdf684d91}">
           <p14:sldIdLst>
             <p14:sldId id="264"/>
             <p14:sldId id="265"/>
           </p14:sldIdLst>
         </p14:section>
-        <p14:section name="Evidence" id="{cef0a6a7-2731-0dad-39fa-83a269c89a57}">
+        <p14:section name="Evidence" id="{01de466a-6321-7c60-61ee-8a9e2fc29292}">
           <p14:sldIdLst>
             <p14:sldId id="266"/>
             <p14:sldId id="267"/>
@@ -160,29 +161,30 @@
             <p14:sldId id="270"/>
           </p14:sldIdLst>
         </p14:section>
-        <p14:section name="Engineering" id="{f25ab926-e817-018c-a95e-a734bf270b21}">
+        <p14:section name="Engineering" id="{f2a0a78c-f13d-72d9-7a34-63a13d012caf}">
           <p14:sldIdLst>
             <p14:sldId id="271"/>
           </p14:sldIdLst>
         </p14:section>
-        <p14:section name="Business" id="{839768b9-f90c-0020-b59d-d1488e1b62a4}">
+        <p14:section name="Business" id="{6f2026c3-8829-ee9c-efd2-c67ed48aaf48}">
           <p14:sldIdLst>
             <p14:sldId id="272"/>
             <p14:sldId id="273"/>
           </p14:sldIdLst>
         </p14:section>
-        <p14:section name="Plan" id="{4f71cf53-2038-6d3c-16d3-00dd8974d4ab}">
+        <p14:section name="Plan" id="{292a9716-7e87-b6bf-7ecb-b092cb224669}">
           <p14:sldIdLst>
             <p14:sldId id="274"/>
             <p14:sldId id="275"/>
             <p14:sldId id="276"/>
           </p14:sldIdLst>
         </p14:section>
-        <p14:section name="Appendix" id="{3ef54d83-1dbd-7204-d562-731609f5f5f4}">
+        <p14:section name="Appendix" id="{023827eb-21fb-47e1-4157-331c2d4a5c91}">
           <p14:sldIdLst>
             <p14:sldId id="277"/>
             <p14:sldId id="278"/>
             <p14:sldId id="279"/>
+            <p14:sldId id="280"/>
           </p14:sldIdLst>
         </p14:section>
       </p14:sectionLst>
@@ -2021,6 +2023,94 @@
             <a:fld id="{F7021451-1387-4CA6-816F-3879F97B5CBC}" type="slidenum">
               <a:rPr lang="en-US"/>
               <a:t>24</a:t>
+            </a:fld>
+            <a:endParaRPr lang="en-US"/>
+          </a:p>
+        </p:txBody>
+      </p:sp>
+    </p:spTree>
+    <p:extLst>
+      <p:ext uri="{BB962C8B-B14F-4D97-AF65-F5344CB8AC3E}">
+        <p14:creationId xmlns:p14="http://schemas.microsoft.com/office/powerpoint/2010/main" val="1024086991"/>
+      </p:ext>
+    </p:extLst>
+  </p:cSld>
+  <p:clrMapOvr>
+    <a:masterClrMapping/>
+  </p:clrMapOvr>
+</p:notes>
+</file>
+
+<file path=ppt/notesSlides/notesSlide25.xml><?xml version="1.0" encoding="utf-8"?>
+<p:notes xmlns:a="http://schemas.openxmlformats.org/drawingml/2006/main" xmlns:r="http://schemas.openxmlformats.org/officeDocument/2006/relationships" xmlns:p="http://schemas.openxmlformats.org/presentationml/2006/main">
+  <p:cSld>
+    <p:spTree>
+      <p:nvGrpSpPr>
+        <p:cNvPr id="1" name=""/>
+        <p:cNvGrpSpPr/>
+        <p:nvPr/>
+      </p:nvGrpSpPr>
+      <p:grpSpPr>
+        <a:xfrm>
+          <a:off x="0" y="0"/>
+          <a:ext cx="0" cy="0"/>
+          <a:chOff x="0" y="0"/>
+          <a:chExt cx="0" cy="0"/>
+        </a:xfrm>
+      </p:grpSpPr>
+      <p:sp>
+        <p:nvSpPr>
+          <p:cNvPr id="2" name="Slide Image Placeholder 1"/>
+          <p:cNvSpPr>
+            <a:spLocks noGrp="1" noRot="1" noChangeAspect="1"/>
+          </p:cNvSpPr>
+          <p:nvPr>
+            <p:ph type="sldImg"/>
+          </p:nvPr>
+        </p:nvSpPr>
+        <p:spPr/>
+      </p:sp>
+      <p:sp>
+        <p:nvSpPr>
+          <p:cNvPr id="3" name="Notes Placeholder 2"/>
+          <p:cNvSpPr>
+            <a:spLocks noGrp="1"/>
+          </p:cNvSpPr>
+          <p:nvPr>
+            <p:ph type="body" idx="1"/>
+          </p:nvPr>
+        </p:nvSpPr>
+        <p:spPr/>
+        <p:txBody>
+          <a:bodyPr/>
+          <a:lstStyle/>
+          <a:p>
+            <a:r>
+              <a:rPr lang="en-US" dirty="0"/>
+              <a:t/>
+            </a:r>
+            <a:endParaRPr lang="en-US" dirty="0"/>
+          </a:p>
+        </p:txBody>
+      </p:sp>
+      <p:sp>
+        <p:nvSpPr>
+          <p:cNvPr id="4" name="Slide Number Placeholder 3"/>
+          <p:cNvSpPr>
+            <a:spLocks noGrp="1"/>
+          </p:cNvSpPr>
+          <p:nvPr>
+            <p:ph type="sldNum" sz="quarter" idx="10"/>
+          </p:nvPr>
+        </p:nvSpPr>
+        <p:spPr/>
+        <p:txBody>
+          <a:bodyPr/>
+          <a:lstStyle/>
+          <a:p>
+            <a:fld id="{F7021451-1387-4CA6-816F-3879F97B5CBC}" type="slidenum">
+              <a:rPr lang="en-US"/>
+              <a:t>25</a:t>
             </a:fld>
             <a:endParaRPr lang="en-US"/>
           </a:p>
@@ -3343,7 +3433,7 @@
       </p:sp>
       <p:pic>
         <p:nvPicPr>
-          <p:cNvPr id="3" name="Image 0" descr="C:\Users\yu9br\AppData\Local\Temp\neo-JM5AXu\a2.png">    </p:cNvPr>
+          <p:cNvPr id="3" name="Image 0" descr="C:\Users\yu9br\AppData\Local\Temp\neo-hIrnKR\a2.png">    </p:cNvPr>
           <p:cNvPicPr>
             <a:picLocks noChangeAspect="1"/>
           </p:cNvPicPr>
@@ -3395,7 +3485,7 @@
                   <a:srgbClr val="F4F2FF"/>
                 </a:solidFill>
               </a:rPr>
-              <a:t>Know which must-have shots you already have, and which to reshoot, before the crew leaves the location.</a:t>
+              <a:t>Checks your shot list against your footage, on your own computer, before the crew leaves the location.</a:t>
             </a:r>
             <a:endParaRPr lang="en-US" sz="2000" dirty="0"/>
           </a:p>
@@ -3477,7 +3567,7 @@
         <p:spPr>
           <a:xfrm>
             <a:off x="2103120" y="4343400"/>
-            <a:ext cx="2697480" cy="384048"/>
+            <a:ext cx="2606040" cy="384048"/>
           </a:xfrm>
           <a:prstGeom prst="roundRect">
             <a:avLst>
@@ -3508,7 +3598,7 @@
         <p:spPr>
           <a:xfrm>
             <a:off x="2103120" y="4343400"/>
-            <a:ext cx="2697480" cy="384048"/>
+            <a:ext cx="2606040" cy="384048"/>
           </a:xfrm>
           <a:prstGeom prst="rect">
             <a:avLst/>
@@ -3529,7 +3619,7 @@
                   <a:srgbClr val="FFFFFF"/>
                 </a:solidFill>
               </a:rPr>
-              <a:t>Evidence for every verdict</a:t>
+              <a:t>Evidence for every answer</a:t>
             </a:r>
             <a:endParaRPr lang="en-US" sz="1200" dirty="0"/>
           </a:p>
@@ -3543,8 +3633,8 @@
         </p:nvSpPr>
         <p:spPr>
           <a:xfrm>
-            <a:off x="4937760" y="4343400"/>
-            <a:ext cx="1691640" cy="384048"/>
+            <a:off x="640080" y="4846320"/>
+            <a:ext cx="1874520" cy="384048"/>
           </a:xfrm>
           <a:prstGeom prst="roundRect">
             <a:avLst>
@@ -3574,8 +3664,8 @@
         </p:nvSpPr>
         <p:spPr>
           <a:xfrm>
-            <a:off x="4937760" y="4343400"/>
-            <a:ext cx="1691640" cy="384048"/>
+            <a:off x="640080" y="4846320"/>
+            <a:ext cx="1874520" cy="384048"/>
           </a:xfrm>
           <a:prstGeom prst="rect">
             <a:avLst/>
@@ -3596,7 +3686,7 @@
                   <a:srgbClr val="FFFFFF"/>
                 </a:solidFill>
               </a:rPr>
-              <a:t>Person confirms</a:t>
+              <a:t>A person confirms</a:t>
             </a:r>
             <a:endParaRPr lang="en-US" sz="1200" dirty="0"/>
           </a:p>
@@ -3610,8 +3700,8 @@
         </p:nvSpPr>
         <p:spPr>
           <a:xfrm>
-            <a:off x="640080" y="4846320"/>
-            <a:ext cx="1691640" cy="384048"/>
+            <a:off x="2651760" y="4846320"/>
+            <a:ext cx="2148840" cy="384048"/>
           </a:xfrm>
           <a:prstGeom prst="roundRect">
             <a:avLst>
@@ -3641,8 +3731,8 @@
         </p:nvSpPr>
         <p:spPr>
           <a:xfrm>
-            <a:off x="640080" y="4846320"/>
-            <a:ext cx="1691640" cy="384048"/>
+            <a:off x="2651760" y="4846320"/>
+            <a:ext cx="2148840" cy="384048"/>
           </a:xfrm>
           <a:prstGeom prst="rect">
             <a:avLst/>
@@ -3663,7 +3753,7 @@
                   <a:srgbClr val="FFFFFF"/>
                 </a:solidFill>
               </a:rPr>
-              <a:t>Hailo-10H route</a:t>
+              <a:t>UGen300 port planned</a:t>
             </a:r>
             <a:endParaRPr lang="en-US" sz="1200" dirty="0"/>
           </a:p>
@@ -3762,7 +3852,7 @@
                   <a:srgbClr val="111118"/>
                 </a:solidFill>
               </a:rPr>
-              <a:t>UGen300 plan: image encoder on the device, checked by a G1 gate</a:t>
+              <a:t>Before we trust the UGen300, its results must match the PC's</a:t>
             </a:r>
             <a:endParaRPr lang="en-US" sz="2800" dirty="0"/>
           </a:p>
@@ -3840,6 +3930,42 @@
           </a:p>
         </p:txBody>
       </p:sp>
+      <p:sp>
+        <p:nvSpPr>
+          <p:cNvPr id="5" name="Text 3"/>
+          <p:cNvSpPr txBox="1"/>
+          <p:nvPr/>
+        </p:nvSpPr>
+        <p:spPr>
+          <a:xfrm>
+            <a:off x="640080" y="1371600"/>
+            <a:ext cx="10881360" cy="457200"/>
+          </a:xfrm>
+          <a:prstGeom prst="rect">
+            <a:avLst/>
+          </a:prstGeom>
+          <a:noFill/>
+          <a:ln/>
+        </p:spPr>
+        <p:txBody>
+          <a:bodyPr wrap="square" lIns="0" tIns="0" rIns="0" bIns="0" rtlCol="0" anchor="ctr"/>
+          <a:lstStyle/>
+          <a:p>
+            <a:pPr indent="0" marL="0">
+              <a:buNone/>
+            </a:pPr>
+            <a:r>
+              <a:rPr lang="en-US" sz="1500" dirty="0">
+                <a:solidFill>
+                  <a:srgbClr val="6B7280"/>
+                </a:solidFill>
+              </a:rPr>
+              <a:t>G1 = five checks that the device ranks clips the same way as the PC, on the same dev frames.</a:t>
+            </a:r>
+            <a:endParaRPr lang="en-US" sz="1500" dirty="0"/>
+          </a:p>
+        </p:txBody>
+      </p:sp>
       <p:graphicFrame>
         <p:nvGraphicFramePr>
           <p:cNvPr id="11" name="Table 0"/>
@@ -3855,7 +3981,7 @@
           </p:nvPr>
         </p:nvGraphicFramePr>
         <p:xfrm>
-          <a:off x="640080" y="1600200"/>
+          <a:off x="640080" y="1965960"/>
           <a:ext cx="10881360" cy="914400"/>
         </p:xfrm>
         <a:graphic>
@@ -3868,7 +3994,7 @@
                 <a:gridCol w="2877715"/>
                 <a:gridCol w="2428072"/>
               </a:tblGrid>
-              <a:tr h="522514">
+              <a:tr h="470263">
                 <a:tc>
                   <a:txBody>
                     <a:bodyPr/>
@@ -3886,7 +4012,7 @@
                           <a:ea typeface="Arial" pitchFamily="34" charset="-122"/>
                           <a:cs typeface="Arial" pitchFamily="34" charset="-120"/>
                         </a:rPr>
-                        <a:t>GATE</a:t>
+                        <a:t>CHECK</a:t>
                       </a:r>
                       <a:endParaRPr lang="en-US" sz="1000" dirty="0">
                         <a:latin typeface="Arial" charset="0"/>
@@ -4070,7 +4196,7 @@
                   </a:tcPr>
                 </a:tc>
               </a:tr>
-              <a:tr h="522514">
+              <a:tr h="470263">
                 <a:tc>
                   <a:txBody>
                     <a:bodyPr/>
@@ -4238,7 +4364,7 @@
                           <a:ea typeface="Arial" pitchFamily="34" charset="-122"/>
                           <a:cs typeface="Arial" pitchFamily="34" charset="-120"/>
                         </a:rPr>
-                        <a:t>not_run</a:t>
+                        <a:t>Not run yet</a:t>
                       </a:r>
                       <a:endParaRPr lang="en-US" sz="1250" dirty="0">
                         <a:latin typeface="Arial" charset="0"/>
@@ -4272,7 +4398,7 @@
                   </a:tcPr>
                 </a:tc>
               </a:tr>
-              <a:tr h="522514">
+              <a:tr h="470263">
                 <a:tc>
                   <a:txBody>
                     <a:bodyPr/>
@@ -4440,7 +4566,7 @@
                           <a:ea typeface="Arial" pitchFamily="34" charset="-122"/>
                           <a:cs typeface="Arial" pitchFamily="34" charset="-120"/>
                         </a:rPr>
-                        <a:t>not_run</a:t>
+                        <a:t>Not run yet</a:t>
                       </a:r>
                       <a:endParaRPr lang="en-US" sz="1250" dirty="0">
                         <a:latin typeface="Arial" charset="0"/>
@@ -4474,7 +4600,7 @@
                   </a:tcPr>
                 </a:tc>
               </a:tr>
-              <a:tr h="522514">
+              <a:tr h="470263">
                 <a:tc>
                   <a:txBody>
                     <a:bodyPr/>
@@ -4642,7 +4768,7 @@
                           <a:ea typeface="Arial" pitchFamily="34" charset="-122"/>
                           <a:cs typeface="Arial" pitchFamily="34" charset="-120"/>
                         </a:rPr>
-                        <a:t>not_run</a:t>
+                        <a:t>Not run yet</a:t>
                       </a:r>
                       <a:endParaRPr lang="en-US" sz="1250" dirty="0">
                         <a:latin typeface="Arial" charset="0"/>
@@ -4676,7 +4802,7 @@
                   </a:tcPr>
                 </a:tc>
               </a:tr>
-              <a:tr h="522514">
+              <a:tr h="470263">
                 <a:tc>
                   <a:txBody>
                     <a:bodyPr/>
@@ -4844,7 +4970,7 @@
                           <a:ea typeface="Arial" pitchFamily="34" charset="-122"/>
                           <a:cs typeface="Arial" pitchFamily="34" charset="-120"/>
                         </a:rPr>
-                        <a:t>not_run</a:t>
+                        <a:t>Not run yet</a:t>
                       </a:r>
                       <a:endParaRPr lang="en-US" sz="1250" dirty="0">
                         <a:latin typeface="Arial" charset="0"/>
@@ -4878,7 +5004,7 @@
                   </a:tcPr>
                 </a:tc>
               </a:tr>
-              <a:tr h="522514">
+              <a:tr h="470263">
                 <a:tc>
                   <a:txBody>
                     <a:bodyPr/>
@@ -5046,7 +5172,7 @@
                           <a:ea typeface="Arial" pitchFamily="34" charset="-122"/>
                           <a:cs typeface="Arial" pitchFamily="34" charset="-120"/>
                         </a:rPr>
-                        <a:t>not_run</a:t>
+                        <a:t>Not run yet</a:t>
                       </a:r>
                       <a:endParaRPr lang="en-US" sz="1250" dirty="0">
                         <a:latin typeface="Arial" charset="0"/>
@@ -5080,7 +5206,7 @@
                   </a:tcPr>
                 </a:tc>
               </a:tr>
-              <a:tr h="522514">
+              <a:tr h="470263">
                 <a:tc>
                   <a:txBody>
                     <a:bodyPr/>
@@ -5248,7 +5374,7 @@
                           <a:ea typeface="Arial" pitchFamily="34" charset="-122"/>
                           <a:cs typeface="Arial" pitchFamily="34" charset="-120"/>
                         </a:rPr>
-                        <a:t>cos 1.0000, ρ 1.000</a:t>
+                        <a:t>cos 1.0000, ρ 0.99999</a:t>
                       </a:r>
                       <a:endParaRPr lang="en-US" sz="1250" dirty="0">
                         <a:latin typeface="Arial" charset="0"/>
@@ -5288,7 +5414,7 @@
       </p:graphicFrame>
       <p:sp>
         <p:nvSpPr>
-          <p:cNvPr id="6" name="Shape 3"/>
+          <p:cNvPr id="7" name="Shape 4"/>
           <p:cNvSpPr/>
           <p:nvPr/>
         </p:nvSpPr>
@@ -5311,7 +5437,7 @@
       </p:sp>
       <p:sp>
         <p:nvSpPr>
-          <p:cNvPr id="7" name="Text 4"/>
+          <p:cNvPr id="8" name="Text 5"/>
           <p:cNvSpPr txBox="1"/>
           <p:nvPr/>
         </p:nvSpPr>
@@ -5347,7 +5473,7 @@
       </p:sp>
       <p:sp>
         <p:nvSpPr>
-          <p:cNvPr id="8" name="Text 5"/>
+          <p:cNvPr id="9" name="Text 6"/>
           <p:cNvSpPr txBox="1"/>
           <p:nvPr/>
         </p:nvSpPr>
@@ -5862,7 +5988,7 @@
                   <a:srgbClr val="111118"/>
                 </a:solidFill>
               </a:rPr>
-              <a:t>Requirements</a:t>
+              <a:t>Shot list</a:t>
             </a:r>
             <a:endParaRPr lang="en-US" sz="1400" dirty="0"/>
           </a:p>
@@ -5898,7 +6024,7 @@
                   <a:srgbClr val="4B5563"/>
                 </a:solidFill>
               </a:rPr>
-              <a:t>11 café-promo requirements and queries written before any frame was seen.</a:t>
+              <a:t>11 café-promo shots and queries written before any frame was seen.</a:t>
             </a:r>
             <a:endParaRPr lang="en-US" sz="1150" dirty="0"/>
           </a:p>
@@ -6022,7 +6148,7 @@
                   <a:srgbClr val="111118"/>
                 </a:solidFill>
               </a:rPr>
-              <a:t>Two annotators</a:t>
+              <a:t>Two AI annotators</a:t>
             </a:r>
             <a:endParaRPr lang="en-US" sz="1400" dirty="0"/>
           </a:p>
@@ -6058,7 +6184,7 @@
                   <a:srgbClr val="4B5563"/>
                 </a:solidFill>
               </a:rPr>
-              <a:t>Independent labels on 1 fps contact sheets; a third pass on every disagreement.</a:t>
+              <a:t>Independent AI labelling sessions on 1 fps contact sheets; a third pass on every disagreement.</a:t>
             </a:r>
             <a:endParaRPr lang="en-US" sz="1150" dirty="0"/>
           </a:p>
@@ -6378,7 +6504,7 @@
                   <a:srgbClr val="4B5563"/>
                 </a:solidFill>
               </a:rPr>
-              <a:t>Held-out uploaders, scored once; the script refuses a second run.</a:t>
+              <a:t>Held-out authors, scored once; the script refuses a second run.</a:t>
             </a:r>
             <a:endParaRPr lang="en-US" sz="1150" dirty="0"/>
           </a:p>
@@ -6566,7 +6692,7 @@
       </p:sp>
       <p:pic>
         <p:nvPicPr>
-          <p:cNvPr id="5" name="Image 0" descr="C:\Users\yu9br\AppData\Local\Temp\neo-JM5AXu\a3.png">    </p:cNvPr>
+          <p:cNvPr id="5" name="Image 0" descr="C:\Users\yu9br\AppData\Local\Temp\neo-hIrnKR\a3.png">    </p:cNvPr>
           <p:cNvPicPr>
             <a:picLocks noChangeAspect="1"/>
           </p:cNvPicPr>
@@ -6653,7 +6779,7 @@
       </p:sp>
       <p:pic>
         <p:nvPicPr>
-          <p:cNvPr id="8" name="Image 1" descr="C:\Users\yu9br\AppData\Local\Temp\neo-JM5AXu\a4.png">    </p:cNvPr>
+          <p:cNvPr id="8" name="Image 1" descr="C:\Users\yu9br\AppData\Local\Temp\neo-hIrnKR\a4.png">    </p:cNvPr>
           <p:cNvPicPr>
             <a:picLocks noChangeAspect="1"/>
           </p:cNvPicPr>
@@ -6705,7 +6831,7 @@
                   <a:srgbClr val="D6D6E2"/>
                 </a:solidFill>
               </a:rPr>
-              <a:t>Cohen's κ between the two annotators (sample level)</a:t>
+              <a:t>agreement between two AI annotators (Cohen's κ; 1 = perfect)</a:t>
             </a:r>
             <a:endParaRPr lang="en-US" sz="1300" dirty="0"/>
           </a:p>
@@ -6740,7 +6866,7 @@
       </p:sp>
       <p:pic>
         <p:nvPicPr>
-          <p:cNvPr id="11" name="Image 2" descr="C:\Users\yu9br\AppData\Local\Temp\neo-JM5AXu\a5.png">    </p:cNvPr>
+          <p:cNvPr id="11" name="Image 2" descr="C:\Users\yu9br\AppData\Local\Temp\neo-hIrnKR\a5.png">    </p:cNvPr>
           <p:cNvPicPr>
             <a:picLocks noChangeAspect="1"/>
           </p:cNvPicPr>
@@ -6792,7 +6918,7 @@
                   <a:srgbClr val="D6D6E2"/>
                 </a:solidFill>
               </a:rPr>
-              <a:t>test / dev clips, split by uploader so no shoot is on both sides</a:t>
+              <a:t>test / dev clips, split by author</a:t>
             </a:r>
             <a:endParaRPr lang="en-US" sz="1300" dirty="0"/>
           </a:p>
@@ -6827,7 +6953,7 @@
       </p:sp>
       <p:pic>
         <p:nvPicPr>
-          <p:cNvPr id="14" name="Image 3" descr="C:\Users\yu9br\AppData\Local\Temp\neo-JM5AXu\a6.png">    </p:cNvPr>
+          <p:cNvPr id="14" name="Image 3" descr="C:\Users\yu9br\AppData\Local\Temp\neo-hIrnKR\a6.png">    </p:cNvPr>
           <p:cNvPicPr>
             <a:picLocks noChangeAspect="1"/>
           </p:cNvPicPr>
@@ -6879,7 +7005,7 @@
                   <a:srgbClr val="D6D6E2"/>
                 </a:solidFill>
               </a:rPr>
-              <a:t>requirements, incl. a co-occurrence and a manual brand check</a:t>
+              <a:t>shots, incl. a same-frame rule and a manual brand check</a:t>
             </a:r>
             <a:endParaRPr lang="en-US" sz="1300" dirty="0"/>
           </a:p>
@@ -6915,7 +7041,7 @@
                   <a:srgbClr val="FFFFFF"/>
                 </a:solidFill>
               </a:rPr>
-              <a:t>Licences: CC BY-SA 4.0 ×15, CC BY 3.0 ×9, CC0 ×8, CC BY-SA 3.0 ×4, PD ×3, CC BY 4.0 ×3, CC BY 2.0 ×2</a:t>
+              <a:t>Licences: CC BY-SA 4.0 ×15, CC BY 3.0 ×9, CC0 ×8, CC BY-SA 3.0 ×4, public domain ×3, CC BY 4.0 ×3, CC BY 2.0 ×2</a:t>
             </a:r>
             <a:endParaRPr lang="en-US" sz="1500" dirty="0"/>
           </a:p>
@@ -7023,7 +7149,7 @@
                   <a:srgbClr val="111118"/>
                 </a:solidFill>
               </a:rPr>
-              <a:t>On held-out footage, the right clip is in the top 5 for 7 of 11 shots</a:t>
+              <a:t>Right clip in the top 5 for 7 of 11 shots; the rule checks cost one hit against plain search</a:t>
             </a:r>
             <a:endParaRPr lang="en-US" sz="2800" dirty="0"/>
           </a:p>
@@ -7146,7 +7272,7 @@
                           <a:ea typeface="Arial" pitchFamily="34" charset="-122"/>
                           <a:cs typeface="Arial" pitchFamily="34" charset="-120"/>
                         </a:rPr>
-                        <a:t>METHOD (SAME CLIP, SAME Τ)</a:t>
+                        <a:t>METHOD</a:t>
                       </a:r>
                       <a:endParaRPr lang="en-US" sz="1000" dirty="0">
                         <a:latin typeface="Arial" charset="0"/>
@@ -7196,7 +7322,7 @@
                           <a:ea typeface="Arial" pitchFamily="34" charset="-122"/>
                           <a:cs typeface="Arial" pitchFamily="34" charset="-120"/>
                         </a:rPr>
-                        <a:t>RECALL@5</a:t>
+                        <a:t>RIGHT CLIP IN TOP 5 (RECALL@5)</a:t>
                       </a:r>
                       <a:endParaRPr lang="en-US" sz="1000" dirty="0">
                         <a:latin typeface="Arial" charset="0"/>
@@ -7246,7 +7372,7 @@
                           <a:ea typeface="Arial" pitchFamily="34" charset="-122"/>
                           <a:cs typeface="Arial" pitchFamily="34" charset="-120"/>
                         </a:rPr>
-                        <a:t>PRECISION@5</a:t>
+                        <a:t>TOP-5 PICKS THAT ARE RIGHT (PRECISION@5)</a:t>
                       </a:r>
                       <a:endParaRPr lang="en-US" sz="1000" dirty="0">
                         <a:latin typeface="Arial" charset="0"/>
@@ -7602,7 +7728,7 @@
                           <a:ea typeface="Arial" pitchFamily="34" charset="-122"/>
                           <a:cs typeface="Arial" pitchFamily="34" charset="-120"/>
                         </a:rPr>
-                        <a:t>SceneGap: + duration, densify, same frame</a:t>
+                        <a:t>SceneGap: + length, re-check, same-frame rules</a:t>
                       </a:r>
                       <a:endParaRPr lang="en-US" sz="1350" dirty="0">
                         <a:latin typeface="Arial" charset="0"/>
@@ -7793,7 +7919,7 @@
                   <a:srgbClr val="111118"/>
                 </a:solidFill>
               </a:rPr>
-              <a:t>26 held-out clips, scored once at 2026-10-26 19:22:51 with τ = 0.225 (center-crop).</a:t>
+              <a:t>26 held-out clips, scored once with τ = 0.225. A hit needs 0.5 s of overlap, so Recall@5 does not test the length rules.</a:t>
             </a:r>
             <a:endParaRPr lang="en-US" sz="1350" dirty="0"/>
           </a:p>
@@ -8112,7 +8238,7 @@
                           <a:ea typeface="Arial" pitchFamily="34" charset="-122"/>
                           <a:cs typeface="Arial" pitchFamily="34" charset="-120"/>
                         </a:rPr>
-                        <a:t>GAP RECALL</a:t>
+                        <a:t>MISSING SHOTS CAUGHT</a:t>
                       </a:r>
                       <a:endParaRPr lang="en-US" sz="1000" dirty="0">
                         <a:latin typeface="Arial" charset="0"/>
@@ -8162,7 +8288,7 @@
                           <a:ea typeface="Arial" pitchFamily="34" charset="-122"/>
                           <a:cs typeface="Arial" pitchFamily="34" charset="-120"/>
                         </a:rPr>
-                        <a:t>WRONG RESHOOT</a:t>
+                        <a:t>RESHOOT ASKED, SHOT WAS THERE</a:t>
                       </a:r>
                       <a:endParaRPr lang="en-US" sz="1000" dirty="0">
                         <a:latin typeface="Arial" charset="0"/>
@@ -8212,7 +8338,7 @@
                           <a:ea typeface="Arial" pitchFamily="34" charset="-122"/>
                           <a:cs typeface="Arial" pitchFamily="34" charset="-120"/>
                         </a:rPr>
-                        <a:t>UNKNOWN</a:t>
+                        <a:t>COULDN'T DECIDE</a:t>
                       </a:r>
                       <a:endParaRPr lang="en-US" sz="1000" dirty="0">
                         <a:latin typeface="Arial" charset="0"/>
@@ -8262,7 +8388,7 @@
                           <a:ea typeface="Arial" pitchFamily="34" charset="-122"/>
                           <a:cs typeface="Arial" pitchFamily="34" charset="-120"/>
                         </a:rPr>
-                        <a:t>CANDIDATE WHERE NONE EXISTS</a:t>
+                        <a:t>SAID 'FOUND' WHEN ABSENT</a:t>
                       </a:r>
                       <a:endParaRPr lang="en-US" sz="1000" dirty="0">
                         <a:latin typeface="Arial" charset="0"/>
@@ -9109,7 +9235,7 @@
                   <a:srgbClr val="111118"/>
                 </a:solidFill>
               </a:rPr>
-              <a:t>The threshold was tuned for single frames, so almost every shot finds some candidate. On dev, a margin score finds 33% of gaps at 11% wrong reshoots; Stage II calibrates per shot.</a:t>
+              <a:t>The threshold was tuned for single frames, so almost every shot finds some candidate. On dev, a relative score catches 33% of gaps at 11% wrong reshoots; Stage II calibrates per shot.</a:t>
             </a:r>
             <a:endParaRPr lang="en-US" sz="1350" dirty="0"/>
           </a:p>
@@ -9253,7 +9379,7 @@
                   <a:srgbClr val="111118"/>
                 </a:solidFill>
               </a:rPr>
-              <a:t>Analysis costs 2–3 s per minute of video; decoding, not the model, dominates</a:t>
+              <a:t>Analysis costs 2.3–3.1 s per minute of video; decoding, not the model, dominates</a:t>
             </a:r>
             <a:endParaRPr lang="en-US" sz="2800" dirty="0"/>
           </a:p>
@@ -9528,7 +9654,7 @@
                           <a:ea typeface="Arial" pitchFamily="34" charset="-122"/>
                           <a:cs typeface="Arial" pitchFamily="34" charset="-120"/>
                         </a:rPr>
-                        <a:t>SEARCH P50 / P95, 10K SEGMENTS</a:t>
+                        <a:t>SEARCH, TYPICAL / SLOWEST 5% (10K CLIPS)</a:t>
                       </a:r>
                       <a:endParaRPr lang="en-US" sz="1000" dirty="0">
                         <a:latin typeface="Arial" charset="0"/>
@@ -10234,7 +10360,7 @@
                           <a:ea typeface="Arial" pitchFamily="34" charset="-122"/>
                           <a:cs typeface="Arial" pitchFamily="34" charset="-120"/>
                         </a:rPr>
-                        <a:t>not_run</a:t>
+                        <a:t>Not run yet</a:t>
                       </a:r>
                       <a:endParaRPr lang="en-US" sz="1350" dirty="0">
                         <a:latin typeface="Arial" charset="0"/>
@@ -10284,7 +10410,7 @@
                           <a:ea typeface="Arial" pitchFamily="34" charset="-122"/>
                           <a:cs typeface="Arial" pitchFamily="34" charset="-120"/>
                         </a:rPr>
-                        <a:t>not_run</a:t>
+                        <a:t>Not run yet</a:t>
                       </a:r>
                       <a:endParaRPr lang="en-US" sz="1350" dirty="0">
                         <a:latin typeface="Arial" charset="0"/>
@@ -10334,7 +10460,7 @@
                           <a:ea typeface="Arial" pitchFamily="34" charset="-122"/>
                           <a:cs typeface="Arial" pitchFamily="34" charset="-120"/>
                         </a:rPr>
-                        <a:t>not_run</a:t>
+                        <a:t>Not run yet</a:t>
                       </a:r>
                       <a:endParaRPr lang="en-US" sz="1350" dirty="0">
                         <a:latin typeface="Arial" charset="0"/>
@@ -10425,7 +10551,7 @@
                   <a:srgbClr val="111118"/>
                 </a:solidFill>
               </a:rPr>
-              <a:t>1080p30 playback while analysing: 0 late frames; frame work p95 none 5.72 ms / cpu 7.54 ms / cuda 6.24 ms (budget 33 ms).</a:t>
+              <a:t>Playing a 1080p30 test pattern while analysing: 0 of 1,800 frames late; slowest 5% of frames 5.7 ms idle, 7.5 ms with CPU analysis, 6.2 ms with GPU (budget 33 ms).</a:t>
             </a:r>
             <a:endParaRPr lang="en-US" sz="1350" dirty="0"/>
           </a:p>
@@ -10569,7 +10695,7 @@
                   <a:srgbClr val="111118"/>
                 </a:solidFill>
               </a:rPr>
-              <a:t>Built to be checked: tests, trace, safety</a:t>
+              <a:t>46 automated tests cover media edge cases, logic, security and recovery</a:t>
             </a:r>
             <a:endParaRPr lang="en-US" sz="2800" dirty="0"/>
           </a:p>
@@ -10677,7 +10803,7 @@
                   <a:srgbClr val="6B7280"/>
                 </a:solidFill>
               </a:rPr>
-              <a:t>46 automated tests; 30 of the PRD's 36 acceptance cases pass by test; a fresh-environment install passes the suite.</a:t>
+              <a:t>30 of the PRD's 36 acceptance cases pass by test; a fresh-environment install passes all 46 tests.</a:t>
             </a:r>
             <a:endParaRPr lang="en-US" sz="1500" dirty="0"/>
           </a:p>
@@ -10977,7 +11103,7 @@
                   <a:srgbClr val="4B5563"/>
                 </a:solidFill>
               </a:rPr>
-              <a:t>Three-valued AND/OR/NOT; two short pieces never add up; duplicates are not two takes; revisions void old decisions (409 on stale edits).</a:t>
+              <a:t>'Can't tell' stays 'can't tell'; two short clips never count as one long one; duplicates are not two takes; editing a shot voids old decisions.</a:t>
             </a:r>
             <a:endParaRPr lang="en-US" sz="1250" dirty="0"/>
           </a:p>
@@ -11127,7 +11253,7 @@
                   <a:srgbClr val="4B5563"/>
                 </a:solidFill>
               </a:rPr>
-              <a:t>127.0.0.1 only, per-run token, Origin + Host checks, authorised folders, CSV formula guard, escaped HTML, no traceback to the browser.</a:t>
+              <a:t>127.0.0.1 only, per-run token, Origin + Host checks, authorised folders, CSV formula guard, escaped HTML, errors never expose internals.</a:t>
             </a:r>
             <a:endParaRPr lang="en-US" sz="1250" dirty="0"/>
           </a:p>
@@ -12516,7 +12642,7 @@
                           <a:ea typeface="Arial" pitchFamily="34" charset="-122"/>
                           <a:cs typeface="Arial" pitchFamily="34" charset="-120"/>
                         </a:rPr>
-                        <a:t>Goldman Sachs (partial)</a:t>
+                        <a:t>Goldman Sachs (estimate, partly verified)</a:t>
                       </a:r>
                       <a:endParaRPr lang="en-US" sz="1350" dirty="0">
                         <a:latin typeface="Arial" charset="0"/>
@@ -12618,7 +12744,7 @@
                           <a:ea typeface="Arial" pitchFamily="34" charset="-122"/>
                           <a:cs typeface="Arial" pitchFamily="34" charset="-120"/>
                         </a:rPr>
-                        <a:t>crews tick shots to schedule pickups</a:t>
+                        <a:t>crews tick off shots and schedule pickup shots</a:t>
                       </a:r>
                       <a:endParaRPr lang="en-US" sz="1350" dirty="0">
                         <a:latin typeface="Arial" charset="0"/>
@@ -13984,7 +14110,7 @@
                   <a:srgbClr val="4B5563"/>
                 </a:solidFill>
               </a:rPr>
-              <a:t>Same clips, CPU vs GPU vs NPU; playback interference in a real NLE timeline.</a:t>
+              <a:t>Same clips, CPU vs GPU vs NPU; playback interference in a real editing-app timeline.</a:t>
             </a:r>
             <a:endParaRPr lang="en-US" sz="1150" dirty="0"/>
           </a:p>
@@ -14304,7 +14430,7 @@
                   <a:srgbClr val="4B5563"/>
                 </a:solidFill>
               </a:rPr>
-              <a:t>SigLIP2 multilingual on device; adopt only if within 3 pts of English Recall@5 on dev.</a:t>
+              <a:t>A multilingual model (SigLIP 2), so Chinese shot lists need no English query; adopt only if it finds as many dev shots.</a:t>
             </a:r>
             <a:endParaRPr lang="en-US" sz="1150" dirty="0"/>
           </a:p>
@@ -14464,7 +14590,7 @@
                   <a:srgbClr val="4B5563"/>
                 </a:solidFill>
               </a:rPr>
-              <a:t>yolov8s person/object counts and OCR detection, each behind its own gate.</a:t>
+              <a:t>Optional person counts and text detection, each behind its own check.</a:t>
             </a:r>
             <a:endParaRPr lang="en-US" sz="1150" dirty="0"/>
           </a:p>
@@ -14704,7 +14830,7 @@
                   <a:srgbClr val="FFFFFF"/>
                 </a:solidFill>
               </a:rPr>
-              <a:t>Two-person crew, café promo, 11 must-have shots</a:t>
+              <a:t>Illustrative scenario · two-person crew, café promo, 11 must-have shots</a:t>
             </a:r>
             <a:endParaRPr lang="en-US" sz="1600" dirty="0"/>
           </a:p>
@@ -15037,7 +15163,7 @@
                   <a:srgbClr val="E5E7EB"/>
                 </a:solidFill>
               </a:rPr>
-              <a:t>The editor scrubs for the pour: every take cuts away after 2 s. The brand on the bag is out of focus.</a:t>
+              <a:t>The editor scrubs for the pour: every take cuts away after 2 s, and nobody filmed a customer drinking.</a:t>
             </a:r>
             <a:endParaRPr lang="en-US" sz="1350" dirty="0"/>
           </a:p>
@@ -15620,7 +15746,7 @@
                           <a:ea typeface="Arial" pitchFamily="34" charset="-122"/>
                           <a:cs typeface="Arial" pitchFamily="34" charset="-120"/>
                         </a:rPr>
-                        <a:t>Near-threshold cuts give UNKNOWN, not FAIL; the cut is shown in the viewer</a:t>
+                        <a:t>A borderline cut makes the length check say 'can't tell', not 'too short'; the cut is shown</a:t>
                       </a:r>
                       <a:endParaRPr lang="en-US" sz="1250" dirty="0">
                         <a:latin typeface="Arial" charset="0"/>
@@ -15722,7 +15848,7 @@
                           <a:ea typeface="Arial" pitchFamily="34" charset="-122"/>
                           <a:cs typeface="Arial" pitchFamily="34" charset="-120"/>
                         </a:rPr>
-                        <a:t>τ per model fingerprint now; per query family next, calibrated on dev</a:t>
+                        <a:t>One threshold per model version now; per type of shot next, set on dev</a:t>
                       </a:r>
                       <a:endParaRPr lang="en-US" sz="1250" dirty="0">
                         <a:latin typeface="Arial" charset="0"/>
@@ -15824,7 +15950,7 @@
                           <a:ea typeface="Arial" pitchFamily="34" charset="-122"/>
                           <a:cs typeface="Arial" pitchFamily="34" charset="-120"/>
                         </a:rPr>
-                        <a:t>Person confirms query_en; multilingual model only after its gate</a:t>
+                        <a:t>A person checks the English search phrase; multilingual model only after its check</a:t>
                       </a:r>
                       <a:endParaRPr lang="en-US" sz="1250" dirty="0">
                         <a:latin typeface="Arial" charset="0"/>
@@ -16138,7 +16264,7 @@
       </p:grpSpPr>
       <p:pic>
         <p:nvPicPr>
-          <p:cNvPr id="2" name="Image 0" descr="C:\Users\yu9br\AppData\Local\Temp\neo-JM5AXu\a7.png">    </p:cNvPr>
+          <p:cNvPr id="2" name="Image 0" descr="C:\Users\yu9br\AppData\Local\Temp\neo-hIrnKR\a7.png">    </p:cNvPr>
           <p:cNvPicPr>
             <a:picLocks noChangeAspect="1"/>
           </p:cNvPicPr>
@@ -16190,7 +16316,7 @@
                   <a:srgbClr val="C9C9D6"/>
                 </a:solidFill>
               </a:rPr>
-              <a:t>SceneGap Edge · local-first shot coverage for small crews</a:t>
+              <a:t>SceneGap Edge · checks your shot list against your footage, on your own computer</a:t>
             </a:r>
             <a:endParaRPr lang="en-US" sz="1800" dirty="0"/>
           </a:p>
@@ -16248,7 +16374,7 @@
                   <a:srgbClr val="E5E7EB"/>
                 </a:solidFill>
               </a:rPr>
-              <a:t>Finds the right clip in the top 5 for 7 of 11 shots on held-out footage; a person confirms in one click</a:t>
+              <a:t>Finds the right clip in the top 5 for 7 of 11 shots on held-out footage; a person confirms each one</a:t>
             </a:r>
             <a:endParaRPr lang="en-US" sz="1500" dirty="0"/>
           </a:p>
@@ -16404,7 +16530,7 @@
                   <a:srgbClr val="111118"/>
                 </a:solidFill>
               </a:rPr>
-              <a:t>Footage credits (1 of 3)</a:t>
+              <a:t>Footage credits (1 of 4)</a:t>
             </a:r>
             <a:endParaRPr lang="en-US" sz="2800" dirty="0"/>
           </a:p>
@@ -16506,11 +16632,11 @@
               <a:tblPr/>
               <a:tblGrid>
                 <a:gridCol w="539572"/>
-                <a:gridCol w="5755430"/>
-                <a:gridCol w="2967644"/>
+                <a:gridCol w="5935287"/>
+                <a:gridCol w="2787786"/>
                 <a:gridCol w="1618715"/>
               </a:tblGrid>
-              <a:tr h="329184">
+              <a:tr h="358140">
                 <a:tc>
                   <a:txBody>
                     <a:bodyPr/>
@@ -16712,7 +16838,7 @@
                   </a:tcPr>
                 </a:tc>
               </a:tr>
-              <a:tr h="329184">
+              <a:tr h="358140">
                 <a:tc>
                   <a:txBody>
                     <a:bodyPr/>
@@ -16830,7 +16956,7 @@
                           <a:ea typeface="Microsoft JhengHei" pitchFamily="34" charset="-122"/>
                           <a:cs typeface="Microsoft JhengHei" pitchFamily="34" charset="-120"/>
                         </a:rPr>
-                        <a:t>Cliché Online ( talk ) (Yan.)</a:t>
+                        <a:t>Cliché Online (Yan.)</a:t>
                       </a:r>
                       <a:endParaRPr lang="en-US" sz="900" dirty="0">
                         <a:latin typeface="Microsoft JhengHei" charset="0"/>
@@ -16914,7 +17040,7 @@
                   </a:tcPr>
                 </a:tc>
               </a:tr>
-              <a:tr h="329184">
+              <a:tr h="358140">
                 <a:tc>
                   <a:txBody>
                     <a:bodyPr/>
@@ -17116,7 +17242,7 @@
                   </a:tcPr>
                 </a:tc>
               </a:tr>
-              <a:tr h="329184">
+              <a:tr h="358140">
                 <a:tc>
                   <a:txBody>
                     <a:bodyPr/>
@@ -17234,7 +17360,7 @@
                           <a:ea typeface="Microsoft JhengHei" pitchFamily="34" charset="-122"/>
                           <a:cs typeface="Microsoft JhengHei" pitchFamily="34" charset="-120"/>
                         </a:rPr>
-                        <a:t>This video is a work by Wikipedia and Wi</a:t>
+                        <a:t>C.Suthorn</a:t>
                       </a:r>
                       <a:endParaRPr lang="en-US" sz="900" dirty="0">
                         <a:latin typeface="Microsoft JhengHei" charset="0"/>
@@ -17318,7 +17444,7 @@
                   </a:tcPr>
                 </a:tc>
               </a:tr>
-              <a:tr h="329184">
+              <a:tr h="358140">
                 <a:tc>
                   <a:txBody>
                     <a:bodyPr/>
@@ -17520,7 +17646,7 @@
                   </a:tcPr>
                 </a:tc>
               </a:tr>
-              <a:tr h="329184">
+              <a:tr h="358140">
                 <a:tc>
                   <a:txBody>
                     <a:bodyPr/>
@@ -17722,7 +17848,7 @@
                   </a:tcPr>
                 </a:tc>
               </a:tr>
-              <a:tr h="329184">
+              <a:tr h="358140">
                 <a:tc>
                   <a:txBody>
                     <a:bodyPr/>
@@ -17924,7 +18050,7 @@
                   </a:tcPr>
                 </a:tc>
               </a:tr>
-              <a:tr h="329184">
+              <a:tr h="358140">
                 <a:tc>
                   <a:txBody>
                     <a:bodyPr/>
@@ -18126,7 +18252,7 @@
                   </a:tcPr>
                 </a:tc>
               </a:tr>
-              <a:tr h="329184">
+              <a:tr h="358140">
                 <a:tc>
                   <a:txBody>
                     <a:bodyPr/>
@@ -18328,7 +18454,7 @@
                   </a:tcPr>
                 </a:tc>
               </a:tr>
-              <a:tr h="329184">
+              <a:tr h="358140">
                 <a:tc>
                   <a:txBody>
                     <a:bodyPr/>
@@ -18530,7 +18656,7 @@
                   </a:tcPr>
                 </a:tc>
               </a:tr>
-              <a:tr h="329184">
+              <a:tr h="358140">
                 <a:tc>
                   <a:txBody>
                     <a:bodyPr/>
@@ -18732,7 +18858,7 @@
                   </a:tcPr>
                 </a:tc>
               </a:tr>
-              <a:tr h="329184">
+              <a:tr h="358140">
                 <a:tc>
                   <a:txBody>
                     <a:bodyPr/>
@@ -18901,814 +19027,6 @@
                           <a:cs typeface="Microsoft JhengHei" pitchFamily="34" charset="-120"/>
                         </a:rPr>
                         <a:t>Public domain</a:t>
-                      </a:r>
-                      <a:endParaRPr lang="en-US" sz="900" dirty="0">
-                        <a:latin typeface="Microsoft JhengHei" charset="0"/>
-                        <a:ea typeface="Microsoft JhengHei" charset="0"/>
-                        <a:cs typeface="Microsoft JhengHei" charset="0"/>
-                      </a:endParaRPr>
-                    </a:p>
-                  </a:txBody>
-                  <a:tcPr marL="101600" marR="101600" marT="50800" marB="50800" anchor="ctr">
-                    <a:lnL w="0" cap="flat" cmpd="sng" algn="ctr">
-                      <a:noFill/>
-                    </a:lnL>
-                    <a:lnR w="0" cap="flat" cmpd="sng" algn="ctr">
-                      <a:noFill/>
-                    </a:lnR>
-                    <a:lnT w="0" cap="flat" cmpd="sng" algn="ctr">
-                      <a:noFill/>
-                    </a:lnT>
-                    <a:lnB w="6350" cap="flat" cmpd="sng" algn="ctr">
-                      <a:solidFill>
-                        <a:srgbClr val="E5E7EB"/>
-                      </a:solidFill>
-                      <a:prstDash val="solid"/>
-                      <a:round/>
-                      <a:headEnd type="none" w="med" len="med"/>
-                      <a:tailEnd type="none" w="med" len="med"/>
-                    </a:lnB>
-                    <a:solidFill>
-                      <a:srgbClr val="FFFFFF"/>
-                    </a:solidFill>
-                  </a:tcPr>
-                </a:tc>
-              </a:tr>
-              <a:tr h="329184">
-                <a:tc>
-                  <a:txBody>
-                    <a:bodyPr/>
-                    <a:lstStyle/>
-                    <a:p>
-                      <a:pPr indent="0" marL="0">
-                        <a:buNone/>
-                      </a:pPr>
-                      <a:r>
-                        <a:rPr lang="en-US" sz="900" dirty="0">
-                          <a:solidFill>
-                            <a:srgbClr val="111118"/>
-                          </a:solidFill>
-                          <a:latin typeface="Microsoft JhengHei" pitchFamily="34" charset="0"/>
-                          <a:ea typeface="Microsoft JhengHei" pitchFamily="34" charset="-122"/>
-                          <a:cs typeface="Microsoft JhengHei" pitchFamily="34" charset="-120"/>
-                        </a:rPr>
-                        <a:t>011</a:t>
-                      </a:r>
-                      <a:endParaRPr lang="en-US" sz="900" dirty="0">
-                        <a:latin typeface="Microsoft JhengHei" charset="0"/>
-                        <a:ea typeface="Microsoft JhengHei" charset="0"/>
-                        <a:cs typeface="Microsoft JhengHei" charset="0"/>
-                      </a:endParaRPr>
-                    </a:p>
-                  </a:txBody>
-                  <a:tcPr marL="101600" marR="101600" marT="50800" marB="50800" anchor="ctr">
-                    <a:lnL w="0" cap="flat" cmpd="sng" algn="ctr">
-                      <a:noFill/>
-                    </a:lnL>
-                    <a:lnR w="0" cap="flat" cmpd="sng" algn="ctr">
-                      <a:noFill/>
-                    </a:lnR>
-                    <a:lnT w="0" cap="flat" cmpd="sng" algn="ctr">
-                      <a:noFill/>
-                    </a:lnT>
-                    <a:lnB w="6350" cap="flat" cmpd="sng" algn="ctr">
-                      <a:solidFill>
-                        <a:srgbClr val="E5E7EB"/>
-                      </a:solidFill>
-                      <a:prstDash val="solid"/>
-                      <a:round/>
-                      <a:headEnd type="none" w="med" len="med"/>
-                      <a:tailEnd type="none" w="med" len="med"/>
-                    </a:lnB>
-                    <a:solidFill>
-                      <a:srgbClr val="FFFFFF"/>
-                    </a:solidFill>
-                  </a:tcPr>
-                </a:tc>
-                <a:tc>
-                  <a:txBody>
-                    <a:bodyPr/>
-                    <a:lstStyle/>
-                    <a:p>
-                      <a:pPr indent="0" marL="0">
-                        <a:buNone/>
-                      </a:pPr>
-                      <a:r>
-                        <a:rPr lang="en-US" sz="900" dirty="0">
-                          <a:solidFill>
-                            <a:srgbClr val="111118"/>
-                          </a:solidFill>
-                          <a:latin typeface="Microsoft JhengHei" pitchFamily="34" charset="0"/>
-                          <a:ea typeface="Microsoft JhengHei" pitchFamily="34" charset="-122"/>
-                          <a:cs typeface="Microsoft JhengHei" pitchFamily="34" charset="-120"/>
-                        </a:rPr>
-                        <a:t>Color sorter coffeebeans.webm</a:t>
-                      </a:r>
-                      <a:endParaRPr lang="en-US" sz="900" dirty="0">
-                        <a:latin typeface="Microsoft JhengHei" charset="0"/>
-                        <a:ea typeface="Microsoft JhengHei" charset="0"/>
-                        <a:cs typeface="Microsoft JhengHei" charset="0"/>
-                      </a:endParaRPr>
-                    </a:p>
-                  </a:txBody>
-                  <a:tcPr marL="101600" marR="101600" marT="50800" marB="50800" anchor="ctr">
-                    <a:lnL w="0" cap="flat" cmpd="sng" algn="ctr">
-                      <a:noFill/>
-                    </a:lnL>
-                    <a:lnR w="0" cap="flat" cmpd="sng" algn="ctr">
-                      <a:noFill/>
-                    </a:lnR>
-                    <a:lnT w="0" cap="flat" cmpd="sng" algn="ctr">
-                      <a:noFill/>
-                    </a:lnT>
-                    <a:lnB w="6350" cap="flat" cmpd="sng" algn="ctr">
-                      <a:solidFill>
-                        <a:srgbClr val="E5E7EB"/>
-                      </a:solidFill>
-                      <a:prstDash val="solid"/>
-                      <a:round/>
-                      <a:headEnd type="none" w="med" len="med"/>
-                      <a:tailEnd type="none" w="med" len="med"/>
-                    </a:lnB>
-                    <a:solidFill>
-                      <a:srgbClr val="FFFFFF"/>
-                    </a:solidFill>
-                  </a:tcPr>
-                </a:tc>
-                <a:tc>
-                  <a:txBody>
-                    <a:bodyPr/>
-                    <a:lstStyle/>
-                    <a:p>
-                      <a:pPr indent="0" marL="0">
-                        <a:buNone/>
-                      </a:pPr>
-                      <a:r>
-                        <a:rPr lang="en-US" sz="900" dirty="0">
-                          <a:solidFill>
-                            <a:srgbClr val="111118"/>
-                          </a:solidFill>
-                          <a:latin typeface="Microsoft JhengHei" pitchFamily="34" charset="0"/>
-                          <a:ea typeface="Microsoft JhengHei" pitchFamily="34" charset="-122"/>
-                          <a:cs typeface="Microsoft JhengHei" pitchFamily="34" charset="-120"/>
-                        </a:rPr>
-                        <a:t>AlexanderKlink</a:t>
-                      </a:r>
-                      <a:endParaRPr lang="en-US" sz="900" dirty="0">
-                        <a:latin typeface="Microsoft JhengHei" charset="0"/>
-                        <a:ea typeface="Microsoft JhengHei" charset="0"/>
-                        <a:cs typeface="Microsoft JhengHei" charset="0"/>
-                      </a:endParaRPr>
-                    </a:p>
-                  </a:txBody>
-                  <a:tcPr marL="101600" marR="101600" marT="50800" marB="50800" anchor="ctr">
-                    <a:lnL w="0" cap="flat" cmpd="sng" algn="ctr">
-                      <a:noFill/>
-                    </a:lnL>
-                    <a:lnR w="0" cap="flat" cmpd="sng" algn="ctr">
-                      <a:noFill/>
-                    </a:lnR>
-                    <a:lnT w="0" cap="flat" cmpd="sng" algn="ctr">
-                      <a:noFill/>
-                    </a:lnT>
-                    <a:lnB w="6350" cap="flat" cmpd="sng" algn="ctr">
-                      <a:solidFill>
-                        <a:srgbClr val="E5E7EB"/>
-                      </a:solidFill>
-                      <a:prstDash val="solid"/>
-                      <a:round/>
-                      <a:headEnd type="none" w="med" len="med"/>
-                      <a:tailEnd type="none" w="med" len="med"/>
-                    </a:lnB>
-                    <a:solidFill>
-                      <a:srgbClr val="FFFFFF"/>
-                    </a:solidFill>
-                  </a:tcPr>
-                </a:tc>
-                <a:tc>
-                  <a:txBody>
-                    <a:bodyPr/>
-                    <a:lstStyle/>
-                    <a:p>
-                      <a:pPr indent="0" marL="0">
-                        <a:buNone/>
-                      </a:pPr>
-                      <a:r>
-                        <a:rPr lang="en-US" sz="900" dirty="0">
-                          <a:solidFill>
-                            <a:srgbClr val="111118"/>
-                          </a:solidFill>
-                          <a:latin typeface="Microsoft JhengHei" pitchFamily="34" charset="0"/>
-                          <a:ea typeface="Microsoft JhengHei" pitchFamily="34" charset="-122"/>
-                          <a:cs typeface="Microsoft JhengHei" pitchFamily="34" charset="-120"/>
-                        </a:rPr>
-                        <a:t>CC0</a:t>
-                      </a:r>
-                      <a:endParaRPr lang="en-US" sz="900" dirty="0">
-                        <a:latin typeface="Microsoft JhengHei" charset="0"/>
-                        <a:ea typeface="Microsoft JhengHei" charset="0"/>
-                        <a:cs typeface="Microsoft JhengHei" charset="0"/>
-                      </a:endParaRPr>
-                    </a:p>
-                  </a:txBody>
-                  <a:tcPr marL="101600" marR="101600" marT="50800" marB="50800" anchor="ctr">
-                    <a:lnL w="0" cap="flat" cmpd="sng" algn="ctr">
-                      <a:noFill/>
-                    </a:lnL>
-                    <a:lnR w="0" cap="flat" cmpd="sng" algn="ctr">
-                      <a:noFill/>
-                    </a:lnR>
-                    <a:lnT w="0" cap="flat" cmpd="sng" algn="ctr">
-                      <a:noFill/>
-                    </a:lnT>
-                    <a:lnB w="6350" cap="flat" cmpd="sng" algn="ctr">
-                      <a:solidFill>
-                        <a:srgbClr val="E5E7EB"/>
-                      </a:solidFill>
-                      <a:prstDash val="solid"/>
-                      <a:round/>
-                      <a:headEnd type="none" w="med" len="med"/>
-                      <a:tailEnd type="none" w="med" len="med"/>
-                    </a:lnB>
-                    <a:solidFill>
-                      <a:srgbClr val="FFFFFF"/>
-                    </a:solidFill>
-                  </a:tcPr>
-                </a:tc>
-              </a:tr>
-              <a:tr h="329184">
-                <a:tc>
-                  <a:txBody>
-                    <a:bodyPr/>
-                    <a:lstStyle/>
-                    <a:p>
-                      <a:pPr indent="0" marL="0">
-                        <a:buNone/>
-                      </a:pPr>
-                      <a:r>
-                        <a:rPr lang="en-US" sz="900" dirty="0">
-                          <a:solidFill>
-                            <a:srgbClr val="111118"/>
-                          </a:solidFill>
-                          <a:latin typeface="Microsoft JhengHei" pitchFamily="34" charset="0"/>
-                          <a:ea typeface="Microsoft JhengHei" pitchFamily="34" charset="-122"/>
-                          <a:cs typeface="Microsoft JhengHei" pitchFamily="34" charset="-120"/>
-                        </a:rPr>
-                        <a:t>012</a:t>
-                      </a:r>
-                      <a:endParaRPr lang="en-US" sz="900" dirty="0">
-                        <a:latin typeface="Microsoft JhengHei" charset="0"/>
-                        <a:ea typeface="Microsoft JhengHei" charset="0"/>
-                        <a:cs typeface="Microsoft JhengHei" charset="0"/>
-                      </a:endParaRPr>
-                    </a:p>
-                  </a:txBody>
-                  <a:tcPr marL="101600" marR="101600" marT="50800" marB="50800" anchor="ctr">
-                    <a:lnL w="0" cap="flat" cmpd="sng" algn="ctr">
-                      <a:noFill/>
-                    </a:lnL>
-                    <a:lnR w="0" cap="flat" cmpd="sng" algn="ctr">
-                      <a:noFill/>
-                    </a:lnR>
-                    <a:lnT w="0" cap="flat" cmpd="sng" algn="ctr">
-                      <a:noFill/>
-                    </a:lnT>
-                    <a:lnB w="6350" cap="flat" cmpd="sng" algn="ctr">
-                      <a:solidFill>
-                        <a:srgbClr val="E5E7EB"/>
-                      </a:solidFill>
-                      <a:prstDash val="solid"/>
-                      <a:round/>
-                      <a:headEnd type="none" w="med" len="med"/>
-                      <a:tailEnd type="none" w="med" len="med"/>
-                    </a:lnB>
-                    <a:solidFill>
-                      <a:srgbClr val="FFFFFF"/>
-                    </a:solidFill>
-                  </a:tcPr>
-                </a:tc>
-                <a:tc>
-                  <a:txBody>
-                    <a:bodyPr/>
-                    <a:lstStyle/>
-                    <a:p>
-                      <a:pPr indent="0" marL="0">
-                        <a:buNone/>
-                      </a:pPr>
-                      <a:r>
-                        <a:rPr lang="en-US" sz="900" dirty="0">
-                          <a:solidFill>
-                            <a:srgbClr val="111118"/>
-                          </a:solidFill>
-                          <a:latin typeface="Microsoft JhengHei" pitchFamily="34" charset="0"/>
-                          <a:ea typeface="Microsoft JhengHei" pitchFamily="34" charset="-122"/>
-                          <a:cs typeface="Microsoft JhengHei" pitchFamily="34" charset="-120"/>
-                        </a:rPr>
-                        <a:t>Kaffe - Ystad-2024.ogg</a:t>
-                      </a:r>
-                      <a:endParaRPr lang="en-US" sz="900" dirty="0">
-                        <a:latin typeface="Microsoft JhengHei" charset="0"/>
-                        <a:ea typeface="Microsoft JhengHei" charset="0"/>
-                        <a:cs typeface="Microsoft JhengHei" charset="0"/>
-                      </a:endParaRPr>
-                    </a:p>
-                  </a:txBody>
-                  <a:tcPr marL="101600" marR="101600" marT="50800" marB="50800" anchor="ctr">
-                    <a:lnL w="0" cap="flat" cmpd="sng" algn="ctr">
-                      <a:noFill/>
-                    </a:lnL>
-                    <a:lnR w="0" cap="flat" cmpd="sng" algn="ctr">
-                      <a:noFill/>
-                    </a:lnR>
-                    <a:lnT w="0" cap="flat" cmpd="sng" algn="ctr">
-                      <a:noFill/>
-                    </a:lnT>
-                    <a:lnB w="6350" cap="flat" cmpd="sng" algn="ctr">
-                      <a:solidFill>
-                        <a:srgbClr val="E5E7EB"/>
-                      </a:solidFill>
-                      <a:prstDash val="solid"/>
-                      <a:round/>
-                      <a:headEnd type="none" w="med" len="med"/>
-                      <a:tailEnd type="none" w="med" len="med"/>
-                    </a:lnB>
-                    <a:solidFill>
-                      <a:srgbClr val="FFFFFF"/>
-                    </a:solidFill>
-                  </a:tcPr>
-                </a:tc>
-                <a:tc>
-                  <a:txBody>
-                    <a:bodyPr/>
-                    <a:lstStyle/>
-                    <a:p>
-                      <a:pPr indent="0" marL="0">
-                        <a:buNone/>
-                      </a:pPr>
-                      <a:r>
-                        <a:rPr lang="en-US" sz="900" dirty="0">
-                          <a:solidFill>
-                            <a:srgbClr val="111118"/>
-                          </a:solidFill>
-                          <a:latin typeface="Microsoft JhengHei" pitchFamily="34" charset="0"/>
-                          <a:ea typeface="Microsoft JhengHei" pitchFamily="34" charset="-122"/>
-                          <a:cs typeface="Microsoft JhengHei" pitchFamily="34" charset="-120"/>
-                        </a:rPr>
-                        <a:t>Foto: Jonn Leffmann</a:t>
-                      </a:r>
-                      <a:endParaRPr lang="en-US" sz="900" dirty="0">
-                        <a:latin typeface="Microsoft JhengHei" charset="0"/>
-                        <a:ea typeface="Microsoft JhengHei" charset="0"/>
-                        <a:cs typeface="Microsoft JhengHei" charset="0"/>
-                      </a:endParaRPr>
-                    </a:p>
-                  </a:txBody>
-                  <a:tcPr marL="101600" marR="101600" marT="50800" marB="50800" anchor="ctr">
-                    <a:lnL w="0" cap="flat" cmpd="sng" algn="ctr">
-                      <a:noFill/>
-                    </a:lnL>
-                    <a:lnR w="0" cap="flat" cmpd="sng" algn="ctr">
-                      <a:noFill/>
-                    </a:lnR>
-                    <a:lnT w="0" cap="flat" cmpd="sng" algn="ctr">
-                      <a:noFill/>
-                    </a:lnT>
-                    <a:lnB w="6350" cap="flat" cmpd="sng" algn="ctr">
-                      <a:solidFill>
-                        <a:srgbClr val="E5E7EB"/>
-                      </a:solidFill>
-                      <a:prstDash val="solid"/>
-                      <a:round/>
-                      <a:headEnd type="none" w="med" len="med"/>
-                      <a:tailEnd type="none" w="med" len="med"/>
-                    </a:lnB>
-                    <a:solidFill>
-                      <a:srgbClr val="FFFFFF"/>
-                    </a:solidFill>
-                  </a:tcPr>
-                </a:tc>
-                <a:tc>
-                  <a:txBody>
-                    <a:bodyPr/>
-                    <a:lstStyle/>
-                    <a:p>
-                      <a:pPr indent="0" marL="0">
-                        <a:buNone/>
-                      </a:pPr>
-                      <a:r>
-                        <a:rPr lang="en-US" sz="900" dirty="0">
-                          <a:solidFill>
-                            <a:srgbClr val="111118"/>
-                          </a:solidFill>
-                          <a:latin typeface="Microsoft JhengHei" pitchFamily="34" charset="0"/>
-                          <a:ea typeface="Microsoft JhengHei" pitchFamily="34" charset="-122"/>
-                          <a:cs typeface="Microsoft JhengHei" pitchFamily="34" charset="-120"/>
-                        </a:rPr>
-                        <a:t>CC BY 3.0</a:t>
-                      </a:r>
-                      <a:endParaRPr lang="en-US" sz="900" dirty="0">
-                        <a:latin typeface="Microsoft JhengHei" charset="0"/>
-                        <a:ea typeface="Microsoft JhengHei" charset="0"/>
-                        <a:cs typeface="Microsoft JhengHei" charset="0"/>
-                      </a:endParaRPr>
-                    </a:p>
-                  </a:txBody>
-                  <a:tcPr marL="101600" marR="101600" marT="50800" marB="50800" anchor="ctr">
-                    <a:lnL w="0" cap="flat" cmpd="sng" algn="ctr">
-                      <a:noFill/>
-                    </a:lnL>
-                    <a:lnR w="0" cap="flat" cmpd="sng" algn="ctr">
-                      <a:noFill/>
-                    </a:lnR>
-                    <a:lnT w="0" cap="flat" cmpd="sng" algn="ctr">
-                      <a:noFill/>
-                    </a:lnT>
-                    <a:lnB w="6350" cap="flat" cmpd="sng" algn="ctr">
-                      <a:solidFill>
-                        <a:srgbClr val="E5E7EB"/>
-                      </a:solidFill>
-                      <a:prstDash val="solid"/>
-                      <a:round/>
-                      <a:headEnd type="none" w="med" len="med"/>
-                      <a:tailEnd type="none" w="med" len="med"/>
-                    </a:lnB>
-                    <a:solidFill>
-                      <a:srgbClr val="FFFFFF"/>
-                    </a:solidFill>
-                  </a:tcPr>
-                </a:tc>
-              </a:tr>
-              <a:tr h="329184">
-                <a:tc>
-                  <a:txBody>
-                    <a:bodyPr/>
-                    <a:lstStyle/>
-                    <a:p>
-                      <a:pPr indent="0" marL="0">
-                        <a:buNone/>
-                      </a:pPr>
-                      <a:r>
-                        <a:rPr lang="en-US" sz="900" dirty="0">
-                          <a:solidFill>
-                            <a:srgbClr val="111118"/>
-                          </a:solidFill>
-                          <a:latin typeface="Microsoft JhengHei" pitchFamily="34" charset="0"/>
-                          <a:ea typeface="Microsoft JhengHei" pitchFamily="34" charset="-122"/>
-                          <a:cs typeface="Microsoft JhengHei" pitchFamily="34" charset="-120"/>
-                        </a:rPr>
-                        <a:t>013</a:t>
-                      </a:r>
-                      <a:endParaRPr lang="en-US" sz="900" dirty="0">
-                        <a:latin typeface="Microsoft JhengHei" charset="0"/>
-                        <a:ea typeface="Microsoft JhengHei" charset="0"/>
-                        <a:cs typeface="Microsoft JhengHei" charset="0"/>
-                      </a:endParaRPr>
-                    </a:p>
-                  </a:txBody>
-                  <a:tcPr marL="101600" marR="101600" marT="50800" marB="50800" anchor="ctr">
-                    <a:lnL w="0" cap="flat" cmpd="sng" algn="ctr">
-                      <a:noFill/>
-                    </a:lnL>
-                    <a:lnR w="0" cap="flat" cmpd="sng" algn="ctr">
-                      <a:noFill/>
-                    </a:lnR>
-                    <a:lnT w="0" cap="flat" cmpd="sng" algn="ctr">
-                      <a:noFill/>
-                    </a:lnT>
-                    <a:lnB w="6350" cap="flat" cmpd="sng" algn="ctr">
-                      <a:solidFill>
-                        <a:srgbClr val="E5E7EB"/>
-                      </a:solidFill>
-                      <a:prstDash val="solid"/>
-                      <a:round/>
-                      <a:headEnd type="none" w="med" len="med"/>
-                      <a:tailEnd type="none" w="med" len="med"/>
-                    </a:lnB>
-                    <a:solidFill>
-                      <a:srgbClr val="FFFFFF"/>
-                    </a:solidFill>
-                  </a:tcPr>
-                </a:tc>
-                <a:tc>
-                  <a:txBody>
-                    <a:bodyPr/>
-                    <a:lstStyle/>
-                    <a:p>
-                      <a:pPr indent="0" marL="0">
-                        <a:buNone/>
-                      </a:pPr>
-                      <a:r>
-                        <a:rPr lang="en-US" sz="900" dirty="0">
-                          <a:solidFill>
-                            <a:srgbClr val="111118"/>
-                          </a:solidFill>
-                          <a:latin typeface="Microsoft JhengHei" pitchFamily="34" charset="0"/>
-                          <a:ea typeface="Microsoft JhengHei" pitchFamily="34" charset="-122"/>
-                          <a:cs typeface="Microsoft JhengHei" pitchFamily="34" charset="-120"/>
-                        </a:rPr>
-                        <a:t>Coffee from dan 2.webm</a:t>
-                      </a:r>
-                      <a:endParaRPr lang="en-US" sz="900" dirty="0">
-                        <a:latin typeface="Microsoft JhengHei" charset="0"/>
-                        <a:ea typeface="Microsoft JhengHei" charset="0"/>
-                        <a:cs typeface="Microsoft JhengHei" charset="0"/>
-                      </a:endParaRPr>
-                    </a:p>
-                  </a:txBody>
-                  <a:tcPr marL="101600" marR="101600" marT="50800" marB="50800" anchor="ctr">
-                    <a:lnL w="0" cap="flat" cmpd="sng" algn="ctr">
-                      <a:noFill/>
-                    </a:lnL>
-                    <a:lnR w="0" cap="flat" cmpd="sng" algn="ctr">
-                      <a:noFill/>
-                    </a:lnR>
-                    <a:lnT w="0" cap="flat" cmpd="sng" algn="ctr">
-                      <a:noFill/>
-                    </a:lnT>
-                    <a:lnB w="6350" cap="flat" cmpd="sng" algn="ctr">
-                      <a:solidFill>
-                        <a:srgbClr val="E5E7EB"/>
-                      </a:solidFill>
-                      <a:prstDash val="solid"/>
-                      <a:round/>
-                      <a:headEnd type="none" w="med" len="med"/>
-                      <a:tailEnd type="none" w="med" len="med"/>
-                    </a:lnB>
-                    <a:solidFill>
-                      <a:srgbClr val="FFFFFF"/>
-                    </a:solidFill>
-                  </a:tcPr>
-                </a:tc>
-                <a:tc>
-                  <a:txBody>
-                    <a:bodyPr/>
-                    <a:lstStyle/>
-                    <a:p>
-                      <a:pPr indent="0" marL="0">
-                        <a:buNone/>
-                      </a:pPr>
-                      <a:r>
-                        <a:rPr lang="en-US" sz="900" dirty="0">
-                          <a:solidFill>
-                            <a:srgbClr val="111118"/>
-                          </a:solidFill>
-                          <a:latin typeface="Microsoft JhengHei" pitchFamily="34" charset="0"/>
-                          <a:ea typeface="Microsoft JhengHei" pitchFamily="34" charset="-122"/>
-                          <a:cs typeface="Microsoft JhengHei" pitchFamily="34" charset="-120"/>
-                        </a:rPr>
-                        <a:t>Denis kasozi</a:t>
-                      </a:r>
-                      <a:endParaRPr lang="en-US" sz="900" dirty="0">
-                        <a:latin typeface="Microsoft JhengHei" charset="0"/>
-                        <a:ea typeface="Microsoft JhengHei" charset="0"/>
-                        <a:cs typeface="Microsoft JhengHei" charset="0"/>
-                      </a:endParaRPr>
-                    </a:p>
-                  </a:txBody>
-                  <a:tcPr marL="101600" marR="101600" marT="50800" marB="50800" anchor="ctr">
-                    <a:lnL w="0" cap="flat" cmpd="sng" algn="ctr">
-                      <a:noFill/>
-                    </a:lnL>
-                    <a:lnR w="0" cap="flat" cmpd="sng" algn="ctr">
-                      <a:noFill/>
-                    </a:lnR>
-                    <a:lnT w="0" cap="flat" cmpd="sng" algn="ctr">
-                      <a:noFill/>
-                    </a:lnT>
-                    <a:lnB w="6350" cap="flat" cmpd="sng" algn="ctr">
-                      <a:solidFill>
-                        <a:srgbClr val="E5E7EB"/>
-                      </a:solidFill>
-                      <a:prstDash val="solid"/>
-                      <a:round/>
-                      <a:headEnd type="none" w="med" len="med"/>
-                      <a:tailEnd type="none" w="med" len="med"/>
-                    </a:lnB>
-                    <a:solidFill>
-                      <a:srgbClr val="FFFFFF"/>
-                    </a:solidFill>
-                  </a:tcPr>
-                </a:tc>
-                <a:tc>
-                  <a:txBody>
-                    <a:bodyPr/>
-                    <a:lstStyle/>
-                    <a:p>
-                      <a:pPr indent="0" marL="0">
-                        <a:buNone/>
-                      </a:pPr>
-                      <a:r>
-                        <a:rPr lang="en-US" sz="900" dirty="0">
-                          <a:solidFill>
-                            <a:srgbClr val="111118"/>
-                          </a:solidFill>
-                          <a:latin typeface="Microsoft JhengHei" pitchFamily="34" charset="0"/>
-                          <a:ea typeface="Microsoft JhengHei" pitchFamily="34" charset="-122"/>
-                          <a:cs typeface="Microsoft JhengHei" pitchFamily="34" charset="-120"/>
-                        </a:rPr>
-                        <a:t>CC BY-SA 4.0</a:t>
-                      </a:r>
-                      <a:endParaRPr lang="en-US" sz="900" dirty="0">
-                        <a:latin typeface="Microsoft JhengHei" charset="0"/>
-                        <a:ea typeface="Microsoft JhengHei" charset="0"/>
-                        <a:cs typeface="Microsoft JhengHei" charset="0"/>
-                      </a:endParaRPr>
-                    </a:p>
-                  </a:txBody>
-                  <a:tcPr marL="101600" marR="101600" marT="50800" marB="50800" anchor="ctr">
-                    <a:lnL w="0" cap="flat" cmpd="sng" algn="ctr">
-                      <a:noFill/>
-                    </a:lnL>
-                    <a:lnR w="0" cap="flat" cmpd="sng" algn="ctr">
-                      <a:noFill/>
-                    </a:lnR>
-                    <a:lnT w="0" cap="flat" cmpd="sng" algn="ctr">
-                      <a:noFill/>
-                    </a:lnT>
-                    <a:lnB w="6350" cap="flat" cmpd="sng" algn="ctr">
-                      <a:solidFill>
-                        <a:srgbClr val="E5E7EB"/>
-                      </a:solidFill>
-                      <a:prstDash val="solid"/>
-                      <a:round/>
-                      <a:headEnd type="none" w="med" len="med"/>
-                      <a:tailEnd type="none" w="med" len="med"/>
-                    </a:lnB>
-                    <a:solidFill>
-                      <a:srgbClr val="FFFFFF"/>
-                    </a:solidFill>
-                  </a:tcPr>
-                </a:tc>
-              </a:tr>
-              <a:tr h="329184">
-                <a:tc>
-                  <a:txBody>
-                    <a:bodyPr/>
-                    <a:lstStyle/>
-                    <a:p>
-                      <a:pPr indent="0" marL="0">
-                        <a:buNone/>
-                      </a:pPr>
-                      <a:r>
-                        <a:rPr lang="en-US" sz="900" dirty="0">
-                          <a:solidFill>
-                            <a:srgbClr val="111118"/>
-                          </a:solidFill>
-                          <a:latin typeface="Microsoft JhengHei" pitchFamily="34" charset="0"/>
-                          <a:ea typeface="Microsoft JhengHei" pitchFamily="34" charset="-122"/>
-                          <a:cs typeface="Microsoft JhengHei" pitchFamily="34" charset="-120"/>
-                        </a:rPr>
-                        <a:t>014</a:t>
-                      </a:r>
-                      <a:endParaRPr lang="en-US" sz="900" dirty="0">
-                        <a:latin typeface="Microsoft JhengHei" charset="0"/>
-                        <a:ea typeface="Microsoft JhengHei" charset="0"/>
-                        <a:cs typeface="Microsoft JhengHei" charset="0"/>
-                      </a:endParaRPr>
-                    </a:p>
-                  </a:txBody>
-                  <a:tcPr marL="101600" marR="101600" marT="50800" marB="50800" anchor="ctr">
-                    <a:lnL w="0" cap="flat" cmpd="sng" algn="ctr">
-                      <a:noFill/>
-                    </a:lnL>
-                    <a:lnR w="0" cap="flat" cmpd="sng" algn="ctr">
-                      <a:noFill/>
-                    </a:lnR>
-                    <a:lnT w="0" cap="flat" cmpd="sng" algn="ctr">
-                      <a:noFill/>
-                    </a:lnT>
-                    <a:lnB w="6350" cap="flat" cmpd="sng" algn="ctr">
-                      <a:solidFill>
-                        <a:srgbClr val="E5E7EB"/>
-                      </a:solidFill>
-                      <a:prstDash val="solid"/>
-                      <a:round/>
-                      <a:headEnd type="none" w="med" len="med"/>
-                      <a:tailEnd type="none" w="med" len="med"/>
-                    </a:lnB>
-                    <a:solidFill>
-                      <a:srgbClr val="FFFFFF"/>
-                    </a:solidFill>
-                  </a:tcPr>
-                </a:tc>
-                <a:tc>
-                  <a:txBody>
-                    <a:bodyPr/>
-                    <a:lstStyle/>
-                    <a:p>
-                      <a:pPr indent="0" marL="0">
-                        <a:buNone/>
-                      </a:pPr>
-                      <a:r>
-                        <a:rPr lang="en-US" sz="900" dirty="0">
-                          <a:solidFill>
-                            <a:srgbClr val="111118"/>
-                          </a:solidFill>
-                          <a:latin typeface="Microsoft JhengHei" pitchFamily="34" charset="0"/>
-                          <a:ea typeface="Microsoft JhengHei" pitchFamily="34" charset="-122"/>
-                          <a:cs typeface="Microsoft JhengHei" pitchFamily="34" charset="-120"/>
-                        </a:rPr>
-                        <a:t>Traditional Ethiopian Coffee Roasting Ceremony.webm</a:t>
-                      </a:r>
-                      <a:endParaRPr lang="en-US" sz="900" dirty="0">
-                        <a:latin typeface="Microsoft JhengHei" charset="0"/>
-                        <a:ea typeface="Microsoft JhengHei" charset="0"/>
-                        <a:cs typeface="Microsoft JhengHei" charset="0"/>
-                      </a:endParaRPr>
-                    </a:p>
-                  </a:txBody>
-                  <a:tcPr marL="101600" marR="101600" marT="50800" marB="50800" anchor="ctr">
-                    <a:lnL w="0" cap="flat" cmpd="sng" algn="ctr">
-                      <a:noFill/>
-                    </a:lnL>
-                    <a:lnR w="0" cap="flat" cmpd="sng" algn="ctr">
-                      <a:noFill/>
-                    </a:lnR>
-                    <a:lnT w="0" cap="flat" cmpd="sng" algn="ctr">
-                      <a:noFill/>
-                    </a:lnT>
-                    <a:lnB w="6350" cap="flat" cmpd="sng" algn="ctr">
-                      <a:solidFill>
-                        <a:srgbClr val="E5E7EB"/>
-                      </a:solidFill>
-                      <a:prstDash val="solid"/>
-                      <a:round/>
-                      <a:headEnd type="none" w="med" len="med"/>
-                      <a:tailEnd type="none" w="med" len="med"/>
-                    </a:lnB>
-                    <a:solidFill>
-                      <a:srgbClr val="FFFFFF"/>
-                    </a:solidFill>
-                  </a:tcPr>
-                </a:tc>
-                <a:tc>
-                  <a:txBody>
-                    <a:bodyPr/>
-                    <a:lstStyle/>
-                    <a:p>
-                      <a:pPr indent="0" marL="0">
-                        <a:buNone/>
-                      </a:pPr>
-                      <a:r>
-                        <a:rPr lang="en-US" sz="900" dirty="0">
-                          <a:solidFill>
-                            <a:srgbClr val="111118"/>
-                          </a:solidFill>
-                          <a:latin typeface="Microsoft JhengHei" pitchFamily="34" charset="0"/>
-                          <a:ea typeface="Microsoft JhengHei" pitchFamily="34" charset="-122"/>
-                          <a:cs typeface="Microsoft JhengHei" pitchFamily="34" charset="-120"/>
-                        </a:rPr>
-                        <a:t>Keria T</a:t>
-                      </a:r>
-                      <a:endParaRPr lang="en-US" sz="900" dirty="0">
-                        <a:latin typeface="Microsoft JhengHei" charset="0"/>
-                        <a:ea typeface="Microsoft JhengHei" charset="0"/>
-                        <a:cs typeface="Microsoft JhengHei" charset="0"/>
-                      </a:endParaRPr>
-                    </a:p>
-                  </a:txBody>
-                  <a:tcPr marL="101600" marR="101600" marT="50800" marB="50800" anchor="ctr">
-                    <a:lnL w="0" cap="flat" cmpd="sng" algn="ctr">
-                      <a:noFill/>
-                    </a:lnL>
-                    <a:lnR w="0" cap="flat" cmpd="sng" algn="ctr">
-                      <a:noFill/>
-                    </a:lnR>
-                    <a:lnT w="0" cap="flat" cmpd="sng" algn="ctr">
-                      <a:noFill/>
-                    </a:lnT>
-                    <a:lnB w="6350" cap="flat" cmpd="sng" algn="ctr">
-                      <a:solidFill>
-                        <a:srgbClr val="E5E7EB"/>
-                      </a:solidFill>
-                      <a:prstDash val="solid"/>
-                      <a:round/>
-                      <a:headEnd type="none" w="med" len="med"/>
-                      <a:tailEnd type="none" w="med" len="med"/>
-                    </a:lnB>
-                    <a:solidFill>
-                      <a:srgbClr val="FFFFFF"/>
-                    </a:solidFill>
-                  </a:tcPr>
-                </a:tc>
-                <a:tc>
-                  <a:txBody>
-                    <a:bodyPr/>
-                    <a:lstStyle/>
-                    <a:p>
-                      <a:pPr indent="0" marL="0">
-                        <a:buNone/>
-                      </a:pPr>
-                      <a:r>
-                        <a:rPr lang="en-US" sz="900" dirty="0">
-                          <a:solidFill>
-                            <a:srgbClr val="111118"/>
-                          </a:solidFill>
-                          <a:latin typeface="Microsoft JhengHei" pitchFamily="34" charset="0"/>
-                          <a:ea typeface="Microsoft JhengHei" pitchFamily="34" charset="-122"/>
-                          <a:cs typeface="Microsoft JhengHei" pitchFamily="34" charset="-120"/>
-                        </a:rPr>
-                        <a:t>CC BY-SA 4.0</a:t>
                       </a:r>
                       <a:endParaRPr lang="en-US" sz="900" dirty="0">
                         <a:latin typeface="Microsoft JhengHei" charset="0"/>
@@ -19848,7 +19166,7 @@
                   <a:srgbClr val="111118"/>
                 </a:solidFill>
               </a:rPr>
-              <a:t>Footage credits (2 of 3)</a:t>
+              <a:t>Footage credits (2 of 4)</a:t>
             </a:r>
             <a:endParaRPr lang="en-US" sz="2800" dirty="0"/>
           </a:p>
@@ -19950,11 +19268,11 @@
               <a:tblPr/>
               <a:tblGrid>
                 <a:gridCol w="539572"/>
-                <a:gridCol w="5755430"/>
-                <a:gridCol w="2967644"/>
+                <a:gridCol w="5935287"/>
+                <a:gridCol w="2787786"/>
                 <a:gridCol w="1618715"/>
               </a:tblGrid>
-              <a:tr h="329184">
+              <a:tr h="358140">
                 <a:tc>
                   <a:txBody>
                     <a:bodyPr/>
@@ -20156,7 +19474,7 @@
                   </a:tcPr>
                 </a:tc>
               </a:tr>
-              <a:tr h="329184">
+              <a:tr h="358140">
                 <a:tc>
                   <a:txBody>
                     <a:bodyPr/>
@@ -20174,7 +19492,7 @@
                           <a:ea typeface="Microsoft JhengHei" pitchFamily="34" charset="-122"/>
                           <a:cs typeface="Microsoft JhengHei" pitchFamily="34" charset="-120"/>
                         </a:rPr>
-                        <a:t>015</a:t>
+                        <a:t>011</a:t>
                       </a:r>
                       <a:endParaRPr lang="en-US" sz="900" dirty="0">
                         <a:latin typeface="Microsoft JhengHei" charset="0"/>
@@ -20224,7 +19542,7 @@
                           <a:ea typeface="Microsoft JhengHei" pitchFamily="34" charset="-122"/>
                           <a:cs typeface="Microsoft JhengHei" pitchFamily="34" charset="-120"/>
                         </a:rPr>
-                        <a:t>Despulpadora.ogg</a:t>
+                        <a:t>Color sorter coffeebeans.webm</a:t>
                       </a:r>
                       <a:endParaRPr lang="en-US" sz="900" dirty="0">
                         <a:latin typeface="Microsoft JhengHei" charset="0"/>
@@ -20274,7 +19592,7 @@
                           <a:ea typeface="Microsoft JhengHei" pitchFamily="34" charset="-122"/>
                           <a:cs typeface="Microsoft JhengHei" pitchFamily="34" charset="-120"/>
                         </a:rPr>
-                        <a:t>Jhonespe150102</a:t>
+                        <a:t>AlexanderKlink</a:t>
                       </a:r>
                       <a:endParaRPr lang="en-US" sz="900" dirty="0">
                         <a:latin typeface="Microsoft JhengHei" charset="0"/>
@@ -20324,7 +19642,7 @@
                           <a:ea typeface="Microsoft JhengHei" pitchFamily="34" charset="-122"/>
                           <a:cs typeface="Microsoft JhengHei" pitchFamily="34" charset="-120"/>
                         </a:rPr>
-                        <a:t>CC BY-SA 4.0</a:t>
+                        <a:t>CC0</a:t>
                       </a:r>
                       <a:endParaRPr lang="en-US" sz="900" dirty="0">
                         <a:latin typeface="Microsoft JhengHei" charset="0"/>
@@ -20358,7 +19676,7 @@
                   </a:tcPr>
                 </a:tc>
               </a:tr>
-              <a:tr h="329184">
+              <a:tr h="358140">
                 <a:tc>
                   <a:txBody>
                     <a:bodyPr/>
@@ -20376,7 +19694,7 @@
                           <a:ea typeface="Microsoft JhengHei" pitchFamily="34" charset="-122"/>
                           <a:cs typeface="Microsoft JhengHei" pitchFamily="34" charset="-120"/>
                         </a:rPr>
-                        <a:t>016</a:t>
+                        <a:t>012</a:t>
                       </a:r>
                       <a:endParaRPr lang="en-US" sz="900" dirty="0">
                         <a:latin typeface="Microsoft JhengHei" charset="0"/>
@@ -20426,7 +19744,7 @@
                           <a:ea typeface="Microsoft JhengHei" pitchFamily="34" charset="-122"/>
                           <a:cs typeface="Microsoft JhengHei" pitchFamily="34" charset="-120"/>
                         </a:rPr>
-                        <a:t>Lions Almelo zamelt koffie in voor Voedselbank.webm</a:t>
+                        <a:t>Kaffe - Ystad-2024.ogg</a:t>
                       </a:r>
                       <a:endParaRPr lang="en-US" sz="900" dirty="0">
                         <a:latin typeface="Microsoft JhengHei" charset="0"/>
@@ -20476,7 +19794,7 @@
                           <a:ea typeface="Microsoft JhengHei" pitchFamily="34" charset="-122"/>
                           <a:cs typeface="Microsoft JhengHei" pitchFamily="34" charset="-120"/>
                         </a:rPr>
-                        <a:t>AAVISIE</a:t>
+                        <a:t>Jonn Leffmann</a:t>
                       </a:r>
                       <a:endParaRPr lang="en-US" sz="900" dirty="0">
                         <a:latin typeface="Microsoft JhengHei" charset="0"/>
@@ -20560,7 +19878,7 @@
                   </a:tcPr>
                 </a:tc>
               </a:tr>
-              <a:tr h="329184">
+              <a:tr h="358140">
                 <a:tc>
                   <a:txBody>
                     <a:bodyPr/>
@@ -20578,7 +19896,7 @@
                           <a:ea typeface="Microsoft JhengHei" pitchFamily="34" charset="-122"/>
                           <a:cs typeface="Microsoft JhengHei" pitchFamily="34" charset="-120"/>
                         </a:rPr>
-                        <a:t>017</a:t>
+                        <a:t>013</a:t>
                       </a:r>
                       <a:endParaRPr lang="en-US" sz="900" dirty="0">
                         <a:latin typeface="Microsoft JhengHei" charset="0"/>
@@ -20628,7 +19946,7 @@
                           <a:ea typeface="Microsoft JhengHei" pitchFamily="34" charset="-122"/>
                           <a:cs typeface="Microsoft JhengHei" pitchFamily="34" charset="-120"/>
                         </a:rPr>
-                        <a:t>Sunday Morning Espresso Routine - Grind + distribute + tamp </a:t>
+                        <a:t>Coffee from dan 2.webm</a:t>
                       </a:r>
                       <a:endParaRPr lang="en-US" sz="900" dirty="0">
                         <a:latin typeface="Microsoft JhengHei" charset="0"/>
@@ -20678,7 +19996,7 @@
                           <a:ea typeface="Microsoft JhengHei" pitchFamily="34" charset="-122"/>
                           <a:cs typeface="Microsoft JhengHei" pitchFamily="34" charset="-120"/>
                         </a:rPr>
-                        <a:t>Scott Schiller from San Francisco, CA, U</a:t>
+                        <a:t>Denis kasozi</a:t>
                       </a:r>
                       <a:endParaRPr lang="en-US" sz="900" dirty="0">
                         <a:latin typeface="Microsoft JhengHei" charset="0"/>
@@ -20728,7 +20046,7 @@
                           <a:ea typeface="Microsoft JhengHei" pitchFamily="34" charset="-122"/>
                           <a:cs typeface="Microsoft JhengHei" pitchFamily="34" charset="-120"/>
                         </a:rPr>
-                        <a:t>CC BY 2.0</a:t>
+                        <a:t>CC BY-SA 4.0</a:t>
                       </a:r>
                       <a:endParaRPr lang="en-US" sz="900" dirty="0">
                         <a:latin typeface="Microsoft JhengHei" charset="0"/>
@@ -20762,7 +20080,7 @@
                   </a:tcPr>
                 </a:tc>
               </a:tr>
-              <a:tr h="329184">
+              <a:tr h="358140">
                 <a:tc>
                   <a:txBody>
                     <a:bodyPr/>
@@ -20780,7 +20098,7 @@
                           <a:ea typeface="Microsoft JhengHei" pitchFamily="34" charset="-122"/>
                           <a:cs typeface="Microsoft JhengHei" pitchFamily="34" charset="-120"/>
                         </a:rPr>
-                        <a:t>018</a:t>
+                        <a:t>014</a:t>
                       </a:r>
                       <a:endParaRPr lang="en-US" sz="900" dirty="0">
                         <a:latin typeface="Microsoft JhengHei" charset="0"/>
@@ -20830,7 +20148,7 @@
                           <a:ea typeface="Microsoft JhengHei" pitchFamily="34" charset="-122"/>
                           <a:cs typeface="Microsoft JhengHei" pitchFamily="34" charset="-120"/>
                         </a:rPr>
-                        <a:t>Кофемельница JURA 43.webm</a:t>
+                        <a:t>Traditional Ethiopian Coffee Roasting Ceremony.webm</a:t>
                       </a:r>
                       <a:endParaRPr lang="en-US" sz="900" dirty="0">
                         <a:latin typeface="Microsoft JhengHei" charset="0"/>
@@ -20880,7 +20198,7 @@
                           <a:ea typeface="Microsoft JhengHei" pitchFamily="34" charset="-122"/>
                           <a:cs typeface="Microsoft JhengHei" pitchFamily="34" charset="-120"/>
                         </a:rPr>
-                        <a:t>Gontcharik.petr</a:t>
+                        <a:t>Keria T</a:t>
                       </a:r>
                       <a:endParaRPr lang="en-US" sz="900" dirty="0">
                         <a:latin typeface="Microsoft JhengHei" charset="0"/>
@@ -20964,7 +20282,7 @@
                   </a:tcPr>
                 </a:tc>
               </a:tr>
-              <a:tr h="329184">
+              <a:tr h="358140">
                 <a:tc>
                   <a:txBody>
                     <a:bodyPr/>
@@ -20982,7 +20300,7 @@
                           <a:ea typeface="Microsoft JhengHei" pitchFamily="34" charset="-122"/>
                           <a:cs typeface="Microsoft JhengHei" pitchFamily="34" charset="-120"/>
                         </a:rPr>
-                        <a:t>019</a:t>
+                        <a:t>015</a:t>
                       </a:r>
                       <a:endParaRPr lang="en-US" sz="900" dirty="0">
                         <a:latin typeface="Microsoft JhengHei" charset="0"/>
@@ -21032,7 +20350,7 @@
                           <a:ea typeface="Microsoft JhengHei" pitchFamily="34" charset="-122"/>
                           <a:cs typeface="Microsoft JhengHei" pitchFamily="34" charset="-120"/>
                         </a:rPr>
-                        <a:t>MoliendoCafeEnLicuadora ohs02.webm</a:t>
+                        <a:t>Despulpadora.ogg</a:t>
                       </a:r>
                       <a:endParaRPr lang="en-US" sz="900" dirty="0">
                         <a:latin typeface="Microsoft JhengHei" charset="0"/>
@@ -21082,7 +20400,7 @@
                           <a:ea typeface="Microsoft JhengHei" pitchFamily="34" charset="-122"/>
                           <a:cs typeface="Microsoft JhengHei" pitchFamily="34" charset="-120"/>
                         </a:rPr>
-                        <a:t>PetrohsW</a:t>
+                        <a:t>Jhonespe150102</a:t>
                       </a:r>
                       <a:endParaRPr lang="en-US" sz="900" dirty="0">
                         <a:latin typeface="Microsoft JhengHei" charset="0"/>
@@ -21166,7 +20484,7 @@
                   </a:tcPr>
                 </a:tc>
               </a:tr>
-              <a:tr h="329184">
+              <a:tr h="358140">
                 <a:tc>
                   <a:txBody>
                     <a:bodyPr/>
@@ -21184,7 +20502,7 @@
                           <a:ea typeface="Microsoft JhengHei" pitchFamily="34" charset="-122"/>
                           <a:cs typeface="Microsoft JhengHei" pitchFamily="34" charset="-120"/>
                         </a:rPr>
-                        <a:t>020</a:t>
+                        <a:t>016</a:t>
                       </a:r>
                       <a:endParaRPr lang="en-US" sz="900" dirty="0">
                         <a:latin typeface="Microsoft JhengHei" charset="0"/>
@@ -21234,7 +20552,7 @@
                           <a:ea typeface="Microsoft JhengHei" pitchFamily="34" charset="-122"/>
                           <a:cs typeface="Microsoft JhengHei" pitchFamily="34" charset="-120"/>
                         </a:rPr>
-                        <a:t>Espresso video.ogv</a:t>
+                        <a:t>Lions Almelo zamelt koffie in voor Voedselbank.webm</a:t>
                       </a:r>
                       <a:endParaRPr lang="en-US" sz="900" dirty="0">
                         <a:latin typeface="Microsoft JhengHei" charset="0"/>
@@ -21284,7 +20602,7 @@
                           <a:ea typeface="Microsoft JhengHei" pitchFamily="34" charset="-122"/>
                           <a:cs typeface="Microsoft JhengHei" pitchFamily="34" charset="-120"/>
                         </a:rPr>
-                        <a:t>Rosatrieu</a:t>
+                        <a:t>AAVISIE</a:t>
                       </a:r>
                       <a:endParaRPr lang="en-US" sz="900" dirty="0">
                         <a:latin typeface="Microsoft JhengHei" charset="0"/>
@@ -21334,7 +20652,7 @@
                           <a:ea typeface="Microsoft JhengHei" pitchFamily="34" charset="-122"/>
                           <a:cs typeface="Microsoft JhengHei" pitchFamily="34" charset="-120"/>
                         </a:rPr>
-                        <a:t>CC BY-SA 3.0</a:t>
+                        <a:t>CC BY 3.0</a:t>
                       </a:r>
                       <a:endParaRPr lang="en-US" sz="900" dirty="0">
                         <a:latin typeface="Microsoft JhengHei" charset="0"/>
@@ -21368,7 +20686,7 @@
                   </a:tcPr>
                 </a:tc>
               </a:tr>
-              <a:tr h="329184">
+              <a:tr h="358140">
                 <a:tc>
                   <a:txBody>
                     <a:bodyPr/>
@@ -21386,7 +20704,7 @@
                           <a:ea typeface="Microsoft JhengHei" pitchFamily="34" charset="-122"/>
                           <a:cs typeface="Microsoft JhengHei" pitchFamily="34" charset="-120"/>
                         </a:rPr>
-                        <a:t>021</a:t>
+                        <a:t>017</a:t>
                       </a:r>
                       <a:endParaRPr lang="en-US" sz="900" dirty="0">
                         <a:latin typeface="Microsoft JhengHei" charset="0"/>
@@ -21436,7 +20754,7 @@
                           <a:ea typeface="Microsoft JhengHei" pitchFamily="34" charset="-122"/>
                           <a:cs typeface="Microsoft JhengHei" pitchFamily="34" charset="-120"/>
                         </a:rPr>
-                        <a:t>Macro Espresso Process.webm</a:t>
+                        <a:t>Sunday Morning Espresso Routine - Grind + distribute + tamp + extraction (15-Second Abridged Version).webm</a:t>
                       </a:r>
                       <a:endParaRPr lang="en-US" sz="900" dirty="0">
                         <a:latin typeface="Microsoft JhengHei" charset="0"/>
@@ -21486,7 +20804,7 @@
                           <a:ea typeface="Microsoft JhengHei" pitchFamily="34" charset="-122"/>
                           <a:cs typeface="Microsoft JhengHei" pitchFamily="34" charset="-120"/>
                         </a:rPr>
-                        <a:t>Scott Schiller from San Francisco, CA, U</a:t>
+                        <a:t>Scott Schiller from San Francisco, CA, USA</a:t>
                       </a:r>
                       <a:endParaRPr lang="en-US" sz="900" dirty="0">
                         <a:latin typeface="Microsoft JhengHei" charset="0"/>
@@ -21570,7 +20888,7 @@
                   </a:tcPr>
                 </a:tc>
               </a:tr>
-              <a:tr h="329184">
+              <a:tr h="358140">
                 <a:tc>
                   <a:txBody>
                     <a:bodyPr/>
@@ -21588,7 +20906,7 @@
                           <a:ea typeface="Microsoft JhengHei" pitchFamily="34" charset="-122"/>
                           <a:cs typeface="Microsoft JhengHei" pitchFamily="34" charset="-120"/>
                         </a:rPr>
-                        <a:t>022</a:t>
+                        <a:t>018</a:t>
                       </a:r>
                       <a:endParaRPr lang="en-US" sz="900" dirty="0">
                         <a:latin typeface="Microsoft JhengHei" charset="0"/>
@@ -21638,7 +20956,7 @@
                           <a:ea typeface="Microsoft JhengHei" pitchFamily="34" charset="-122"/>
                           <a:cs typeface="Microsoft JhengHei" pitchFamily="34" charset="-120"/>
                         </a:rPr>
-                        <a:t>Der perfekte Espresso aus dem Siebträger.ogv</a:t>
+                        <a:t>Кофемельница JURA 43.webm</a:t>
                       </a:r>
                       <a:endParaRPr lang="en-US" sz="900" dirty="0">
                         <a:latin typeface="Microsoft JhengHei" charset="0"/>
@@ -21688,7 +21006,7 @@
                           <a:ea typeface="Microsoft JhengHei" pitchFamily="34" charset="-122"/>
                           <a:cs typeface="Microsoft JhengHei" pitchFamily="34" charset="-120"/>
                         </a:rPr>
-                        <a:t>Max Duchardt, Katrin Engel</a:t>
+                        <a:t>Gontcharik.petr</a:t>
                       </a:r>
                       <a:endParaRPr lang="en-US" sz="900" dirty="0">
                         <a:latin typeface="Microsoft JhengHei" charset="0"/>
@@ -21738,7 +21056,7 @@
                           <a:ea typeface="Microsoft JhengHei" pitchFamily="34" charset="-122"/>
                           <a:cs typeface="Microsoft JhengHei" pitchFamily="34" charset="-120"/>
                         </a:rPr>
-                        <a:t>CC BY 3.0</a:t>
+                        <a:t>CC BY-SA 4.0</a:t>
                       </a:r>
                       <a:endParaRPr lang="en-US" sz="900" dirty="0">
                         <a:latin typeface="Microsoft JhengHei" charset="0"/>
@@ -21772,7 +21090,7 @@
                   </a:tcPr>
                 </a:tc>
               </a:tr>
-              <a:tr h="329184">
+              <a:tr h="358140">
                 <a:tc>
                   <a:txBody>
                     <a:bodyPr/>
@@ -21790,7 +21108,7 @@
                           <a:ea typeface="Microsoft JhengHei" pitchFamily="34" charset="-122"/>
                           <a:cs typeface="Microsoft JhengHei" pitchFamily="34" charset="-120"/>
                         </a:rPr>
-                        <a:t>023</a:t>
+                        <a:t>019</a:t>
                       </a:r>
                       <a:endParaRPr lang="en-US" sz="900" dirty="0">
                         <a:latin typeface="Microsoft JhengHei" charset="0"/>
@@ -21840,7 +21158,7 @@
                           <a:ea typeface="Microsoft JhengHei" pitchFamily="34" charset="-122"/>
                           <a:cs typeface="Microsoft JhengHei" pitchFamily="34" charset="-120"/>
                         </a:rPr>
-                        <a:t>Pour Over.ogv</a:t>
+                        <a:t>MoliendoCafeEnLicuadora ohs02.webm</a:t>
                       </a:r>
                       <a:endParaRPr lang="en-US" sz="900" dirty="0">
                         <a:latin typeface="Microsoft JhengHei" charset="0"/>
@@ -21890,7 +21208,7 @@
                           <a:ea typeface="Microsoft JhengHei" pitchFamily="34" charset="-122"/>
                           <a:cs typeface="Microsoft JhengHei" pitchFamily="34" charset="-120"/>
                         </a:rPr>
-                        <a:t>Lev Lazinskiy</a:t>
+                        <a:t>PetrohsW</a:t>
                       </a:r>
                       <a:endParaRPr lang="en-US" sz="900" dirty="0">
                         <a:latin typeface="Microsoft JhengHei" charset="0"/>
@@ -21974,7 +21292,7 @@
                   </a:tcPr>
                 </a:tc>
               </a:tr>
-              <a:tr h="329184">
+              <a:tr h="358140">
                 <a:tc>
                   <a:txBody>
                     <a:bodyPr/>
@@ -21992,7 +21310,7 @@
                           <a:ea typeface="Microsoft JhengHei" pitchFamily="34" charset="-122"/>
                           <a:cs typeface="Microsoft JhengHei" pitchFamily="34" charset="-120"/>
                         </a:rPr>
-                        <a:t>024</a:t>
+                        <a:t>020</a:t>
                       </a:r>
                       <a:endParaRPr lang="en-US" sz="900" dirty="0">
                         <a:latin typeface="Microsoft JhengHei" charset="0"/>
@@ -22042,7 +21360,7 @@
                           <a:ea typeface="Microsoft JhengHei" pitchFamily="34" charset="-122"/>
                           <a:cs typeface="Microsoft JhengHei" pitchFamily="34" charset="-120"/>
                         </a:rPr>
-                        <a:t>Use of a coffee press.ogv</a:t>
+                        <a:t>Espresso video.ogv</a:t>
                       </a:r>
                       <a:endParaRPr lang="en-US" sz="900" dirty="0">
                         <a:latin typeface="Microsoft JhengHei" charset="0"/>
@@ -22092,7 +21410,7 @@
                           <a:ea typeface="Microsoft JhengHei" pitchFamily="34" charset="-122"/>
                           <a:cs typeface="Microsoft JhengHei" pitchFamily="34" charset="-120"/>
                         </a:rPr>
-                        <a:t>Produced, directed and edited by Daniel </a:t>
+                        <a:t>Rosatrieu</a:t>
                       </a:r>
                       <a:endParaRPr lang="en-US" sz="900" dirty="0">
                         <a:latin typeface="Microsoft JhengHei" charset="0"/>
@@ -22176,7 +21494,7 @@
                   </a:tcPr>
                 </a:tc>
               </a:tr>
-              <a:tr h="329184">
+              <a:tr h="358140">
                 <a:tc>
                   <a:txBody>
                     <a:bodyPr/>
@@ -22194,7 +21512,7 @@
                           <a:ea typeface="Microsoft JhengHei" pitchFamily="34" charset="-122"/>
                           <a:cs typeface="Microsoft JhengHei" pitchFamily="34" charset="-120"/>
                         </a:rPr>
-                        <a:t>025</a:t>
+                        <a:t>021</a:t>
                       </a:r>
                       <a:endParaRPr lang="en-US" sz="900" dirty="0">
                         <a:latin typeface="Microsoft JhengHei" charset="0"/>
@@ -22244,7 +21562,7 @@
                           <a:ea typeface="Microsoft JhengHei" pitchFamily="34" charset="-122"/>
                           <a:cs typeface="Microsoft JhengHei" pitchFamily="34" charset="-120"/>
                         </a:rPr>
-                        <a:t>Schritt für Schritt - Kaffeezubereitung mit der Chemex.ogv</a:t>
+                        <a:t>Macro Espresso Process.webm</a:t>
                       </a:r>
                       <a:endParaRPr lang="en-US" sz="900" dirty="0">
                         <a:latin typeface="Microsoft JhengHei" charset="0"/>
@@ -22294,7 +21612,7 @@
                           <a:ea typeface="Microsoft JhengHei" pitchFamily="34" charset="-122"/>
                           <a:cs typeface="Microsoft JhengHei" pitchFamily="34" charset="-120"/>
                         </a:rPr>
-                        <a:t>Max Duchardt , Katrin Engel</a:t>
+                        <a:t>Scott Schiller from San Francisco, CA, USA</a:t>
                       </a:r>
                       <a:endParaRPr lang="en-US" sz="900" dirty="0">
                         <a:latin typeface="Microsoft JhengHei" charset="0"/>
@@ -22344,815 +21662,7 @@
                           <a:ea typeface="Microsoft JhengHei" pitchFamily="34" charset="-122"/>
                           <a:cs typeface="Microsoft JhengHei" pitchFamily="34" charset="-120"/>
                         </a:rPr>
-                        <a:t>CC BY 3.0</a:t>
-                      </a:r>
-                      <a:endParaRPr lang="en-US" sz="900" dirty="0">
-                        <a:latin typeface="Microsoft JhengHei" charset="0"/>
-                        <a:ea typeface="Microsoft JhengHei" charset="0"/>
-                        <a:cs typeface="Microsoft JhengHei" charset="0"/>
-                      </a:endParaRPr>
-                    </a:p>
-                  </a:txBody>
-                  <a:tcPr marL="101600" marR="101600" marT="50800" marB="50800" anchor="ctr">
-                    <a:lnL w="0" cap="flat" cmpd="sng" algn="ctr">
-                      <a:noFill/>
-                    </a:lnL>
-                    <a:lnR w="0" cap="flat" cmpd="sng" algn="ctr">
-                      <a:noFill/>
-                    </a:lnR>
-                    <a:lnT w="0" cap="flat" cmpd="sng" algn="ctr">
-                      <a:noFill/>
-                    </a:lnT>
-                    <a:lnB w="6350" cap="flat" cmpd="sng" algn="ctr">
-                      <a:solidFill>
-                        <a:srgbClr val="E5E7EB"/>
-                      </a:solidFill>
-                      <a:prstDash val="solid"/>
-                      <a:round/>
-                      <a:headEnd type="none" w="med" len="med"/>
-                      <a:tailEnd type="none" w="med" len="med"/>
-                    </a:lnB>
-                    <a:solidFill>
-                      <a:srgbClr val="FFFFFF"/>
-                    </a:solidFill>
-                  </a:tcPr>
-                </a:tc>
-              </a:tr>
-              <a:tr h="329184">
-                <a:tc>
-                  <a:txBody>
-                    <a:bodyPr/>
-                    <a:lstStyle/>
-                    <a:p>
-                      <a:pPr indent="0" marL="0">
-                        <a:buNone/>
-                      </a:pPr>
-                      <a:r>
-                        <a:rPr lang="en-US" sz="900" dirty="0">
-                          <a:solidFill>
-                            <a:srgbClr val="111118"/>
-                          </a:solidFill>
-                          <a:latin typeface="Microsoft JhengHei" pitchFamily="34" charset="0"/>
-                          <a:ea typeface="Microsoft JhengHei" pitchFamily="34" charset="-122"/>
-                          <a:cs typeface="Microsoft JhengHei" pitchFamily="34" charset="-120"/>
-                        </a:rPr>
-                        <a:t>026</a:t>
-                      </a:r>
-                      <a:endParaRPr lang="en-US" sz="900" dirty="0">
-                        <a:latin typeface="Microsoft JhengHei" charset="0"/>
-                        <a:ea typeface="Microsoft JhengHei" charset="0"/>
-                        <a:cs typeface="Microsoft JhengHei" charset="0"/>
-                      </a:endParaRPr>
-                    </a:p>
-                  </a:txBody>
-                  <a:tcPr marL="101600" marR="101600" marT="50800" marB="50800" anchor="ctr">
-                    <a:lnL w="0" cap="flat" cmpd="sng" algn="ctr">
-                      <a:noFill/>
-                    </a:lnL>
-                    <a:lnR w="0" cap="flat" cmpd="sng" algn="ctr">
-                      <a:noFill/>
-                    </a:lnR>
-                    <a:lnT w="0" cap="flat" cmpd="sng" algn="ctr">
-                      <a:noFill/>
-                    </a:lnT>
-                    <a:lnB w="6350" cap="flat" cmpd="sng" algn="ctr">
-                      <a:solidFill>
-                        <a:srgbClr val="E5E7EB"/>
-                      </a:solidFill>
-                      <a:prstDash val="solid"/>
-                      <a:round/>
-                      <a:headEnd type="none" w="med" len="med"/>
-                      <a:tailEnd type="none" w="med" len="med"/>
-                    </a:lnB>
-                    <a:solidFill>
-                      <a:srgbClr val="FFFFFF"/>
-                    </a:solidFill>
-                  </a:tcPr>
-                </a:tc>
-                <a:tc>
-                  <a:txBody>
-                    <a:bodyPr/>
-                    <a:lstStyle/>
-                    <a:p>
-                      <a:pPr indent="0" marL="0">
-                        <a:buNone/>
-                      </a:pPr>
-                      <a:r>
-                        <a:rPr lang="en-US" sz="900" dirty="0">
-                          <a:solidFill>
-                            <a:srgbClr val="111118"/>
-                          </a:solidFill>
-                          <a:latin typeface="Microsoft JhengHei" pitchFamily="34" charset="0"/>
-                          <a:ea typeface="Microsoft JhengHei" pitchFamily="34" charset="-122"/>
-                          <a:cs typeface="Microsoft JhengHei" pitchFamily="34" charset="-120"/>
-                        </a:rPr>
-                        <a:t>Latte art flower - 01.ogv</a:t>
-                      </a:r>
-                      <a:endParaRPr lang="en-US" sz="900" dirty="0">
-                        <a:latin typeface="Microsoft JhengHei" charset="0"/>
-                        <a:ea typeface="Microsoft JhengHei" charset="0"/>
-                        <a:cs typeface="Microsoft JhengHei" charset="0"/>
-                      </a:endParaRPr>
-                    </a:p>
-                  </a:txBody>
-                  <a:tcPr marL="101600" marR="101600" marT="50800" marB="50800" anchor="ctr">
-                    <a:lnL w="0" cap="flat" cmpd="sng" algn="ctr">
-                      <a:noFill/>
-                    </a:lnL>
-                    <a:lnR w="0" cap="flat" cmpd="sng" algn="ctr">
-                      <a:noFill/>
-                    </a:lnR>
-                    <a:lnT w="0" cap="flat" cmpd="sng" algn="ctr">
-                      <a:noFill/>
-                    </a:lnT>
-                    <a:lnB w="6350" cap="flat" cmpd="sng" algn="ctr">
-                      <a:solidFill>
-                        <a:srgbClr val="E5E7EB"/>
-                      </a:solidFill>
-                      <a:prstDash val="solid"/>
-                      <a:round/>
-                      <a:headEnd type="none" w="med" len="med"/>
-                      <a:tailEnd type="none" w="med" len="med"/>
-                    </a:lnB>
-                    <a:solidFill>
-                      <a:srgbClr val="FFFFFF"/>
-                    </a:solidFill>
-                  </a:tcPr>
-                </a:tc>
-                <a:tc>
-                  <a:txBody>
-                    <a:bodyPr/>
-                    <a:lstStyle/>
-                    <a:p>
-                      <a:pPr indent="0" marL="0">
-                        <a:buNone/>
-                      </a:pPr>
-                      <a:r>
-                        <a:rPr lang="en-US" sz="900" dirty="0">
-                          <a:solidFill>
-                            <a:srgbClr val="111118"/>
-                          </a:solidFill>
-                          <a:latin typeface="Microsoft JhengHei" pitchFamily="34" charset="0"/>
-                          <a:ea typeface="Microsoft JhengHei" pitchFamily="34" charset="-122"/>
-                          <a:cs typeface="Microsoft JhengHei" pitchFamily="34" charset="-120"/>
-                        </a:rPr>
-                        <a:t>Anna Frodesiak</a:t>
-                      </a:r>
-                      <a:endParaRPr lang="en-US" sz="900" dirty="0">
-                        <a:latin typeface="Microsoft JhengHei" charset="0"/>
-                        <a:ea typeface="Microsoft JhengHei" charset="0"/>
-                        <a:cs typeface="Microsoft JhengHei" charset="0"/>
-                      </a:endParaRPr>
-                    </a:p>
-                  </a:txBody>
-                  <a:tcPr marL="101600" marR="101600" marT="50800" marB="50800" anchor="ctr">
-                    <a:lnL w="0" cap="flat" cmpd="sng" algn="ctr">
-                      <a:noFill/>
-                    </a:lnL>
-                    <a:lnR w="0" cap="flat" cmpd="sng" algn="ctr">
-                      <a:noFill/>
-                    </a:lnR>
-                    <a:lnT w="0" cap="flat" cmpd="sng" algn="ctr">
-                      <a:noFill/>
-                    </a:lnT>
-                    <a:lnB w="6350" cap="flat" cmpd="sng" algn="ctr">
-                      <a:solidFill>
-                        <a:srgbClr val="E5E7EB"/>
-                      </a:solidFill>
-                      <a:prstDash val="solid"/>
-                      <a:round/>
-                      <a:headEnd type="none" w="med" len="med"/>
-                      <a:tailEnd type="none" w="med" len="med"/>
-                    </a:lnB>
-                    <a:solidFill>
-                      <a:srgbClr val="FFFFFF"/>
-                    </a:solidFill>
-                  </a:tcPr>
-                </a:tc>
-                <a:tc>
-                  <a:txBody>
-                    <a:bodyPr/>
-                    <a:lstStyle/>
-                    <a:p>
-                      <a:pPr indent="0" marL="0">
-                        <a:buNone/>
-                      </a:pPr>
-                      <a:r>
-                        <a:rPr lang="en-US" sz="900" dirty="0">
-                          <a:solidFill>
-                            <a:srgbClr val="111118"/>
-                          </a:solidFill>
-                          <a:latin typeface="Microsoft JhengHei" pitchFamily="34" charset="0"/>
-                          <a:ea typeface="Microsoft JhengHei" pitchFamily="34" charset="-122"/>
-                          <a:cs typeface="Microsoft JhengHei" pitchFamily="34" charset="-120"/>
-                        </a:rPr>
-                        <a:t>CC0</a:t>
-                      </a:r>
-                      <a:endParaRPr lang="en-US" sz="900" dirty="0">
-                        <a:latin typeface="Microsoft JhengHei" charset="0"/>
-                        <a:ea typeface="Microsoft JhengHei" charset="0"/>
-                        <a:cs typeface="Microsoft JhengHei" charset="0"/>
-                      </a:endParaRPr>
-                    </a:p>
-                  </a:txBody>
-                  <a:tcPr marL="101600" marR="101600" marT="50800" marB="50800" anchor="ctr">
-                    <a:lnL w="0" cap="flat" cmpd="sng" algn="ctr">
-                      <a:noFill/>
-                    </a:lnL>
-                    <a:lnR w="0" cap="flat" cmpd="sng" algn="ctr">
-                      <a:noFill/>
-                    </a:lnR>
-                    <a:lnT w="0" cap="flat" cmpd="sng" algn="ctr">
-                      <a:noFill/>
-                    </a:lnT>
-                    <a:lnB w="6350" cap="flat" cmpd="sng" algn="ctr">
-                      <a:solidFill>
-                        <a:srgbClr val="E5E7EB"/>
-                      </a:solidFill>
-                      <a:prstDash val="solid"/>
-                      <a:round/>
-                      <a:headEnd type="none" w="med" len="med"/>
-                      <a:tailEnd type="none" w="med" len="med"/>
-                    </a:lnB>
-                    <a:solidFill>
-                      <a:srgbClr val="FFFFFF"/>
-                    </a:solidFill>
-                  </a:tcPr>
-                </a:tc>
-              </a:tr>
-              <a:tr h="329184">
-                <a:tc>
-                  <a:txBody>
-                    <a:bodyPr/>
-                    <a:lstStyle/>
-                    <a:p>
-                      <a:pPr indent="0" marL="0">
-                        <a:buNone/>
-                      </a:pPr>
-                      <a:r>
-                        <a:rPr lang="en-US" sz="900" dirty="0">
-                          <a:solidFill>
-                            <a:srgbClr val="111118"/>
-                          </a:solidFill>
-                          <a:latin typeface="Microsoft JhengHei" pitchFamily="34" charset="0"/>
-                          <a:ea typeface="Microsoft JhengHei" pitchFamily="34" charset="-122"/>
-                          <a:cs typeface="Microsoft JhengHei" pitchFamily="34" charset="-120"/>
-                        </a:rPr>
-                        <a:t>027</a:t>
-                      </a:r>
-                      <a:endParaRPr lang="en-US" sz="900" dirty="0">
-                        <a:latin typeface="Microsoft JhengHei" charset="0"/>
-                        <a:ea typeface="Microsoft JhengHei" charset="0"/>
-                        <a:cs typeface="Microsoft JhengHei" charset="0"/>
-                      </a:endParaRPr>
-                    </a:p>
-                  </a:txBody>
-                  <a:tcPr marL="101600" marR="101600" marT="50800" marB="50800" anchor="ctr">
-                    <a:lnL w="0" cap="flat" cmpd="sng" algn="ctr">
-                      <a:noFill/>
-                    </a:lnL>
-                    <a:lnR w="0" cap="flat" cmpd="sng" algn="ctr">
-                      <a:noFill/>
-                    </a:lnR>
-                    <a:lnT w="0" cap="flat" cmpd="sng" algn="ctr">
-                      <a:noFill/>
-                    </a:lnT>
-                    <a:lnB w="6350" cap="flat" cmpd="sng" algn="ctr">
-                      <a:solidFill>
-                        <a:srgbClr val="E5E7EB"/>
-                      </a:solidFill>
-                      <a:prstDash val="solid"/>
-                      <a:round/>
-                      <a:headEnd type="none" w="med" len="med"/>
-                      <a:tailEnd type="none" w="med" len="med"/>
-                    </a:lnB>
-                    <a:solidFill>
-                      <a:srgbClr val="FFFFFF"/>
-                    </a:solidFill>
-                  </a:tcPr>
-                </a:tc>
-                <a:tc>
-                  <a:txBody>
-                    <a:bodyPr/>
-                    <a:lstStyle/>
-                    <a:p>
-                      <a:pPr indent="0" marL="0">
-                        <a:buNone/>
-                      </a:pPr>
-                      <a:r>
-                        <a:rPr lang="en-US" sz="900" dirty="0">
-                          <a:solidFill>
-                            <a:srgbClr val="111118"/>
-                          </a:solidFill>
-                          <a:latin typeface="Microsoft JhengHei" pitchFamily="34" charset="0"/>
-                          <a:ea typeface="Microsoft JhengHei" pitchFamily="34" charset="-122"/>
-                          <a:cs typeface="Microsoft JhengHei" pitchFamily="34" charset="-120"/>
-                        </a:rPr>
-                        <a:t>Latte art leaf - 01.ogv</a:t>
-                      </a:r>
-                      <a:endParaRPr lang="en-US" sz="900" dirty="0">
-                        <a:latin typeface="Microsoft JhengHei" charset="0"/>
-                        <a:ea typeface="Microsoft JhengHei" charset="0"/>
-                        <a:cs typeface="Microsoft JhengHei" charset="0"/>
-                      </a:endParaRPr>
-                    </a:p>
-                  </a:txBody>
-                  <a:tcPr marL="101600" marR="101600" marT="50800" marB="50800" anchor="ctr">
-                    <a:lnL w="0" cap="flat" cmpd="sng" algn="ctr">
-                      <a:noFill/>
-                    </a:lnL>
-                    <a:lnR w="0" cap="flat" cmpd="sng" algn="ctr">
-                      <a:noFill/>
-                    </a:lnR>
-                    <a:lnT w="0" cap="flat" cmpd="sng" algn="ctr">
-                      <a:noFill/>
-                    </a:lnT>
-                    <a:lnB w="6350" cap="flat" cmpd="sng" algn="ctr">
-                      <a:solidFill>
-                        <a:srgbClr val="E5E7EB"/>
-                      </a:solidFill>
-                      <a:prstDash val="solid"/>
-                      <a:round/>
-                      <a:headEnd type="none" w="med" len="med"/>
-                      <a:tailEnd type="none" w="med" len="med"/>
-                    </a:lnB>
-                    <a:solidFill>
-                      <a:srgbClr val="FFFFFF"/>
-                    </a:solidFill>
-                  </a:tcPr>
-                </a:tc>
-                <a:tc>
-                  <a:txBody>
-                    <a:bodyPr/>
-                    <a:lstStyle/>
-                    <a:p>
-                      <a:pPr indent="0" marL="0">
-                        <a:buNone/>
-                      </a:pPr>
-                      <a:r>
-                        <a:rPr lang="en-US" sz="900" dirty="0">
-                          <a:solidFill>
-                            <a:srgbClr val="111118"/>
-                          </a:solidFill>
-                          <a:latin typeface="Microsoft JhengHei" pitchFamily="34" charset="0"/>
-                          <a:ea typeface="Microsoft JhengHei" pitchFamily="34" charset="-122"/>
-                          <a:cs typeface="Microsoft JhengHei" pitchFamily="34" charset="-120"/>
-                        </a:rPr>
-                        <a:t>Anna Frodesiak</a:t>
-                      </a:r>
-                      <a:endParaRPr lang="en-US" sz="900" dirty="0">
-                        <a:latin typeface="Microsoft JhengHei" charset="0"/>
-                        <a:ea typeface="Microsoft JhengHei" charset="0"/>
-                        <a:cs typeface="Microsoft JhengHei" charset="0"/>
-                      </a:endParaRPr>
-                    </a:p>
-                  </a:txBody>
-                  <a:tcPr marL="101600" marR="101600" marT="50800" marB="50800" anchor="ctr">
-                    <a:lnL w="0" cap="flat" cmpd="sng" algn="ctr">
-                      <a:noFill/>
-                    </a:lnL>
-                    <a:lnR w="0" cap="flat" cmpd="sng" algn="ctr">
-                      <a:noFill/>
-                    </a:lnR>
-                    <a:lnT w="0" cap="flat" cmpd="sng" algn="ctr">
-                      <a:noFill/>
-                    </a:lnT>
-                    <a:lnB w="6350" cap="flat" cmpd="sng" algn="ctr">
-                      <a:solidFill>
-                        <a:srgbClr val="E5E7EB"/>
-                      </a:solidFill>
-                      <a:prstDash val="solid"/>
-                      <a:round/>
-                      <a:headEnd type="none" w="med" len="med"/>
-                      <a:tailEnd type="none" w="med" len="med"/>
-                    </a:lnB>
-                    <a:solidFill>
-                      <a:srgbClr val="FFFFFF"/>
-                    </a:solidFill>
-                  </a:tcPr>
-                </a:tc>
-                <a:tc>
-                  <a:txBody>
-                    <a:bodyPr/>
-                    <a:lstStyle/>
-                    <a:p>
-                      <a:pPr indent="0" marL="0">
-                        <a:buNone/>
-                      </a:pPr>
-                      <a:r>
-                        <a:rPr lang="en-US" sz="900" dirty="0">
-                          <a:solidFill>
-                            <a:srgbClr val="111118"/>
-                          </a:solidFill>
-                          <a:latin typeface="Microsoft JhengHei" pitchFamily="34" charset="0"/>
-                          <a:ea typeface="Microsoft JhengHei" pitchFamily="34" charset="-122"/>
-                          <a:cs typeface="Microsoft JhengHei" pitchFamily="34" charset="-120"/>
-                        </a:rPr>
-                        <a:t>CC0</a:t>
-                      </a:r>
-                      <a:endParaRPr lang="en-US" sz="900" dirty="0">
-                        <a:latin typeface="Microsoft JhengHei" charset="0"/>
-                        <a:ea typeface="Microsoft JhengHei" charset="0"/>
-                        <a:cs typeface="Microsoft JhengHei" charset="0"/>
-                      </a:endParaRPr>
-                    </a:p>
-                  </a:txBody>
-                  <a:tcPr marL="101600" marR="101600" marT="50800" marB="50800" anchor="ctr">
-                    <a:lnL w="0" cap="flat" cmpd="sng" algn="ctr">
-                      <a:noFill/>
-                    </a:lnL>
-                    <a:lnR w="0" cap="flat" cmpd="sng" algn="ctr">
-                      <a:noFill/>
-                    </a:lnR>
-                    <a:lnT w="0" cap="flat" cmpd="sng" algn="ctr">
-                      <a:noFill/>
-                    </a:lnT>
-                    <a:lnB w="6350" cap="flat" cmpd="sng" algn="ctr">
-                      <a:solidFill>
-                        <a:srgbClr val="E5E7EB"/>
-                      </a:solidFill>
-                      <a:prstDash val="solid"/>
-                      <a:round/>
-                      <a:headEnd type="none" w="med" len="med"/>
-                      <a:tailEnd type="none" w="med" len="med"/>
-                    </a:lnB>
-                    <a:solidFill>
-                      <a:srgbClr val="FFFFFF"/>
-                    </a:solidFill>
-                  </a:tcPr>
-                </a:tc>
-              </a:tr>
-              <a:tr h="329184">
-                <a:tc>
-                  <a:txBody>
-                    <a:bodyPr/>
-                    <a:lstStyle/>
-                    <a:p>
-                      <a:pPr indent="0" marL="0">
-                        <a:buNone/>
-                      </a:pPr>
-                      <a:r>
-                        <a:rPr lang="en-US" sz="900" dirty="0">
-                          <a:solidFill>
-                            <a:srgbClr val="111118"/>
-                          </a:solidFill>
-                          <a:latin typeface="Microsoft JhengHei" pitchFamily="34" charset="0"/>
-                          <a:ea typeface="Microsoft JhengHei" pitchFamily="34" charset="-122"/>
-                          <a:cs typeface="Microsoft JhengHei" pitchFamily="34" charset="-120"/>
-                        </a:rPr>
-                        <a:t>028</a:t>
-                      </a:r>
-                      <a:endParaRPr lang="en-US" sz="900" dirty="0">
-                        <a:latin typeface="Microsoft JhengHei" charset="0"/>
-                        <a:ea typeface="Microsoft JhengHei" charset="0"/>
-                        <a:cs typeface="Microsoft JhengHei" charset="0"/>
-                      </a:endParaRPr>
-                    </a:p>
-                  </a:txBody>
-                  <a:tcPr marL="101600" marR="101600" marT="50800" marB="50800" anchor="ctr">
-                    <a:lnL w="0" cap="flat" cmpd="sng" algn="ctr">
-                      <a:noFill/>
-                    </a:lnL>
-                    <a:lnR w="0" cap="flat" cmpd="sng" algn="ctr">
-                      <a:noFill/>
-                    </a:lnR>
-                    <a:lnT w="0" cap="flat" cmpd="sng" algn="ctr">
-                      <a:noFill/>
-                    </a:lnT>
-                    <a:lnB w="6350" cap="flat" cmpd="sng" algn="ctr">
-                      <a:solidFill>
-                        <a:srgbClr val="E5E7EB"/>
-                      </a:solidFill>
-                      <a:prstDash val="solid"/>
-                      <a:round/>
-                      <a:headEnd type="none" w="med" len="med"/>
-                      <a:tailEnd type="none" w="med" len="med"/>
-                    </a:lnB>
-                    <a:solidFill>
-                      <a:srgbClr val="FFFFFF"/>
-                    </a:solidFill>
-                  </a:tcPr>
-                </a:tc>
-                <a:tc>
-                  <a:txBody>
-                    <a:bodyPr/>
-                    <a:lstStyle/>
-                    <a:p>
-                      <a:pPr indent="0" marL="0">
-                        <a:buNone/>
-                      </a:pPr>
-                      <a:r>
-                        <a:rPr lang="en-US" sz="900" dirty="0">
-                          <a:solidFill>
-                            <a:srgbClr val="111118"/>
-                          </a:solidFill>
-                          <a:latin typeface="Microsoft JhengHei" pitchFamily="34" charset="0"/>
-                          <a:ea typeface="Microsoft JhengHei" pitchFamily="34" charset="-122"/>
-                          <a:cs typeface="Microsoft JhengHei" pitchFamily="34" charset="-120"/>
-                        </a:rPr>
-                        <a:t>Nespresso machine.ogv</a:t>
-                      </a:r>
-                      <a:endParaRPr lang="en-US" sz="900" dirty="0">
-                        <a:latin typeface="Microsoft JhengHei" charset="0"/>
-                        <a:ea typeface="Microsoft JhengHei" charset="0"/>
-                        <a:cs typeface="Microsoft JhengHei" charset="0"/>
-                      </a:endParaRPr>
-                    </a:p>
-                  </a:txBody>
-                  <a:tcPr marL="101600" marR="101600" marT="50800" marB="50800" anchor="ctr">
-                    <a:lnL w="0" cap="flat" cmpd="sng" algn="ctr">
-                      <a:noFill/>
-                    </a:lnL>
-                    <a:lnR w="0" cap="flat" cmpd="sng" algn="ctr">
-                      <a:noFill/>
-                    </a:lnR>
-                    <a:lnT w="0" cap="flat" cmpd="sng" algn="ctr">
-                      <a:noFill/>
-                    </a:lnT>
-                    <a:lnB w="6350" cap="flat" cmpd="sng" algn="ctr">
-                      <a:solidFill>
-                        <a:srgbClr val="E5E7EB"/>
-                      </a:solidFill>
-                      <a:prstDash val="solid"/>
-                      <a:round/>
-                      <a:headEnd type="none" w="med" len="med"/>
-                      <a:tailEnd type="none" w="med" len="med"/>
-                    </a:lnB>
-                    <a:solidFill>
-                      <a:srgbClr val="FFFFFF"/>
-                    </a:solidFill>
-                  </a:tcPr>
-                </a:tc>
-                <a:tc>
-                  <a:txBody>
-                    <a:bodyPr/>
-                    <a:lstStyle/>
-                    <a:p>
-                      <a:pPr indent="0" marL="0">
-                        <a:buNone/>
-                      </a:pPr>
-                      <a:r>
-                        <a:rPr lang="en-US" sz="900" dirty="0">
-                          <a:solidFill>
-                            <a:srgbClr val="111118"/>
-                          </a:solidFill>
-                          <a:latin typeface="Microsoft JhengHei" pitchFamily="34" charset="0"/>
-                          <a:ea typeface="Microsoft JhengHei" pitchFamily="34" charset="-122"/>
-                          <a:cs typeface="Microsoft JhengHei" pitchFamily="34" charset="-120"/>
-                        </a:rPr>
-                        <a:t>Kjetil Ree</a:t>
-                      </a:r>
-                      <a:endParaRPr lang="en-US" sz="900" dirty="0">
-                        <a:latin typeface="Microsoft JhengHei" charset="0"/>
-                        <a:ea typeface="Microsoft JhengHei" charset="0"/>
-                        <a:cs typeface="Microsoft JhengHei" charset="0"/>
-                      </a:endParaRPr>
-                    </a:p>
-                  </a:txBody>
-                  <a:tcPr marL="101600" marR="101600" marT="50800" marB="50800" anchor="ctr">
-                    <a:lnL w="0" cap="flat" cmpd="sng" algn="ctr">
-                      <a:noFill/>
-                    </a:lnL>
-                    <a:lnR w="0" cap="flat" cmpd="sng" algn="ctr">
-                      <a:noFill/>
-                    </a:lnR>
-                    <a:lnT w="0" cap="flat" cmpd="sng" algn="ctr">
-                      <a:noFill/>
-                    </a:lnT>
-                    <a:lnB w="6350" cap="flat" cmpd="sng" algn="ctr">
-                      <a:solidFill>
-                        <a:srgbClr val="E5E7EB"/>
-                      </a:solidFill>
-                      <a:prstDash val="solid"/>
-                      <a:round/>
-                      <a:headEnd type="none" w="med" len="med"/>
-                      <a:tailEnd type="none" w="med" len="med"/>
-                    </a:lnB>
-                    <a:solidFill>
-                      <a:srgbClr val="FFFFFF"/>
-                    </a:solidFill>
-                  </a:tcPr>
-                </a:tc>
-                <a:tc>
-                  <a:txBody>
-                    <a:bodyPr/>
-                    <a:lstStyle/>
-                    <a:p>
-                      <a:pPr indent="0" marL="0">
-                        <a:buNone/>
-                      </a:pPr>
-                      <a:r>
-                        <a:rPr lang="en-US" sz="900" dirty="0">
-                          <a:solidFill>
-                            <a:srgbClr val="111118"/>
-                          </a:solidFill>
-                          <a:latin typeface="Microsoft JhengHei" pitchFamily="34" charset="0"/>
-                          <a:ea typeface="Microsoft JhengHei" pitchFamily="34" charset="-122"/>
-                          <a:cs typeface="Microsoft JhengHei" pitchFamily="34" charset="-120"/>
-                        </a:rPr>
-                        <a:t>CC0</a:t>
-                      </a:r>
-                      <a:endParaRPr lang="en-US" sz="900" dirty="0">
-                        <a:latin typeface="Microsoft JhengHei" charset="0"/>
-                        <a:ea typeface="Microsoft JhengHei" charset="0"/>
-                        <a:cs typeface="Microsoft JhengHei" charset="0"/>
-                      </a:endParaRPr>
-                    </a:p>
-                  </a:txBody>
-                  <a:tcPr marL="101600" marR="101600" marT="50800" marB="50800" anchor="ctr">
-                    <a:lnL w="0" cap="flat" cmpd="sng" algn="ctr">
-                      <a:noFill/>
-                    </a:lnL>
-                    <a:lnR w="0" cap="flat" cmpd="sng" algn="ctr">
-                      <a:noFill/>
-                    </a:lnR>
-                    <a:lnT w="0" cap="flat" cmpd="sng" algn="ctr">
-                      <a:noFill/>
-                    </a:lnT>
-                    <a:lnB w="6350" cap="flat" cmpd="sng" algn="ctr">
-                      <a:solidFill>
-                        <a:srgbClr val="E5E7EB"/>
-                      </a:solidFill>
-                      <a:prstDash val="solid"/>
-                      <a:round/>
-                      <a:headEnd type="none" w="med" len="med"/>
-                      <a:tailEnd type="none" w="med" len="med"/>
-                    </a:lnB>
-                    <a:solidFill>
-                      <a:srgbClr val="FFFFFF"/>
-                    </a:solidFill>
-                  </a:tcPr>
-                </a:tc>
-              </a:tr>
-              <a:tr h="329184">
-                <a:tc>
-                  <a:txBody>
-                    <a:bodyPr/>
-                    <a:lstStyle/>
-                    <a:p>
-                      <a:pPr indent="0" marL="0">
-                        <a:buNone/>
-                      </a:pPr>
-                      <a:r>
-                        <a:rPr lang="en-US" sz="900" dirty="0">
-                          <a:solidFill>
-                            <a:srgbClr val="111118"/>
-                          </a:solidFill>
-                          <a:latin typeface="Microsoft JhengHei" pitchFamily="34" charset="0"/>
-                          <a:ea typeface="Microsoft JhengHei" pitchFamily="34" charset="-122"/>
-                          <a:cs typeface="Microsoft JhengHei" pitchFamily="34" charset="-120"/>
-                        </a:rPr>
-                        <a:t>029</a:t>
-                      </a:r>
-                      <a:endParaRPr lang="en-US" sz="900" dirty="0">
-                        <a:latin typeface="Microsoft JhengHei" charset="0"/>
-                        <a:ea typeface="Microsoft JhengHei" charset="0"/>
-                        <a:cs typeface="Microsoft JhengHei" charset="0"/>
-                      </a:endParaRPr>
-                    </a:p>
-                  </a:txBody>
-                  <a:tcPr marL="101600" marR="101600" marT="50800" marB="50800" anchor="ctr">
-                    <a:lnL w="0" cap="flat" cmpd="sng" algn="ctr">
-                      <a:noFill/>
-                    </a:lnL>
-                    <a:lnR w="0" cap="flat" cmpd="sng" algn="ctr">
-                      <a:noFill/>
-                    </a:lnR>
-                    <a:lnT w="0" cap="flat" cmpd="sng" algn="ctr">
-                      <a:noFill/>
-                    </a:lnT>
-                    <a:lnB w="6350" cap="flat" cmpd="sng" algn="ctr">
-                      <a:solidFill>
-                        <a:srgbClr val="E5E7EB"/>
-                      </a:solidFill>
-                      <a:prstDash val="solid"/>
-                      <a:round/>
-                      <a:headEnd type="none" w="med" len="med"/>
-                      <a:tailEnd type="none" w="med" len="med"/>
-                    </a:lnB>
-                    <a:solidFill>
-                      <a:srgbClr val="FFFFFF"/>
-                    </a:solidFill>
-                  </a:tcPr>
-                </a:tc>
-                <a:tc>
-                  <a:txBody>
-                    <a:bodyPr/>
-                    <a:lstStyle/>
-                    <a:p>
-                      <a:pPr indent="0" marL="0">
-                        <a:buNone/>
-                      </a:pPr>
-                      <a:r>
-                        <a:rPr lang="en-US" sz="900" dirty="0">
-                          <a:solidFill>
-                            <a:srgbClr val="111118"/>
-                          </a:solidFill>
-                          <a:latin typeface="Microsoft JhengHei" pitchFamily="34" charset="0"/>
-                          <a:ea typeface="Microsoft JhengHei" pitchFamily="34" charset="-122"/>
-                          <a:cs typeface="Microsoft JhengHei" pitchFamily="34" charset="-120"/>
-                        </a:rPr>
-                        <a:t>A man pours Arabic coffee.ogv</a:t>
-                      </a:r>
-                      <a:endParaRPr lang="en-US" sz="900" dirty="0">
-                        <a:latin typeface="Microsoft JhengHei" charset="0"/>
-                        <a:ea typeface="Microsoft JhengHei" charset="0"/>
-                        <a:cs typeface="Microsoft JhengHei" charset="0"/>
-                      </a:endParaRPr>
-                    </a:p>
-                  </a:txBody>
-                  <a:tcPr marL="101600" marR="101600" marT="50800" marB="50800" anchor="ctr">
-                    <a:lnL w="0" cap="flat" cmpd="sng" algn="ctr">
-                      <a:noFill/>
-                    </a:lnL>
-                    <a:lnR w="0" cap="flat" cmpd="sng" algn="ctr">
-                      <a:noFill/>
-                    </a:lnR>
-                    <a:lnT w="0" cap="flat" cmpd="sng" algn="ctr">
-                      <a:noFill/>
-                    </a:lnT>
-                    <a:lnB w="6350" cap="flat" cmpd="sng" algn="ctr">
-                      <a:solidFill>
-                        <a:srgbClr val="E5E7EB"/>
-                      </a:solidFill>
-                      <a:prstDash val="solid"/>
-                      <a:round/>
-                      <a:headEnd type="none" w="med" len="med"/>
-                      <a:tailEnd type="none" w="med" len="med"/>
-                    </a:lnB>
-                    <a:solidFill>
-                      <a:srgbClr val="FFFFFF"/>
-                    </a:solidFill>
-                  </a:tcPr>
-                </a:tc>
-                <a:tc>
-                  <a:txBody>
-                    <a:bodyPr/>
-                    <a:lstStyle/>
-                    <a:p>
-                      <a:pPr indent="0" marL="0">
-                        <a:buNone/>
-                      </a:pPr>
-                      <a:r>
-                        <a:rPr lang="en-US" sz="900" dirty="0">
-                          <a:solidFill>
-                            <a:srgbClr val="111118"/>
-                          </a:solidFill>
-                          <a:latin typeface="Microsoft JhengHei" pitchFamily="34" charset="0"/>
-                          <a:ea typeface="Microsoft JhengHei" pitchFamily="34" charset="-122"/>
-                          <a:cs typeface="Microsoft JhengHei" pitchFamily="34" charset="-120"/>
-                        </a:rPr>
-                        <a:t>Sarah Canbel</a:t>
-                      </a:r>
-                      <a:endParaRPr lang="en-US" sz="900" dirty="0">
-                        <a:latin typeface="Microsoft JhengHei" charset="0"/>
-                        <a:ea typeface="Microsoft JhengHei" charset="0"/>
-                        <a:cs typeface="Microsoft JhengHei" charset="0"/>
-                      </a:endParaRPr>
-                    </a:p>
-                  </a:txBody>
-                  <a:tcPr marL="101600" marR="101600" marT="50800" marB="50800" anchor="ctr">
-                    <a:lnL w="0" cap="flat" cmpd="sng" algn="ctr">
-                      <a:noFill/>
-                    </a:lnL>
-                    <a:lnR w="0" cap="flat" cmpd="sng" algn="ctr">
-                      <a:noFill/>
-                    </a:lnR>
-                    <a:lnT w="0" cap="flat" cmpd="sng" algn="ctr">
-                      <a:noFill/>
-                    </a:lnT>
-                    <a:lnB w="6350" cap="flat" cmpd="sng" algn="ctr">
-                      <a:solidFill>
-                        <a:srgbClr val="E5E7EB"/>
-                      </a:solidFill>
-                      <a:prstDash val="solid"/>
-                      <a:round/>
-                      <a:headEnd type="none" w="med" len="med"/>
-                      <a:tailEnd type="none" w="med" len="med"/>
-                    </a:lnB>
-                    <a:solidFill>
-                      <a:srgbClr val="FFFFFF"/>
-                    </a:solidFill>
-                  </a:tcPr>
-                </a:tc>
-                <a:tc>
-                  <a:txBody>
-                    <a:bodyPr/>
-                    <a:lstStyle/>
-                    <a:p>
-                      <a:pPr indent="0" marL="0">
-                        <a:buNone/>
-                      </a:pPr>
-                      <a:r>
-                        <a:rPr lang="en-US" sz="900" dirty="0">
-                          <a:solidFill>
-                            <a:srgbClr val="111118"/>
-                          </a:solidFill>
-                          <a:latin typeface="Microsoft JhengHei" pitchFamily="34" charset="0"/>
-                          <a:ea typeface="Microsoft JhengHei" pitchFamily="34" charset="-122"/>
-                          <a:cs typeface="Microsoft JhengHei" pitchFamily="34" charset="-120"/>
-                        </a:rPr>
-                        <a:t>CC BY-SA 4.0</a:t>
+                        <a:t>CC BY 2.0</a:t>
                       </a:r>
                       <a:endParaRPr lang="en-US" sz="900" dirty="0">
                         <a:latin typeface="Microsoft JhengHei" charset="0"/>
@@ -23292,7 +21802,7 @@
                   <a:srgbClr val="111118"/>
                 </a:solidFill>
               </a:rPr>
-              <a:t>Footage credits (3 of 3)</a:t>
+              <a:t>Footage credits (3 of 4)</a:t>
             </a:r>
             <a:endParaRPr lang="en-US" sz="2800" dirty="0"/>
           </a:p>
@@ -23394,11 +21904,11 @@
               <a:tblPr/>
               <a:tblGrid>
                 <a:gridCol w="539572"/>
-                <a:gridCol w="5755430"/>
-                <a:gridCol w="2967644"/>
+                <a:gridCol w="5935287"/>
+                <a:gridCol w="2787786"/>
                 <a:gridCol w="1618715"/>
               </a:tblGrid>
-              <a:tr h="329184">
+              <a:tr h="358140">
                 <a:tc>
                   <a:txBody>
                     <a:bodyPr/>
@@ -23600,7 +22110,7 @@
                   </a:tcPr>
                 </a:tc>
               </a:tr>
-              <a:tr h="329184">
+              <a:tr h="358140">
                 <a:tc>
                   <a:txBody>
                     <a:bodyPr/>
@@ -23618,7 +22128,7 @@
                           <a:ea typeface="Microsoft JhengHei" pitchFamily="34" charset="-122"/>
                           <a:cs typeface="Microsoft JhengHei" pitchFamily="34" charset="-120"/>
                         </a:rPr>
-                        <a:t>030</a:t>
+                        <a:t>022</a:t>
                       </a:r>
                       <a:endParaRPr lang="en-US" sz="900" dirty="0">
                         <a:latin typeface="Microsoft JhengHei" charset="0"/>
@@ -23668,7 +22178,7 @@
                           <a:ea typeface="Microsoft JhengHei" pitchFamily="34" charset="-122"/>
                           <a:cs typeface="Microsoft JhengHei" pitchFamily="34" charset="-120"/>
                         </a:rPr>
-                        <a:t>Servido tradicional de café etíope.webm</a:t>
+                        <a:t>Der perfekte Espresso aus dem Siebträger.ogv</a:t>
                       </a:r>
                       <a:endParaRPr lang="en-US" sz="900" dirty="0">
                         <a:latin typeface="Microsoft JhengHei" charset="0"/>
@@ -23718,7 +22228,7 @@
                           <a:ea typeface="Microsoft JhengHei" pitchFamily="34" charset="-122"/>
                           <a:cs typeface="Microsoft JhengHei" pitchFamily="34" charset="-120"/>
                         </a:rPr>
-                        <a:t>ProtoplasmaKid</a:t>
+                        <a:t>Max Duchardt, Katrin Engel</a:t>
                       </a:r>
                       <a:endParaRPr lang="en-US" sz="900" dirty="0">
                         <a:latin typeface="Microsoft JhengHei" charset="0"/>
@@ -23768,7 +22278,7 @@
                           <a:ea typeface="Microsoft JhengHei" pitchFamily="34" charset="-122"/>
                           <a:cs typeface="Microsoft JhengHei" pitchFamily="34" charset="-120"/>
                         </a:rPr>
-                        <a:t>CC BY 4.0</a:t>
+                        <a:t>CC BY 3.0</a:t>
                       </a:r>
                       <a:endParaRPr lang="en-US" sz="900" dirty="0">
                         <a:latin typeface="Microsoft JhengHei" charset="0"/>
@@ -23802,7 +22312,7 @@
                   </a:tcPr>
                 </a:tc>
               </a:tr>
-              <a:tr h="329184">
+              <a:tr h="358140">
                 <a:tc>
                   <a:txBody>
                     <a:bodyPr/>
@@ -23820,7 +22330,7 @@
                           <a:ea typeface="Microsoft JhengHei" pitchFamily="34" charset="-122"/>
                           <a:cs typeface="Microsoft JhengHei" pitchFamily="34" charset="-120"/>
                         </a:rPr>
-                        <a:t>031</a:t>
+                        <a:t>023</a:t>
                       </a:r>
                       <a:endParaRPr lang="en-US" sz="900" dirty="0">
                         <a:latin typeface="Microsoft JhengHei" charset="0"/>
@@ -23870,7 +22380,7 @@
                           <a:ea typeface="Microsoft JhengHei" pitchFamily="34" charset="-122"/>
                           <a:cs typeface="Microsoft JhengHei" pitchFamily="34" charset="-120"/>
                         </a:rPr>
-                        <a:t>How to brew Coffee using the laws of physics - with the Hari</a:t>
+                        <a:t>Pour Over.ogv</a:t>
                       </a:r>
                       <a:endParaRPr lang="en-US" sz="900" dirty="0">
                         <a:latin typeface="Microsoft JhengHei" charset="0"/>
@@ -23920,7 +22430,7 @@
                           <a:ea typeface="Microsoft JhengHei" pitchFamily="34" charset="-122"/>
                           <a:cs typeface="Microsoft JhengHei" pitchFamily="34" charset="-120"/>
                         </a:rPr>
-                        <a:t>Coffee Circle</a:t>
+                        <a:t>Lev Lazinskiy</a:t>
                       </a:r>
                       <a:endParaRPr lang="en-US" sz="900" dirty="0">
                         <a:latin typeface="Microsoft JhengHei" charset="0"/>
@@ -23970,7 +22480,7 @@
                           <a:ea typeface="Microsoft JhengHei" pitchFamily="34" charset="-122"/>
                           <a:cs typeface="Microsoft JhengHei" pitchFamily="34" charset="-120"/>
                         </a:rPr>
-                        <a:t>CC BY 3.0</a:t>
+                        <a:t>CC BY-SA 4.0</a:t>
                       </a:r>
                       <a:endParaRPr lang="en-US" sz="900" dirty="0">
                         <a:latin typeface="Microsoft JhengHei" charset="0"/>
@@ -24004,7 +22514,7 @@
                   </a:tcPr>
                 </a:tc>
               </a:tr>
-              <a:tr h="329184">
+              <a:tr h="358140">
                 <a:tc>
                   <a:txBody>
                     <a:bodyPr/>
@@ -24022,7 +22532,7 @@
                           <a:ea typeface="Microsoft JhengHei" pitchFamily="34" charset="-122"/>
                           <a:cs typeface="Microsoft JhengHei" pitchFamily="34" charset="-120"/>
                         </a:rPr>
-                        <a:t>032</a:t>
+                        <a:t>024</a:t>
                       </a:r>
                       <a:endParaRPr lang="en-US" sz="900" dirty="0">
                         <a:latin typeface="Microsoft JhengHei" charset="0"/>
@@ -24072,7 +22582,7 @@
                           <a:ea typeface="Microsoft JhengHei" pitchFamily="34" charset="-122"/>
                           <a:cs typeface="Microsoft JhengHei" pitchFamily="34" charset="-120"/>
                         </a:rPr>
-                        <a:t>Sugar falling into coffee.webm</a:t>
+                        <a:t>Use of a coffee press.ogv</a:t>
                       </a:r>
                       <a:endParaRPr lang="en-US" sz="900" dirty="0">
                         <a:latin typeface="Microsoft JhengHei" charset="0"/>
@@ -24122,7 +22632,7 @@
                           <a:ea typeface="Microsoft JhengHei" pitchFamily="34" charset="-122"/>
                           <a:cs typeface="Microsoft JhengHei" pitchFamily="34" charset="-120"/>
                         </a:rPr>
-                        <a:t>Anselm Schüler</a:t>
+                        <a:t>Daniel Case</a:t>
                       </a:r>
                       <a:endParaRPr lang="en-US" sz="900" dirty="0">
                         <a:latin typeface="Microsoft JhengHei" charset="0"/>
@@ -24172,7 +22682,7 @@
                           <a:ea typeface="Microsoft JhengHei" pitchFamily="34" charset="-122"/>
                           <a:cs typeface="Microsoft JhengHei" pitchFamily="34" charset="-120"/>
                         </a:rPr>
-                        <a:t>CC BY-SA 4.0</a:t>
+                        <a:t>CC BY-SA 3.0</a:t>
                       </a:r>
                       <a:endParaRPr lang="en-US" sz="900" dirty="0">
                         <a:latin typeface="Microsoft JhengHei" charset="0"/>
@@ -24206,7 +22716,7 @@
                   </a:tcPr>
                 </a:tc>
               </a:tr>
-              <a:tr h="329184">
+              <a:tr h="358140">
                 <a:tc>
                   <a:txBody>
                     <a:bodyPr/>
@@ -24224,7 +22734,7 @@
                           <a:ea typeface="Microsoft JhengHei" pitchFamily="34" charset="-122"/>
                           <a:cs typeface="Microsoft JhengHei" pitchFamily="34" charset="-120"/>
                         </a:rPr>
-                        <a:t>033</a:t>
+                        <a:t>025</a:t>
                       </a:r>
                       <a:endParaRPr lang="en-US" sz="900" dirty="0">
                         <a:latin typeface="Microsoft JhengHei" charset="0"/>
@@ -24274,7 +22784,7 @@
                           <a:ea typeface="Microsoft JhengHei" pitchFamily="34" charset="-122"/>
                           <a:cs typeface="Microsoft JhengHei" pitchFamily="34" charset="-120"/>
                         </a:rPr>
-                        <a:t>Bosnian coffee with rahat lokum, Kujundziluk and Old Bridge </a:t>
+                        <a:t>Schritt für Schritt - Kaffeezubereitung mit der Chemex.ogv</a:t>
                       </a:r>
                       <a:endParaRPr lang="en-US" sz="900" dirty="0">
                         <a:latin typeface="Microsoft JhengHei" charset="0"/>
@@ -24324,7 +22834,7 @@
                           <a:ea typeface="Microsoft JhengHei" pitchFamily="34" charset="-122"/>
                           <a:cs typeface="Microsoft JhengHei" pitchFamily="34" charset="-120"/>
                         </a:rPr>
-                        <a:t>Minja Klarić</a:t>
+                        <a:t>Max Duchardt, Katrin Engel</a:t>
                       </a:r>
                       <a:endParaRPr lang="en-US" sz="900" dirty="0">
                         <a:latin typeface="Microsoft JhengHei" charset="0"/>
@@ -24374,7 +22884,7 @@
                           <a:ea typeface="Microsoft JhengHei" pitchFamily="34" charset="-122"/>
                           <a:cs typeface="Microsoft JhengHei" pitchFamily="34" charset="-120"/>
                         </a:rPr>
-                        <a:t>CC BY-SA 4.0</a:t>
+                        <a:t>CC BY 3.0</a:t>
                       </a:r>
                       <a:endParaRPr lang="en-US" sz="900" dirty="0">
                         <a:latin typeface="Microsoft JhengHei" charset="0"/>
@@ -24408,7 +22918,7 @@
                   </a:tcPr>
                 </a:tc>
               </a:tr>
-              <a:tr h="329184">
+              <a:tr h="358140">
                 <a:tc>
                   <a:txBody>
                     <a:bodyPr/>
@@ -24426,7 +22936,7 @@
                           <a:ea typeface="Microsoft JhengHei" pitchFamily="34" charset="-122"/>
                           <a:cs typeface="Microsoft JhengHei" pitchFamily="34" charset="-120"/>
                         </a:rPr>
-                        <a:t>034</a:t>
+                        <a:t>026</a:t>
                       </a:r>
                       <a:endParaRPr lang="en-US" sz="900" dirty="0">
                         <a:latin typeface="Microsoft JhengHei" charset="0"/>
@@ -24476,7 +22986,7 @@
                           <a:ea typeface="Microsoft JhengHei" pitchFamily="34" charset="-122"/>
                           <a:cs typeface="Microsoft JhengHei" pitchFamily="34" charset="-120"/>
                         </a:rPr>
-                        <a:t>A cup of Kenyan Coffee.webm</a:t>
+                        <a:t>Latte art flower - 01.ogv</a:t>
                       </a:r>
                       <a:endParaRPr lang="en-US" sz="900" dirty="0">
                         <a:latin typeface="Microsoft JhengHei" charset="0"/>
@@ -24526,7 +23036,7 @@
                           <a:ea typeface="Microsoft JhengHei" pitchFamily="34" charset="-122"/>
                           <a:cs typeface="Microsoft JhengHei" pitchFamily="34" charset="-120"/>
                         </a:rPr>
-                        <a:t>Queen Asali</a:t>
+                        <a:t>Anna Frodesiak</a:t>
                       </a:r>
                       <a:endParaRPr lang="en-US" sz="900" dirty="0">
                         <a:latin typeface="Microsoft JhengHei" charset="0"/>
@@ -24576,7 +23086,7 @@
                           <a:ea typeface="Microsoft JhengHei" pitchFamily="34" charset="-122"/>
                           <a:cs typeface="Microsoft JhengHei" pitchFamily="34" charset="-120"/>
                         </a:rPr>
-                        <a:t>CC BY-SA 4.0</a:t>
+                        <a:t>CC0</a:t>
                       </a:r>
                       <a:endParaRPr lang="en-US" sz="900" dirty="0">
                         <a:latin typeface="Microsoft JhengHei" charset="0"/>
@@ -24610,7 +23120,7 @@
                   </a:tcPr>
                 </a:tc>
               </a:tr>
-              <a:tr h="329184">
+              <a:tr h="358140">
                 <a:tc>
                   <a:txBody>
                     <a:bodyPr/>
@@ -24628,7 +23138,7 @@
                           <a:ea typeface="Microsoft JhengHei" pitchFamily="34" charset="-122"/>
                           <a:cs typeface="Microsoft JhengHei" pitchFamily="34" charset="-120"/>
                         </a:rPr>
-                        <a:t>035</a:t>
+                        <a:t>027</a:t>
                       </a:r>
                       <a:endParaRPr lang="en-US" sz="900" dirty="0">
                         <a:latin typeface="Microsoft JhengHei" charset="0"/>
@@ -24678,7 +23188,7 @@
                           <a:ea typeface="Microsoft JhengHei" pitchFamily="34" charset="-122"/>
                           <a:cs typeface="Microsoft JhengHei" pitchFamily="34" charset="-120"/>
                         </a:rPr>
-                        <a:t>Latte salute.webm</a:t>
+                        <a:t>Latte art leaf - 01.ogv</a:t>
                       </a:r>
                       <a:endParaRPr lang="en-US" sz="900" dirty="0">
                         <a:latin typeface="Microsoft JhengHei" charset="0"/>
@@ -24728,7 +23238,7 @@
                           <a:ea typeface="Microsoft JhengHei" pitchFamily="34" charset="-122"/>
                           <a:cs typeface="Microsoft JhengHei" pitchFamily="34" charset="-120"/>
                         </a:rPr>
-                        <a:t>Unidentified. Released by the White Hous</a:t>
+                        <a:t>Anna Frodesiak</a:t>
                       </a:r>
                       <a:endParaRPr lang="en-US" sz="900" dirty="0">
                         <a:latin typeface="Microsoft JhengHei" charset="0"/>
@@ -24778,7 +23288,7 @@
                           <a:ea typeface="Microsoft JhengHei" pitchFamily="34" charset="-122"/>
                           <a:cs typeface="Microsoft JhengHei" pitchFamily="34" charset="-120"/>
                         </a:rPr>
-                        <a:t>Public domain</a:t>
+                        <a:t>CC0</a:t>
                       </a:r>
                       <a:endParaRPr lang="en-US" sz="900" dirty="0">
                         <a:latin typeface="Microsoft JhengHei" charset="0"/>
@@ -24812,7 +23322,7 @@
                   </a:tcPr>
                 </a:tc>
               </a:tr>
-              <a:tr h="329184">
+              <a:tr h="358140">
                 <a:tc>
                   <a:txBody>
                     <a:bodyPr/>
@@ -24830,7 +23340,7 @@
                           <a:ea typeface="Microsoft JhengHei" pitchFamily="34" charset="-122"/>
                           <a:cs typeface="Microsoft JhengHei" pitchFamily="34" charset="-120"/>
                         </a:rPr>
-                        <a:t>036</a:t>
+                        <a:t>028</a:t>
                       </a:r>
                       <a:endParaRPr lang="en-US" sz="900" dirty="0">
                         <a:latin typeface="Microsoft JhengHei" charset="0"/>
@@ -24880,7 +23390,7 @@
                           <a:ea typeface="Microsoft JhengHei" pitchFamily="34" charset="-122"/>
                           <a:cs typeface="Microsoft JhengHei" pitchFamily="34" charset="-120"/>
                         </a:rPr>
-                        <a:t>Turkish tea 2015.webm</a:t>
+                        <a:t>Nespresso machine.ogv</a:t>
                       </a:r>
                       <a:endParaRPr lang="en-US" sz="900" dirty="0">
                         <a:latin typeface="Microsoft JhengHei" charset="0"/>
@@ -24930,7 +23440,7 @@
                           <a:ea typeface="Microsoft JhengHei" pitchFamily="34" charset="-122"/>
                           <a:cs typeface="Microsoft JhengHei" pitchFamily="34" charset="-120"/>
                         </a:rPr>
-                        <a:t>Klapi</a:t>
+                        <a:t>Kjetil Ree</a:t>
                       </a:r>
                       <a:endParaRPr lang="en-US" sz="900" dirty="0">
                         <a:latin typeface="Microsoft JhengHei" charset="0"/>
@@ -24980,7 +23490,7 @@
                           <a:ea typeface="Microsoft JhengHei" pitchFamily="34" charset="-122"/>
                           <a:cs typeface="Microsoft JhengHei" pitchFamily="34" charset="-120"/>
                         </a:rPr>
-                        <a:t>CC BY-SA 4.0</a:t>
+                        <a:t>CC0</a:t>
                       </a:r>
                       <a:endParaRPr lang="en-US" sz="900" dirty="0">
                         <a:latin typeface="Microsoft JhengHei" charset="0"/>
@@ -25014,7 +23524,7 @@
                   </a:tcPr>
                 </a:tc>
               </a:tr>
-              <a:tr h="329184">
+              <a:tr h="358140">
                 <a:tc>
                   <a:txBody>
                     <a:bodyPr/>
@@ -25032,7 +23542,7 @@
                           <a:ea typeface="Microsoft JhengHei" pitchFamily="34" charset="-122"/>
                           <a:cs typeface="Microsoft JhengHei" pitchFamily="34" charset="-120"/>
                         </a:rPr>
-                        <a:t>037</a:t>
+                        <a:t>029</a:t>
                       </a:r>
                       <a:endParaRPr lang="en-US" sz="900" dirty="0">
                         <a:latin typeface="Microsoft JhengHei" charset="0"/>
@@ -25082,7 +23592,7 @@
                           <a:ea typeface="Microsoft JhengHei" pitchFamily="34" charset="-122"/>
                           <a:cs typeface="Microsoft JhengHei" pitchFamily="34" charset="-120"/>
                         </a:rPr>
-                        <a:t>Jane pouring beer fast.webm</a:t>
+                        <a:t>A man pours Arabic coffee.ogv</a:t>
                       </a:r>
                       <a:endParaRPr lang="en-US" sz="900" dirty="0">
                         <a:latin typeface="Microsoft JhengHei" charset="0"/>
@@ -25132,7 +23642,7 @@
                           <a:ea typeface="Microsoft JhengHei" pitchFamily="34" charset="-122"/>
                           <a:cs typeface="Microsoft JhengHei" pitchFamily="34" charset="-120"/>
                         </a:rPr>
-                        <a:t>Angulidayaaluta</a:t>
+                        <a:t>Sarah Canbel</a:t>
                       </a:r>
                       <a:endParaRPr lang="en-US" sz="900" dirty="0">
                         <a:latin typeface="Microsoft JhengHei" charset="0"/>
@@ -25216,7 +23726,7 @@
                   </a:tcPr>
                 </a:tc>
               </a:tr>
-              <a:tr h="329184">
+              <a:tr h="358140">
                 <a:tc>
                   <a:txBody>
                     <a:bodyPr/>
@@ -25234,7 +23744,7 @@
                           <a:ea typeface="Microsoft JhengHei" pitchFamily="34" charset="-122"/>
                           <a:cs typeface="Microsoft JhengHei" pitchFamily="34" charset="-120"/>
                         </a:rPr>
-                        <a:t>038</a:t>
+                        <a:t>030</a:t>
                       </a:r>
                       <a:endParaRPr lang="en-US" sz="900" dirty="0">
                         <a:latin typeface="Microsoft JhengHei" charset="0"/>
@@ -25284,7 +23794,7 @@
                           <a:ea typeface="Microsoft JhengHei" pitchFamily="34" charset="-122"/>
                           <a:cs typeface="Microsoft JhengHei" pitchFamily="34" charset="-120"/>
                         </a:rPr>
-                        <a:t>Turkovich Family Wines - June 2019 - Stierch 03.ogv</a:t>
+                        <a:t>Servido tradicional de café etíope.webm</a:t>
                       </a:r>
                       <a:endParaRPr lang="en-US" sz="900" dirty="0">
                         <a:latin typeface="Microsoft JhengHei" charset="0"/>
@@ -25334,7 +23844,7 @@
                           <a:ea typeface="Microsoft JhengHei" pitchFamily="34" charset="-122"/>
                           <a:cs typeface="Microsoft JhengHei" pitchFamily="34" charset="-120"/>
                         </a:rPr>
-                        <a:t>Missvain</a:t>
+                        <a:t>ProtoplasmaKid</a:t>
                       </a:r>
                       <a:endParaRPr lang="en-US" sz="900" dirty="0">
                         <a:latin typeface="Microsoft JhengHei" charset="0"/>
@@ -25418,7 +23928,7 @@
                   </a:tcPr>
                 </a:tc>
               </a:tr>
-              <a:tr h="329184">
+              <a:tr h="358140">
                 <a:tc>
                   <a:txBody>
                     <a:bodyPr/>
@@ -25436,7 +23946,7 @@
                           <a:ea typeface="Microsoft JhengHei" pitchFamily="34" charset="-122"/>
                           <a:cs typeface="Microsoft JhengHei" pitchFamily="34" charset="-120"/>
                         </a:rPr>
-                        <a:t>039</a:t>
+                        <a:t>031</a:t>
                       </a:r>
                       <a:endParaRPr lang="en-US" sz="900" dirty="0">
                         <a:latin typeface="Microsoft JhengHei" charset="0"/>
@@ -25486,7 +23996,7 @@
                           <a:ea typeface="Microsoft JhengHei" pitchFamily="34" charset="-122"/>
                           <a:cs typeface="Microsoft JhengHei" pitchFamily="34" charset="-120"/>
                         </a:rPr>
-                        <a:t>Drinking glass symphony.ogv</a:t>
+                        <a:t>How to brew Coffee using the laws of physics - with the Hario Syphon Technica.webm</a:t>
                       </a:r>
                       <a:endParaRPr lang="en-US" sz="900" dirty="0">
                         <a:latin typeface="Microsoft JhengHei" charset="0"/>
@@ -25536,7 +24046,7 @@
                           <a:ea typeface="Microsoft JhengHei" pitchFamily="34" charset="-122"/>
                           <a:cs typeface="Microsoft JhengHei" pitchFamily="34" charset="-120"/>
                         </a:rPr>
-                        <a:t>IMG 4512</a:t>
+                        <a:t>Coffee Circle</a:t>
                       </a:r>
                       <a:endParaRPr lang="en-US" sz="900" dirty="0">
                         <a:latin typeface="Microsoft JhengHei" charset="0"/>
@@ -25586,7 +24096,7 @@
                           <a:ea typeface="Microsoft JhengHei" pitchFamily="34" charset="-122"/>
                           <a:cs typeface="Microsoft JhengHei" pitchFamily="34" charset="-120"/>
                         </a:rPr>
-                        <a:t>CC0</a:t>
+                        <a:t>CC BY 3.0</a:t>
                       </a:r>
                       <a:endParaRPr lang="en-US" sz="900" dirty="0">
                         <a:latin typeface="Microsoft JhengHei" charset="0"/>
@@ -25620,7 +24130,7 @@
                   </a:tcPr>
                 </a:tc>
               </a:tr>
-              <a:tr h="329184">
+              <a:tr h="358140">
                 <a:tc>
                   <a:txBody>
                     <a:bodyPr/>
@@ -25638,7 +24148,7 @@
                           <a:ea typeface="Microsoft JhengHei" pitchFamily="34" charset="-122"/>
                           <a:cs typeface="Microsoft JhengHei" pitchFamily="34" charset="-120"/>
                         </a:rPr>
-                        <a:t>040</a:t>
+                        <a:t>032</a:t>
                       </a:r>
                       <a:endParaRPr lang="en-US" sz="900" dirty="0">
                         <a:latin typeface="Microsoft JhengHei" charset="0"/>
@@ -25688,7 +24198,7 @@
                           <a:ea typeface="Microsoft JhengHei" pitchFamily="34" charset="-122"/>
                           <a:cs typeface="Microsoft JhengHei" pitchFamily="34" charset="-120"/>
                         </a:rPr>
-                        <a:t>Thermochromic mug.webm</a:t>
+                        <a:t>Sugar falling into coffee.webm</a:t>
                       </a:r>
                       <a:endParaRPr lang="en-US" sz="900" dirty="0">
                         <a:latin typeface="Microsoft JhengHei" charset="0"/>
@@ -25738,7 +24248,7 @@
                           <a:ea typeface="Microsoft JhengHei" pitchFamily="34" charset="-122"/>
                           <a:cs typeface="Microsoft JhengHei" pitchFamily="34" charset="-120"/>
                         </a:rPr>
-                        <a:t>The wub</a:t>
+                        <a:t>Anselm Schüler</a:t>
                       </a:r>
                       <a:endParaRPr lang="en-US" sz="900" dirty="0">
                         <a:latin typeface="Microsoft JhengHei" charset="0"/>
@@ -25789,612 +24299,6 @@
                           <a:cs typeface="Microsoft JhengHei" pitchFamily="34" charset="-120"/>
                         </a:rPr>
                         <a:t>CC BY-SA 4.0</a:t>
-                      </a:r>
-                      <a:endParaRPr lang="en-US" sz="900" dirty="0">
-                        <a:latin typeface="Microsoft JhengHei" charset="0"/>
-                        <a:ea typeface="Microsoft JhengHei" charset="0"/>
-                        <a:cs typeface="Microsoft JhengHei" charset="0"/>
-                      </a:endParaRPr>
-                    </a:p>
-                  </a:txBody>
-                  <a:tcPr marL="101600" marR="101600" marT="50800" marB="50800" anchor="ctr">
-                    <a:lnL w="0" cap="flat" cmpd="sng" algn="ctr">
-                      <a:noFill/>
-                    </a:lnL>
-                    <a:lnR w="0" cap="flat" cmpd="sng" algn="ctr">
-                      <a:noFill/>
-                    </a:lnR>
-                    <a:lnT w="0" cap="flat" cmpd="sng" algn="ctr">
-                      <a:noFill/>
-                    </a:lnT>
-                    <a:lnB w="6350" cap="flat" cmpd="sng" algn="ctr">
-                      <a:solidFill>
-                        <a:srgbClr val="E5E7EB"/>
-                      </a:solidFill>
-                      <a:prstDash val="solid"/>
-                      <a:round/>
-                      <a:headEnd type="none" w="med" len="med"/>
-                      <a:tailEnd type="none" w="med" len="med"/>
-                    </a:lnB>
-                    <a:solidFill>
-                      <a:srgbClr val="FFFFFF"/>
-                    </a:solidFill>
-                  </a:tcPr>
-                </a:tc>
-              </a:tr>
-              <a:tr h="329184">
-                <a:tc>
-                  <a:txBody>
-                    <a:bodyPr/>
-                    <a:lstStyle/>
-                    <a:p>
-                      <a:pPr indent="0" marL="0">
-                        <a:buNone/>
-                      </a:pPr>
-                      <a:r>
-                        <a:rPr lang="en-US" sz="900" dirty="0">
-                          <a:solidFill>
-                            <a:srgbClr val="111118"/>
-                          </a:solidFill>
-                          <a:latin typeface="Microsoft JhengHei" pitchFamily="34" charset="0"/>
-                          <a:ea typeface="Microsoft JhengHei" pitchFamily="34" charset="-122"/>
-                          <a:cs typeface="Microsoft JhengHei" pitchFamily="34" charset="-120"/>
-                        </a:rPr>
-                        <a:t>041</a:t>
-                      </a:r>
-                      <a:endParaRPr lang="en-US" sz="900" dirty="0">
-                        <a:latin typeface="Microsoft JhengHei" charset="0"/>
-                        <a:ea typeface="Microsoft JhengHei" charset="0"/>
-                        <a:cs typeface="Microsoft JhengHei" charset="0"/>
-                      </a:endParaRPr>
-                    </a:p>
-                  </a:txBody>
-                  <a:tcPr marL="101600" marR="101600" marT="50800" marB="50800" anchor="ctr">
-                    <a:lnL w="0" cap="flat" cmpd="sng" algn="ctr">
-                      <a:noFill/>
-                    </a:lnL>
-                    <a:lnR w="0" cap="flat" cmpd="sng" algn="ctr">
-                      <a:noFill/>
-                    </a:lnR>
-                    <a:lnT w="0" cap="flat" cmpd="sng" algn="ctr">
-                      <a:noFill/>
-                    </a:lnT>
-                    <a:lnB w="6350" cap="flat" cmpd="sng" algn="ctr">
-                      <a:solidFill>
-                        <a:srgbClr val="E5E7EB"/>
-                      </a:solidFill>
-                      <a:prstDash val="solid"/>
-                      <a:round/>
-                      <a:headEnd type="none" w="med" len="med"/>
-                      <a:tailEnd type="none" w="med" len="med"/>
-                    </a:lnB>
-                    <a:solidFill>
-                      <a:srgbClr val="FFFFFF"/>
-                    </a:solidFill>
-                  </a:tcPr>
-                </a:tc>
-                <a:tc>
-                  <a:txBody>
-                    <a:bodyPr/>
-                    <a:lstStyle/>
-                    <a:p>
-                      <a:pPr indent="0" marL="0">
-                        <a:buNone/>
-                      </a:pPr>
-                      <a:r>
-                        <a:rPr lang="en-US" sz="900" dirty="0">
-                          <a:solidFill>
-                            <a:srgbClr val="111118"/>
-                          </a:solidFill>
-                          <a:latin typeface="Microsoft JhengHei" pitchFamily="34" charset="0"/>
-                          <a:ea typeface="Microsoft JhengHei" pitchFamily="34" charset="-122"/>
-                          <a:cs typeface="Microsoft JhengHei" pitchFamily="34" charset="-120"/>
-                        </a:rPr>
-                        <a:t>Empty Streets of Paris COVID19.webm</a:t>
-                      </a:r>
-                      <a:endParaRPr lang="en-US" sz="900" dirty="0">
-                        <a:latin typeface="Microsoft JhengHei" charset="0"/>
-                        <a:ea typeface="Microsoft JhengHei" charset="0"/>
-                        <a:cs typeface="Microsoft JhengHei" charset="0"/>
-                      </a:endParaRPr>
-                    </a:p>
-                  </a:txBody>
-                  <a:tcPr marL="101600" marR="101600" marT="50800" marB="50800" anchor="ctr">
-                    <a:lnL w="0" cap="flat" cmpd="sng" algn="ctr">
-                      <a:noFill/>
-                    </a:lnL>
-                    <a:lnR w="0" cap="flat" cmpd="sng" algn="ctr">
-                      <a:noFill/>
-                    </a:lnR>
-                    <a:lnT w="0" cap="flat" cmpd="sng" algn="ctr">
-                      <a:noFill/>
-                    </a:lnT>
-                    <a:lnB w="6350" cap="flat" cmpd="sng" algn="ctr">
-                      <a:solidFill>
-                        <a:srgbClr val="E5E7EB"/>
-                      </a:solidFill>
-                      <a:prstDash val="solid"/>
-                      <a:round/>
-                      <a:headEnd type="none" w="med" len="med"/>
-                      <a:tailEnd type="none" w="med" len="med"/>
-                    </a:lnB>
-                    <a:solidFill>
-                      <a:srgbClr val="FFFFFF"/>
-                    </a:solidFill>
-                  </a:tcPr>
-                </a:tc>
-                <a:tc>
-                  <a:txBody>
-                    <a:bodyPr/>
-                    <a:lstStyle/>
-                    <a:p>
-                      <a:pPr indent="0" marL="0">
-                        <a:buNone/>
-                      </a:pPr>
-                      <a:r>
-                        <a:rPr lang="en-US" sz="900" dirty="0">
-                          <a:solidFill>
-                            <a:srgbClr val="111118"/>
-                          </a:solidFill>
-                          <a:latin typeface="Microsoft JhengHei" pitchFamily="34" charset="0"/>
-                          <a:ea typeface="Microsoft JhengHei" pitchFamily="34" charset="-122"/>
-                          <a:cs typeface="Microsoft JhengHei" pitchFamily="34" charset="-120"/>
-                        </a:rPr>
-                        <a:t>CreatorsCloud</a:t>
-                      </a:r>
-                      <a:endParaRPr lang="en-US" sz="900" dirty="0">
-                        <a:latin typeface="Microsoft JhengHei" charset="0"/>
-                        <a:ea typeface="Microsoft JhengHei" charset="0"/>
-                        <a:cs typeface="Microsoft JhengHei" charset="0"/>
-                      </a:endParaRPr>
-                    </a:p>
-                  </a:txBody>
-                  <a:tcPr marL="101600" marR="101600" marT="50800" marB="50800" anchor="ctr">
-                    <a:lnL w="0" cap="flat" cmpd="sng" algn="ctr">
-                      <a:noFill/>
-                    </a:lnL>
-                    <a:lnR w="0" cap="flat" cmpd="sng" algn="ctr">
-                      <a:noFill/>
-                    </a:lnR>
-                    <a:lnT w="0" cap="flat" cmpd="sng" algn="ctr">
-                      <a:noFill/>
-                    </a:lnT>
-                    <a:lnB w="6350" cap="flat" cmpd="sng" algn="ctr">
-                      <a:solidFill>
-                        <a:srgbClr val="E5E7EB"/>
-                      </a:solidFill>
-                      <a:prstDash val="solid"/>
-                      <a:round/>
-                      <a:headEnd type="none" w="med" len="med"/>
-                      <a:tailEnd type="none" w="med" len="med"/>
-                    </a:lnB>
-                    <a:solidFill>
-                      <a:srgbClr val="FFFFFF"/>
-                    </a:solidFill>
-                  </a:tcPr>
-                </a:tc>
-                <a:tc>
-                  <a:txBody>
-                    <a:bodyPr/>
-                    <a:lstStyle/>
-                    <a:p>
-                      <a:pPr indent="0" marL="0">
-                        <a:buNone/>
-                      </a:pPr>
-                      <a:r>
-                        <a:rPr lang="en-US" sz="900" dirty="0">
-                          <a:solidFill>
-                            <a:srgbClr val="111118"/>
-                          </a:solidFill>
-                          <a:latin typeface="Microsoft JhengHei" pitchFamily="34" charset="0"/>
-                          <a:ea typeface="Microsoft JhengHei" pitchFamily="34" charset="-122"/>
-                          <a:cs typeface="Microsoft JhengHei" pitchFamily="34" charset="-120"/>
-                        </a:rPr>
-                        <a:t>CC BY 3.0</a:t>
-                      </a:r>
-                      <a:endParaRPr lang="en-US" sz="900" dirty="0">
-                        <a:latin typeface="Microsoft JhengHei" charset="0"/>
-                        <a:ea typeface="Microsoft JhengHei" charset="0"/>
-                        <a:cs typeface="Microsoft JhengHei" charset="0"/>
-                      </a:endParaRPr>
-                    </a:p>
-                  </a:txBody>
-                  <a:tcPr marL="101600" marR="101600" marT="50800" marB="50800" anchor="ctr">
-                    <a:lnL w="0" cap="flat" cmpd="sng" algn="ctr">
-                      <a:noFill/>
-                    </a:lnL>
-                    <a:lnR w="0" cap="flat" cmpd="sng" algn="ctr">
-                      <a:noFill/>
-                    </a:lnR>
-                    <a:lnT w="0" cap="flat" cmpd="sng" algn="ctr">
-                      <a:noFill/>
-                    </a:lnT>
-                    <a:lnB w="6350" cap="flat" cmpd="sng" algn="ctr">
-                      <a:solidFill>
-                        <a:srgbClr val="E5E7EB"/>
-                      </a:solidFill>
-                      <a:prstDash val="solid"/>
-                      <a:round/>
-                      <a:headEnd type="none" w="med" len="med"/>
-                      <a:tailEnd type="none" w="med" len="med"/>
-                    </a:lnB>
-                    <a:solidFill>
-                      <a:srgbClr val="FFFFFF"/>
-                    </a:solidFill>
-                  </a:tcPr>
-                </a:tc>
-              </a:tr>
-              <a:tr h="329184">
-                <a:tc>
-                  <a:txBody>
-                    <a:bodyPr/>
-                    <a:lstStyle/>
-                    <a:p>
-                      <a:pPr indent="0" marL="0">
-                        <a:buNone/>
-                      </a:pPr>
-                      <a:r>
-                        <a:rPr lang="en-US" sz="900" dirty="0">
-                          <a:solidFill>
-                            <a:srgbClr val="111118"/>
-                          </a:solidFill>
-                          <a:latin typeface="Microsoft JhengHei" pitchFamily="34" charset="0"/>
-                          <a:ea typeface="Microsoft JhengHei" pitchFamily="34" charset="-122"/>
-                          <a:cs typeface="Microsoft JhengHei" pitchFamily="34" charset="-120"/>
-                        </a:rPr>
-                        <a:t>042</a:t>
-                      </a:r>
-                      <a:endParaRPr lang="en-US" sz="900" dirty="0">
-                        <a:latin typeface="Microsoft JhengHei" charset="0"/>
-                        <a:ea typeface="Microsoft JhengHei" charset="0"/>
-                        <a:cs typeface="Microsoft JhengHei" charset="0"/>
-                      </a:endParaRPr>
-                    </a:p>
-                  </a:txBody>
-                  <a:tcPr marL="101600" marR="101600" marT="50800" marB="50800" anchor="ctr">
-                    <a:lnL w="0" cap="flat" cmpd="sng" algn="ctr">
-                      <a:noFill/>
-                    </a:lnL>
-                    <a:lnR w="0" cap="flat" cmpd="sng" algn="ctr">
-                      <a:noFill/>
-                    </a:lnR>
-                    <a:lnT w="0" cap="flat" cmpd="sng" algn="ctr">
-                      <a:noFill/>
-                    </a:lnT>
-                    <a:lnB w="6350" cap="flat" cmpd="sng" algn="ctr">
-                      <a:solidFill>
-                        <a:srgbClr val="E5E7EB"/>
-                      </a:solidFill>
-                      <a:prstDash val="solid"/>
-                      <a:round/>
-                      <a:headEnd type="none" w="med" len="med"/>
-                      <a:tailEnd type="none" w="med" len="med"/>
-                    </a:lnB>
-                    <a:solidFill>
-                      <a:srgbClr val="FFFFFF"/>
-                    </a:solidFill>
-                  </a:tcPr>
-                </a:tc>
-                <a:tc>
-                  <a:txBody>
-                    <a:bodyPr/>
-                    <a:lstStyle/>
-                    <a:p>
-                      <a:pPr indent="0" marL="0">
-                        <a:buNone/>
-                      </a:pPr>
-                      <a:r>
-                        <a:rPr lang="en-US" sz="900" dirty="0">
-                          <a:solidFill>
-                            <a:srgbClr val="111118"/>
-                          </a:solidFill>
-                          <a:latin typeface="Microsoft JhengHei" pitchFamily="34" charset="0"/>
-                          <a:ea typeface="Microsoft JhengHei" pitchFamily="34" charset="-122"/>
-                          <a:cs typeface="Microsoft JhengHei" pitchFamily="34" charset="-120"/>
-                        </a:rPr>
-                        <a:t>IrishTraditionalMusic-IrishPub-Tokyo-2016-2-24.webm</a:t>
-                      </a:r>
-                      <a:endParaRPr lang="en-US" sz="900" dirty="0">
-                        <a:latin typeface="Microsoft JhengHei" charset="0"/>
-                        <a:ea typeface="Microsoft JhengHei" charset="0"/>
-                        <a:cs typeface="Microsoft JhengHei" charset="0"/>
-                      </a:endParaRPr>
-                    </a:p>
-                  </a:txBody>
-                  <a:tcPr marL="101600" marR="101600" marT="50800" marB="50800" anchor="ctr">
-                    <a:lnL w="0" cap="flat" cmpd="sng" algn="ctr">
-                      <a:noFill/>
-                    </a:lnL>
-                    <a:lnR w="0" cap="flat" cmpd="sng" algn="ctr">
-                      <a:noFill/>
-                    </a:lnR>
-                    <a:lnT w="0" cap="flat" cmpd="sng" algn="ctr">
-                      <a:noFill/>
-                    </a:lnT>
-                    <a:lnB w="6350" cap="flat" cmpd="sng" algn="ctr">
-                      <a:solidFill>
-                        <a:srgbClr val="E5E7EB"/>
-                      </a:solidFill>
-                      <a:prstDash val="solid"/>
-                      <a:round/>
-                      <a:headEnd type="none" w="med" len="med"/>
-                      <a:tailEnd type="none" w="med" len="med"/>
-                    </a:lnB>
-                    <a:solidFill>
-                      <a:srgbClr val="FFFFFF"/>
-                    </a:solidFill>
-                  </a:tcPr>
-                </a:tc>
-                <a:tc>
-                  <a:txBody>
-                    <a:bodyPr/>
-                    <a:lstStyle/>
-                    <a:p>
-                      <a:pPr indent="0" marL="0">
-                        <a:buNone/>
-                      </a:pPr>
-                      <a:r>
-                        <a:rPr lang="en-US" sz="900" dirty="0">
-                          <a:solidFill>
-                            <a:srgbClr val="111118"/>
-                          </a:solidFill>
-                          <a:latin typeface="Microsoft JhengHei" pitchFamily="34" charset="0"/>
-                          <a:ea typeface="Microsoft JhengHei" pitchFamily="34" charset="-122"/>
-                          <a:cs typeface="Microsoft JhengHei" pitchFamily="34" charset="-120"/>
-                        </a:rPr>
-                        <a:t>Nesnad</a:t>
-                      </a:r>
-                      <a:endParaRPr lang="en-US" sz="900" dirty="0">
-                        <a:latin typeface="Microsoft JhengHei" charset="0"/>
-                        <a:ea typeface="Microsoft JhengHei" charset="0"/>
-                        <a:cs typeface="Microsoft JhengHei" charset="0"/>
-                      </a:endParaRPr>
-                    </a:p>
-                  </a:txBody>
-                  <a:tcPr marL="101600" marR="101600" marT="50800" marB="50800" anchor="ctr">
-                    <a:lnL w="0" cap="flat" cmpd="sng" algn="ctr">
-                      <a:noFill/>
-                    </a:lnL>
-                    <a:lnR w="0" cap="flat" cmpd="sng" algn="ctr">
-                      <a:noFill/>
-                    </a:lnR>
-                    <a:lnT w="0" cap="flat" cmpd="sng" algn="ctr">
-                      <a:noFill/>
-                    </a:lnT>
-                    <a:lnB w="6350" cap="flat" cmpd="sng" algn="ctr">
-                      <a:solidFill>
-                        <a:srgbClr val="E5E7EB"/>
-                      </a:solidFill>
-                      <a:prstDash val="solid"/>
-                      <a:round/>
-                      <a:headEnd type="none" w="med" len="med"/>
-                      <a:tailEnd type="none" w="med" len="med"/>
-                    </a:lnB>
-                    <a:solidFill>
-                      <a:srgbClr val="FFFFFF"/>
-                    </a:solidFill>
-                  </a:tcPr>
-                </a:tc>
-                <a:tc>
-                  <a:txBody>
-                    <a:bodyPr/>
-                    <a:lstStyle/>
-                    <a:p>
-                      <a:pPr indent="0" marL="0">
-                        <a:buNone/>
-                      </a:pPr>
-                      <a:r>
-                        <a:rPr lang="en-US" sz="900" dirty="0">
-                          <a:solidFill>
-                            <a:srgbClr val="111118"/>
-                          </a:solidFill>
-                          <a:latin typeface="Microsoft JhengHei" pitchFamily="34" charset="0"/>
-                          <a:ea typeface="Microsoft JhengHei" pitchFamily="34" charset="-122"/>
-                          <a:cs typeface="Microsoft JhengHei" pitchFamily="34" charset="-120"/>
-                        </a:rPr>
-                        <a:t>CC BY 4.0</a:t>
-                      </a:r>
-                      <a:endParaRPr lang="en-US" sz="900" dirty="0">
-                        <a:latin typeface="Microsoft JhengHei" charset="0"/>
-                        <a:ea typeface="Microsoft JhengHei" charset="0"/>
-                        <a:cs typeface="Microsoft JhengHei" charset="0"/>
-                      </a:endParaRPr>
-                    </a:p>
-                  </a:txBody>
-                  <a:tcPr marL="101600" marR="101600" marT="50800" marB="50800" anchor="ctr">
-                    <a:lnL w="0" cap="flat" cmpd="sng" algn="ctr">
-                      <a:noFill/>
-                    </a:lnL>
-                    <a:lnR w="0" cap="flat" cmpd="sng" algn="ctr">
-                      <a:noFill/>
-                    </a:lnR>
-                    <a:lnT w="0" cap="flat" cmpd="sng" algn="ctr">
-                      <a:noFill/>
-                    </a:lnT>
-                    <a:lnB w="6350" cap="flat" cmpd="sng" algn="ctr">
-                      <a:solidFill>
-                        <a:srgbClr val="E5E7EB"/>
-                      </a:solidFill>
-                      <a:prstDash val="solid"/>
-                      <a:round/>
-                      <a:headEnd type="none" w="med" len="med"/>
-                      <a:tailEnd type="none" w="med" len="med"/>
-                    </a:lnB>
-                    <a:solidFill>
-                      <a:srgbClr val="FFFFFF"/>
-                    </a:solidFill>
-                  </a:tcPr>
-                </a:tc>
-              </a:tr>
-              <a:tr h="329184">
-                <a:tc>
-                  <a:txBody>
-                    <a:bodyPr/>
-                    <a:lstStyle/>
-                    <a:p>
-                      <a:pPr indent="0" marL="0">
-                        <a:buNone/>
-                      </a:pPr>
-                      <a:r>
-                        <a:rPr lang="en-US" sz="900" dirty="0">
-                          <a:solidFill>
-                            <a:srgbClr val="111118"/>
-                          </a:solidFill>
-                          <a:latin typeface="Microsoft JhengHei" pitchFamily="34" charset="0"/>
-                          <a:ea typeface="Microsoft JhengHei" pitchFamily="34" charset="-122"/>
-                          <a:cs typeface="Microsoft JhengHei" pitchFamily="34" charset="-120"/>
-                        </a:rPr>
-                        <a:t>043</a:t>
-                      </a:r>
-                      <a:endParaRPr lang="en-US" sz="900" dirty="0">
-                        <a:latin typeface="Microsoft JhengHei" charset="0"/>
-                        <a:ea typeface="Microsoft JhengHei" charset="0"/>
-                        <a:cs typeface="Microsoft JhengHei" charset="0"/>
-                      </a:endParaRPr>
-                    </a:p>
-                  </a:txBody>
-                  <a:tcPr marL="101600" marR="101600" marT="50800" marB="50800" anchor="ctr">
-                    <a:lnL w="0" cap="flat" cmpd="sng" algn="ctr">
-                      <a:noFill/>
-                    </a:lnL>
-                    <a:lnR w="0" cap="flat" cmpd="sng" algn="ctr">
-                      <a:noFill/>
-                    </a:lnR>
-                    <a:lnT w="0" cap="flat" cmpd="sng" algn="ctr">
-                      <a:noFill/>
-                    </a:lnT>
-                    <a:lnB w="6350" cap="flat" cmpd="sng" algn="ctr">
-                      <a:solidFill>
-                        <a:srgbClr val="E5E7EB"/>
-                      </a:solidFill>
-                      <a:prstDash val="solid"/>
-                      <a:round/>
-                      <a:headEnd type="none" w="med" len="med"/>
-                      <a:tailEnd type="none" w="med" len="med"/>
-                    </a:lnB>
-                    <a:solidFill>
-                      <a:srgbClr val="FFFFFF"/>
-                    </a:solidFill>
-                  </a:tcPr>
-                </a:tc>
-                <a:tc>
-                  <a:txBody>
-                    <a:bodyPr/>
-                    <a:lstStyle/>
-                    <a:p>
-                      <a:pPr indent="0" marL="0">
-                        <a:buNone/>
-                      </a:pPr>
-                      <a:r>
-                        <a:rPr lang="en-US" sz="900" dirty="0">
-                          <a:solidFill>
-                            <a:srgbClr val="111118"/>
-                          </a:solidFill>
-                          <a:latin typeface="Microsoft JhengHei" pitchFamily="34" charset="0"/>
-                          <a:ea typeface="Microsoft JhengHei" pitchFamily="34" charset="-122"/>
-                          <a:cs typeface="Microsoft JhengHei" pitchFamily="34" charset="-120"/>
-                        </a:rPr>
-                        <a:t>Couple holding hands.webm</a:t>
-                      </a:r>
-                      <a:endParaRPr lang="en-US" sz="900" dirty="0">
-                        <a:latin typeface="Microsoft JhengHei" charset="0"/>
-                        <a:ea typeface="Microsoft JhengHei" charset="0"/>
-                        <a:cs typeface="Microsoft JhengHei" charset="0"/>
-                      </a:endParaRPr>
-                    </a:p>
-                  </a:txBody>
-                  <a:tcPr marL="101600" marR="101600" marT="50800" marB="50800" anchor="ctr">
-                    <a:lnL w="0" cap="flat" cmpd="sng" algn="ctr">
-                      <a:noFill/>
-                    </a:lnL>
-                    <a:lnR w="0" cap="flat" cmpd="sng" algn="ctr">
-                      <a:noFill/>
-                    </a:lnR>
-                    <a:lnT w="0" cap="flat" cmpd="sng" algn="ctr">
-                      <a:noFill/>
-                    </a:lnT>
-                    <a:lnB w="6350" cap="flat" cmpd="sng" algn="ctr">
-                      <a:solidFill>
-                        <a:srgbClr val="E5E7EB"/>
-                      </a:solidFill>
-                      <a:prstDash val="solid"/>
-                      <a:round/>
-                      <a:headEnd type="none" w="med" len="med"/>
-                      <a:tailEnd type="none" w="med" len="med"/>
-                    </a:lnB>
-                    <a:solidFill>
-                      <a:srgbClr val="FFFFFF"/>
-                    </a:solidFill>
-                  </a:tcPr>
-                </a:tc>
-                <a:tc>
-                  <a:txBody>
-                    <a:bodyPr/>
-                    <a:lstStyle/>
-                    <a:p>
-                      <a:pPr indent="0" marL="0">
-                        <a:buNone/>
-                      </a:pPr>
-                      <a:r>
-                        <a:rPr lang="en-US" sz="900" dirty="0">
-                          <a:solidFill>
-                            <a:srgbClr val="111118"/>
-                          </a:solidFill>
-                          <a:latin typeface="Microsoft JhengHei" pitchFamily="34" charset="0"/>
-                          <a:ea typeface="Microsoft JhengHei" pitchFamily="34" charset="-122"/>
-                          <a:cs typeface="Microsoft JhengHei" pitchFamily="34" charset="-120"/>
-                        </a:rPr>
-                        <a:t>https://www.youtube.com/user/Editor</a:t>
-                      </a:r>
-                      <a:endParaRPr lang="en-US" sz="900" dirty="0">
-                        <a:latin typeface="Microsoft JhengHei" charset="0"/>
-                        <a:ea typeface="Microsoft JhengHei" charset="0"/>
-                        <a:cs typeface="Microsoft JhengHei" charset="0"/>
-                      </a:endParaRPr>
-                    </a:p>
-                  </a:txBody>
-                  <a:tcPr marL="101600" marR="101600" marT="50800" marB="50800" anchor="ctr">
-                    <a:lnL w="0" cap="flat" cmpd="sng" algn="ctr">
-                      <a:noFill/>
-                    </a:lnL>
-                    <a:lnR w="0" cap="flat" cmpd="sng" algn="ctr">
-                      <a:noFill/>
-                    </a:lnR>
-                    <a:lnT w="0" cap="flat" cmpd="sng" algn="ctr">
-                      <a:noFill/>
-                    </a:lnT>
-                    <a:lnB w="6350" cap="flat" cmpd="sng" algn="ctr">
-                      <a:solidFill>
-                        <a:srgbClr val="E5E7EB"/>
-                      </a:solidFill>
-                      <a:prstDash val="solid"/>
-                      <a:round/>
-                      <a:headEnd type="none" w="med" len="med"/>
-                      <a:tailEnd type="none" w="med" len="med"/>
-                    </a:lnB>
-                    <a:solidFill>
-                      <a:srgbClr val="FFFFFF"/>
-                    </a:solidFill>
-                  </a:tcPr>
-                </a:tc>
-                <a:tc>
-                  <a:txBody>
-                    <a:bodyPr/>
-                    <a:lstStyle/>
-                    <a:p>
-                      <a:pPr indent="0" marL="0">
-                        <a:buNone/>
-                      </a:pPr>
-                      <a:r>
-                        <a:rPr lang="en-US" sz="900" dirty="0">
-                          <a:solidFill>
-                            <a:srgbClr val="111118"/>
-                          </a:solidFill>
-                          <a:latin typeface="Microsoft JhengHei" pitchFamily="34" charset="0"/>
-                          <a:ea typeface="Microsoft JhengHei" pitchFamily="34" charset="-122"/>
-                          <a:cs typeface="Microsoft JhengHei" pitchFamily="34" charset="-120"/>
-                        </a:rPr>
-                        <a:t>CC BY 3.0</a:t>
                       </a:r>
                       <a:endParaRPr lang="en-US" sz="900" dirty="0">
                         <a:latin typeface="Microsoft JhengHei" charset="0"/>
@@ -26472,6 +24376,2642 @@
             <a:fld id="{F7021451-1387-4CA6-816F-3879F97B5CBC}" type="slidenum">
               <a:rPr b="0" lang="en-US"/>
               <a:t>24</a:t>
+            </a:fld>
+            <a:endParaRPr lang="en-US"/>
+          </a:p>
+        </p:txBody>
+      </p:sp>
+    </p:spTree>
+  </p:cSld>
+  <p:clrMapOvr>
+    <a:masterClrMapping/>
+  </p:clrMapOvr>
+</p:sld>
+</file>
+
+<file path=ppt/slides/slide25.xml><?xml version="1.0" encoding="utf-8"?>
+<p:sld xmlns:a="http://schemas.openxmlformats.org/drawingml/2006/main" xmlns:r="http://schemas.openxmlformats.org/officeDocument/2006/relationships" xmlns:p="http://schemas.openxmlformats.org/presentationml/2006/main">
+  <p:cSld name="Slide 25">
+    <p:spTree>
+      <p:nvGrpSpPr>
+        <p:cNvPr id="1" name=""/>
+        <p:cNvGrpSpPr/>
+        <p:nvPr/>
+      </p:nvGrpSpPr>
+      <p:grpSpPr>
+        <a:xfrm>
+          <a:off x="0" y="0"/>
+          <a:ext cx="0" cy="0"/>
+          <a:chOff x="0" y="0"/>
+          <a:chExt cx="0" cy="0"/>
+        </a:xfrm>
+      </p:grpSpPr>
+      <p:sp>
+        <p:nvSpPr>
+          <p:cNvPr id="2" name="Text 0"/>
+          <p:cNvSpPr/>
+          <p:nvPr>
+            <p:ph idx="100" type="title" hasCustomPrompt="1"/>
+          </p:nvPr>
+        </p:nvSpPr>
+        <p:spPr>
+          <a:xfrm>
+            <a:off x="640080" y="502920"/>
+            <a:ext cx="10881360" cy="914400"/>
+          </a:xfrm>
+          <a:prstGeom prst="rect">
+            <a:avLst/>
+          </a:prstGeom>
+          <a:noFill/>
+          <a:ln/>
+        </p:spPr>
+        <p:txBody>
+          <a:bodyPr wrap="square" lIns="0" tIns="0" rIns="0" bIns="0" rtlCol="0" anchor="t"/>
+          <a:lstStyle/>
+          <a:p>
+            <a:pPr algn="l" indent="0" marL="0">
+              <a:buNone/>
+            </a:pPr>
+            <a:r>
+              <a:rPr lang="en-US" sz="2800" b="1" dirty="0">
+                <a:solidFill>
+                  <a:srgbClr val="111118"/>
+                </a:solidFill>
+              </a:rPr>
+              <a:t>Footage credits (4 of 4)</a:t>
+            </a:r>
+            <a:endParaRPr lang="en-US" sz="2800" dirty="0"/>
+          </a:p>
+        </p:txBody>
+      </p:sp>
+      <p:sp>
+        <p:nvSpPr>
+          <p:cNvPr id="3" name="Text 1"/>
+          <p:cNvSpPr txBox="1"/>
+          <p:nvPr/>
+        </p:nvSpPr>
+        <p:spPr>
+          <a:xfrm>
+            <a:off x="640080" y="274320"/>
+            <a:ext cx="8229600" cy="256032"/>
+          </a:xfrm>
+          <a:prstGeom prst="rect">
+            <a:avLst/>
+          </a:prstGeom>
+          <a:noFill/>
+          <a:ln/>
+        </p:spPr>
+        <p:txBody>
+          <a:bodyPr wrap="square" lIns="0" tIns="0" rIns="0" bIns="0" rtlCol="0" anchor="ctr"/>
+          <a:lstStyle/>
+          <a:p>
+            <a:pPr indent="0" marL="0">
+              <a:buNone/>
+            </a:pPr>
+            <a:r>
+              <a:rPr lang="en-US" sz="1050" b="1" spc="300" kern="0" dirty="0">
+                <a:solidFill>
+                  <a:srgbClr val="6C4CF5"/>
+                </a:solidFill>
+              </a:rPr>
+              <a:t>APPENDIX</a:t>
+            </a:r>
+            <a:endParaRPr lang="en-US" sz="1050" dirty="0"/>
+          </a:p>
+        </p:txBody>
+      </p:sp>
+      <p:sp>
+        <p:nvSpPr>
+          <p:cNvPr id="4" name="Text 2"/>
+          <p:cNvSpPr txBox="1"/>
+          <p:nvPr/>
+        </p:nvSpPr>
+        <p:spPr>
+          <a:xfrm>
+            <a:off x="640080" y="6355080"/>
+            <a:ext cx="5486400" cy="274320"/>
+          </a:xfrm>
+          <a:prstGeom prst="rect">
+            <a:avLst/>
+          </a:prstGeom>
+          <a:noFill/>
+          <a:ln/>
+        </p:spPr>
+        <p:txBody>
+          <a:bodyPr wrap="square" lIns="0" tIns="0" rIns="0" bIns="0" rtlCol="0" anchor="ctr"/>
+          <a:lstStyle/>
+          <a:p>
+            <a:pPr indent="0" marL="0">
+              <a:buNone/>
+            </a:pPr>
+            <a:r>
+              <a:rPr lang="en-US" sz="1000" dirty="0">
+                <a:solidFill>
+                  <a:srgbClr val="9CA3AF"/>
+                </a:solidFill>
+              </a:rPr>
+              <a:t>SceneGap Edge · Stage I</a:t>
+            </a:r>
+            <a:endParaRPr lang="en-US" sz="1000" dirty="0"/>
+          </a:p>
+        </p:txBody>
+      </p:sp>
+      <p:graphicFrame>
+        <p:nvGraphicFramePr>
+          <p:cNvPr id="26" name="Table 0"/>
+          <p:cNvGraphicFramePr>
+            <a:graphicFrameLocks noGrp="1"/>
+          </p:cNvGraphicFramePr>
+          <p:nvPr>
+            <p:extLst>
+              <p:ext uri="{D42A27DB-BD31-4B8C-83A1-F6EECF244321}">
+                <p14:modId xmlns:p14="http://schemas.microsoft.com/office/powerpoint/2010/main" val="1579011935"/>
+              </p:ext>
+            </p:extLst>
+          </p:nvPr>
+        </p:nvGraphicFramePr>
+        <p:xfrm>
+          <a:off x="640080" y="1600200"/>
+          <a:ext cx="10881360" cy="914400"/>
+        </p:xfrm>
+        <a:graphic>
+          <a:graphicData uri="http://schemas.openxmlformats.org/drawingml/2006/table">
+            <a:tbl>
+              <a:tblPr/>
+              <a:tblGrid>
+                <a:gridCol w="539572"/>
+                <a:gridCol w="5935287"/>
+                <a:gridCol w="2787786"/>
+                <a:gridCol w="1618715"/>
+              </a:tblGrid>
+              <a:tr h="358140">
+                <a:tc>
+                  <a:txBody>
+                    <a:bodyPr/>
+                    <a:lstStyle/>
+                    <a:p>
+                      <a:pPr indent="0" marL="0">
+                        <a:buNone/>
+                      </a:pPr>
+                      <a:r>
+                        <a:rPr lang="en-US" sz="1000" b="1" dirty="0">
+                          <a:solidFill>
+                            <a:srgbClr val="6B7280"/>
+                          </a:solidFill>
+                          <a:latin typeface="Microsoft JhengHei" pitchFamily="34" charset="0"/>
+                          <a:ea typeface="Microsoft JhengHei" pitchFamily="34" charset="-122"/>
+                          <a:cs typeface="Microsoft JhengHei" pitchFamily="34" charset="-120"/>
+                        </a:rPr>
+                        <a:t>#</a:t>
+                      </a:r>
+                      <a:endParaRPr lang="en-US" sz="1000" dirty="0">
+                        <a:latin typeface="Microsoft JhengHei" charset="0"/>
+                        <a:ea typeface="Microsoft JhengHei" charset="0"/>
+                        <a:cs typeface="Microsoft JhengHei" charset="0"/>
+                      </a:endParaRPr>
+                    </a:p>
+                  </a:txBody>
+                  <a:tcPr marL="101600" marR="101600" marT="50800" marB="50800" anchor="ctr">
+                    <a:lnL w="0" cap="flat" cmpd="sng" algn="ctr">
+                      <a:noFill/>
+                    </a:lnL>
+                    <a:lnR w="0" cap="flat" cmpd="sng" algn="ctr">
+                      <a:noFill/>
+                    </a:lnR>
+                    <a:lnT w="0" cap="flat" cmpd="sng" algn="ctr">
+                      <a:noFill/>
+                    </a:lnT>
+                    <a:lnB w="15875" cap="flat" cmpd="sng" algn="ctr">
+                      <a:solidFill>
+                        <a:srgbClr val="111118"/>
+                      </a:solidFill>
+                      <a:prstDash val="solid"/>
+                      <a:round/>
+                      <a:headEnd type="none" w="med" len="med"/>
+                      <a:tailEnd type="none" w="med" len="med"/>
+                    </a:lnB>
+                    <a:solidFill>
+                      <a:srgbClr val="FFFFFF"/>
+                    </a:solidFill>
+                  </a:tcPr>
+                </a:tc>
+                <a:tc>
+                  <a:txBody>
+                    <a:bodyPr/>
+                    <a:lstStyle/>
+                    <a:p>
+                      <a:pPr indent="0" marL="0">
+                        <a:buNone/>
+                      </a:pPr>
+                      <a:r>
+                        <a:rPr lang="en-US" sz="1000" b="1" dirty="0">
+                          <a:solidFill>
+                            <a:srgbClr val="6B7280"/>
+                          </a:solidFill>
+                          <a:latin typeface="Microsoft JhengHei" pitchFamily="34" charset="0"/>
+                          <a:ea typeface="Microsoft JhengHei" pitchFamily="34" charset="-122"/>
+                          <a:cs typeface="Microsoft JhengHei" pitchFamily="34" charset="-120"/>
+                        </a:rPr>
+                        <a:t>WIKIMEDIA COMMONS FILE</a:t>
+                      </a:r>
+                      <a:endParaRPr lang="en-US" sz="1000" dirty="0">
+                        <a:latin typeface="Microsoft JhengHei" charset="0"/>
+                        <a:ea typeface="Microsoft JhengHei" charset="0"/>
+                        <a:cs typeface="Microsoft JhengHei" charset="0"/>
+                      </a:endParaRPr>
+                    </a:p>
+                  </a:txBody>
+                  <a:tcPr marL="101600" marR="101600" marT="50800" marB="50800" anchor="ctr">
+                    <a:lnL w="0" cap="flat" cmpd="sng" algn="ctr">
+                      <a:noFill/>
+                    </a:lnL>
+                    <a:lnR w="0" cap="flat" cmpd="sng" algn="ctr">
+                      <a:noFill/>
+                    </a:lnR>
+                    <a:lnT w="0" cap="flat" cmpd="sng" algn="ctr">
+                      <a:noFill/>
+                    </a:lnT>
+                    <a:lnB w="15875" cap="flat" cmpd="sng" algn="ctr">
+                      <a:solidFill>
+                        <a:srgbClr val="111118"/>
+                      </a:solidFill>
+                      <a:prstDash val="solid"/>
+                      <a:round/>
+                      <a:headEnd type="none" w="med" len="med"/>
+                      <a:tailEnd type="none" w="med" len="med"/>
+                    </a:lnB>
+                    <a:solidFill>
+                      <a:srgbClr val="FFFFFF"/>
+                    </a:solidFill>
+                  </a:tcPr>
+                </a:tc>
+                <a:tc>
+                  <a:txBody>
+                    <a:bodyPr/>
+                    <a:lstStyle/>
+                    <a:p>
+                      <a:pPr indent="0" marL="0">
+                        <a:buNone/>
+                      </a:pPr>
+                      <a:r>
+                        <a:rPr lang="en-US" sz="1000" b="1" dirty="0">
+                          <a:solidFill>
+                            <a:srgbClr val="6B7280"/>
+                          </a:solidFill>
+                          <a:latin typeface="Microsoft JhengHei" pitchFamily="34" charset="0"/>
+                          <a:ea typeface="Microsoft JhengHei" pitchFamily="34" charset="-122"/>
+                          <a:cs typeface="Microsoft JhengHei" pitchFamily="34" charset="-120"/>
+                        </a:rPr>
+                        <a:t>AUTHOR</a:t>
+                      </a:r>
+                      <a:endParaRPr lang="en-US" sz="1000" dirty="0">
+                        <a:latin typeface="Microsoft JhengHei" charset="0"/>
+                        <a:ea typeface="Microsoft JhengHei" charset="0"/>
+                        <a:cs typeface="Microsoft JhengHei" charset="0"/>
+                      </a:endParaRPr>
+                    </a:p>
+                  </a:txBody>
+                  <a:tcPr marL="101600" marR="101600" marT="50800" marB="50800" anchor="ctr">
+                    <a:lnL w="0" cap="flat" cmpd="sng" algn="ctr">
+                      <a:noFill/>
+                    </a:lnL>
+                    <a:lnR w="0" cap="flat" cmpd="sng" algn="ctr">
+                      <a:noFill/>
+                    </a:lnR>
+                    <a:lnT w="0" cap="flat" cmpd="sng" algn="ctr">
+                      <a:noFill/>
+                    </a:lnT>
+                    <a:lnB w="15875" cap="flat" cmpd="sng" algn="ctr">
+                      <a:solidFill>
+                        <a:srgbClr val="111118"/>
+                      </a:solidFill>
+                      <a:prstDash val="solid"/>
+                      <a:round/>
+                      <a:headEnd type="none" w="med" len="med"/>
+                      <a:tailEnd type="none" w="med" len="med"/>
+                    </a:lnB>
+                    <a:solidFill>
+                      <a:srgbClr val="FFFFFF"/>
+                    </a:solidFill>
+                  </a:tcPr>
+                </a:tc>
+                <a:tc>
+                  <a:txBody>
+                    <a:bodyPr/>
+                    <a:lstStyle/>
+                    <a:p>
+                      <a:pPr indent="0" marL="0">
+                        <a:buNone/>
+                      </a:pPr>
+                      <a:r>
+                        <a:rPr lang="en-US" sz="1000" b="1" dirty="0">
+                          <a:solidFill>
+                            <a:srgbClr val="6B7280"/>
+                          </a:solidFill>
+                          <a:latin typeface="Microsoft JhengHei" pitchFamily="34" charset="0"/>
+                          <a:ea typeface="Microsoft JhengHei" pitchFamily="34" charset="-122"/>
+                          <a:cs typeface="Microsoft JhengHei" pitchFamily="34" charset="-120"/>
+                        </a:rPr>
+                        <a:t>LICENCE</a:t>
+                      </a:r>
+                      <a:endParaRPr lang="en-US" sz="1000" dirty="0">
+                        <a:latin typeface="Microsoft JhengHei" charset="0"/>
+                        <a:ea typeface="Microsoft JhengHei" charset="0"/>
+                        <a:cs typeface="Microsoft JhengHei" charset="0"/>
+                      </a:endParaRPr>
+                    </a:p>
+                  </a:txBody>
+                  <a:tcPr marL="101600" marR="101600" marT="50800" marB="50800" anchor="ctr">
+                    <a:lnL w="0" cap="flat" cmpd="sng" algn="ctr">
+                      <a:noFill/>
+                    </a:lnL>
+                    <a:lnR w="0" cap="flat" cmpd="sng" algn="ctr">
+                      <a:noFill/>
+                    </a:lnR>
+                    <a:lnT w="0" cap="flat" cmpd="sng" algn="ctr">
+                      <a:noFill/>
+                    </a:lnT>
+                    <a:lnB w="15875" cap="flat" cmpd="sng" algn="ctr">
+                      <a:solidFill>
+                        <a:srgbClr val="111118"/>
+                      </a:solidFill>
+                      <a:prstDash val="solid"/>
+                      <a:round/>
+                      <a:headEnd type="none" w="med" len="med"/>
+                      <a:tailEnd type="none" w="med" len="med"/>
+                    </a:lnB>
+                    <a:solidFill>
+                      <a:srgbClr val="FFFFFF"/>
+                    </a:solidFill>
+                  </a:tcPr>
+                </a:tc>
+              </a:tr>
+              <a:tr h="358140">
+                <a:tc>
+                  <a:txBody>
+                    <a:bodyPr/>
+                    <a:lstStyle/>
+                    <a:p>
+                      <a:pPr indent="0" marL="0">
+                        <a:buNone/>
+                      </a:pPr>
+                      <a:r>
+                        <a:rPr lang="en-US" sz="900" dirty="0">
+                          <a:solidFill>
+                            <a:srgbClr val="111118"/>
+                          </a:solidFill>
+                          <a:latin typeface="Microsoft JhengHei" pitchFamily="34" charset="0"/>
+                          <a:ea typeface="Microsoft JhengHei" pitchFamily="34" charset="-122"/>
+                          <a:cs typeface="Microsoft JhengHei" pitchFamily="34" charset="-120"/>
+                        </a:rPr>
+                        <a:t>033</a:t>
+                      </a:r>
+                      <a:endParaRPr lang="en-US" sz="900" dirty="0">
+                        <a:latin typeface="Microsoft JhengHei" charset="0"/>
+                        <a:ea typeface="Microsoft JhengHei" charset="0"/>
+                        <a:cs typeface="Microsoft JhengHei" charset="0"/>
+                      </a:endParaRPr>
+                    </a:p>
+                  </a:txBody>
+                  <a:tcPr marL="101600" marR="101600" marT="50800" marB="50800" anchor="ctr">
+                    <a:lnL w="0" cap="flat" cmpd="sng" algn="ctr">
+                      <a:noFill/>
+                    </a:lnL>
+                    <a:lnR w="0" cap="flat" cmpd="sng" algn="ctr">
+                      <a:noFill/>
+                    </a:lnR>
+                    <a:lnT w="0" cap="flat" cmpd="sng" algn="ctr">
+                      <a:noFill/>
+                    </a:lnT>
+                    <a:lnB w="6350" cap="flat" cmpd="sng" algn="ctr">
+                      <a:solidFill>
+                        <a:srgbClr val="E5E7EB"/>
+                      </a:solidFill>
+                      <a:prstDash val="solid"/>
+                      <a:round/>
+                      <a:headEnd type="none" w="med" len="med"/>
+                      <a:tailEnd type="none" w="med" len="med"/>
+                    </a:lnB>
+                    <a:solidFill>
+                      <a:srgbClr val="FFFFFF"/>
+                    </a:solidFill>
+                  </a:tcPr>
+                </a:tc>
+                <a:tc>
+                  <a:txBody>
+                    <a:bodyPr/>
+                    <a:lstStyle/>
+                    <a:p>
+                      <a:pPr indent="0" marL="0">
+                        <a:buNone/>
+                      </a:pPr>
+                      <a:r>
+                        <a:rPr lang="en-US" sz="900" dirty="0">
+                          <a:solidFill>
+                            <a:srgbClr val="111118"/>
+                          </a:solidFill>
+                          <a:latin typeface="Microsoft JhengHei" pitchFamily="34" charset="0"/>
+                          <a:ea typeface="Microsoft JhengHei" pitchFamily="34" charset="-122"/>
+                          <a:cs typeface="Microsoft JhengHei" pitchFamily="34" charset="-120"/>
+                        </a:rPr>
+                        <a:t>Bosnian coffee with rahat lokum, Kujundziluk and Old Bridge in Mostar - Bosnia and Herzegovina (2026)-bs.webm</a:t>
+                      </a:r>
+                      <a:endParaRPr lang="en-US" sz="900" dirty="0">
+                        <a:latin typeface="Microsoft JhengHei" charset="0"/>
+                        <a:ea typeface="Microsoft JhengHei" charset="0"/>
+                        <a:cs typeface="Microsoft JhengHei" charset="0"/>
+                      </a:endParaRPr>
+                    </a:p>
+                  </a:txBody>
+                  <a:tcPr marL="101600" marR="101600" marT="50800" marB="50800" anchor="ctr">
+                    <a:lnL w="0" cap="flat" cmpd="sng" algn="ctr">
+                      <a:noFill/>
+                    </a:lnL>
+                    <a:lnR w="0" cap="flat" cmpd="sng" algn="ctr">
+                      <a:noFill/>
+                    </a:lnR>
+                    <a:lnT w="0" cap="flat" cmpd="sng" algn="ctr">
+                      <a:noFill/>
+                    </a:lnT>
+                    <a:lnB w="6350" cap="flat" cmpd="sng" algn="ctr">
+                      <a:solidFill>
+                        <a:srgbClr val="E5E7EB"/>
+                      </a:solidFill>
+                      <a:prstDash val="solid"/>
+                      <a:round/>
+                      <a:headEnd type="none" w="med" len="med"/>
+                      <a:tailEnd type="none" w="med" len="med"/>
+                    </a:lnB>
+                    <a:solidFill>
+                      <a:srgbClr val="FFFFFF"/>
+                    </a:solidFill>
+                  </a:tcPr>
+                </a:tc>
+                <a:tc>
+                  <a:txBody>
+                    <a:bodyPr/>
+                    <a:lstStyle/>
+                    <a:p>
+                      <a:pPr indent="0" marL="0">
+                        <a:buNone/>
+                      </a:pPr>
+                      <a:r>
+                        <a:rPr lang="en-US" sz="900" dirty="0">
+                          <a:solidFill>
+                            <a:srgbClr val="111118"/>
+                          </a:solidFill>
+                          <a:latin typeface="Microsoft JhengHei" pitchFamily="34" charset="0"/>
+                          <a:ea typeface="Microsoft JhengHei" pitchFamily="34" charset="-122"/>
+                          <a:cs typeface="Microsoft JhengHei" pitchFamily="34" charset="-120"/>
+                        </a:rPr>
+                        <a:t>Minja Klarić</a:t>
+                      </a:r>
+                      <a:endParaRPr lang="en-US" sz="900" dirty="0">
+                        <a:latin typeface="Microsoft JhengHei" charset="0"/>
+                        <a:ea typeface="Microsoft JhengHei" charset="0"/>
+                        <a:cs typeface="Microsoft JhengHei" charset="0"/>
+                      </a:endParaRPr>
+                    </a:p>
+                  </a:txBody>
+                  <a:tcPr marL="101600" marR="101600" marT="50800" marB="50800" anchor="ctr">
+                    <a:lnL w="0" cap="flat" cmpd="sng" algn="ctr">
+                      <a:noFill/>
+                    </a:lnL>
+                    <a:lnR w="0" cap="flat" cmpd="sng" algn="ctr">
+                      <a:noFill/>
+                    </a:lnR>
+                    <a:lnT w="0" cap="flat" cmpd="sng" algn="ctr">
+                      <a:noFill/>
+                    </a:lnT>
+                    <a:lnB w="6350" cap="flat" cmpd="sng" algn="ctr">
+                      <a:solidFill>
+                        <a:srgbClr val="E5E7EB"/>
+                      </a:solidFill>
+                      <a:prstDash val="solid"/>
+                      <a:round/>
+                      <a:headEnd type="none" w="med" len="med"/>
+                      <a:tailEnd type="none" w="med" len="med"/>
+                    </a:lnB>
+                    <a:solidFill>
+                      <a:srgbClr val="FFFFFF"/>
+                    </a:solidFill>
+                  </a:tcPr>
+                </a:tc>
+                <a:tc>
+                  <a:txBody>
+                    <a:bodyPr/>
+                    <a:lstStyle/>
+                    <a:p>
+                      <a:pPr indent="0" marL="0">
+                        <a:buNone/>
+                      </a:pPr>
+                      <a:r>
+                        <a:rPr lang="en-US" sz="900" dirty="0">
+                          <a:solidFill>
+                            <a:srgbClr val="111118"/>
+                          </a:solidFill>
+                          <a:latin typeface="Microsoft JhengHei" pitchFamily="34" charset="0"/>
+                          <a:ea typeface="Microsoft JhengHei" pitchFamily="34" charset="-122"/>
+                          <a:cs typeface="Microsoft JhengHei" pitchFamily="34" charset="-120"/>
+                        </a:rPr>
+                        <a:t>CC BY-SA 4.0</a:t>
+                      </a:r>
+                      <a:endParaRPr lang="en-US" sz="900" dirty="0">
+                        <a:latin typeface="Microsoft JhengHei" charset="0"/>
+                        <a:ea typeface="Microsoft JhengHei" charset="0"/>
+                        <a:cs typeface="Microsoft JhengHei" charset="0"/>
+                      </a:endParaRPr>
+                    </a:p>
+                  </a:txBody>
+                  <a:tcPr marL="101600" marR="101600" marT="50800" marB="50800" anchor="ctr">
+                    <a:lnL w="0" cap="flat" cmpd="sng" algn="ctr">
+                      <a:noFill/>
+                    </a:lnL>
+                    <a:lnR w="0" cap="flat" cmpd="sng" algn="ctr">
+                      <a:noFill/>
+                    </a:lnR>
+                    <a:lnT w="0" cap="flat" cmpd="sng" algn="ctr">
+                      <a:noFill/>
+                    </a:lnT>
+                    <a:lnB w="6350" cap="flat" cmpd="sng" algn="ctr">
+                      <a:solidFill>
+                        <a:srgbClr val="E5E7EB"/>
+                      </a:solidFill>
+                      <a:prstDash val="solid"/>
+                      <a:round/>
+                      <a:headEnd type="none" w="med" len="med"/>
+                      <a:tailEnd type="none" w="med" len="med"/>
+                    </a:lnB>
+                    <a:solidFill>
+                      <a:srgbClr val="FFFFFF"/>
+                    </a:solidFill>
+                  </a:tcPr>
+                </a:tc>
+              </a:tr>
+              <a:tr h="358140">
+                <a:tc>
+                  <a:txBody>
+                    <a:bodyPr/>
+                    <a:lstStyle/>
+                    <a:p>
+                      <a:pPr indent="0" marL="0">
+                        <a:buNone/>
+                      </a:pPr>
+                      <a:r>
+                        <a:rPr lang="en-US" sz="900" dirty="0">
+                          <a:solidFill>
+                            <a:srgbClr val="111118"/>
+                          </a:solidFill>
+                          <a:latin typeface="Microsoft JhengHei" pitchFamily="34" charset="0"/>
+                          <a:ea typeface="Microsoft JhengHei" pitchFamily="34" charset="-122"/>
+                          <a:cs typeface="Microsoft JhengHei" pitchFamily="34" charset="-120"/>
+                        </a:rPr>
+                        <a:t>034</a:t>
+                      </a:r>
+                      <a:endParaRPr lang="en-US" sz="900" dirty="0">
+                        <a:latin typeface="Microsoft JhengHei" charset="0"/>
+                        <a:ea typeface="Microsoft JhengHei" charset="0"/>
+                        <a:cs typeface="Microsoft JhengHei" charset="0"/>
+                      </a:endParaRPr>
+                    </a:p>
+                  </a:txBody>
+                  <a:tcPr marL="101600" marR="101600" marT="50800" marB="50800" anchor="ctr">
+                    <a:lnL w="0" cap="flat" cmpd="sng" algn="ctr">
+                      <a:noFill/>
+                    </a:lnL>
+                    <a:lnR w="0" cap="flat" cmpd="sng" algn="ctr">
+                      <a:noFill/>
+                    </a:lnR>
+                    <a:lnT w="0" cap="flat" cmpd="sng" algn="ctr">
+                      <a:noFill/>
+                    </a:lnT>
+                    <a:lnB w="6350" cap="flat" cmpd="sng" algn="ctr">
+                      <a:solidFill>
+                        <a:srgbClr val="E5E7EB"/>
+                      </a:solidFill>
+                      <a:prstDash val="solid"/>
+                      <a:round/>
+                      <a:headEnd type="none" w="med" len="med"/>
+                      <a:tailEnd type="none" w="med" len="med"/>
+                    </a:lnB>
+                    <a:solidFill>
+                      <a:srgbClr val="FFFFFF"/>
+                    </a:solidFill>
+                  </a:tcPr>
+                </a:tc>
+                <a:tc>
+                  <a:txBody>
+                    <a:bodyPr/>
+                    <a:lstStyle/>
+                    <a:p>
+                      <a:pPr indent="0" marL="0">
+                        <a:buNone/>
+                      </a:pPr>
+                      <a:r>
+                        <a:rPr lang="en-US" sz="900" dirty="0">
+                          <a:solidFill>
+                            <a:srgbClr val="111118"/>
+                          </a:solidFill>
+                          <a:latin typeface="Microsoft JhengHei" pitchFamily="34" charset="0"/>
+                          <a:ea typeface="Microsoft JhengHei" pitchFamily="34" charset="-122"/>
+                          <a:cs typeface="Microsoft JhengHei" pitchFamily="34" charset="-120"/>
+                        </a:rPr>
+                        <a:t>A cup of Kenyan Coffee.webm</a:t>
+                      </a:r>
+                      <a:endParaRPr lang="en-US" sz="900" dirty="0">
+                        <a:latin typeface="Microsoft JhengHei" charset="0"/>
+                        <a:ea typeface="Microsoft JhengHei" charset="0"/>
+                        <a:cs typeface="Microsoft JhengHei" charset="0"/>
+                      </a:endParaRPr>
+                    </a:p>
+                  </a:txBody>
+                  <a:tcPr marL="101600" marR="101600" marT="50800" marB="50800" anchor="ctr">
+                    <a:lnL w="0" cap="flat" cmpd="sng" algn="ctr">
+                      <a:noFill/>
+                    </a:lnL>
+                    <a:lnR w="0" cap="flat" cmpd="sng" algn="ctr">
+                      <a:noFill/>
+                    </a:lnR>
+                    <a:lnT w="0" cap="flat" cmpd="sng" algn="ctr">
+                      <a:noFill/>
+                    </a:lnT>
+                    <a:lnB w="6350" cap="flat" cmpd="sng" algn="ctr">
+                      <a:solidFill>
+                        <a:srgbClr val="E5E7EB"/>
+                      </a:solidFill>
+                      <a:prstDash val="solid"/>
+                      <a:round/>
+                      <a:headEnd type="none" w="med" len="med"/>
+                      <a:tailEnd type="none" w="med" len="med"/>
+                    </a:lnB>
+                    <a:solidFill>
+                      <a:srgbClr val="FFFFFF"/>
+                    </a:solidFill>
+                  </a:tcPr>
+                </a:tc>
+                <a:tc>
+                  <a:txBody>
+                    <a:bodyPr/>
+                    <a:lstStyle/>
+                    <a:p>
+                      <a:pPr indent="0" marL="0">
+                        <a:buNone/>
+                      </a:pPr>
+                      <a:r>
+                        <a:rPr lang="en-US" sz="900" dirty="0">
+                          <a:solidFill>
+                            <a:srgbClr val="111118"/>
+                          </a:solidFill>
+                          <a:latin typeface="Microsoft JhengHei" pitchFamily="34" charset="0"/>
+                          <a:ea typeface="Microsoft JhengHei" pitchFamily="34" charset="-122"/>
+                          <a:cs typeface="Microsoft JhengHei" pitchFamily="34" charset="-120"/>
+                        </a:rPr>
+                        <a:t>Queen Asali</a:t>
+                      </a:r>
+                      <a:endParaRPr lang="en-US" sz="900" dirty="0">
+                        <a:latin typeface="Microsoft JhengHei" charset="0"/>
+                        <a:ea typeface="Microsoft JhengHei" charset="0"/>
+                        <a:cs typeface="Microsoft JhengHei" charset="0"/>
+                      </a:endParaRPr>
+                    </a:p>
+                  </a:txBody>
+                  <a:tcPr marL="101600" marR="101600" marT="50800" marB="50800" anchor="ctr">
+                    <a:lnL w="0" cap="flat" cmpd="sng" algn="ctr">
+                      <a:noFill/>
+                    </a:lnL>
+                    <a:lnR w="0" cap="flat" cmpd="sng" algn="ctr">
+                      <a:noFill/>
+                    </a:lnR>
+                    <a:lnT w="0" cap="flat" cmpd="sng" algn="ctr">
+                      <a:noFill/>
+                    </a:lnT>
+                    <a:lnB w="6350" cap="flat" cmpd="sng" algn="ctr">
+                      <a:solidFill>
+                        <a:srgbClr val="E5E7EB"/>
+                      </a:solidFill>
+                      <a:prstDash val="solid"/>
+                      <a:round/>
+                      <a:headEnd type="none" w="med" len="med"/>
+                      <a:tailEnd type="none" w="med" len="med"/>
+                    </a:lnB>
+                    <a:solidFill>
+                      <a:srgbClr val="FFFFFF"/>
+                    </a:solidFill>
+                  </a:tcPr>
+                </a:tc>
+                <a:tc>
+                  <a:txBody>
+                    <a:bodyPr/>
+                    <a:lstStyle/>
+                    <a:p>
+                      <a:pPr indent="0" marL="0">
+                        <a:buNone/>
+                      </a:pPr>
+                      <a:r>
+                        <a:rPr lang="en-US" sz="900" dirty="0">
+                          <a:solidFill>
+                            <a:srgbClr val="111118"/>
+                          </a:solidFill>
+                          <a:latin typeface="Microsoft JhengHei" pitchFamily="34" charset="0"/>
+                          <a:ea typeface="Microsoft JhengHei" pitchFamily="34" charset="-122"/>
+                          <a:cs typeface="Microsoft JhengHei" pitchFamily="34" charset="-120"/>
+                        </a:rPr>
+                        <a:t>CC BY-SA 4.0</a:t>
+                      </a:r>
+                      <a:endParaRPr lang="en-US" sz="900" dirty="0">
+                        <a:latin typeface="Microsoft JhengHei" charset="0"/>
+                        <a:ea typeface="Microsoft JhengHei" charset="0"/>
+                        <a:cs typeface="Microsoft JhengHei" charset="0"/>
+                      </a:endParaRPr>
+                    </a:p>
+                  </a:txBody>
+                  <a:tcPr marL="101600" marR="101600" marT="50800" marB="50800" anchor="ctr">
+                    <a:lnL w="0" cap="flat" cmpd="sng" algn="ctr">
+                      <a:noFill/>
+                    </a:lnL>
+                    <a:lnR w="0" cap="flat" cmpd="sng" algn="ctr">
+                      <a:noFill/>
+                    </a:lnR>
+                    <a:lnT w="0" cap="flat" cmpd="sng" algn="ctr">
+                      <a:noFill/>
+                    </a:lnT>
+                    <a:lnB w="6350" cap="flat" cmpd="sng" algn="ctr">
+                      <a:solidFill>
+                        <a:srgbClr val="E5E7EB"/>
+                      </a:solidFill>
+                      <a:prstDash val="solid"/>
+                      <a:round/>
+                      <a:headEnd type="none" w="med" len="med"/>
+                      <a:tailEnd type="none" w="med" len="med"/>
+                    </a:lnB>
+                    <a:solidFill>
+                      <a:srgbClr val="FFFFFF"/>
+                    </a:solidFill>
+                  </a:tcPr>
+                </a:tc>
+              </a:tr>
+              <a:tr h="358140">
+                <a:tc>
+                  <a:txBody>
+                    <a:bodyPr/>
+                    <a:lstStyle/>
+                    <a:p>
+                      <a:pPr indent="0" marL="0">
+                        <a:buNone/>
+                      </a:pPr>
+                      <a:r>
+                        <a:rPr lang="en-US" sz="900" dirty="0">
+                          <a:solidFill>
+                            <a:srgbClr val="111118"/>
+                          </a:solidFill>
+                          <a:latin typeface="Microsoft JhengHei" pitchFamily="34" charset="0"/>
+                          <a:ea typeface="Microsoft JhengHei" pitchFamily="34" charset="-122"/>
+                          <a:cs typeface="Microsoft JhengHei" pitchFamily="34" charset="-120"/>
+                        </a:rPr>
+                        <a:t>035</a:t>
+                      </a:r>
+                      <a:endParaRPr lang="en-US" sz="900" dirty="0">
+                        <a:latin typeface="Microsoft JhengHei" charset="0"/>
+                        <a:ea typeface="Microsoft JhengHei" charset="0"/>
+                        <a:cs typeface="Microsoft JhengHei" charset="0"/>
+                      </a:endParaRPr>
+                    </a:p>
+                  </a:txBody>
+                  <a:tcPr marL="101600" marR="101600" marT="50800" marB="50800" anchor="ctr">
+                    <a:lnL w="0" cap="flat" cmpd="sng" algn="ctr">
+                      <a:noFill/>
+                    </a:lnL>
+                    <a:lnR w="0" cap="flat" cmpd="sng" algn="ctr">
+                      <a:noFill/>
+                    </a:lnR>
+                    <a:lnT w="0" cap="flat" cmpd="sng" algn="ctr">
+                      <a:noFill/>
+                    </a:lnT>
+                    <a:lnB w="6350" cap="flat" cmpd="sng" algn="ctr">
+                      <a:solidFill>
+                        <a:srgbClr val="E5E7EB"/>
+                      </a:solidFill>
+                      <a:prstDash val="solid"/>
+                      <a:round/>
+                      <a:headEnd type="none" w="med" len="med"/>
+                      <a:tailEnd type="none" w="med" len="med"/>
+                    </a:lnB>
+                    <a:solidFill>
+                      <a:srgbClr val="FFFFFF"/>
+                    </a:solidFill>
+                  </a:tcPr>
+                </a:tc>
+                <a:tc>
+                  <a:txBody>
+                    <a:bodyPr/>
+                    <a:lstStyle/>
+                    <a:p>
+                      <a:pPr indent="0" marL="0">
+                        <a:buNone/>
+                      </a:pPr>
+                      <a:r>
+                        <a:rPr lang="en-US" sz="900" dirty="0">
+                          <a:solidFill>
+                            <a:srgbClr val="111118"/>
+                          </a:solidFill>
+                          <a:latin typeface="Microsoft JhengHei" pitchFamily="34" charset="0"/>
+                          <a:ea typeface="Microsoft JhengHei" pitchFamily="34" charset="-122"/>
+                          <a:cs typeface="Microsoft JhengHei" pitchFamily="34" charset="-120"/>
+                        </a:rPr>
+                        <a:t>Latte salute.webm</a:t>
+                      </a:r>
+                      <a:endParaRPr lang="en-US" sz="900" dirty="0">
+                        <a:latin typeface="Microsoft JhengHei" charset="0"/>
+                        <a:ea typeface="Microsoft JhengHei" charset="0"/>
+                        <a:cs typeface="Microsoft JhengHei" charset="0"/>
+                      </a:endParaRPr>
+                    </a:p>
+                  </a:txBody>
+                  <a:tcPr marL="101600" marR="101600" marT="50800" marB="50800" anchor="ctr">
+                    <a:lnL w="0" cap="flat" cmpd="sng" algn="ctr">
+                      <a:noFill/>
+                    </a:lnL>
+                    <a:lnR w="0" cap="flat" cmpd="sng" algn="ctr">
+                      <a:noFill/>
+                    </a:lnR>
+                    <a:lnT w="0" cap="flat" cmpd="sng" algn="ctr">
+                      <a:noFill/>
+                    </a:lnT>
+                    <a:lnB w="6350" cap="flat" cmpd="sng" algn="ctr">
+                      <a:solidFill>
+                        <a:srgbClr val="E5E7EB"/>
+                      </a:solidFill>
+                      <a:prstDash val="solid"/>
+                      <a:round/>
+                      <a:headEnd type="none" w="med" len="med"/>
+                      <a:tailEnd type="none" w="med" len="med"/>
+                    </a:lnB>
+                    <a:solidFill>
+                      <a:srgbClr val="FFFFFF"/>
+                    </a:solidFill>
+                  </a:tcPr>
+                </a:tc>
+                <a:tc>
+                  <a:txBody>
+                    <a:bodyPr/>
+                    <a:lstStyle/>
+                    <a:p>
+                      <a:pPr indent="0" marL="0">
+                        <a:buNone/>
+                      </a:pPr>
+                      <a:r>
+                        <a:rPr lang="en-US" sz="900" dirty="0">
+                          <a:solidFill>
+                            <a:srgbClr val="111118"/>
+                          </a:solidFill>
+                          <a:latin typeface="Microsoft JhengHei" pitchFamily="34" charset="0"/>
+                          <a:ea typeface="Microsoft JhengHei" pitchFamily="34" charset="-122"/>
+                          <a:cs typeface="Microsoft JhengHei" pitchFamily="34" charset="-120"/>
+                        </a:rPr>
+                        <a:t>The White House</a:t>
+                      </a:r>
+                      <a:endParaRPr lang="en-US" sz="900" dirty="0">
+                        <a:latin typeface="Microsoft JhengHei" charset="0"/>
+                        <a:ea typeface="Microsoft JhengHei" charset="0"/>
+                        <a:cs typeface="Microsoft JhengHei" charset="0"/>
+                      </a:endParaRPr>
+                    </a:p>
+                  </a:txBody>
+                  <a:tcPr marL="101600" marR="101600" marT="50800" marB="50800" anchor="ctr">
+                    <a:lnL w="0" cap="flat" cmpd="sng" algn="ctr">
+                      <a:noFill/>
+                    </a:lnL>
+                    <a:lnR w="0" cap="flat" cmpd="sng" algn="ctr">
+                      <a:noFill/>
+                    </a:lnR>
+                    <a:lnT w="0" cap="flat" cmpd="sng" algn="ctr">
+                      <a:noFill/>
+                    </a:lnT>
+                    <a:lnB w="6350" cap="flat" cmpd="sng" algn="ctr">
+                      <a:solidFill>
+                        <a:srgbClr val="E5E7EB"/>
+                      </a:solidFill>
+                      <a:prstDash val="solid"/>
+                      <a:round/>
+                      <a:headEnd type="none" w="med" len="med"/>
+                      <a:tailEnd type="none" w="med" len="med"/>
+                    </a:lnB>
+                    <a:solidFill>
+                      <a:srgbClr val="FFFFFF"/>
+                    </a:solidFill>
+                  </a:tcPr>
+                </a:tc>
+                <a:tc>
+                  <a:txBody>
+                    <a:bodyPr/>
+                    <a:lstStyle/>
+                    <a:p>
+                      <a:pPr indent="0" marL="0">
+                        <a:buNone/>
+                      </a:pPr>
+                      <a:r>
+                        <a:rPr lang="en-US" sz="900" dirty="0">
+                          <a:solidFill>
+                            <a:srgbClr val="111118"/>
+                          </a:solidFill>
+                          <a:latin typeface="Microsoft JhengHei" pitchFamily="34" charset="0"/>
+                          <a:ea typeface="Microsoft JhengHei" pitchFamily="34" charset="-122"/>
+                          <a:cs typeface="Microsoft JhengHei" pitchFamily="34" charset="-120"/>
+                        </a:rPr>
+                        <a:t>Public domain</a:t>
+                      </a:r>
+                      <a:endParaRPr lang="en-US" sz="900" dirty="0">
+                        <a:latin typeface="Microsoft JhengHei" charset="0"/>
+                        <a:ea typeface="Microsoft JhengHei" charset="0"/>
+                        <a:cs typeface="Microsoft JhengHei" charset="0"/>
+                      </a:endParaRPr>
+                    </a:p>
+                  </a:txBody>
+                  <a:tcPr marL="101600" marR="101600" marT="50800" marB="50800" anchor="ctr">
+                    <a:lnL w="0" cap="flat" cmpd="sng" algn="ctr">
+                      <a:noFill/>
+                    </a:lnL>
+                    <a:lnR w="0" cap="flat" cmpd="sng" algn="ctr">
+                      <a:noFill/>
+                    </a:lnR>
+                    <a:lnT w="0" cap="flat" cmpd="sng" algn="ctr">
+                      <a:noFill/>
+                    </a:lnT>
+                    <a:lnB w="6350" cap="flat" cmpd="sng" algn="ctr">
+                      <a:solidFill>
+                        <a:srgbClr val="E5E7EB"/>
+                      </a:solidFill>
+                      <a:prstDash val="solid"/>
+                      <a:round/>
+                      <a:headEnd type="none" w="med" len="med"/>
+                      <a:tailEnd type="none" w="med" len="med"/>
+                    </a:lnB>
+                    <a:solidFill>
+                      <a:srgbClr val="FFFFFF"/>
+                    </a:solidFill>
+                  </a:tcPr>
+                </a:tc>
+              </a:tr>
+              <a:tr h="358140">
+                <a:tc>
+                  <a:txBody>
+                    <a:bodyPr/>
+                    <a:lstStyle/>
+                    <a:p>
+                      <a:pPr indent="0" marL="0">
+                        <a:buNone/>
+                      </a:pPr>
+                      <a:r>
+                        <a:rPr lang="en-US" sz="900" dirty="0">
+                          <a:solidFill>
+                            <a:srgbClr val="111118"/>
+                          </a:solidFill>
+                          <a:latin typeface="Microsoft JhengHei" pitchFamily="34" charset="0"/>
+                          <a:ea typeface="Microsoft JhengHei" pitchFamily="34" charset="-122"/>
+                          <a:cs typeface="Microsoft JhengHei" pitchFamily="34" charset="-120"/>
+                        </a:rPr>
+                        <a:t>036</a:t>
+                      </a:r>
+                      <a:endParaRPr lang="en-US" sz="900" dirty="0">
+                        <a:latin typeface="Microsoft JhengHei" charset="0"/>
+                        <a:ea typeface="Microsoft JhengHei" charset="0"/>
+                        <a:cs typeface="Microsoft JhengHei" charset="0"/>
+                      </a:endParaRPr>
+                    </a:p>
+                  </a:txBody>
+                  <a:tcPr marL="101600" marR="101600" marT="50800" marB="50800" anchor="ctr">
+                    <a:lnL w="0" cap="flat" cmpd="sng" algn="ctr">
+                      <a:noFill/>
+                    </a:lnL>
+                    <a:lnR w="0" cap="flat" cmpd="sng" algn="ctr">
+                      <a:noFill/>
+                    </a:lnR>
+                    <a:lnT w="0" cap="flat" cmpd="sng" algn="ctr">
+                      <a:noFill/>
+                    </a:lnT>
+                    <a:lnB w="6350" cap="flat" cmpd="sng" algn="ctr">
+                      <a:solidFill>
+                        <a:srgbClr val="E5E7EB"/>
+                      </a:solidFill>
+                      <a:prstDash val="solid"/>
+                      <a:round/>
+                      <a:headEnd type="none" w="med" len="med"/>
+                      <a:tailEnd type="none" w="med" len="med"/>
+                    </a:lnB>
+                    <a:solidFill>
+                      <a:srgbClr val="FFFFFF"/>
+                    </a:solidFill>
+                  </a:tcPr>
+                </a:tc>
+                <a:tc>
+                  <a:txBody>
+                    <a:bodyPr/>
+                    <a:lstStyle/>
+                    <a:p>
+                      <a:pPr indent="0" marL="0">
+                        <a:buNone/>
+                      </a:pPr>
+                      <a:r>
+                        <a:rPr lang="en-US" sz="900" dirty="0">
+                          <a:solidFill>
+                            <a:srgbClr val="111118"/>
+                          </a:solidFill>
+                          <a:latin typeface="Microsoft JhengHei" pitchFamily="34" charset="0"/>
+                          <a:ea typeface="Microsoft JhengHei" pitchFamily="34" charset="-122"/>
+                          <a:cs typeface="Microsoft JhengHei" pitchFamily="34" charset="-120"/>
+                        </a:rPr>
+                        <a:t>Turkish tea 2015.webm</a:t>
+                      </a:r>
+                      <a:endParaRPr lang="en-US" sz="900" dirty="0">
+                        <a:latin typeface="Microsoft JhengHei" charset="0"/>
+                        <a:ea typeface="Microsoft JhengHei" charset="0"/>
+                        <a:cs typeface="Microsoft JhengHei" charset="0"/>
+                      </a:endParaRPr>
+                    </a:p>
+                  </a:txBody>
+                  <a:tcPr marL="101600" marR="101600" marT="50800" marB="50800" anchor="ctr">
+                    <a:lnL w="0" cap="flat" cmpd="sng" algn="ctr">
+                      <a:noFill/>
+                    </a:lnL>
+                    <a:lnR w="0" cap="flat" cmpd="sng" algn="ctr">
+                      <a:noFill/>
+                    </a:lnR>
+                    <a:lnT w="0" cap="flat" cmpd="sng" algn="ctr">
+                      <a:noFill/>
+                    </a:lnT>
+                    <a:lnB w="6350" cap="flat" cmpd="sng" algn="ctr">
+                      <a:solidFill>
+                        <a:srgbClr val="E5E7EB"/>
+                      </a:solidFill>
+                      <a:prstDash val="solid"/>
+                      <a:round/>
+                      <a:headEnd type="none" w="med" len="med"/>
+                      <a:tailEnd type="none" w="med" len="med"/>
+                    </a:lnB>
+                    <a:solidFill>
+                      <a:srgbClr val="FFFFFF"/>
+                    </a:solidFill>
+                  </a:tcPr>
+                </a:tc>
+                <a:tc>
+                  <a:txBody>
+                    <a:bodyPr/>
+                    <a:lstStyle/>
+                    <a:p>
+                      <a:pPr indent="0" marL="0">
+                        <a:buNone/>
+                      </a:pPr>
+                      <a:r>
+                        <a:rPr lang="en-US" sz="900" dirty="0">
+                          <a:solidFill>
+                            <a:srgbClr val="111118"/>
+                          </a:solidFill>
+                          <a:latin typeface="Microsoft JhengHei" pitchFamily="34" charset="0"/>
+                          <a:ea typeface="Microsoft JhengHei" pitchFamily="34" charset="-122"/>
+                          <a:cs typeface="Microsoft JhengHei" pitchFamily="34" charset="-120"/>
+                        </a:rPr>
+                        <a:t>Klapi</a:t>
+                      </a:r>
+                      <a:endParaRPr lang="en-US" sz="900" dirty="0">
+                        <a:latin typeface="Microsoft JhengHei" charset="0"/>
+                        <a:ea typeface="Microsoft JhengHei" charset="0"/>
+                        <a:cs typeface="Microsoft JhengHei" charset="0"/>
+                      </a:endParaRPr>
+                    </a:p>
+                  </a:txBody>
+                  <a:tcPr marL="101600" marR="101600" marT="50800" marB="50800" anchor="ctr">
+                    <a:lnL w="0" cap="flat" cmpd="sng" algn="ctr">
+                      <a:noFill/>
+                    </a:lnL>
+                    <a:lnR w="0" cap="flat" cmpd="sng" algn="ctr">
+                      <a:noFill/>
+                    </a:lnR>
+                    <a:lnT w="0" cap="flat" cmpd="sng" algn="ctr">
+                      <a:noFill/>
+                    </a:lnT>
+                    <a:lnB w="6350" cap="flat" cmpd="sng" algn="ctr">
+                      <a:solidFill>
+                        <a:srgbClr val="E5E7EB"/>
+                      </a:solidFill>
+                      <a:prstDash val="solid"/>
+                      <a:round/>
+                      <a:headEnd type="none" w="med" len="med"/>
+                      <a:tailEnd type="none" w="med" len="med"/>
+                    </a:lnB>
+                    <a:solidFill>
+                      <a:srgbClr val="FFFFFF"/>
+                    </a:solidFill>
+                  </a:tcPr>
+                </a:tc>
+                <a:tc>
+                  <a:txBody>
+                    <a:bodyPr/>
+                    <a:lstStyle/>
+                    <a:p>
+                      <a:pPr indent="0" marL="0">
+                        <a:buNone/>
+                      </a:pPr>
+                      <a:r>
+                        <a:rPr lang="en-US" sz="900" dirty="0">
+                          <a:solidFill>
+                            <a:srgbClr val="111118"/>
+                          </a:solidFill>
+                          <a:latin typeface="Microsoft JhengHei" pitchFamily="34" charset="0"/>
+                          <a:ea typeface="Microsoft JhengHei" pitchFamily="34" charset="-122"/>
+                          <a:cs typeface="Microsoft JhengHei" pitchFamily="34" charset="-120"/>
+                        </a:rPr>
+                        <a:t>CC BY-SA 4.0</a:t>
+                      </a:r>
+                      <a:endParaRPr lang="en-US" sz="900" dirty="0">
+                        <a:latin typeface="Microsoft JhengHei" charset="0"/>
+                        <a:ea typeface="Microsoft JhengHei" charset="0"/>
+                        <a:cs typeface="Microsoft JhengHei" charset="0"/>
+                      </a:endParaRPr>
+                    </a:p>
+                  </a:txBody>
+                  <a:tcPr marL="101600" marR="101600" marT="50800" marB="50800" anchor="ctr">
+                    <a:lnL w="0" cap="flat" cmpd="sng" algn="ctr">
+                      <a:noFill/>
+                    </a:lnL>
+                    <a:lnR w="0" cap="flat" cmpd="sng" algn="ctr">
+                      <a:noFill/>
+                    </a:lnR>
+                    <a:lnT w="0" cap="flat" cmpd="sng" algn="ctr">
+                      <a:noFill/>
+                    </a:lnT>
+                    <a:lnB w="6350" cap="flat" cmpd="sng" algn="ctr">
+                      <a:solidFill>
+                        <a:srgbClr val="E5E7EB"/>
+                      </a:solidFill>
+                      <a:prstDash val="solid"/>
+                      <a:round/>
+                      <a:headEnd type="none" w="med" len="med"/>
+                      <a:tailEnd type="none" w="med" len="med"/>
+                    </a:lnB>
+                    <a:solidFill>
+                      <a:srgbClr val="FFFFFF"/>
+                    </a:solidFill>
+                  </a:tcPr>
+                </a:tc>
+              </a:tr>
+              <a:tr h="358140">
+                <a:tc>
+                  <a:txBody>
+                    <a:bodyPr/>
+                    <a:lstStyle/>
+                    <a:p>
+                      <a:pPr indent="0" marL="0">
+                        <a:buNone/>
+                      </a:pPr>
+                      <a:r>
+                        <a:rPr lang="en-US" sz="900" dirty="0">
+                          <a:solidFill>
+                            <a:srgbClr val="111118"/>
+                          </a:solidFill>
+                          <a:latin typeface="Microsoft JhengHei" pitchFamily="34" charset="0"/>
+                          <a:ea typeface="Microsoft JhengHei" pitchFamily="34" charset="-122"/>
+                          <a:cs typeface="Microsoft JhengHei" pitchFamily="34" charset="-120"/>
+                        </a:rPr>
+                        <a:t>037</a:t>
+                      </a:r>
+                      <a:endParaRPr lang="en-US" sz="900" dirty="0">
+                        <a:latin typeface="Microsoft JhengHei" charset="0"/>
+                        <a:ea typeface="Microsoft JhengHei" charset="0"/>
+                        <a:cs typeface="Microsoft JhengHei" charset="0"/>
+                      </a:endParaRPr>
+                    </a:p>
+                  </a:txBody>
+                  <a:tcPr marL="101600" marR="101600" marT="50800" marB="50800" anchor="ctr">
+                    <a:lnL w="0" cap="flat" cmpd="sng" algn="ctr">
+                      <a:noFill/>
+                    </a:lnL>
+                    <a:lnR w="0" cap="flat" cmpd="sng" algn="ctr">
+                      <a:noFill/>
+                    </a:lnR>
+                    <a:lnT w="0" cap="flat" cmpd="sng" algn="ctr">
+                      <a:noFill/>
+                    </a:lnT>
+                    <a:lnB w="6350" cap="flat" cmpd="sng" algn="ctr">
+                      <a:solidFill>
+                        <a:srgbClr val="E5E7EB"/>
+                      </a:solidFill>
+                      <a:prstDash val="solid"/>
+                      <a:round/>
+                      <a:headEnd type="none" w="med" len="med"/>
+                      <a:tailEnd type="none" w="med" len="med"/>
+                    </a:lnB>
+                    <a:solidFill>
+                      <a:srgbClr val="FFFFFF"/>
+                    </a:solidFill>
+                  </a:tcPr>
+                </a:tc>
+                <a:tc>
+                  <a:txBody>
+                    <a:bodyPr/>
+                    <a:lstStyle/>
+                    <a:p>
+                      <a:pPr indent="0" marL="0">
+                        <a:buNone/>
+                      </a:pPr>
+                      <a:r>
+                        <a:rPr lang="en-US" sz="900" dirty="0">
+                          <a:solidFill>
+                            <a:srgbClr val="111118"/>
+                          </a:solidFill>
+                          <a:latin typeface="Microsoft JhengHei" pitchFamily="34" charset="0"/>
+                          <a:ea typeface="Microsoft JhengHei" pitchFamily="34" charset="-122"/>
+                          <a:cs typeface="Microsoft JhengHei" pitchFamily="34" charset="-120"/>
+                        </a:rPr>
+                        <a:t>Jane pouring beer fast.webm</a:t>
+                      </a:r>
+                      <a:endParaRPr lang="en-US" sz="900" dirty="0">
+                        <a:latin typeface="Microsoft JhengHei" charset="0"/>
+                        <a:ea typeface="Microsoft JhengHei" charset="0"/>
+                        <a:cs typeface="Microsoft JhengHei" charset="0"/>
+                      </a:endParaRPr>
+                    </a:p>
+                  </a:txBody>
+                  <a:tcPr marL="101600" marR="101600" marT="50800" marB="50800" anchor="ctr">
+                    <a:lnL w="0" cap="flat" cmpd="sng" algn="ctr">
+                      <a:noFill/>
+                    </a:lnL>
+                    <a:lnR w="0" cap="flat" cmpd="sng" algn="ctr">
+                      <a:noFill/>
+                    </a:lnR>
+                    <a:lnT w="0" cap="flat" cmpd="sng" algn="ctr">
+                      <a:noFill/>
+                    </a:lnT>
+                    <a:lnB w="6350" cap="flat" cmpd="sng" algn="ctr">
+                      <a:solidFill>
+                        <a:srgbClr val="E5E7EB"/>
+                      </a:solidFill>
+                      <a:prstDash val="solid"/>
+                      <a:round/>
+                      <a:headEnd type="none" w="med" len="med"/>
+                      <a:tailEnd type="none" w="med" len="med"/>
+                    </a:lnB>
+                    <a:solidFill>
+                      <a:srgbClr val="FFFFFF"/>
+                    </a:solidFill>
+                  </a:tcPr>
+                </a:tc>
+                <a:tc>
+                  <a:txBody>
+                    <a:bodyPr/>
+                    <a:lstStyle/>
+                    <a:p>
+                      <a:pPr indent="0" marL="0">
+                        <a:buNone/>
+                      </a:pPr>
+                      <a:r>
+                        <a:rPr lang="en-US" sz="900" dirty="0">
+                          <a:solidFill>
+                            <a:srgbClr val="111118"/>
+                          </a:solidFill>
+                          <a:latin typeface="Microsoft JhengHei" pitchFamily="34" charset="0"/>
+                          <a:ea typeface="Microsoft JhengHei" pitchFamily="34" charset="-122"/>
+                          <a:cs typeface="Microsoft JhengHei" pitchFamily="34" charset="-120"/>
+                        </a:rPr>
+                        <a:t>Angulidayaaluta</a:t>
+                      </a:r>
+                      <a:endParaRPr lang="en-US" sz="900" dirty="0">
+                        <a:latin typeface="Microsoft JhengHei" charset="0"/>
+                        <a:ea typeface="Microsoft JhengHei" charset="0"/>
+                        <a:cs typeface="Microsoft JhengHei" charset="0"/>
+                      </a:endParaRPr>
+                    </a:p>
+                  </a:txBody>
+                  <a:tcPr marL="101600" marR="101600" marT="50800" marB="50800" anchor="ctr">
+                    <a:lnL w="0" cap="flat" cmpd="sng" algn="ctr">
+                      <a:noFill/>
+                    </a:lnL>
+                    <a:lnR w="0" cap="flat" cmpd="sng" algn="ctr">
+                      <a:noFill/>
+                    </a:lnR>
+                    <a:lnT w="0" cap="flat" cmpd="sng" algn="ctr">
+                      <a:noFill/>
+                    </a:lnT>
+                    <a:lnB w="6350" cap="flat" cmpd="sng" algn="ctr">
+                      <a:solidFill>
+                        <a:srgbClr val="E5E7EB"/>
+                      </a:solidFill>
+                      <a:prstDash val="solid"/>
+                      <a:round/>
+                      <a:headEnd type="none" w="med" len="med"/>
+                      <a:tailEnd type="none" w="med" len="med"/>
+                    </a:lnB>
+                    <a:solidFill>
+                      <a:srgbClr val="FFFFFF"/>
+                    </a:solidFill>
+                  </a:tcPr>
+                </a:tc>
+                <a:tc>
+                  <a:txBody>
+                    <a:bodyPr/>
+                    <a:lstStyle/>
+                    <a:p>
+                      <a:pPr indent="0" marL="0">
+                        <a:buNone/>
+                      </a:pPr>
+                      <a:r>
+                        <a:rPr lang="en-US" sz="900" dirty="0">
+                          <a:solidFill>
+                            <a:srgbClr val="111118"/>
+                          </a:solidFill>
+                          <a:latin typeface="Microsoft JhengHei" pitchFamily="34" charset="0"/>
+                          <a:ea typeface="Microsoft JhengHei" pitchFamily="34" charset="-122"/>
+                          <a:cs typeface="Microsoft JhengHei" pitchFamily="34" charset="-120"/>
+                        </a:rPr>
+                        <a:t>CC BY-SA 4.0</a:t>
+                      </a:r>
+                      <a:endParaRPr lang="en-US" sz="900" dirty="0">
+                        <a:latin typeface="Microsoft JhengHei" charset="0"/>
+                        <a:ea typeface="Microsoft JhengHei" charset="0"/>
+                        <a:cs typeface="Microsoft JhengHei" charset="0"/>
+                      </a:endParaRPr>
+                    </a:p>
+                  </a:txBody>
+                  <a:tcPr marL="101600" marR="101600" marT="50800" marB="50800" anchor="ctr">
+                    <a:lnL w="0" cap="flat" cmpd="sng" algn="ctr">
+                      <a:noFill/>
+                    </a:lnL>
+                    <a:lnR w="0" cap="flat" cmpd="sng" algn="ctr">
+                      <a:noFill/>
+                    </a:lnR>
+                    <a:lnT w="0" cap="flat" cmpd="sng" algn="ctr">
+                      <a:noFill/>
+                    </a:lnT>
+                    <a:lnB w="6350" cap="flat" cmpd="sng" algn="ctr">
+                      <a:solidFill>
+                        <a:srgbClr val="E5E7EB"/>
+                      </a:solidFill>
+                      <a:prstDash val="solid"/>
+                      <a:round/>
+                      <a:headEnd type="none" w="med" len="med"/>
+                      <a:tailEnd type="none" w="med" len="med"/>
+                    </a:lnB>
+                    <a:solidFill>
+                      <a:srgbClr val="FFFFFF"/>
+                    </a:solidFill>
+                  </a:tcPr>
+                </a:tc>
+              </a:tr>
+              <a:tr h="358140">
+                <a:tc>
+                  <a:txBody>
+                    <a:bodyPr/>
+                    <a:lstStyle/>
+                    <a:p>
+                      <a:pPr indent="0" marL="0">
+                        <a:buNone/>
+                      </a:pPr>
+                      <a:r>
+                        <a:rPr lang="en-US" sz="900" dirty="0">
+                          <a:solidFill>
+                            <a:srgbClr val="111118"/>
+                          </a:solidFill>
+                          <a:latin typeface="Microsoft JhengHei" pitchFamily="34" charset="0"/>
+                          <a:ea typeface="Microsoft JhengHei" pitchFamily="34" charset="-122"/>
+                          <a:cs typeface="Microsoft JhengHei" pitchFamily="34" charset="-120"/>
+                        </a:rPr>
+                        <a:t>038</a:t>
+                      </a:r>
+                      <a:endParaRPr lang="en-US" sz="900" dirty="0">
+                        <a:latin typeface="Microsoft JhengHei" charset="0"/>
+                        <a:ea typeface="Microsoft JhengHei" charset="0"/>
+                        <a:cs typeface="Microsoft JhengHei" charset="0"/>
+                      </a:endParaRPr>
+                    </a:p>
+                  </a:txBody>
+                  <a:tcPr marL="101600" marR="101600" marT="50800" marB="50800" anchor="ctr">
+                    <a:lnL w="0" cap="flat" cmpd="sng" algn="ctr">
+                      <a:noFill/>
+                    </a:lnL>
+                    <a:lnR w="0" cap="flat" cmpd="sng" algn="ctr">
+                      <a:noFill/>
+                    </a:lnR>
+                    <a:lnT w="0" cap="flat" cmpd="sng" algn="ctr">
+                      <a:noFill/>
+                    </a:lnT>
+                    <a:lnB w="6350" cap="flat" cmpd="sng" algn="ctr">
+                      <a:solidFill>
+                        <a:srgbClr val="E5E7EB"/>
+                      </a:solidFill>
+                      <a:prstDash val="solid"/>
+                      <a:round/>
+                      <a:headEnd type="none" w="med" len="med"/>
+                      <a:tailEnd type="none" w="med" len="med"/>
+                    </a:lnB>
+                    <a:solidFill>
+                      <a:srgbClr val="FFFFFF"/>
+                    </a:solidFill>
+                  </a:tcPr>
+                </a:tc>
+                <a:tc>
+                  <a:txBody>
+                    <a:bodyPr/>
+                    <a:lstStyle/>
+                    <a:p>
+                      <a:pPr indent="0" marL="0">
+                        <a:buNone/>
+                      </a:pPr>
+                      <a:r>
+                        <a:rPr lang="en-US" sz="900" dirty="0">
+                          <a:solidFill>
+                            <a:srgbClr val="111118"/>
+                          </a:solidFill>
+                          <a:latin typeface="Microsoft JhengHei" pitchFamily="34" charset="0"/>
+                          <a:ea typeface="Microsoft JhengHei" pitchFamily="34" charset="-122"/>
+                          <a:cs typeface="Microsoft JhengHei" pitchFamily="34" charset="-120"/>
+                        </a:rPr>
+                        <a:t>Turkovich Family Wines - June 2019 - Stierch 03.ogv</a:t>
+                      </a:r>
+                      <a:endParaRPr lang="en-US" sz="900" dirty="0">
+                        <a:latin typeface="Microsoft JhengHei" charset="0"/>
+                        <a:ea typeface="Microsoft JhengHei" charset="0"/>
+                        <a:cs typeface="Microsoft JhengHei" charset="0"/>
+                      </a:endParaRPr>
+                    </a:p>
+                  </a:txBody>
+                  <a:tcPr marL="101600" marR="101600" marT="50800" marB="50800" anchor="ctr">
+                    <a:lnL w="0" cap="flat" cmpd="sng" algn="ctr">
+                      <a:noFill/>
+                    </a:lnL>
+                    <a:lnR w="0" cap="flat" cmpd="sng" algn="ctr">
+                      <a:noFill/>
+                    </a:lnR>
+                    <a:lnT w="0" cap="flat" cmpd="sng" algn="ctr">
+                      <a:noFill/>
+                    </a:lnT>
+                    <a:lnB w="6350" cap="flat" cmpd="sng" algn="ctr">
+                      <a:solidFill>
+                        <a:srgbClr val="E5E7EB"/>
+                      </a:solidFill>
+                      <a:prstDash val="solid"/>
+                      <a:round/>
+                      <a:headEnd type="none" w="med" len="med"/>
+                      <a:tailEnd type="none" w="med" len="med"/>
+                    </a:lnB>
+                    <a:solidFill>
+                      <a:srgbClr val="FFFFFF"/>
+                    </a:solidFill>
+                  </a:tcPr>
+                </a:tc>
+                <a:tc>
+                  <a:txBody>
+                    <a:bodyPr/>
+                    <a:lstStyle/>
+                    <a:p>
+                      <a:pPr indent="0" marL="0">
+                        <a:buNone/>
+                      </a:pPr>
+                      <a:r>
+                        <a:rPr lang="en-US" sz="900" dirty="0">
+                          <a:solidFill>
+                            <a:srgbClr val="111118"/>
+                          </a:solidFill>
+                          <a:latin typeface="Microsoft JhengHei" pitchFamily="34" charset="0"/>
+                          <a:ea typeface="Microsoft JhengHei" pitchFamily="34" charset="-122"/>
+                          <a:cs typeface="Microsoft JhengHei" pitchFamily="34" charset="-120"/>
+                        </a:rPr>
+                        <a:t>Missvain</a:t>
+                      </a:r>
+                      <a:endParaRPr lang="en-US" sz="900" dirty="0">
+                        <a:latin typeface="Microsoft JhengHei" charset="0"/>
+                        <a:ea typeface="Microsoft JhengHei" charset="0"/>
+                        <a:cs typeface="Microsoft JhengHei" charset="0"/>
+                      </a:endParaRPr>
+                    </a:p>
+                  </a:txBody>
+                  <a:tcPr marL="101600" marR="101600" marT="50800" marB="50800" anchor="ctr">
+                    <a:lnL w="0" cap="flat" cmpd="sng" algn="ctr">
+                      <a:noFill/>
+                    </a:lnL>
+                    <a:lnR w="0" cap="flat" cmpd="sng" algn="ctr">
+                      <a:noFill/>
+                    </a:lnR>
+                    <a:lnT w="0" cap="flat" cmpd="sng" algn="ctr">
+                      <a:noFill/>
+                    </a:lnT>
+                    <a:lnB w="6350" cap="flat" cmpd="sng" algn="ctr">
+                      <a:solidFill>
+                        <a:srgbClr val="E5E7EB"/>
+                      </a:solidFill>
+                      <a:prstDash val="solid"/>
+                      <a:round/>
+                      <a:headEnd type="none" w="med" len="med"/>
+                      <a:tailEnd type="none" w="med" len="med"/>
+                    </a:lnB>
+                    <a:solidFill>
+                      <a:srgbClr val="FFFFFF"/>
+                    </a:solidFill>
+                  </a:tcPr>
+                </a:tc>
+                <a:tc>
+                  <a:txBody>
+                    <a:bodyPr/>
+                    <a:lstStyle/>
+                    <a:p>
+                      <a:pPr indent="0" marL="0">
+                        <a:buNone/>
+                      </a:pPr>
+                      <a:r>
+                        <a:rPr lang="en-US" sz="900" dirty="0">
+                          <a:solidFill>
+                            <a:srgbClr val="111118"/>
+                          </a:solidFill>
+                          <a:latin typeface="Microsoft JhengHei" pitchFamily="34" charset="0"/>
+                          <a:ea typeface="Microsoft JhengHei" pitchFamily="34" charset="-122"/>
+                          <a:cs typeface="Microsoft JhengHei" pitchFamily="34" charset="-120"/>
+                        </a:rPr>
+                        <a:t>CC BY 4.0</a:t>
+                      </a:r>
+                      <a:endParaRPr lang="en-US" sz="900" dirty="0">
+                        <a:latin typeface="Microsoft JhengHei" charset="0"/>
+                        <a:ea typeface="Microsoft JhengHei" charset="0"/>
+                        <a:cs typeface="Microsoft JhengHei" charset="0"/>
+                      </a:endParaRPr>
+                    </a:p>
+                  </a:txBody>
+                  <a:tcPr marL="101600" marR="101600" marT="50800" marB="50800" anchor="ctr">
+                    <a:lnL w="0" cap="flat" cmpd="sng" algn="ctr">
+                      <a:noFill/>
+                    </a:lnL>
+                    <a:lnR w="0" cap="flat" cmpd="sng" algn="ctr">
+                      <a:noFill/>
+                    </a:lnR>
+                    <a:lnT w="0" cap="flat" cmpd="sng" algn="ctr">
+                      <a:noFill/>
+                    </a:lnT>
+                    <a:lnB w="6350" cap="flat" cmpd="sng" algn="ctr">
+                      <a:solidFill>
+                        <a:srgbClr val="E5E7EB"/>
+                      </a:solidFill>
+                      <a:prstDash val="solid"/>
+                      <a:round/>
+                      <a:headEnd type="none" w="med" len="med"/>
+                      <a:tailEnd type="none" w="med" len="med"/>
+                    </a:lnB>
+                    <a:solidFill>
+                      <a:srgbClr val="FFFFFF"/>
+                    </a:solidFill>
+                  </a:tcPr>
+                </a:tc>
+              </a:tr>
+              <a:tr h="358140">
+                <a:tc>
+                  <a:txBody>
+                    <a:bodyPr/>
+                    <a:lstStyle/>
+                    <a:p>
+                      <a:pPr indent="0" marL="0">
+                        <a:buNone/>
+                      </a:pPr>
+                      <a:r>
+                        <a:rPr lang="en-US" sz="900" dirty="0">
+                          <a:solidFill>
+                            <a:srgbClr val="111118"/>
+                          </a:solidFill>
+                          <a:latin typeface="Microsoft JhengHei" pitchFamily="34" charset="0"/>
+                          <a:ea typeface="Microsoft JhengHei" pitchFamily="34" charset="-122"/>
+                          <a:cs typeface="Microsoft JhengHei" pitchFamily="34" charset="-120"/>
+                        </a:rPr>
+                        <a:t>039</a:t>
+                      </a:r>
+                      <a:endParaRPr lang="en-US" sz="900" dirty="0">
+                        <a:latin typeface="Microsoft JhengHei" charset="0"/>
+                        <a:ea typeface="Microsoft JhengHei" charset="0"/>
+                        <a:cs typeface="Microsoft JhengHei" charset="0"/>
+                      </a:endParaRPr>
+                    </a:p>
+                  </a:txBody>
+                  <a:tcPr marL="101600" marR="101600" marT="50800" marB="50800" anchor="ctr">
+                    <a:lnL w="0" cap="flat" cmpd="sng" algn="ctr">
+                      <a:noFill/>
+                    </a:lnL>
+                    <a:lnR w="0" cap="flat" cmpd="sng" algn="ctr">
+                      <a:noFill/>
+                    </a:lnR>
+                    <a:lnT w="0" cap="flat" cmpd="sng" algn="ctr">
+                      <a:noFill/>
+                    </a:lnT>
+                    <a:lnB w="6350" cap="flat" cmpd="sng" algn="ctr">
+                      <a:solidFill>
+                        <a:srgbClr val="E5E7EB"/>
+                      </a:solidFill>
+                      <a:prstDash val="solid"/>
+                      <a:round/>
+                      <a:headEnd type="none" w="med" len="med"/>
+                      <a:tailEnd type="none" w="med" len="med"/>
+                    </a:lnB>
+                    <a:solidFill>
+                      <a:srgbClr val="FFFFFF"/>
+                    </a:solidFill>
+                  </a:tcPr>
+                </a:tc>
+                <a:tc>
+                  <a:txBody>
+                    <a:bodyPr/>
+                    <a:lstStyle/>
+                    <a:p>
+                      <a:pPr indent="0" marL="0">
+                        <a:buNone/>
+                      </a:pPr>
+                      <a:r>
+                        <a:rPr lang="en-US" sz="900" dirty="0">
+                          <a:solidFill>
+                            <a:srgbClr val="111118"/>
+                          </a:solidFill>
+                          <a:latin typeface="Microsoft JhengHei" pitchFamily="34" charset="0"/>
+                          <a:ea typeface="Microsoft JhengHei" pitchFamily="34" charset="-122"/>
+                          <a:cs typeface="Microsoft JhengHei" pitchFamily="34" charset="-120"/>
+                        </a:rPr>
+                        <a:t>Drinking glass symphony.ogv</a:t>
+                      </a:r>
+                      <a:endParaRPr lang="en-US" sz="900" dirty="0">
+                        <a:latin typeface="Microsoft JhengHei" charset="0"/>
+                        <a:ea typeface="Microsoft JhengHei" charset="0"/>
+                        <a:cs typeface="Microsoft JhengHei" charset="0"/>
+                      </a:endParaRPr>
+                    </a:p>
+                  </a:txBody>
+                  <a:tcPr marL="101600" marR="101600" marT="50800" marB="50800" anchor="ctr">
+                    <a:lnL w="0" cap="flat" cmpd="sng" algn="ctr">
+                      <a:noFill/>
+                    </a:lnL>
+                    <a:lnR w="0" cap="flat" cmpd="sng" algn="ctr">
+                      <a:noFill/>
+                    </a:lnR>
+                    <a:lnT w="0" cap="flat" cmpd="sng" algn="ctr">
+                      <a:noFill/>
+                    </a:lnT>
+                    <a:lnB w="6350" cap="flat" cmpd="sng" algn="ctr">
+                      <a:solidFill>
+                        <a:srgbClr val="E5E7EB"/>
+                      </a:solidFill>
+                      <a:prstDash val="solid"/>
+                      <a:round/>
+                      <a:headEnd type="none" w="med" len="med"/>
+                      <a:tailEnd type="none" w="med" len="med"/>
+                    </a:lnB>
+                    <a:solidFill>
+                      <a:srgbClr val="FFFFFF"/>
+                    </a:solidFill>
+                  </a:tcPr>
+                </a:tc>
+                <a:tc>
+                  <a:txBody>
+                    <a:bodyPr/>
+                    <a:lstStyle/>
+                    <a:p>
+                      <a:pPr indent="0" marL="0">
+                        <a:buNone/>
+                      </a:pPr>
+                      <a:r>
+                        <a:rPr lang="en-US" sz="900" dirty="0">
+                          <a:solidFill>
+                            <a:srgbClr val="111118"/>
+                          </a:solidFill>
+                          <a:latin typeface="Microsoft JhengHei" pitchFamily="34" charset="0"/>
+                          <a:ea typeface="Microsoft JhengHei" pitchFamily="34" charset="-122"/>
+                          <a:cs typeface="Microsoft JhengHei" pitchFamily="34" charset="-120"/>
+                        </a:rPr>
+                        <a:t>IMG 4512</a:t>
+                      </a:r>
+                      <a:endParaRPr lang="en-US" sz="900" dirty="0">
+                        <a:latin typeface="Microsoft JhengHei" charset="0"/>
+                        <a:ea typeface="Microsoft JhengHei" charset="0"/>
+                        <a:cs typeface="Microsoft JhengHei" charset="0"/>
+                      </a:endParaRPr>
+                    </a:p>
+                  </a:txBody>
+                  <a:tcPr marL="101600" marR="101600" marT="50800" marB="50800" anchor="ctr">
+                    <a:lnL w="0" cap="flat" cmpd="sng" algn="ctr">
+                      <a:noFill/>
+                    </a:lnL>
+                    <a:lnR w="0" cap="flat" cmpd="sng" algn="ctr">
+                      <a:noFill/>
+                    </a:lnR>
+                    <a:lnT w="0" cap="flat" cmpd="sng" algn="ctr">
+                      <a:noFill/>
+                    </a:lnT>
+                    <a:lnB w="6350" cap="flat" cmpd="sng" algn="ctr">
+                      <a:solidFill>
+                        <a:srgbClr val="E5E7EB"/>
+                      </a:solidFill>
+                      <a:prstDash val="solid"/>
+                      <a:round/>
+                      <a:headEnd type="none" w="med" len="med"/>
+                      <a:tailEnd type="none" w="med" len="med"/>
+                    </a:lnB>
+                    <a:solidFill>
+                      <a:srgbClr val="FFFFFF"/>
+                    </a:solidFill>
+                  </a:tcPr>
+                </a:tc>
+                <a:tc>
+                  <a:txBody>
+                    <a:bodyPr/>
+                    <a:lstStyle/>
+                    <a:p>
+                      <a:pPr indent="0" marL="0">
+                        <a:buNone/>
+                      </a:pPr>
+                      <a:r>
+                        <a:rPr lang="en-US" sz="900" dirty="0">
+                          <a:solidFill>
+                            <a:srgbClr val="111118"/>
+                          </a:solidFill>
+                          <a:latin typeface="Microsoft JhengHei" pitchFamily="34" charset="0"/>
+                          <a:ea typeface="Microsoft JhengHei" pitchFamily="34" charset="-122"/>
+                          <a:cs typeface="Microsoft JhengHei" pitchFamily="34" charset="-120"/>
+                        </a:rPr>
+                        <a:t>CC0</a:t>
+                      </a:r>
+                      <a:endParaRPr lang="en-US" sz="900" dirty="0">
+                        <a:latin typeface="Microsoft JhengHei" charset="0"/>
+                        <a:ea typeface="Microsoft JhengHei" charset="0"/>
+                        <a:cs typeface="Microsoft JhengHei" charset="0"/>
+                      </a:endParaRPr>
+                    </a:p>
+                  </a:txBody>
+                  <a:tcPr marL="101600" marR="101600" marT="50800" marB="50800" anchor="ctr">
+                    <a:lnL w="0" cap="flat" cmpd="sng" algn="ctr">
+                      <a:noFill/>
+                    </a:lnL>
+                    <a:lnR w="0" cap="flat" cmpd="sng" algn="ctr">
+                      <a:noFill/>
+                    </a:lnR>
+                    <a:lnT w="0" cap="flat" cmpd="sng" algn="ctr">
+                      <a:noFill/>
+                    </a:lnT>
+                    <a:lnB w="6350" cap="flat" cmpd="sng" algn="ctr">
+                      <a:solidFill>
+                        <a:srgbClr val="E5E7EB"/>
+                      </a:solidFill>
+                      <a:prstDash val="solid"/>
+                      <a:round/>
+                      <a:headEnd type="none" w="med" len="med"/>
+                      <a:tailEnd type="none" w="med" len="med"/>
+                    </a:lnB>
+                    <a:solidFill>
+                      <a:srgbClr val="FFFFFF"/>
+                    </a:solidFill>
+                  </a:tcPr>
+                </a:tc>
+              </a:tr>
+              <a:tr h="358140">
+                <a:tc>
+                  <a:txBody>
+                    <a:bodyPr/>
+                    <a:lstStyle/>
+                    <a:p>
+                      <a:pPr indent="0" marL="0">
+                        <a:buNone/>
+                      </a:pPr>
+                      <a:r>
+                        <a:rPr lang="en-US" sz="900" dirty="0">
+                          <a:solidFill>
+                            <a:srgbClr val="111118"/>
+                          </a:solidFill>
+                          <a:latin typeface="Microsoft JhengHei" pitchFamily="34" charset="0"/>
+                          <a:ea typeface="Microsoft JhengHei" pitchFamily="34" charset="-122"/>
+                          <a:cs typeface="Microsoft JhengHei" pitchFamily="34" charset="-120"/>
+                        </a:rPr>
+                        <a:t>040</a:t>
+                      </a:r>
+                      <a:endParaRPr lang="en-US" sz="900" dirty="0">
+                        <a:latin typeface="Microsoft JhengHei" charset="0"/>
+                        <a:ea typeface="Microsoft JhengHei" charset="0"/>
+                        <a:cs typeface="Microsoft JhengHei" charset="0"/>
+                      </a:endParaRPr>
+                    </a:p>
+                  </a:txBody>
+                  <a:tcPr marL="101600" marR="101600" marT="50800" marB="50800" anchor="ctr">
+                    <a:lnL w="0" cap="flat" cmpd="sng" algn="ctr">
+                      <a:noFill/>
+                    </a:lnL>
+                    <a:lnR w="0" cap="flat" cmpd="sng" algn="ctr">
+                      <a:noFill/>
+                    </a:lnR>
+                    <a:lnT w="0" cap="flat" cmpd="sng" algn="ctr">
+                      <a:noFill/>
+                    </a:lnT>
+                    <a:lnB w="6350" cap="flat" cmpd="sng" algn="ctr">
+                      <a:solidFill>
+                        <a:srgbClr val="E5E7EB"/>
+                      </a:solidFill>
+                      <a:prstDash val="solid"/>
+                      <a:round/>
+                      <a:headEnd type="none" w="med" len="med"/>
+                      <a:tailEnd type="none" w="med" len="med"/>
+                    </a:lnB>
+                    <a:solidFill>
+                      <a:srgbClr val="FFFFFF"/>
+                    </a:solidFill>
+                  </a:tcPr>
+                </a:tc>
+                <a:tc>
+                  <a:txBody>
+                    <a:bodyPr/>
+                    <a:lstStyle/>
+                    <a:p>
+                      <a:pPr indent="0" marL="0">
+                        <a:buNone/>
+                      </a:pPr>
+                      <a:r>
+                        <a:rPr lang="en-US" sz="900" dirty="0">
+                          <a:solidFill>
+                            <a:srgbClr val="111118"/>
+                          </a:solidFill>
+                          <a:latin typeface="Microsoft JhengHei" pitchFamily="34" charset="0"/>
+                          <a:ea typeface="Microsoft JhengHei" pitchFamily="34" charset="-122"/>
+                          <a:cs typeface="Microsoft JhengHei" pitchFamily="34" charset="-120"/>
+                        </a:rPr>
+                        <a:t>Thermochromic mug.webm</a:t>
+                      </a:r>
+                      <a:endParaRPr lang="en-US" sz="900" dirty="0">
+                        <a:latin typeface="Microsoft JhengHei" charset="0"/>
+                        <a:ea typeface="Microsoft JhengHei" charset="0"/>
+                        <a:cs typeface="Microsoft JhengHei" charset="0"/>
+                      </a:endParaRPr>
+                    </a:p>
+                  </a:txBody>
+                  <a:tcPr marL="101600" marR="101600" marT="50800" marB="50800" anchor="ctr">
+                    <a:lnL w="0" cap="flat" cmpd="sng" algn="ctr">
+                      <a:noFill/>
+                    </a:lnL>
+                    <a:lnR w="0" cap="flat" cmpd="sng" algn="ctr">
+                      <a:noFill/>
+                    </a:lnR>
+                    <a:lnT w="0" cap="flat" cmpd="sng" algn="ctr">
+                      <a:noFill/>
+                    </a:lnT>
+                    <a:lnB w="6350" cap="flat" cmpd="sng" algn="ctr">
+                      <a:solidFill>
+                        <a:srgbClr val="E5E7EB"/>
+                      </a:solidFill>
+                      <a:prstDash val="solid"/>
+                      <a:round/>
+                      <a:headEnd type="none" w="med" len="med"/>
+                      <a:tailEnd type="none" w="med" len="med"/>
+                    </a:lnB>
+                    <a:solidFill>
+                      <a:srgbClr val="FFFFFF"/>
+                    </a:solidFill>
+                  </a:tcPr>
+                </a:tc>
+                <a:tc>
+                  <a:txBody>
+                    <a:bodyPr/>
+                    <a:lstStyle/>
+                    <a:p>
+                      <a:pPr indent="0" marL="0">
+                        <a:buNone/>
+                      </a:pPr>
+                      <a:r>
+                        <a:rPr lang="en-US" sz="900" dirty="0">
+                          <a:solidFill>
+                            <a:srgbClr val="111118"/>
+                          </a:solidFill>
+                          <a:latin typeface="Microsoft JhengHei" pitchFamily="34" charset="0"/>
+                          <a:ea typeface="Microsoft JhengHei" pitchFamily="34" charset="-122"/>
+                          <a:cs typeface="Microsoft JhengHei" pitchFamily="34" charset="-120"/>
+                        </a:rPr>
+                        <a:t>The wub</a:t>
+                      </a:r>
+                      <a:endParaRPr lang="en-US" sz="900" dirty="0">
+                        <a:latin typeface="Microsoft JhengHei" charset="0"/>
+                        <a:ea typeface="Microsoft JhengHei" charset="0"/>
+                        <a:cs typeface="Microsoft JhengHei" charset="0"/>
+                      </a:endParaRPr>
+                    </a:p>
+                  </a:txBody>
+                  <a:tcPr marL="101600" marR="101600" marT="50800" marB="50800" anchor="ctr">
+                    <a:lnL w="0" cap="flat" cmpd="sng" algn="ctr">
+                      <a:noFill/>
+                    </a:lnL>
+                    <a:lnR w="0" cap="flat" cmpd="sng" algn="ctr">
+                      <a:noFill/>
+                    </a:lnR>
+                    <a:lnT w="0" cap="flat" cmpd="sng" algn="ctr">
+                      <a:noFill/>
+                    </a:lnT>
+                    <a:lnB w="6350" cap="flat" cmpd="sng" algn="ctr">
+                      <a:solidFill>
+                        <a:srgbClr val="E5E7EB"/>
+                      </a:solidFill>
+                      <a:prstDash val="solid"/>
+                      <a:round/>
+                      <a:headEnd type="none" w="med" len="med"/>
+                      <a:tailEnd type="none" w="med" len="med"/>
+                    </a:lnB>
+                    <a:solidFill>
+                      <a:srgbClr val="FFFFFF"/>
+                    </a:solidFill>
+                  </a:tcPr>
+                </a:tc>
+                <a:tc>
+                  <a:txBody>
+                    <a:bodyPr/>
+                    <a:lstStyle/>
+                    <a:p>
+                      <a:pPr indent="0" marL="0">
+                        <a:buNone/>
+                      </a:pPr>
+                      <a:r>
+                        <a:rPr lang="en-US" sz="900" dirty="0">
+                          <a:solidFill>
+                            <a:srgbClr val="111118"/>
+                          </a:solidFill>
+                          <a:latin typeface="Microsoft JhengHei" pitchFamily="34" charset="0"/>
+                          <a:ea typeface="Microsoft JhengHei" pitchFamily="34" charset="-122"/>
+                          <a:cs typeface="Microsoft JhengHei" pitchFamily="34" charset="-120"/>
+                        </a:rPr>
+                        <a:t>CC BY-SA 4.0</a:t>
+                      </a:r>
+                      <a:endParaRPr lang="en-US" sz="900" dirty="0">
+                        <a:latin typeface="Microsoft JhengHei" charset="0"/>
+                        <a:ea typeface="Microsoft JhengHei" charset="0"/>
+                        <a:cs typeface="Microsoft JhengHei" charset="0"/>
+                      </a:endParaRPr>
+                    </a:p>
+                  </a:txBody>
+                  <a:tcPr marL="101600" marR="101600" marT="50800" marB="50800" anchor="ctr">
+                    <a:lnL w="0" cap="flat" cmpd="sng" algn="ctr">
+                      <a:noFill/>
+                    </a:lnL>
+                    <a:lnR w="0" cap="flat" cmpd="sng" algn="ctr">
+                      <a:noFill/>
+                    </a:lnR>
+                    <a:lnT w="0" cap="flat" cmpd="sng" algn="ctr">
+                      <a:noFill/>
+                    </a:lnT>
+                    <a:lnB w="6350" cap="flat" cmpd="sng" algn="ctr">
+                      <a:solidFill>
+                        <a:srgbClr val="E5E7EB"/>
+                      </a:solidFill>
+                      <a:prstDash val="solid"/>
+                      <a:round/>
+                      <a:headEnd type="none" w="med" len="med"/>
+                      <a:tailEnd type="none" w="med" len="med"/>
+                    </a:lnB>
+                    <a:solidFill>
+                      <a:srgbClr val="FFFFFF"/>
+                    </a:solidFill>
+                  </a:tcPr>
+                </a:tc>
+              </a:tr>
+              <a:tr h="358140">
+                <a:tc>
+                  <a:txBody>
+                    <a:bodyPr/>
+                    <a:lstStyle/>
+                    <a:p>
+                      <a:pPr indent="0" marL="0">
+                        <a:buNone/>
+                      </a:pPr>
+                      <a:r>
+                        <a:rPr lang="en-US" sz="900" dirty="0">
+                          <a:solidFill>
+                            <a:srgbClr val="111118"/>
+                          </a:solidFill>
+                          <a:latin typeface="Microsoft JhengHei" pitchFamily="34" charset="0"/>
+                          <a:ea typeface="Microsoft JhengHei" pitchFamily="34" charset="-122"/>
+                          <a:cs typeface="Microsoft JhengHei" pitchFamily="34" charset="-120"/>
+                        </a:rPr>
+                        <a:t>041</a:t>
+                      </a:r>
+                      <a:endParaRPr lang="en-US" sz="900" dirty="0">
+                        <a:latin typeface="Microsoft JhengHei" charset="0"/>
+                        <a:ea typeface="Microsoft JhengHei" charset="0"/>
+                        <a:cs typeface="Microsoft JhengHei" charset="0"/>
+                      </a:endParaRPr>
+                    </a:p>
+                  </a:txBody>
+                  <a:tcPr marL="101600" marR="101600" marT="50800" marB="50800" anchor="ctr">
+                    <a:lnL w="0" cap="flat" cmpd="sng" algn="ctr">
+                      <a:noFill/>
+                    </a:lnL>
+                    <a:lnR w="0" cap="flat" cmpd="sng" algn="ctr">
+                      <a:noFill/>
+                    </a:lnR>
+                    <a:lnT w="0" cap="flat" cmpd="sng" algn="ctr">
+                      <a:noFill/>
+                    </a:lnT>
+                    <a:lnB w="6350" cap="flat" cmpd="sng" algn="ctr">
+                      <a:solidFill>
+                        <a:srgbClr val="E5E7EB"/>
+                      </a:solidFill>
+                      <a:prstDash val="solid"/>
+                      <a:round/>
+                      <a:headEnd type="none" w="med" len="med"/>
+                      <a:tailEnd type="none" w="med" len="med"/>
+                    </a:lnB>
+                    <a:solidFill>
+                      <a:srgbClr val="FFFFFF"/>
+                    </a:solidFill>
+                  </a:tcPr>
+                </a:tc>
+                <a:tc>
+                  <a:txBody>
+                    <a:bodyPr/>
+                    <a:lstStyle/>
+                    <a:p>
+                      <a:pPr indent="0" marL="0">
+                        <a:buNone/>
+                      </a:pPr>
+                      <a:r>
+                        <a:rPr lang="en-US" sz="900" dirty="0">
+                          <a:solidFill>
+                            <a:srgbClr val="111118"/>
+                          </a:solidFill>
+                          <a:latin typeface="Microsoft JhengHei" pitchFamily="34" charset="0"/>
+                          <a:ea typeface="Microsoft JhengHei" pitchFamily="34" charset="-122"/>
+                          <a:cs typeface="Microsoft JhengHei" pitchFamily="34" charset="-120"/>
+                        </a:rPr>
+                        <a:t>Empty Streets of Paris COVID19.webm</a:t>
+                      </a:r>
+                      <a:endParaRPr lang="en-US" sz="900" dirty="0">
+                        <a:latin typeface="Microsoft JhengHei" charset="0"/>
+                        <a:ea typeface="Microsoft JhengHei" charset="0"/>
+                        <a:cs typeface="Microsoft JhengHei" charset="0"/>
+                      </a:endParaRPr>
+                    </a:p>
+                  </a:txBody>
+                  <a:tcPr marL="101600" marR="101600" marT="50800" marB="50800" anchor="ctr">
+                    <a:lnL w="0" cap="flat" cmpd="sng" algn="ctr">
+                      <a:noFill/>
+                    </a:lnL>
+                    <a:lnR w="0" cap="flat" cmpd="sng" algn="ctr">
+                      <a:noFill/>
+                    </a:lnR>
+                    <a:lnT w="0" cap="flat" cmpd="sng" algn="ctr">
+                      <a:noFill/>
+                    </a:lnT>
+                    <a:lnB w="6350" cap="flat" cmpd="sng" algn="ctr">
+                      <a:solidFill>
+                        <a:srgbClr val="E5E7EB"/>
+                      </a:solidFill>
+                      <a:prstDash val="solid"/>
+                      <a:round/>
+                      <a:headEnd type="none" w="med" len="med"/>
+                      <a:tailEnd type="none" w="med" len="med"/>
+                    </a:lnB>
+                    <a:solidFill>
+                      <a:srgbClr val="FFFFFF"/>
+                    </a:solidFill>
+                  </a:tcPr>
+                </a:tc>
+                <a:tc>
+                  <a:txBody>
+                    <a:bodyPr/>
+                    <a:lstStyle/>
+                    <a:p>
+                      <a:pPr indent="0" marL="0">
+                        <a:buNone/>
+                      </a:pPr>
+                      <a:r>
+                        <a:rPr lang="en-US" sz="900" dirty="0">
+                          <a:solidFill>
+                            <a:srgbClr val="111118"/>
+                          </a:solidFill>
+                          <a:latin typeface="Microsoft JhengHei" pitchFamily="34" charset="0"/>
+                          <a:ea typeface="Microsoft JhengHei" pitchFamily="34" charset="-122"/>
+                          <a:cs typeface="Microsoft JhengHei" pitchFamily="34" charset="-120"/>
+                        </a:rPr>
+                        <a:t>CreatorsCloud</a:t>
+                      </a:r>
+                      <a:endParaRPr lang="en-US" sz="900" dirty="0">
+                        <a:latin typeface="Microsoft JhengHei" charset="0"/>
+                        <a:ea typeface="Microsoft JhengHei" charset="0"/>
+                        <a:cs typeface="Microsoft JhengHei" charset="0"/>
+                      </a:endParaRPr>
+                    </a:p>
+                  </a:txBody>
+                  <a:tcPr marL="101600" marR="101600" marT="50800" marB="50800" anchor="ctr">
+                    <a:lnL w="0" cap="flat" cmpd="sng" algn="ctr">
+                      <a:noFill/>
+                    </a:lnL>
+                    <a:lnR w="0" cap="flat" cmpd="sng" algn="ctr">
+                      <a:noFill/>
+                    </a:lnR>
+                    <a:lnT w="0" cap="flat" cmpd="sng" algn="ctr">
+                      <a:noFill/>
+                    </a:lnT>
+                    <a:lnB w="6350" cap="flat" cmpd="sng" algn="ctr">
+                      <a:solidFill>
+                        <a:srgbClr val="E5E7EB"/>
+                      </a:solidFill>
+                      <a:prstDash val="solid"/>
+                      <a:round/>
+                      <a:headEnd type="none" w="med" len="med"/>
+                      <a:tailEnd type="none" w="med" len="med"/>
+                    </a:lnB>
+                    <a:solidFill>
+                      <a:srgbClr val="FFFFFF"/>
+                    </a:solidFill>
+                  </a:tcPr>
+                </a:tc>
+                <a:tc>
+                  <a:txBody>
+                    <a:bodyPr/>
+                    <a:lstStyle/>
+                    <a:p>
+                      <a:pPr indent="0" marL="0">
+                        <a:buNone/>
+                      </a:pPr>
+                      <a:r>
+                        <a:rPr lang="en-US" sz="900" dirty="0">
+                          <a:solidFill>
+                            <a:srgbClr val="111118"/>
+                          </a:solidFill>
+                          <a:latin typeface="Microsoft JhengHei" pitchFamily="34" charset="0"/>
+                          <a:ea typeface="Microsoft JhengHei" pitchFamily="34" charset="-122"/>
+                          <a:cs typeface="Microsoft JhengHei" pitchFamily="34" charset="-120"/>
+                        </a:rPr>
+                        <a:t>CC BY 3.0</a:t>
+                      </a:r>
+                      <a:endParaRPr lang="en-US" sz="900" dirty="0">
+                        <a:latin typeface="Microsoft JhengHei" charset="0"/>
+                        <a:ea typeface="Microsoft JhengHei" charset="0"/>
+                        <a:cs typeface="Microsoft JhengHei" charset="0"/>
+                      </a:endParaRPr>
+                    </a:p>
+                  </a:txBody>
+                  <a:tcPr marL="101600" marR="101600" marT="50800" marB="50800" anchor="ctr">
+                    <a:lnL w="0" cap="flat" cmpd="sng" algn="ctr">
+                      <a:noFill/>
+                    </a:lnL>
+                    <a:lnR w="0" cap="flat" cmpd="sng" algn="ctr">
+                      <a:noFill/>
+                    </a:lnR>
+                    <a:lnT w="0" cap="flat" cmpd="sng" algn="ctr">
+                      <a:noFill/>
+                    </a:lnT>
+                    <a:lnB w="6350" cap="flat" cmpd="sng" algn="ctr">
+                      <a:solidFill>
+                        <a:srgbClr val="E5E7EB"/>
+                      </a:solidFill>
+                      <a:prstDash val="solid"/>
+                      <a:round/>
+                      <a:headEnd type="none" w="med" len="med"/>
+                      <a:tailEnd type="none" w="med" len="med"/>
+                    </a:lnB>
+                    <a:solidFill>
+                      <a:srgbClr val="FFFFFF"/>
+                    </a:solidFill>
+                  </a:tcPr>
+                </a:tc>
+              </a:tr>
+              <a:tr h="358140">
+                <a:tc>
+                  <a:txBody>
+                    <a:bodyPr/>
+                    <a:lstStyle/>
+                    <a:p>
+                      <a:pPr indent="0" marL="0">
+                        <a:buNone/>
+                      </a:pPr>
+                      <a:r>
+                        <a:rPr lang="en-US" sz="900" dirty="0">
+                          <a:solidFill>
+                            <a:srgbClr val="111118"/>
+                          </a:solidFill>
+                          <a:latin typeface="Microsoft JhengHei" pitchFamily="34" charset="0"/>
+                          <a:ea typeface="Microsoft JhengHei" pitchFamily="34" charset="-122"/>
+                          <a:cs typeface="Microsoft JhengHei" pitchFamily="34" charset="-120"/>
+                        </a:rPr>
+                        <a:t>042</a:t>
+                      </a:r>
+                      <a:endParaRPr lang="en-US" sz="900" dirty="0">
+                        <a:latin typeface="Microsoft JhengHei" charset="0"/>
+                        <a:ea typeface="Microsoft JhengHei" charset="0"/>
+                        <a:cs typeface="Microsoft JhengHei" charset="0"/>
+                      </a:endParaRPr>
+                    </a:p>
+                  </a:txBody>
+                  <a:tcPr marL="101600" marR="101600" marT="50800" marB="50800" anchor="ctr">
+                    <a:lnL w="0" cap="flat" cmpd="sng" algn="ctr">
+                      <a:noFill/>
+                    </a:lnL>
+                    <a:lnR w="0" cap="flat" cmpd="sng" algn="ctr">
+                      <a:noFill/>
+                    </a:lnR>
+                    <a:lnT w="0" cap="flat" cmpd="sng" algn="ctr">
+                      <a:noFill/>
+                    </a:lnT>
+                    <a:lnB w="6350" cap="flat" cmpd="sng" algn="ctr">
+                      <a:solidFill>
+                        <a:srgbClr val="E5E7EB"/>
+                      </a:solidFill>
+                      <a:prstDash val="solid"/>
+                      <a:round/>
+                      <a:headEnd type="none" w="med" len="med"/>
+                      <a:tailEnd type="none" w="med" len="med"/>
+                    </a:lnB>
+                    <a:solidFill>
+                      <a:srgbClr val="FFFFFF"/>
+                    </a:solidFill>
+                  </a:tcPr>
+                </a:tc>
+                <a:tc>
+                  <a:txBody>
+                    <a:bodyPr/>
+                    <a:lstStyle/>
+                    <a:p>
+                      <a:pPr indent="0" marL="0">
+                        <a:buNone/>
+                      </a:pPr>
+                      <a:r>
+                        <a:rPr lang="en-US" sz="900" dirty="0">
+                          <a:solidFill>
+                            <a:srgbClr val="111118"/>
+                          </a:solidFill>
+                          <a:latin typeface="Microsoft JhengHei" pitchFamily="34" charset="0"/>
+                          <a:ea typeface="Microsoft JhengHei" pitchFamily="34" charset="-122"/>
+                          <a:cs typeface="Microsoft JhengHei" pitchFamily="34" charset="-120"/>
+                        </a:rPr>
+                        <a:t>IrishTraditionalMusic-IrishPub-Tokyo-2016-2-24.webm</a:t>
+                      </a:r>
+                      <a:endParaRPr lang="en-US" sz="900" dirty="0">
+                        <a:latin typeface="Microsoft JhengHei" charset="0"/>
+                        <a:ea typeface="Microsoft JhengHei" charset="0"/>
+                        <a:cs typeface="Microsoft JhengHei" charset="0"/>
+                      </a:endParaRPr>
+                    </a:p>
+                  </a:txBody>
+                  <a:tcPr marL="101600" marR="101600" marT="50800" marB="50800" anchor="ctr">
+                    <a:lnL w="0" cap="flat" cmpd="sng" algn="ctr">
+                      <a:noFill/>
+                    </a:lnL>
+                    <a:lnR w="0" cap="flat" cmpd="sng" algn="ctr">
+                      <a:noFill/>
+                    </a:lnR>
+                    <a:lnT w="0" cap="flat" cmpd="sng" algn="ctr">
+                      <a:noFill/>
+                    </a:lnT>
+                    <a:lnB w="6350" cap="flat" cmpd="sng" algn="ctr">
+                      <a:solidFill>
+                        <a:srgbClr val="E5E7EB"/>
+                      </a:solidFill>
+                      <a:prstDash val="solid"/>
+                      <a:round/>
+                      <a:headEnd type="none" w="med" len="med"/>
+                      <a:tailEnd type="none" w="med" len="med"/>
+                    </a:lnB>
+                    <a:solidFill>
+                      <a:srgbClr val="FFFFFF"/>
+                    </a:solidFill>
+                  </a:tcPr>
+                </a:tc>
+                <a:tc>
+                  <a:txBody>
+                    <a:bodyPr/>
+                    <a:lstStyle/>
+                    <a:p>
+                      <a:pPr indent="0" marL="0">
+                        <a:buNone/>
+                      </a:pPr>
+                      <a:r>
+                        <a:rPr lang="en-US" sz="900" dirty="0">
+                          <a:solidFill>
+                            <a:srgbClr val="111118"/>
+                          </a:solidFill>
+                          <a:latin typeface="Microsoft JhengHei" pitchFamily="34" charset="0"/>
+                          <a:ea typeface="Microsoft JhengHei" pitchFamily="34" charset="-122"/>
+                          <a:cs typeface="Microsoft JhengHei" pitchFamily="34" charset="-120"/>
+                        </a:rPr>
+                        <a:t>Nesnad</a:t>
+                      </a:r>
+                      <a:endParaRPr lang="en-US" sz="900" dirty="0">
+                        <a:latin typeface="Microsoft JhengHei" charset="0"/>
+                        <a:ea typeface="Microsoft JhengHei" charset="0"/>
+                        <a:cs typeface="Microsoft JhengHei" charset="0"/>
+                      </a:endParaRPr>
+                    </a:p>
+                  </a:txBody>
+                  <a:tcPr marL="101600" marR="101600" marT="50800" marB="50800" anchor="ctr">
+                    <a:lnL w="0" cap="flat" cmpd="sng" algn="ctr">
+                      <a:noFill/>
+                    </a:lnL>
+                    <a:lnR w="0" cap="flat" cmpd="sng" algn="ctr">
+                      <a:noFill/>
+                    </a:lnR>
+                    <a:lnT w="0" cap="flat" cmpd="sng" algn="ctr">
+                      <a:noFill/>
+                    </a:lnT>
+                    <a:lnB w="6350" cap="flat" cmpd="sng" algn="ctr">
+                      <a:solidFill>
+                        <a:srgbClr val="E5E7EB"/>
+                      </a:solidFill>
+                      <a:prstDash val="solid"/>
+                      <a:round/>
+                      <a:headEnd type="none" w="med" len="med"/>
+                      <a:tailEnd type="none" w="med" len="med"/>
+                    </a:lnB>
+                    <a:solidFill>
+                      <a:srgbClr val="FFFFFF"/>
+                    </a:solidFill>
+                  </a:tcPr>
+                </a:tc>
+                <a:tc>
+                  <a:txBody>
+                    <a:bodyPr/>
+                    <a:lstStyle/>
+                    <a:p>
+                      <a:pPr indent="0" marL="0">
+                        <a:buNone/>
+                      </a:pPr>
+                      <a:r>
+                        <a:rPr lang="en-US" sz="900" dirty="0">
+                          <a:solidFill>
+                            <a:srgbClr val="111118"/>
+                          </a:solidFill>
+                          <a:latin typeface="Microsoft JhengHei" pitchFamily="34" charset="0"/>
+                          <a:ea typeface="Microsoft JhengHei" pitchFamily="34" charset="-122"/>
+                          <a:cs typeface="Microsoft JhengHei" pitchFamily="34" charset="-120"/>
+                        </a:rPr>
+                        <a:t>CC BY 4.0</a:t>
+                      </a:r>
+                      <a:endParaRPr lang="en-US" sz="900" dirty="0">
+                        <a:latin typeface="Microsoft JhengHei" charset="0"/>
+                        <a:ea typeface="Microsoft JhengHei" charset="0"/>
+                        <a:cs typeface="Microsoft JhengHei" charset="0"/>
+                      </a:endParaRPr>
+                    </a:p>
+                  </a:txBody>
+                  <a:tcPr marL="101600" marR="101600" marT="50800" marB="50800" anchor="ctr">
+                    <a:lnL w="0" cap="flat" cmpd="sng" algn="ctr">
+                      <a:noFill/>
+                    </a:lnL>
+                    <a:lnR w="0" cap="flat" cmpd="sng" algn="ctr">
+                      <a:noFill/>
+                    </a:lnR>
+                    <a:lnT w="0" cap="flat" cmpd="sng" algn="ctr">
+                      <a:noFill/>
+                    </a:lnT>
+                    <a:lnB w="6350" cap="flat" cmpd="sng" algn="ctr">
+                      <a:solidFill>
+                        <a:srgbClr val="E5E7EB"/>
+                      </a:solidFill>
+                      <a:prstDash val="solid"/>
+                      <a:round/>
+                      <a:headEnd type="none" w="med" len="med"/>
+                      <a:tailEnd type="none" w="med" len="med"/>
+                    </a:lnB>
+                    <a:solidFill>
+                      <a:srgbClr val="FFFFFF"/>
+                    </a:solidFill>
+                  </a:tcPr>
+                </a:tc>
+              </a:tr>
+              <a:tr h="358140">
+                <a:tc>
+                  <a:txBody>
+                    <a:bodyPr/>
+                    <a:lstStyle/>
+                    <a:p>
+                      <a:pPr indent="0" marL="0">
+                        <a:buNone/>
+                      </a:pPr>
+                      <a:r>
+                        <a:rPr lang="en-US" sz="900" dirty="0">
+                          <a:solidFill>
+                            <a:srgbClr val="111118"/>
+                          </a:solidFill>
+                          <a:latin typeface="Microsoft JhengHei" pitchFamily="34" charset="0"/>
+                          <a:ea typeface="Microsoft JhengHei" pitchFamily="34" charset="-122"/>
+                          <a:cs typeface="Microsoft JhengHei" pitchFamily="34" charset="-120"/>
+                        </a:rPr>
+                        <a:t>043</a:t>
+                      </a:r>
+                      <a:endParaRPr lang="en-US" sz="900" dirty="0">
+                        <a:latin typeface="Microsoft JhengHei" charset="0"/>
+                        <a:ea typeface="Microsoft JhengHei" charset="0"/>
+                        <a:cs typeface="Microsoft JhengHei" charset="0"/>
+                      </a:endParaRPr>
+                    </a:p>
+                  </a:txBody>
+                  <a:tcPr marL="101600" marR="101600" marT="50800" marB="50800" anchor="ctr">
+                    <a:lnL w="0" cap="flat" cmpd="sng" algn="ctr">
+                      <a:noFill/>
+                    </a:lnL>
+                    <a:lnR w="0" cap="flat" cmpd="sng" algn="ctr">
+                      <a:noFill/>
+                    </a:lnR>
+                    <a:lnT w="0" cap="flat" cmpd="sng" algn="ctr">
+                      <a:noFill/>
+                    </a:lnT>
+                    <a:lnB w="6350" cap="flat" cmpd="sng" algn="ctr">
+                      <a:solidFill>
+                        <a:srgbClr val="E5E7EB"/>
+                      </a:solidFill>
+                      <a:prstDash val="solid"/>
+                      <a:round/>
+                      <a:headEnd type="none" w="med" len="med"/>
+                      <a:tailEnd type="none" w="med" len="med"/>
+                    </a:lnB>
+                    <a:solidFill>
+                      <a:srgbClr val="FFFFFF"/>
+                    </a:solidFill>
+                  </a:tcPr>
+                </a:tc>
+                <a:tc>
+                  <a:txBody>
+                    <a:bodyPr/>
+                    <a:lstStyle/>
+                    <a:p>
+                      <a:pPr indent="0" marL="0">
+                        <a:buNone/>
+                      </a:pPr>
+                      <a:r>
+                        <a:rPr lang="en-US" sz="900" dirty="0">
+                          <a:solidFill>
+                            <a:srgbClr val="111118"/>
+                          </a:solidFill>
+                          <a:latin typeface="Microsoft JhengHei" pitchFamily="34" charset="0"/>
+                          <a:ea typeface="Microsoft JhengHei" pitchFamily="34" charset="-122"/>
+                          <a:cs typeface="Microsoft JhengHei" pitchFamily="34" charset="-120"/>
+                        </a:rPr>
+                        <a:t>Couple holding hands.webm</a:t>
+                      </a:r>
+                      <a:endParaRPr lang="en-US" sz="900" dirty="0">
+                        <a:latin typeface="Microsoft JhengHei" charset="0"/>
+                        <a:ea typeface="Microsoft JhengHei" charset="0"/>
+                        <a:cs typeface="Microsoft JhengHei" charset="0"/>
+                      </a:endParaRPr>
+                    </a:p>
+                  </a:txBody>
+                  <a:tcPr marL="101600" marR="101600" marT="50800" marB="50800" anchor="ctr">
+                    <a:lnL w="0" cap="flat" cmpd="sng" algn="ctr">
+                      <a:noFill/>
+                    </a:lnL>
+                    <a:lnR w="0" cap="flat" cmpd="sng" algn="ctr">
+                      <a:noFill/>
+                    </a:lnR>
+                    <a:lnT w="0" cap="flat" cmpd="sng" algn="ctr">
+                      <a:noFill/>
+                    </a:lnT>
+                    <a:lnB w="6350" cap="flat" cmpd="sng" algn="ctr">
+                      <a:solidFill>
+                        <a:srgbClr val="E5E7EB"/>
+                      </a:solidFill>
+                      <a:prstDash val="solid"/>
+                      <a:round/>
+                      <a:headEnd type="none" w="med" len="med"/>
+                      <a:tailEnd type="none" w="med" len="med"/>
+                    </a:lnB>
+                    <a:solidFill>
+                      <a:srgbClr val="FFFFFF"/>
+                    </a:solidFill>
+                  </a:tcPr>
+                </a:tc>
+                <a:tc>
+                  <a:txBody>
+                    <a:bodyPr/>
+                    <a:lstStyle/>
+                    <a:p>
+                      <a:pPr indent="0" marL="0">
+                        <a:buNone/>
+                      </a:pPr>
+                      <a:r>
+                        <a:rPr lang="en-US" sz="900" dirty="0">
+                          <a:solidFill>
+                            <a:srgbClr val="111118"/>
+                          </a:solidFill>
+                          <a:latin typeface="Microsoft JhengHei" pitchFamily="34" charset="0"/>
+                          <a:ea typeface="Microsoft JhengHei" pitchFamily="34" charset="-122"/>
+                          <a:cs typeface="Microsoft JhengHei" pitchFamily="34" charset="-120"/>
+                        </a:rPr>
+                        <a:t>YouTube user “Editor”</a:t>
+                      </a:r>
+                      <a:endParaRPr lang="en-US" sz="900" dirty="0">
+                        <a:latin typeface="Microsoft JhengHei" charset="0"/>
+                        <a:ea typeface="Microsoft JhengHei" charset="0"/>
+                        <a:cs typeface="Microsoft JhengHei" charset="0"/>
+                      </a:endParaRPr>
+                    </a:p>
+                  </a:txBody>
+                  <a:tcPr marL="101600" marR="101600" marT="50800" marB="50800" anchor="ctr">
+                    <a:lnL w="0" cap="flat" cmpd="sng" algn="ctr">
+                      <a:noFill/>
+                    </a:lnL>
+                    <a:lnR w="0" cap="flat" cmpd="sng" algn="ctr">
+                      <a:noFill/>
+                    </a:lnR>
+                    <a:lnT w="0" cap="flat" cmpd="sng" algn="ctr">
+                      <a:noFill/>
+                    </a:lnT>
+                    <a:lnB w="6350" cap="flat" cmpd="sng" algn="ctr">
+                      <a:solidFill>
+                        <a:srgbClr val="E5E7EB"/>
+                      </a:solidFill>
+                      <a:prstDash val="solid"/>
+                      <a:round/>
+                      <a:headEnd type="none" w="med" len="med"/>
+                      <a:tailEnd type="none" w="med" len="med"/>
+                    </a:lnB>
+                    <a:solidFill>
+                      <a:srgbClr val="FFFFFF"/>
+                    </a:solidFill>
+                  </a:tcPr>
+                </a:tc>
+                <a:tc>
+                  <a:txBody>
+                    <a:bodyPr/>
+                    <a:lstStyle/>
+                    <a:p>
+                      <a:pPr indent="0" marL="0">
+                        <a:buNone/>
+                      </a:pPr>
+                      <a:r>
+                        <a:rPr lang="en-US" sz="900" dirty="0">
+                          <a:solidFill>
+                            <a:srgbClr val="111118"/>
+                          </a:solidFill>
+                          <a:latin typeface="Microsoft JhengHei" pitchFamily="34" charset="0"/>
+                          <a:ea typeface="Microsoft JhengHei" pitchFamily="34" charset="-122"/>
+                          <a:cs typeface="Microsoft JhengHei" pitchFamily="34" charset="-120"/>
+                        </a:rPr>
+                        <a:t>CC BY 3.0</a:t>
+                      </a:r>
+                      <a:endParaRPr lang="en-US" sz="900" dirty="0">
+                        <a:latin typeface="Microsoft JhengHei" charset="0"/>
+                        <a:ea typeface="Microsoft JhengHei" charset="0"/>
+                        <a:cs typeface="Microsoft JhengHei" charset="0"/>
+                      </a:endParaRPr>
+                    </a:p>
+                  </a:txBody>
+                  <a:tcPr marL="101600" marR="101600" marT="50800" marB="50800" anchor="ctr">
+                    <a:lnL w="0" cap="flat" cmpd="sng" algn="ctr">
+                      <a:noFill/>
+                    </a:lnL>
+                    <a:lnR w="0" cap="flat" cmpd="sng" algn="ctr">
+                      <a:noFill/>
+                    </a:lnR>
+                    <a:lnT w="0" cap="flat" cmpd="sng" algn="ctr">
+                      <a:noFill/>
+                    </a:lnT>
+                    <a:lnB w="6350" cap="flat" cmpd="sng" algn="ctr">
+                      <a:solidFill>
+                        <a:srgbClr val="E5E7EB"/>
+                      </a:solidFill>
+                      <a:prstDash val="solid"/>
+                      <a:round/>
+                      <a:headEnd type="none" w="med" len="med"/>
+                      <a:tailEnd type="none" w="med" len="med"/>
+                    </a:lnB>
+                    <a:solidFill>
+                      <a:srgbClr val="FFFFFF"/>
+                    </a:solidFill>
+                  </a:tcPr>
+                </a:tc>
+              </a:tr>
+            </a:tbl>
+          </a:graphicData>
+        </a:graphic>
+      </p:graphicFrame>
+      <p:sp>
+        <p:nvSpPr>
+          <p:cNvPr id="25" name="Slide Number Placeholder 0"/>
+          <p:cNvSpPr>
+            <a:spLocks noGrp="1"/>
+          </p:cNvSpPr>
+          <p:nvPr>
+            <p:ph type="sldNum" sz="quarter" idx="4294967295"/>
+          </p:nvPr>
+        </p:nvSpPr>
+        <p:spPr>
+          <a:xfrm>
+            <a:off x="11109960" y="6355080"/>
+            <a:ext cx="457200" cy="274320"/>
+          </a:xfrm>
+          <a:prstGeom prst="rect">
+            <a:avLst/>
+          </a:prstGeom>
+          <a:extLst>
+            <a:ext uri="{C572A759-6A51-4108-AA02-DFA0A04FC94B}">
+              <ma14:wrappingTextBoxFlag xmlns:ma14="http://schemas.microsoft.com/office/mac/drawingml/2011/main" val="0"/>
+            </a:ext>
+          </a:extLst>
+        </p:spPr>
+        <p:txBody>
+          <a:bodyPr/>
+          <a:lstStyle>
+            <a:lvl1pPr>
+              <a:defRPr sz="1000">
+                <a:solidFill>
+                  <a:srgbClr val="9CA3AF"/>
+                </a:solidFill>
+              </a:defRPr>
+            </a:lvl1pPr>
+          </a:lstStyle>
+          <a:p>
+            <a:pPr algn="r"/>
+            <a:fld id="{F7021451-1387-4CA6-816F-3879F97B5CBC}" type="slidenum">
+              <a:rPr b="0" lang="en-US"/>
+              <a:t>25</a:t>
             </a:fld>
             <a:endParaRPr lang="en-US"/>
           </a:p>
@@ -26534,7 +27074,7 @@
                   <a:srgbClr val="111118"/>
                 </a:solidFill>
               </a:rPr>
-              <a:t>Editors can now search footage; nobody checks the shot list</a:t>
+              <a:t>Editors can search footage; none checks length, takes or same-frame rules</a:t>
             </a:r>
             <a:endParaRPr lang="en-US" sz="2800" dirty="0"/>
           </a:p>
@@ -26760,7 +27300,7 @@
                           <a:ea typeface="Arial" pitchFamily="34" charset="-122"/>
                           <a:cs typeface="Arial" pitchFamily="34" charset="-120"/>
                         </a:rPr>
-                        <a:t>TIME RANGE IN CLIP</a:t>
+                        <a:t>FINDS THE MOMENT IN A CLIP</a:t>
                       </a:r>
                       <a:endParaRPr lang="en-US" sz="1000" dirty="0">
                         <a:latin typeface="Arial" charset="0"/>
@@ -27212,7 +27752,7 @@
                           <a:ea typeface="Arial" pitchFamily="34" charset="-122"/>
                           <a:cs typeface="Arial" pitchFamily="34" charset="-120"/>
                         </a:rPr>
-                        <a:t>~$22.99/mo (secondary)</a:t>
+                        <a:t>~$22.99/mo</a:t>
                       </a:r>
                       <a:endParaRPr lang="en-US" sz="1150" dirty="0">
                         <a:latin typeface="Arial" charset="0"/>
@@ -27464,7 +28004,7 @@
                           <a:ea typeface="Arial" pitchFamily="34" charset="-122"/>
                           <a:cs typeface="Arial" pitchFamily="34" charset="-120"/>
                         </a:rPr>
-                        <a:t>likely</a:t>
+                        <a:t>not stated (likely)</a:t>
                       </a:r>
                       <a:endParaRPr lang="en-US" sz="1150" dirty="0">
                         <a:latin typeface="Arial" charset="0"/>
@@ -28522,7 +29062,7 @@
                           <a:ea typeface="Arial" pitchFamily="34" charset="-122"/>
                           <a:cs typeface="Arial" pitchFamily="34" charset="-120"/>
                         </a:rPr>
-                        <a:t>vs shot list</a:t>
+                        <a:t>matches to shot list</a:t>
                       </a:r>
                       <a:endParaRPr lang="en-US" sz="1150" dirty="0">
                         <a:latin typeface="Arial" charset="0"/>
@@ -28924,7 +29464,7 @@
                           <a:ea typeface="Arial" pitchFamily="34" charset="-122"/>
                           <a:cs typeface="Arial" pitchFamily="34" charset="-120"/>
                         </a:rPr>
-                        <a:t>yes, with 'unknown'</a:t>
+                        <a:t>yes, and says when it can't tell</a:t>
                       </a:r>
                       <a:endParaRPr lang="en-US" sz="1150" dirty="0">
                         <a:latin typeface="Arial" charset="0"/>
@@ -29024,7 +29564,7 @@
                           <a:ea typeface="Arial" pitchFamily="34" charset="-122"/>
                           <a:cs typeface="Arial" pitchFamily="34" charset="-120"/>
                         </a:rPr>
-                        <a:t>see business</a:t>
+                        <a:t>see slide 18</a:t>
                       </a:r>
                       <a:endParaRPr lang="en-US" sz="1150" dirty="0">
                         <a:latin typeface="Arial" charset="0"/>
@@ -29115,7 +29655,7 @@
                   <a:srgbClr val="111118"/>
                 </a:solidFill>
               </a:rPr>
-              <a:t>Search tells you where a cup appears. SceneGap tells you whether the 3-second pour you promised exists.</a:t>
+              <a:t>Search tells you where a cup appears. SceneGap checks each clip against the shot's rules, for a person to confirm.</a:t>
             </a:r>
             <a:endParaRPr lang="en-US" sz="1350" dirty="0"/>
           </a:p>
@@ -29259,7 +29799,7 @@
                   <a:srgbClr val="111118"/>
                 </a:solidFill>
               </a:rPr>
-              <a:t>Requirement → constraint → evidence → decision</a:t>
+              <a:t>From your shot list to a decision you can play back</a:t>
             </a:r>
             <a:endParaRPr lang="en-US" sz="2800" dirty="0"/>
           </a:p>
@@ -29737,7 +30277,7 @@
                   <a:srgbClr val="4B5563"/>
                 </a:solidFill>
               </a:rPr>
-              <a:t>Probe, hash, cut shots, sample 1 frame/s on the original timestamps. CLIP image embeddings.</a:t>
+              <a:t>Find camera cuts and sample one frame per second on the original timecode; CLIP turns each frame into a searchable vector.</a:t>
             </a:r>
             <a:endParaRPr lang="en-US" sz="1200" dirty="0"/>
           </a:p>
@@ -29760,11 +30300,11 @@
             </a:avLst>
           </a:prstGeom>
           <a:solidFill>
-            <a:srgbClr val="6C4CF5"/>
+            <a:srgbClr val="8B78FF"/>
           </a:solidFill>
           <a:ln w="12700">
             <a:solidFill>
-              <a:srgbClr val="6C4CF5"/>
+              <a:srgbClr val="8B78FF"/>
             </a:solidFill>
             <a:prstDash val="solid"/>
           </a:ln>
@@ -29800,7 +30340,7 @@
                   <a:srgbClr val="FFFFFF"/>
                 </a:solidFill>
               </a:rPr>
-              <a:t>UGen300</a:t>
+              <a:t>PC today → UGen300</a:t>
             </a:r>
             <a:endParaRPr lang="en-US" sz="1050" dirty="0"/>
           </a:p>
@@ -29960,7 +30500,7 @@
                   <a:srgbClr val="4B5563"/>
                 </a:solidFill>
               </a:rPr>
-              <a:t>Runs of matching samples inside one shot; conservative duration bounds; 250 ms re-sampling when undecided.</a:t>
+              <a:t>Check length, takes and same-frame rules on the matching frames. When unsure, look again every 0.25 s.</a:t>
             </a:r>
             <a:endParaRPr lang="en-US" sz="1200" dirty="0"/>
           </a:p>
@@ -30183,7 +30723,7 @@
                   <a:srgbClr val="4B5563"/>
                 </a:solidFill>
               </a:rPr>
-              <a:t>Candidate / partial / not found / unverifiable, each with playable clips. A person accepts; gaps become reshoot cards.</a:t>
+              <a:t>Candidate / partial / not found / unverifiable, each with playable clips. A person accepts, or adds the shot to the reshoot list.</a:t>
             </a:r>
             <a:endParaRPr lang="en-US" sz="1200" dirty="0"/>
           </a:p>
@@ -30390,7 +30930,7 @@
                   <a:srgbClr val="111118"/>
                 </a:solidFill>
               </a:rPr>
-              <a:t>Four answers per shot, and a person has the last word</a:t>
+              <a:t>The AI gives one of four answers; only a person can mark a shot done</a:t>
             </a:r>
             <a:endParaRPr lang="en-US" sz="2800" dirty="0"/>
           </a:p>
@@ -31506,7 +32046,7 @@
                   <a:srgbClr val="111118"/>
                 </a:solidFill>
               </a:rPr>
-              <a:t>The coverage board a crew reads before leaving</a:t>
+              <a:t>Before leaving, the crew sees which shots are confirmed and which need a look</a:t>
             </a:r>
             <a:endParaRPr lang="en-US" sz="2800" dirty="0"/>
           </a:p>
@@ -31613,7 +32153,7 @@
       </p:sp>
       <p:pic>
         <p:nvPicPr>
-          <p:cNvPr id="6" name="Image 0" descr="The coverage board a crew reads before leaving">    </p:cNvPr>
+          <p:cNvPr id="6" name="Image 0" descr="Before leaving, the crew sees which shots are confirmed and which need a look">    </p:cNvPr>
           <p:cNvPicPr>
             <a:picLocks noChangeAspect="1"/>
           </p:cNvPicPr>
@@ -31768,7 +32308,7 @@
                   <a:srgbClr val="E5E7EB"/>
                 </a:solidFill>
               </a:rPr>
-              <a:t>Each row: the shot, the AI's answer, the person's answer, the best clip</a:t>
+              <a:t>Each row: the shot, the AI's answer, the person's decision, the clip</a:t>
             </a:r>
             <a:endParaRPr lang="en-US" sz="1250" dirty="0"/>
           </a:p>
@@ -31912,7 +32452,7 @@
                   <a:srgbClr val="111118"/>
                 </a:solidFill>
               </a:rPr>
-              <a:t>Every verdict plays its evidence</a:t>
+              <a:t>Every answer plays its clip</a:t>
             </a:r>
             <a:endParaRPr lang="en-US" sz="2800" dirty="0"/>
           </a:p>
@@ -32019,7 +32559,7 @@
       </p:sp>
       <p:pic>
         <p:nvPicPr>
-          <p:cNvPr id="6" name="Image 0" descr="Every verdict plays its evidence">    </p:cNvPr>
+          <p:cNvPr id="6" name="Image 0" descr="Every answer plays its clip">    </p:cNvPr>
           <p:cNvPicPr>
             <a:picLocks noChangeAspect="1"/>
           </p:cNvPicPr>
@@ -32174,7 +32714,7 @@
                   <a:srgbClr val="E5E7EB"/>
                 </a:solidFill>
               </a:rPr>
-              <a:t>Accept, reject, adjust range, send to reshoot</a:t>
+              <a:t>Accept, reject, adjust the range, add to reshoot list</a:t>
             </a:r>
             <a:endParaRPr lang="en-US" sz="1250" dirty="0"/>
           </a:p>
@@ -32192,7 +32732,7 @@
                   <a:srgbClr val="E5E7EB"/>
                 </a:solidFill>
               </a:rPr>
-              <a:t>Filmstrip and range chips on the original timecode</a:t>
+              <a:t>Filmstrip and clip ranges on the original timecode</a:t>
             </a:r>
             <a:endParaRPr lang="en-US" sz="1250" dirty="0"/>
           </a:p>
@@ -32336,7 +32876,7 @@
                   <a:srgbClr val="111118"/>
                 </a:solidFill>
               </a:rPr>
-              <a:t>Gaps become a reshoot list before the crew leaves</a:t>
+              <a:t>Shots nobody could find go on a reshoot list before the crew leaves</a:t>
             </a:r>
             <a:endParaRPr lang="en-US" sz="2800" dirty="0"/>
           </a:p>
@@ -32443,7 +32983,7 @@
       </p:sp>
       <p:pic>
         <p:nvPicPr>
-          <p:cNvPr id="6" name="Image 0" descr="Gaps become a reshoot list before the crew leaves">    </p:cNvPr>
+          <p:cNvPr id="6" name="Image 0" descr="Shots nobody could find go on a reshoot list before the crew leaves">    </p:cNvPr>
           <p:cNvPicPr>
             <a:picLocks noChangeAspect="1"/>
           </p:cNvPicPr>
@@ -32495,7 +33035,7 @@
                   <a:srgbClr val="6B7280"/>
                 </a:solidFill>
               </a:rPr>
-              <a:t>Reshoot list from the same demo: grinder, someone drinking, and the coffee bag were not in the footage.</a:t>
+              <a:t>Same demo: a person rejected the grinder and drinking candidates and put them, with the coffee bag, on the reshoot list.</a:t>
             </a:r>
             <a:endParaRPr lang="en-US" sz="1050" dirty="0"/>
           </a:p>
@@ -32634,7 +33174,7 @@
                   <a:srgbClr val="E5E7EB"/>
                 </a:solidFill>
               </a:rPr>
-              <a:t>Status: to confirm → shooting → done</a:t>
+              <a:t>Status: to decide → reshoot → shooting → done</a:t>
             </a:r>
             <a:endParaRPr lang="en-US" sz="1250" dirty="0"/>
           </a:p>
@@ -32901,7 +33441,7 @@
                   <a:srgbClr val="6B7280"/>
                 </a:solidFill>
               </a:rPr>
-              <a:t>Route A (ADR-002): CLIP ViT-B/32 image tower as Hailo's zoo HEF; text tower on the host with the same weights.</a:t>
+              <a:t>Plan (ADR-002): the image half of CLIP ViT-B/32 runs on the UGen300 as Hailo's precompiled model; the text half and every rule check stay on the PC.</a:t>
             </a:r>
             <a:endParaRPr lang="en-US" sz="1050" dirty="0"/>
           </a:p>

--- a/docs/deck/SceneGapEdge_StageI_Proposal.pptx
+++ b/docs/deck/SceneGapEdge_StageI_Proposal.pptx
@@ -131,13 +131,13 @@
   <p:extLst>
     <p:ext uri="{521415D9-36F7-43E2-AB2F-B90AF26B5E84}">
       <p14:sectionLst xmlns:p14="http://schemas.microsoft.com/office/powerpoint/2010/main">
-        <p14:section name="Problem" id="{20e5a9ca-29c1-c199-e5e5-81d081f3afcc}">
+        <p14:section name="Problem" id="{17f594a6-e4c1-0683-8936-8bb0449f3fff}">
           <p14:sldIdLst>
             <p14:sldId id="257"/>
             <p14:sldId id="258"/>
           </p14:sldIdLst>
         </p14:section>
-        <p14:section name="Solution" id="{51254f0d-8345-d7d6-6f60-171015cf08dc}">
+        <p14:section name="Solution" id="{e1a3e19d-ab88-ef00-7439-af459f9f5836}">
           <p14:sldIdLst>
             <p14:sldId id="259"/>
             <p14:sldId id="260"/>
@@ -146,13 +146,13 @@
             <p14:sldId id="263"/>
           </p14:sldIdLst>
         </p14:section>
-        <p14:section name="Hardware" id="{e1490248-59f3-7432-74f6-9cebdf684d91}">
+        <p14:section name="Hardware" id="{b4fb1340-d022-fcc4-c85e-4f06924850a4}">
           <p14:sldIdLst>
             <p14:sldId id="264"/>
             <p14:sldId id="265"/>
           </p14:sldIdLst>
         </p14:section>
-        <p14:section name="Evidence" id="{01de466a-6321-7c60-61ee-8a9e2fc29292}">
+        <p14:section name="Evidence" id="{25e529fd-e69e-fef7-b9b3-1430a3151a49}">
           <p14:sldIdLst>
             <p14:sldId id="266"/>
             <p14:sldId id="267"/>
@@ -161,25 +161,25 @@
             <p14:sldId id="270"/>
           </p14:sldIdLst>
         </p14:section>
-        <p14:section name="Engineering" id="{f2a0a78c-f13d-72d9-7a34-63a13d012caf}">
+        <p14:section name="Engineering" id="{b9c2d9c4-0346-c4cc-5fe1-39d07ef0fb73}">
           <p14:sldIdLst>
             <p14:sldId id="271"/>
           </p14:sldIdLst>
         </p14:section>
-        <p14:section name="Business" id="{6f2026c3-8829-ee9c-efd2-c67ed48aaf48}">
+        <p14:section name="Business" id="{4cd49748-cbae-ad5e-c117-719f0fc55aba}">
           <p14:sldIdLst>
             <p14:sldId id="272"/>
             <p14:sldId id="273"/>
           </p14:sldIdLst>
         </p14:section>
-        <p14:section name="Plan" id="{292a9716-7e87-b6bf-7ecb-b092cb224669}">
+        <p14:section name="Plan" id="{ea574385-e463-6d11-b68c-2126293677ec}">
           <p14:sldIdLst>
             <p14:sldId id="274"/>
             <p14:sldId id="275"/>
             <p14:sldId id="276"/>
           </p14:sldIdLst>
         </p14:section>
-        <p14:section name="Appendix" id="{023827eb-21fb-47e1-4157-331c2d4a5c91}">
+        <p14:section name="Appendix" id="{964ba821-e602-30b5-1da7-8d4d01e884b8}">
           <p14:sldIdLst>
             <p14:sldId id="277"/>
             <p14:sldId id="278"/>
@@ -3395,9 +3395,33 @@
           <a:chExt cx="0" cy="0"/>
         </a:xfrm>
       </p:grpSpPr>
-      <p:sp>
-        <p:nvSpPr>
-          <p:cNvPr id="2" name="Text 0"/>
+      <p:pic>
+        <p:nvPicPr>
+          <p:cNvPr id="2" name="Image 0" descr="C:\Users\yu9br\AppData\Local\Claude-Data\claude_pzs8sxrjxfjjc\scratch-workspaces\c862142c-bcba-48f7-a17f-6dc389d84d09\2507e86a-ea8c-427c-9ed4-55b4f6822600\scratch-2026-10-25-417d2c\decks\scenegap\img\cover_art.png">    </p:cNvPr>
+          <p:cNvPicPr>
+            <a:picLocks noChangeAspect="1"/>
+          </p:cNvPicPr>
+          <p:nvPr/>
+        </p:nvPicPr>
+        <p:blipFill>
+          <a:blip r:embed="rId1"/>
+          <a:stretch>
+            <a:fillRect/>
+          </a:stretch>
+        </p:blipFill>
+        <p:spPr>
+          <a:xfrm>
+            <a:off x="7071055" y="0"/>
+            <a:ext cx="5120640" cy="6858000"/>
+          </a:xfrm>
+          <a:prstGeom prst="rect">
+            <a:avLst/>
+          </a:prstGeom>
+        </p:spPr>
+      </p:pic>
+      <p:sp>
+        <p:nvSpPr>
+          <p:cNvPr id="3" name="Text 0"/>
           <p:cNvSpPr txBox="1"/>
           <p:nvPr/>
         </p:nvSpPr>
@@ -3433,14 +3457,14 @@
       </p:sp>
       <p:pic>
         <p:nvPicPr>
-          <p:cNvPr id="3" name="Image 0" descr="C:\Users\yu9br\AppData\Local\Temp\neo-hIrnKR\a2.png">    </p:cNvPr>
+          <p:cNvPr id="4" name="Image 1" descr="C:\Users\yu9br\AppData\Local\Temp\neo-cbhqvj\a2.png">    </p:cNvPr>
           <p:cNvPicPr>
             <a:picLocks noChangeAspect="1"/>
           </p:cNvPicPr>
           <p:nvPr/>
         </p:nvPicPr>
         <p:blipFill>
-          <a:blip r:embed="rId1"/>
+          <a:blip r:embed="rId2"/>
           <a:stretch>
             <a:fillRect/>
           </a:stretch>
@@ -3457,7 +3481,7 @@
       </p:pic>
       <p:sp>
         <p:nvSpPr>
-          <p:cNvPr id="4" name="Text 1"/>
+          <p:cNvPr id="5" name="Text 1"/>
           <p:cNvSpPr txBox="1"/>
           <p:nvPr/>
         </p:nvSpPr>
@@ -3493,7 +3517,7 @@
       </p:sp>
       <p:sp>
         <p:nvSpPr>
-          <p:cNvPr id="5" name="Shape 2"/>
+          <p:cNvPr id="6" name="Shape 2"/>
           <p:cNvSpPr/>
           <p:nvPr/>
         </p:nvSpPr>
@@ -3524,7 +3548,7 @@
       </p:sp>
       <p:sp>
         <p:nvSpPr>
-          <p:cNvPr id="6" name="Text 3"/>
+          <p:cNvPr id="7" name="Text 3"/>
           <p:cNvSpPr txBox="1"/>
           <p:nvPr/>
         </p:nvSpPr>
@@ -3560,7 +3584,7 @@
       </p:sp>
       <p:sp>
         <p:nvSpPr>
-          <p:cNvPr id="7" name="Shape 4"/>
+          <p:cNvPr id="8" name="Shape 4"/>
           <p:cNvSpPr/>
           <p:nvPr/>
         </p:nvSpPr>
@@ -3591,7 +3615,7 @@
       </p:sp>
       <p:sp>
         <p:nvSpPr>
-          <p:cNvPr id="8" name="Text 5"/>
+          <p:cNvPr id="9" name="Text 5"/>
           <p:cNvSpPr txBox="1"/>
           <p:nvPr/>
         </p:nvSpPr>
@@ -3627,7 +3651,7 @@
       </p:sp>
       <p:sp>
         <p:nvSpPr>
-          <p:cNvPr id="9" name="Shape 6"/>
+          <p:cNvPr id="10" name="Shape 6"/>
           <p:cNvSpPr/>
           <p:nvPr/>
         </p:nvSpPr>
@@ -3658,7 +3682,7 @@
       </p:sp>
       <p:sp>
         <p:nvSpPr>
-          <p:cNvPr id="10" name="Text 7"/>
+          <p:cNvPr id="11" name="Text 7"/>
           <p:cNvSpPr txBox="1"/>
           <p:nvPr/>
         </p:nvSpPr>
@@ -3694,7 +3718,7 @@
       </p:sp>
       <p:sp>
         <p:nvSpPr>
-          <p:cNvPr id="11" name="Shape 8"/>
+          <p:cNvPr id="12" name="Shape 8"/>
           <p:cNvSpPr/>
           <p:nvPr/>
         </p:nvSpPr>
@@ -3725,7 +3749,7 @@
       </p:sp>
       <p:sp>
         <p:nvSpPr>
-          <p:cNvPr id="12" name="Text 9"/>
+          <p:cNvPr id="13" name="Text 9"/>
           <p:cNvSpPr txBox="1"/>
           <p:nvPr/>
         </p:nvSpPr>
@@ -3761,7 +3785,7 @@
       </p:sp>
       <p:sp>
         <p:nvSpPr>
-          <p:cNvPr id="13" name="Text 10"/>
+          <p:cNvPr id="14" name="Text 10"/>
           <p:cNvSpPr txBox="1"/>
           <p:nvPr/>
         </p:nvSpPr>
@@ -6692,7 +6716,7 @@
       </p:sp>
       <p:pic>
         <p:nvPicPr>
-          <p:cNvPr id="5" name="Image 0" descr="C:\Users\yu9br\AppData\Local\Temp\neo-hIrnKR\a3.png">    </p:cNvPr>
+          <p:cNvPr id="5" name="Image 0" descr="C:\Users\yu9br\AppData\Local\Temp\neo-cbhqvj\a3.png">    </p:cNvPr>
           <p:cNvPicPr>
             <a:picLocks noChangeAspect="1"/>
           </p:cNvPicPr>
@@ -6779,7 +6803,7 @@
       </p:sp>
       <p:pic>
         <p:nvPicPr>
-          <p:cNvPr id="8" name="Image 1" descr="C:\Users\yu9br\AppData\Local\Temp\neo-hIrnKR\a4.png">    </p:cNvPr>
+          <p:cNvPr id="8" name="Image 1" descr="C:\Users\yu9br\AppData\Local\Temp\neo-cbhqvj\a4.png">    </p:cNvPr>
           <p:cNvPicPr>
             <a:picLocks noChangeAspect="1"/>
           </p:cNvPicPr>
@@ -6866,7 +6890,7 @@
       </p:sp>
       <p:pic>
         <p:nvPicPr>
-          <p:cNvPr id="11" name="Image 2" descr="C:\Users\yu9br\AppData\Local\Temp\neo-hIrnKR\a5.png">    </p:cNvPr>
+          <p:cNvPr id="11" name="Image 2" descr="C:\Users\yu9br\AppData\Local\Temp\neo-cbhqvj\a5.png">    </p:cNvPr>
           <p:cNvPicPr>
             <a:picLocks noChangeAspect="1"/>
           </p:cNvPicPr>
@@ -6953,7 +6977,7 @@
       </p:sp>
       <p:pic>
         <p:nvPicPr>
-          <p:cNvPr id="14" name="Image 3" descr="C:\Users\yu9br\AppData\Local\Temp\neo-hIrnKR\a6.png">    </p:cNvPr>
+          <p:cNvPr id="14" name="Image 3" descr="C:\Users\yu9br\AppData\Local\Temp\neo-cbhqvj\a6.png">    </p:cNvPr>
           <p:cNvPicPr>
             <a:picLocks noChangeAspect="1"/>
           </p:cNvPicPr>
@@ -16264,7 +16288,7 @@
       </p:grpSpPr>
       <p:pic>
         <p:nvPicPr>
-          <p:cNvPr id="2" name="Image 0" descr="C:\Users\yu9br\AppData\Local\Temp\neo-hIrnKR\a7.png">    </p:cNvPr>
+          <p:cNvPr id="2" name="Image 0" descr="C:\Users\yu9br\AppData\Local\Temp\neo-cbhqvj\a7.png">    </p:cNvPr>
           <p:cNvPicPr>
             <a:picLocks noChangeAspect="1"/>
           </p:cNvPicPr>

--- a/docs/deck/SceneGapEdge_StageI_Proposal.pptx
+++ b/docs/deck/SceneGapEdge_StageI_Proposal.pptx
@@ -29,12 +29,9 @@
     <p:sldId id="277" r:id="rId23"/>
     <p:sldId id="278" r:id="rId24"/>
     <p:sldId id="279" r:id="rId25"/>
-    <p:sldId id="280" r:id="rId26"/>
-    <p:sldId id="281" r:id="rId27"/>
-    <p:sldId id="282" r:id="rId28"/>
   </p:sldIdLst>
   <p:notesMasterIdLst>
-    <p:notesMasterId r:id="rId29"/>
+    <p:notesMasterId r:id="rId26"/>
   </p:notesMasterIdLst>
   <p:sldSz cx="12192000" cy="6858000"/>
   <p:notesSz cx="6858000" cy="12192000"/>
@@ -133,14 +130,14 @@
   <p:extLst>
     <p:ext uri="{521415D9-36F7-43E2-AB2F-B90AF26B5E84}">
       <p14:sectionLst xmlns:p14="http://schemas.microsoft.com/office/powerpoint/2010/main">
-        <p14:section name="Problem" id="{4a386afc-38bc-f43f-446b-db87dcd91804}">
+        <p14:section name="Problem" id="{ca804b22-8e8d-4c33-78af-2a31cb22561a}">
           <p14:sldIdLst>
             <p14:sldId id="257"/>
             <p14:sldId id="258"/>
             <p14:sldId id="259"/>
           </p14:sldIdLst>
         </p14:section>
-        <p14:section name="Solution" id="{0d7023e3-59a3-5d72-28bf-c50054d8ef12}">
+        <p14:section name="Solution" id="{14f77cca-f561-7140-fbc2-57de14481bda}">
           <p14:sldIdLst>
             <p14:sldId id="260"/>
             <p14:sldId id="261"/>
@@ -149,7 +146,7 @@
             <p14:sldId id="264"/>
           </p14:sldIdLst>
         </p14:section>
-        <p14:section name="Evidence" id="{e21ecf46-1066-e906-8a83-726e0d2adc35}">
+        <p14:section name="Evidence" id="{38356f06-9d87-2cc6-321b-7b7d97037201}">
           <p14:sldIdLst>
             <p14:sldId id="265"/>
             <p14:sldId id="266"/>
@@ -158,33 +155,30 @@
             <p14:sldId id="269"/>
           </p14:sldIdLst>
         </p14:section>
-        <p14:section name="Hardware" id="{f6536b4e-14b0-c218-c70c-e911481acd38}">
+        <p14:section name="Hardware" id="{34265667-fb11-017e-1533-c074190c7f8c}">
           <p14:sldIdLst>
             <p14:sldId id="270"/>
             <p14:sldId id="271"/>
           </p14:sldIdLst>
         </p14:section>
-        <p14:section name="Engineering" id="{c18127be-5bd4-33b2-836f-66e6b075212b}">
+        <p14:section name="Engineering" id="{94ce7110-f077-a7ce-e042-64bb2e1737c4}">
           <p14:sldIdLst>
             <p14:sldId id="272"/>
           </p14:sldIdLst>
         </p14:section>
-        <p14:section name="Business" id="{290d98da-65a6-5208-8922-6b443886794c}">
+        <p14:section name="Business" id="{005eb6df-f8e0-3eb4-eda8-a4180bd1d13e}">
           <p14:sldIdLst>
             <p14:sldId id="273"/>
             <p14:sldId id="274"/>
             <p14:sldId id="275"/>
           </p14:sldIdLst>
         </p14:section>
-        <p14:section name="Appendix" id="{5ae10271-d95e-9be9-4891-db4b36628f4c}">
+        <p14:section name="Appendix" id="{6d9b815f-310b-61c9-e7b5-ff7d2782a8a6}">
           <p14:sldIdLst>
             <p14:sldId id="276"/>
             <p14:sldId id="277"/>
             <p14:sldId id="278"/>
             <p14:sldId id="279"/>
-            <p14:sldId id="280"/>
-            <p14:sldId id="281"/>
-            <p14:sldId id="282"/>
           </p14:sldIdLst>
         </p14:section>
       </p14:sectionLst>
@@ -2023,270 +2017,6 @@
             <a:fld id="{F7021451-1387-4CA6-816F-3879F97B5CBC}" type="slidenum">
               <a:rPr lang="en-US"/>
               <a:t>24</a:t>
-            </a:fld>
-            <a:endParaRPr lang="en-US"/>
-          </a:p>
-        </p:txBody>
-      </p:sp>
-    </p:spTree>
-    <p:extLst>
-      <p:ext uri="{BB962C8B-B14F-4D97-AF65-F5344CB8AC3E}">
-        <p14:creationId xmlns:p14="http://schemas.microsoft.com/office/powerpoint/2010/main" val="1024086991"/>
-      </p:ext>
-    </p:extLst>
-  </p:cSld>
-  <p:clrMapOvr>
-    <a:masterClrMapping/>
-  </p:clrMapOvr>
-</p:notes>
-</file>
-
-<file path=ppt/notesSlides/notesSlide25.xml><?xml version="1.0" encoding="utf-8"?>
-<p:notes xmlns:a="http://schemas.openxmlformats.org/drawingml/2006/main" xmlns:r="http://schemas.openxmlformats.org/officeDocument/2006/relationships" xmlns:p="http://schemas.openxmlformats.org/presentationml/2006/main">
-  <p:cSld>
-    <p:spTree>
-      <p:nvGrpSpPr>
-        <p:cNvPr id="1" name=""/>
-        <p:cNvGrpSpPr/>
-        <p:nvPr/>
-      </p:nvGrpSpPr>
-      <p:grpSpPr>
-        <a:xfrm>
-          <a:off x="0" y="0"/>
-          <a:ext cx="0" cy="0"/>
-          <a:chOff x="0" y="0"/>
-          <a:chExt cx="0" cy="0"/>
-        </a:xfrm>
-      </p:grpSpPr>
-      <p:sp>
-        <p:nvSpPr>
-          <p:cNvPr id="2" name="Slide Image Placeholder 1"/>
-          <p:cNvSpPr>
-            <a:spLocks noGrp="1" noRot="1" noChangeAspect="1"/>
-          </p:cNvSpPr>
-          <p:nvPr>
-            <p:ph type="sldImg"/>
-          </p:nvPr>
-        </p:nvSpPr>
-        <p:spPr/>
-      </p:sp>
-      <p:sp>
-        <p:nvSpPr>
-          <p:cNvPr id="3" name="Notes Placeholder 2"/>
-          <p:cNvSpPr>
-            <a:spLocks noGrp="1"/>
-          </p:cNvSpPr>
-          <p:nvPr>
-            <p:ph type="body" idx="1"/>
-          </p:nvPr>
-        </p:nvSpPr>
-        <p:spPr/>
-        <p:txBody>
-          <a:bodyPr/>
-          <a:lstStyle/>
-          <a:p>
-            <a:r>
-              <a:rPr lang="en-US" dirty="0"/>
-              <a:t/>
-            </a:r>
-            <a:endParaRPr lang="en-US" dirty="0"/>
-          </a:p>
-        </p:txBody>
-      </p:sp>
-      <p:sp>
-        <p:nvSpPr>
-          <p:cNvPr id="4" name="Slide Number Placeholder 3"/>
-          <p:cNvSpPr>
-            <a:spLocks noGrp="1"/>
-          </p:cNvSpPr>
-          <p:nvPr>
-            <p:ph type="sldNum" sz="quarter" idx="10"/>
-          </p:nvPr>
-        </p:nvSpPr>
-        <p:spPr/>
-        <p:txBody>
-          <a:bodyPr/>
-          <a:lstStyle/>
-          <a:p>
-            <a:fld id="{F7021451-1387-4CA6-816F-3879F97B5CBC}" type="slidenum">
-              <a:rPr lang="en-US"/>
-              <a:t>25</a:t>
-            </a:fld>
-            <a:endParaRPr lang="en-US"/>
-          </a:p>
-        </p:txBody>
-      </p:sp>
-    </p:spTree>
-    <p:extLst>
-      <p:ext uri="{BB962C8B-B14F-4D97-AF65-F5344CB8AC3E}">
-        <p14:creationId xmlns:p14="http://schemas.microsoft.com/office/powerpoint/2010/main" val="1024086991"/>
-      </p:ext>
-    </p:extLst>
-  </p:cSld>
-  <p:clrMapOvr>
-    <a:masterClrMapping/>
-  </p:clrMapOvr>
-</p:notes>
-</file>
-
-<file path=ppt/notesSlides/notesSlide26.xml><?xml version="1.0" encoding="utf-8"?>
-<p:notes xmlns:a="http://schemas.openxmlformats.org/drawingml/2006/main" xmlns:r="http://schemas.openxmlformats.org/officeDocument/2006/relationships" xmlns:p="http://schemas.openxmlformats.org/presentationml/2006/main">
-  <p:cSld>
-    <p:spTree>
-      <p:nvGrpSpPr>
-        <p:cNvPr id="1" name=""/>
-        <p:cNvGrpSpPr/>
-        <p:nvPr/>
-      </p:nvGrpSpPr>
-      <p:grpSpPr>
-        <a:xfrm>
-          <a:off x="0" y="0"/>
-          <a:ext cx="0" cy="0"/>
-          <a:chOff x="0" y="0"/>
-          <a:chExt cx="0" cy="0"/>
-        </a:xfrm>
-      </p:grpSpPr>
-      <p:sp>
-        <p:nvSpPr>
-          <p:cNvPr id="2" name="Slide Image Placeholder 1"/>
-          <p:cNvSpPr>
-            <a:spLocks noGrp="1" noRot="1" noChangeAspect="1"/>
-          </p:cNvSpPr>
-          <p:nvPr>
-            <p:ph type="sldImg"/>
-          </p:nvPr>
-        </p:nvSpPr>
-        <p:spPr/>
-      </p:sp>
-      <p:sp>
-        <p:nvSpPr>
-          <p:cNvPr id="3" name="Notes Placeholder 2"/>
-          <p:cNvSpPr>
-            <a:spLocks noGrp="1"/>
-          </p:cNvSpPr>
-          <p:nvPr>
-            <p:ph type="body" idx="1"/>
-          </p:nvPr>
-        </p:nvSpPr>
-        <p:spPr/>
-        <p:txBody>
-          <a:bodyPr/>
-          <a:lstStyle/>
-          <a:p>
-            <a:r>
-              <a:rPr lang="en-US" dirty="0"/>
-              <a:t/>
-            </a:r>
-            <a:endParaRPr lang="en-US" dirty="0"/>
-          </a:p>
-        </p:txBody>
-      </p:sp>
-      <p:sp>
-        <p:nvSpPr>
-          <p:cNvPr id="4" name="Slide Number Placeholder 3"/>
-          <p:cNvSpPr>
-            <a:spLocks noGrp="1"/>
-          </p:cNvSpPr>
-          <p:nvPr>
-            <p:ph type="sldNum" sz="quarter" idx="10"/>
-          </p:nvPr>
-        </p:nvSpPr>
-        <p:spPr/>
-        <p:txBody>
-          <a:bodyPr/>
-          <a:lstStyle/>
-          <a:p>
-            <a:fld id="{F7021451-1387-4CA6-816F-3879F97B5CBC}" type="slidenum">
-              <a:rPr lang="en-US"/>
-              <a:t>26</a:t>
-            </a:fld>
-            <a:endParaRPr lang="en-US"/>
-          </a:p>
-        </p:txBody>
-      </p:sp>
-    </p:spTree>
-    <p:extLst>
-      <p:ext uri="{BB962C8B-B14F-4D97-AF65-F5344CB8AC3E}">
-        <p14:creationId xmlns:p14="http://schemas.microsoft.com/office/powerpoint/2010/main" val="1024086991"/>
-      </p:ext>
-    </p:extLst>
-  </p:cSld>
-  <p:clrMapOvr>
-    <a:masterClrMapping/>
-  </p:clrMapOvr>
-</p:notes>
-</file>
-
-<file path=ppt/notesSlides/notesSlide27.xml><?xml version="1.0" encoding="utf-8"?>
-<p:notes xmlns:a="http://schemas.openxmlformats.org/drawingml/2006/main" xmlns:r="http://schemas.openxmlformats.org/officeDocument/2006/relationships" xmlns:p="http://schemas.openxmlformats.org/presentationml/2006/main">
-  <p:cSld>
-    <p:spTree>
-      <p:nvGrpSpPr>
-        <p:cNvPr id="1" name=""/>
-        <p:cNvGrpSpPr/>
-        <p:nvPr/>
-      </p:nvGrpSpPr>
-      <p:grpSpPr>
-        <a:xfrm>
-          <a:off x="0" y="0"/>
-          <a:ext cx="0" cy="0"/>
-          <a:chOff x="0" y="0"/>
-          <a:chExt cx="0" cy="0"/>
-        </a:xfrm>
-      </p:grpSpPr>
-      <p:sp>
-        <p:nvSpPr>
-          <p:cNvPr id="2" name="Slide Image Placeholder 1"/>
-          <p:cNvSpPr>
-            <a:spLocks noGrp="1" noRot="1" noChangeAspect="1"/>
-          </p:cNvSpPr>
-          <p:nvPr>
-            <p:ph type="sldImg"/>
-          </p:nvPr>
-        </p:nvSpPr>
-        <p:spPr/>
-      </p:sp>
-      <p:sp>
-        <p:nvSpPr>
-          <p:cNvPr id="3" name="Notes Placeholder 2"/>
-          <p:cNvSpPr>
-            <a:spLocks noGrp="1"/>
-          </p:cNvSpPr>
-          <p:nvPr>
-            <p:ph type="body" idx="1"/>
-          </p:nvPr>
-        </p:nvSpPr>
-        <p:spPr/>
-        <p:txBody>
-          <a:bodyPr/>
-          <a:lstStyle/>
-          <a:p>
-            <a:r>
-              <a:rPr lang="en-US" dirty="0"/>
-              <a:t/>
-            </a:r>
-            <a:endParaRPr lang="en-US" dirty="0"/>
-          </a:p>
-        </p:txBody>
-      </p:sp>
-      <p:sp>
-        <p:nvSpPr>
-          <p:cNvPr id="4" name="Slide Number Placeholder 3"/>
-          <p:cNvSpPr>
-            <a:spLocks noGrp="1"/>
-          </p:cNvSpPr>
-          <p:nvPr>
-            <p:ph type="sldNum" sz="quarter" idx="10"/>
-          </p:nvPr>
-        </p:nvSpPr>
-        <p:spPr/>
-        <p:txBody>
-          <a:bodyPr/>
-          <a:lstStyle/>
-          <a:p>
-            <a:fld id="{F7021451-1387-4CA6-816F-3879F97B5CBC}" type="slidenum">
-              <a:rPr lang="en-US"/>
-              <a:t>27</a:t>
             </a:fld>
             <a:endParaRPr lang="en-US"/>
           </a:p>
@@ -3633,7 +3363,7 @@
       </p:sp>
       <p:pic>
         <p:nvPicPr>
-          <p:cNvPr id="4" name="Image 1" descr="C:\Users\yu9br\AppData\Local\Temp\neo-TvGv1B\a2.png">    </p:cNvPr>
+          <p:cNvPr id="4" name="Image 1" descr="C:\Users\yu9br\AppData\Local\Temp\neo-42lqli\a2.png">    </p:cNvPr>
           <p:cNvPicPr>
             <a:picLocks noChangeAspect="1"/>
           </p:cNvPicPr>
@@ -17554,7 +17284,7 @@
       </p:grpSpPr>
       <p:pic>
         <p:nvPicPr>
-          <p:cNvPr id="2" name="Image 0" descr="C:\Users\yu9br\AppData\Local\Temp\neo-TvGv1B\a3.png">    </p:cNvPr>
+          <p:cNvPr id="2" name="Image 0" descr="C:\Users\yu9br\AppData\Local\Temp\neo-42lqli\a3.png">    </p:cNvPr>
           <p:cNvPicPr>
             <a:picLocks noChangeAspect="1"/>
           </p:cNvPicPr>
@@ -21486,7 +21216,7 @@
                   <a:srgbClr val="111118"/>
                 </a:solidFill>
               </a:rPr>
-              <a:t>A4 · Footage credits (1 of 4)</a:t>
+              <a:t>A4 · Footage shown in this deck</a:t>
             </a:r>
             <a:endParaRPr lang="en-US" sz="2800" dirty="0"/>
           </a:p>
@@ -21592,7 +21322,7 @@
                 <a:gridCol w="2787786"/>
                 <a:gridCol w="1618715"/>
               </a:tblGrid>
-              <a:tr h="358140">
+              <a:tr h="365760">
                 <a:tc>
                   <a:txBody>
                     <a:bodyPr/>
@@ -21794,7 +21524,7 @@
                   </a:tcPr>
                 </a:tc>
               </a:tr>
-              <a:tr h="358140">
+              <a:tr h="365760">
                 <a:tc>
                   <a:txBody>
                     <a:bodyPr/>
@@ -21804,7 +21534,7 @@
                         <a:buNone/>
                       </a:pPr>
                       <a:r>
-                        <a:rPr lang="en-US" sz="900" dirty="0">
+                        <a:rPr lang="en-US" sz="1000" dirty="0">
                           <a:solidFill>
                             <a:srgbClr val="111118"/>
                           </a:solidFill>
@@ -21812,9 +21542,9 @@
                           <a:ea typeface="Microsoft JhengHei" pitchFamily="34" charset="-122"/>
                           <a:cs typeface="Microsoft JhengHei" pitchFamily="34" charset="-120"/>
                         </a:rPr>
-                        <a:t>000</a:t>
+                        <a:t>001</a:t>
                       </a:r>
-                      <a:endParaRPr lang="en-US" sz="900" dirty="0">
+                      <a:endParaRPr lang="en-US" sz="1000" dirty="0">
                         <a:latin typeface="Microsoft JhengHei" charset="0"/>
                         <a:ea typeface="Microsoft JhengHei" charset="0"/>
                         <a:cs typeface="Microsoft JhengHei" charset="0"/>
@@ -21854,7 +21584,7 @@
                         <a:buNone/>
                       </a:pPr>
                       <a:r>
-                        <a:rPr lang="en-US" sz="900" dirty="0">
+                        <a:rPr lang="en-US" sz="1000" dirty="0">
                           <a:solidFill>
                             <a:srgbClr val="111118"/>
                           </a:solidFill>
@@ -21862,9 +21592,9 @@
                           <a:ea typeface="Microsoft JhengHei" pitchFamily="34" charset="-122"/>
                           <a:cs typeface="Microsoft JhengHei" pitchFamily="34" charset="-120"/>
                         </a:rPr>
-                        <a:t>Cadaques cafe de la habana 2008 august converted YAN3.ogv</a:t>
+                        <a:t>Vichy - Grand Café, terrasse sous la grêle.ogv</a:t>
                       </a:r>
-                      <a:endParaRPr lang="en-US" sz="900" dirty="0">
+                      <a:endParaRPr lang="en-US" sz="1000" dirty="0">
                         <a:latin typeface="Microsoft JhengHei" charset="0"/>
                         <a:ea typeface="Microsoft JhengHei" charset="0"/>
                         <a:cs typeface="Microsoft JhengHei" charset="0"/>
@@ -21904,7 +21634,7 @@
                         <a:buNone/>
                       </a:pPr>
                       <a:r>
-                        <a:rPr lang="en-US" sz="900" dirty="0">
+                        <a:rPr lang="en-US" sz="1000" dirty="0">
                           <a:solidFill>
                             <a:srgbClr val="111118"/>
                           </a:solidFill>
@@ -21912,9 +21642,9 @@
                           <a:ea typeface="Microsoft JhengHei" pitchFamily="34" charset="-122"/>
                           <a:cs typeface="Microsoft JhengHei" pitchFamily="34" charset="-120"/>
                         </a:rPr>
-                        <a:t>Cliché Online (Yan.)</a:t>
+                        <a:t>Romainbehar</a:t>
                       </a:r>
-                      <a:endParaRPr lang="en-US" sz="900" dirty="0">
+                      <a:endParaRPr lang="en-US" sz="1000" dirty="0">
                         <a:latin typeface="Microsoft JhengHei" charset="0"/>
                         <a:ea typeface="Microsoft JhengHei" charset="0"/>
                         <a:cs typeface="Microsoft JhengHei" charset="0"/>
@@ -21954,7 +21684,7 @@
                         <a:buNone/>
                       </a:pPr>
                       <a:r>
-                        <a:rPr lang="en-US" sz="900" dirty="0">
+                        <a:rPr lang="en-US" sz="1000" dirty="0">
                           <a:solidFill>
                             <a:srgbClr val="111118"/>
                           </a:solidFill>
@@ -21962,9 +21692,9 @@
                           <a:ea typeface="Microsoft JhengHei" pitchFamily="34" charset="-122"/>
                           <a:cs typeface="Microsoft JhengHei" pitchFamily="34" charset="-120"/>
                         </a:rPr>
-                        <a:t>CC BY 3.0</a:t>
+                        <a:t>CC0</a:t>
                       </a:r>
-                      <a:endParaRPr lang="en-US" sz="900" dirty="0">
+                      <a:endParaRPr lang="en-US" sz="1000" dirty="0">
                         <a:latin typeface="Microsoft JhengHei" charset="0"/>
                         <a:ea typeface="Microsoft JhengHei" charset="0"/>
                         <a:cs typeface="Microsoft JhengHei" charset="0"/>
@@ -21996,7 +21726,7 @@
                   </a:tcPr>
                 </a:tc>
               </a:tr>
-              <a:tr h="358140">
+              <a:tr h="365760">
                 <a:tc>
                   <a:txBody>
                     <a:bodyPr/>
@@ -22006,7 +21736,7 @@
                         <a:buNone/>
                       </a:pPr>
                       <a:r>
-                        <a:rPr lang="en-US" sz="900" dirty="0">
+                        <a:rPr lang="en-US" sz="1000" dirty="0">
                           <a:solidFill>
                             <a:srgbClr val="111118"/>
                           </a:solidFill>
@@ -22014,9 +21744,9 @@
                           <a:ea typeface="Microsoft JhengHei" pitchFamily="34" charset="-122"/>
                           <a:cs typeface="Microsoft JhengHei" pitchFamily="34" charset="-120"/>
                         </a:rPr>
-                        <a:t>001</a:t>
+                        <a:t>007</a:t>
                       </a:r>
-                      <a:endParaRPr lang="en-US" sz="900" dirty="0">
+                      <a:endParaRPr lang="en-US" sz="1000" dirty="0">
                         <a:latin typeface="Microsoft JhengHei" charset="0"/>
                         <a:ea typeface="Microsoft JhengHei" charset="0"/>
                         <a:cs typeface="Microsoft JhengHei" charset="0"/>
@@ -22056,7 +21786,7 @@
                         <a:buNone/>
                       </a:pPr>
                       <a:r>
-                        <a:rPr lang="en-US" sz="900" dirty="0">
+                        <a:rPr lang="en-US" sz="1000" dirty="0">
                           <a:solidFill>
                             <a:srgbClr val="111118"/>
                           </a:solidFill>
@@ -22064,9 +21794,9 @@
                           <a:ea typeface="Microsoft JhengHei" pitchFamily="34" charset="-122"/>
                           <a:cs typeface="Microsoft JhengHei" pitchFamily="34" charset="-120"/>
                         </a:rPr>
-                        <a:t>Vichy - Grand Café, terrasse sous la grêle.ogv</a:t>
+                        <a:t>Café Lomi, Paris - Vimeo.webm</a:t>
                       </a:r>
-                      <a:endParaRPr lang="en-US" sz="900" dirty="0">
+                      <a:endParaRPr lang="en-US" sz="1000" dirty="0">
                         <a:latin typeface="Microsoft JhengHei" charset="0"/>
                         <a:ea typeface="Microsoft JhengHei" charset="0"/>
                         <a:cs typeface="Microsoft JhengHei" charset="0"/>
@@ -22106,7 +21836,7 @@
                         <a:buNone/>
                       </a:pPr>
                       <a:r>
-                        <a:rPr lang="en-US" sz="900" dirty="0">
+                        <a:rPr lang="en-US" sz="1000" dirty="0">
                           <a:solidFill>
                             <a:srgbClr val="111118"/>
                           </a:solidFill>
@@ -22114,9 +21844,9 @@
                           <a:ea typeface="Microsoft JhengHei" pitchFamily="34" charset="-122"/>
                           <a:cs typeface="Microsoft JhengHei" pitchFamily="34" charset="-120"/>
                         </a:rPr>
-                        <a:t>Romainbehar</a:t>
+                        <a:t>ideafarm films</a:t>
                       </a:r>
-                      <a:endParaRPr lang="en-US" sz="900" dirty="0">
+                      <a:endParaRPr lang="en-US" sz="1000" dirty="0">
                         <a:latin typeface="Microsoft JhengHei" charset="0"/>
                         <a:ea typeface="Microsoft JhengHei" charset="0"/>
                         <a:cs typeface="Microsoft JhengHei" charset="0"/>
@@ -22156,7 +21886,7 @@
                         <a:buNone/>
                       </a:pPr>
                       <a:r>
-                        <a:rPr lang="en-US" sz="900" dirty="0">
+                        <a:rPr lang="en-US" sz="1000" dirty="0">
                           <a:solidFill>
                             <a:srgbClr val="111118"/>
                           </a:solidFill>
@@ -22164,9 +21894,9 @@
                           <a:ea typeface="Microsoft JhengHei" pitchFamily="34" charset="-122"/>
                           <a:cs typeface="Microsoft JhengHei" pitchFamily="34" charset="-120"/>
                         </a:rPr>
-                        <a:t>CC0</a:t>
+                        <a:t>CC BY 3.0</a:t>
                       </a:r>
-                      <a:endParaRPr lang="en-US" sz="900" dirty="0">
+                      <a:endParaRPr lang="en-US" sz="1000" dirty="0">
                         <a:latin typeface="Microsoft JhengHei" charset="0"/>
                         <a:ea typeface="Microsoft JhengHei" charset="0"/>
                         <a:cs typeface="Microsoft JhengHei" charset="0"/>
@@ -22198,7 +21928,7 @@
                   </a:tcPr>
                 </a:tc>
               </a:tr>
-              <a:tr h="358140">
+              <a:tr h="365760">
                 <a:tc>
                   <a:txBody>
                     <a:bodyPr/>
@@ -22208,7 +21938,7 @@
                         <a:buNone/>
                       </a:pPr>
                       <a:r>
-                        <a:rPr lang="en-US" sz="900" dirty="0">
+                        <a:rPr lang="en-US" sz="1000" dirty="0">
                           <a:solidFill>
                             <a:srgbClr val="111118"/>
                           </a:solidFill>
@@ -22216,9 +21946,9 @@
                           <a:ea typeface="Microsoft JhengHei" pitchFamily="34" charset="-122"/>
                           <a:cs typeface="Microsoft JhengHei" pitchFamily="34" charset="-120"/>
                         </a:rPr>
-                        <a:t>002</a:t>
+                        <a:t>012</a:t>
                       </a:r>
-                      <a:endParaRPr lang="en-US" sz="900" dirty="0">
+                      <a:endParaRPr lang="en-US" sz="1000" dirty="0">
                         <a:latin typeface="Microsoft JhengHei" charset="0"/>
                         <a:ea typeface="Microsoft JhengHei" charset="0"/>
                         <a:cs typeface="Microsoft JhengHei" charset="0"/>
@@ -22258,7 +21988,7 @@
                         <a:buNone/>
                       </a:pPr>
                       <a:r>
-                        <a:rPr lang="en-US" sz="900" dirty="0">
+                        <a:rPr lang="en-US" sz="1000" dirty="0">
                           <a:solidFill>
                             <a:srgbClr val="111118"/>
                           </a:solidFill>
@@ -22266,9 +21996,9 @@
                           <a:ea typeface="Microsoft JhengHei" pitchFamily="34" charset="-122"/>
                           <a:cs typeface="Microsoft JhengHei" pitchFamily="34" charset="-120"/>
                         </a:rPr>
-                        <a:t>Merry X-mas at Kranzler.webm</a:t>
+                        <a:t>Kaffe - Ystad-2024.ogg</a:t>
                       </a:r>
-                      <a:endParaRPr lang="en-US" sz="900" dirty="0">
+                      <a:endParaRPr lang="en-US" sz="1000" dirty="0">
                         <a:latin typeface="Microsoft JhengHei" charset="0"/>
                         <a:ea typeface="Microsoft JhengHei" charset="0"/>
                         <a:cs typeface="Microsoft JhengHei" charset="0"/>
@@ -22308,7 +22038,7 @@
                         <a:buNone/>
                       </a:pPr>
                       <a:r>
-                        <a:rPr lang="en-US" sz="900" dirty="0">
+                        <a:rPr lang="en-US" sz="1000" dirty="0">
                           <a:solidFill>
                             <a:srgbClr val="111118"/>
                           </a:solidFill>
@@ -22316,9 +22046,9 @@
                           <a:ea typeface="Microsoft JhengHei" pitchFamily="34" charset="-122"/>
                           <a:cs typeface="Microsoft JhengHei" pitchFamily="34" charset="-120"/>
                         </a:rPr>
-                        <a:t>C.Suthorn</a:t>
+                        <a:t>Jonn Leffmann</a:t>
                       </a:r>
-                      <a:endParaRPr lang="en-US" sz="900" dirty="0">
+                      <a:endParaRPr lang="en-US" sz="1000" dirty="0">
                         <a:latin typeface="Microsoft JhengHei" charset="0"/>
                         <a:ea typeface="Microsoft JhengHei" charset="0"/>
                         <a:cs typeface="Microsoft JhengHei" charset="0"/>
@@ -22358,7 +22088,7 @@
                         <a:buNone/>
                       </a:pPr>
                       <a:r>
-                        <a:rPr lang="en-US" sz="900" dirty="0">
+                        <a:rPr lang="en-US" sz="1000" dirty="0">
                           <a:solidFill>
                             <a:srgbClr val="111118"/>
                           </a:solidFill>
@@ -22366,9 +22096,9 @@
                           <a:ea typeface="Microsoft JhengHei" pitchFamily="34" charset="-122"/>
                           <a:cs typeface="Microsoft JhengHei" pitchFamily="34" charset="-120"/>
                         </a:rPr>
-                        <a:t>CC BY-SA 4.0</a:t>
+                        <a:t>CC BY 3.0</a:t>
                       </a:r>
-                      <a:endParaRPr lang="en-US" sz="900" dirty="0">
+                      <a:endParaRPr lang="en-US" sz="1000" dirty="0">
                         <a:latin typeface="Microsoft JhengHei" charset="0"/>
                         <a:ea typeface="Microsoft JhengHei" charset="0"/>
                         <a:cs typeface="Microsoft JhengHei" charset="0"/>
@@ -22400,7 +22130,7 @@
                   </a:tcPr>
                 </a:tc>
               </a:tr>
-              <a:tr h="358140">
+              <a:tr h="365760">
                 <a:tc>
                   <a:txBody>
                     <a:bodyPr/>
@@ -22410,7 +22140,7 @@
                         <a:buNone/>
                       </a:pPr>
                       <a:r>
-                        <a:rPr lang="en-US" sz="900" dirty="0">
+                        <a:rPr lang="en-US" sz="1000" dirty="0">
                           <a:solidFill>
                             <a:srgbClr val="111118"/>
                           </a:solidFill>
@@ -22418,9 +22148,9 @@
                           <a:ea typeface="Microsoft JhengHei" pitchFamily="34" charset="-122"/>
                           <a:cs typeface="Microsoft JhengHei" pitchFamily="34" charset="-120"/>
                         </a:rPr>
-                        <a:t>003</a:t>
+                        <a:t>016</a:t>
                       </a:r>
-                      <a:endParaRPr lang="en-US" sz="900" dirty="0">
+                      <a:endParaRPr lang="en-US" sz="1000" dirty="0">
                         <a:latin typeface="Microsoft JhengHei" charset="0"/>
                         <a:ea typeface="Microsoft JhengHei" charset="0"/>
                         <a:cs typeface="Microsoft JhengHei" charset="0"/>
@@ -22460,7 +22190,7 @@
                         <a:buNone/>
                       </a:pPr>
                       <a:r>
-                        <a:rPr lang="en-US" sz="900" dirty="0">
+                        <a:rPr lang="en-US" sz="1000" dirty="0">
                           <a:solidFill>
                             <a:srgbClr val="111118"/>
                           </a:solidFill>
@@ -22468,9 +22198,9 @@
                           <a:ea typeface="Microsoft JhengHei" pitchFamily="34" charset="-122"/>
                           <a:cs typeface="Microsoft JhengHei" pitchFamily="34" charset="-120"/>
                         </a:rPr>
-                        <a:t>Times Cafe inflatable waving character.webm</a:t>
+                        <a:t>Lions Almelo zamelt koffie in voor Voedselbank.webm</a:t>
                       </a:r>
-                      <a:endParaRPr lang="en-US" sz="900" dirty="0">
+                      <a:endParaRPr lang="en-US" sz="1000" dirty="0">
                         <a:latin typeface="Microsoft JhengHei" charset="0"/>
                         <a:ea typeface="Microsoft JhengHei" charset="0"/>
                         <a:cs typeface="Microsoft JhengHei" charset="0"/>
@@ -22510,7 +22240,7 @@
                         <a:buNone/>
                       </a:pPr>
                       <a:r>
-                        <a:rPr lang="en-US" sz="900" dirty="0">
+                        <a:rPr lang="en-US" sz="1000" dirty="0">
                           <a:solidFill>
                             <a:srgbClr val="111118"/>
                           </a:solidFill>
@@ -22518,9 +22248,9 @@
                           <a:ea typeface="Microsoft JhengHei" pitchFamily="34" charset="-122"/>
                           <a:cs typeface="Microsoft JhengHei" pitchFamily="34" charset="-120"/>
                         </a:rPr>
-                        <a:t>Andy Li</a:t>
+                        <a:t>AAVISIE</a:t>
                       </a:r>
-                      <a:endParaRPr lang="en-US" sz="900" dirty="0">
+                      <a:endParaRPr lang="en-US" sz="1000" dirty="0">
                         <a:latin typeface="Microsoft JhengHei" charset="0"/>
                         <a:ea typeface="Microsoft JhengHei" charset="0"/>
                         <a:cs typeface="Microsoft JhengHei" charset="0"/>
@@ -22560,7 +22290,7 @@
                         <a:buNone/>
                       </a:pPr>
                       <a:r>
-                        <a:rPr lang="en-US" sz="900" dirty="0">
+                        <a:rPr lang="en-US" sz="1000" dirty="0">
                           <a:solidFill>
                             <a:srgbClr val="111118"/>
                           </a:solidFill>
@@ -22568,9 +22298,9 @@
                           <a:ea typeface="Microsoft JhengHei" pitchFamily="34" charset="-122"/>
                           <a:cs typeface="Microsoft JhengHei" pitchFamily="34" charset="-120"/>
                         </a:rPr>
-                        <a:t>CC0</a:t>
+                        <a:t>CC BY 3.0</a:t>
                       </a:r>
-                      <a:endParaRPr lang="en-US" sz="900" dirty="0">
+                      <a:endParaRPr lang="en-US" sz="1000" dirty="0">
                         <a:latin typeface="Microsoft JhengHei" charset="0"/>
                         <a:ea typeface="Microsoft JhengHei" charset="0"/>
                         <a:cs typeface="Microsoft JhengHei" charset="0"/>
@@ -22602,7 +22332,7 @@
                   </a:tcPr>
                 </a:tc>
               </a:tr>
-              <a:tr h="358140">
+              <a:tr h="365760">
                 <a:tc>
                   <a:txBody>
                     <a:bodyPr/>
@@ -22612,7 +22342,7 @@
                         <a:buNone/>
                       </a:pPr>
                       <a:r>
-                        <a:rPr lang="en-US" sz="900" dirty="0">
+                        <a:rPr lang="en-US" sz="1000" dirty="0">
                           <a:solidFill>
                             <a:srgbClr val="111118"/>
                           </a:solidFill>
@@ -22620,9 +22350,9 @@
                           <a:ea typeface="Microsoft JhengHei" pitchFamily="34" charset="-122"/>
                           <a:cs typeface="Microsoft JhengHei" pitchFamily="34" charset="-120"/>
                         </a:rPr>
-                        <a:t>004</a:t>
+                        <a:t>019</a:t>
                       </a:r>
-                      <a:endParaRPr lang="en-US" sz="900" dirty="0">
+                      <a:endParaRPr lang="en-US" sz="1000" dirty="0">
                         <a:latin typeface="Microsoft JhengHei" charset="0"/>
                         <a:ea typeface="Microsoft JhengHei" charset="0"/>
                         <a:cs typeface="Microsoft JhengHei" charset="0"/>
@@ -22662,7 +22392,7 @@
                         <a:buNone/>
                       </a:pPr>
                       <a:r>
-                        <a:rPr lang="en-US" sz="900" dirty="0">
+                        <a:rPr lang="en-US" sz="1000" dirty="0">
                           <a:solidFill>
                             <a:srgbClr val="111118"/>
                           </a:solidFill>
@@ -22670,9 +22400,9 @@
                           <a:ea typeface="Microsoft JhengHei" pitchFamily="34" charset="-122"/>
                           <a:cs typeface="Microsoft JhengHei" pitchFamily="34" charset="-120"/>
                         </a:rPr>
-                        <a:t>Rateel cafe music2.webm</a:t>
+                        <a:t>MoliendoCafeEnLicuadora ohs02.webm</a:t>
                       </a:r>
-                      <a:endParaRPr lang="en-US" sz="900" dirty="0">
+                      <a:endParaRPr lang="en-US" sz="1000" dirty="0">
                         <a:latin typeface="Microsoft JhengHei" charset="0"/>
                         <a:ea typeface="Microsoft JhengHei" charset="0"/>
                         <a:cs typeface="Microsoft JhengHei" charset="0"/>
@@ -22712,7 +22442,7 @@
                         <a:buNone/>
                       </a:pPr>
                       <a:r>
-                        <a:rPr lang="en-US" sz="900" dirty="0">
+                        <a:rPr lang="en-US" sz="1000" dirty="0">
                           <a:solidFill>
                             <a:srgbClr val="111118"/>
                           </a:solidFill>
@@ -22720,9 +22450,9 @@
                           <a:ea typeface="Microsoft JhengHei" pitchFamily="34" charset="-122"/>
                           <a:cs typeface="Microsoft JhengHei" pitchFamily="34" charset="-120"/>
                         </a:rPr>
-                        <a:t>Iainsimpsonstewart</a:t>
+                        <a:t>PetrohsW</a:t>
                       </a:r>
-                      <a:endParaRPr lang="en-US" sz="900" dirty="0">
+                      <a:endParaRPr lang="en-US" sz="1000" dirty="0">
                         <a:latin typeface="Microsoft JhengHei" charset="0"/>
                         <a:ea typeface="Microsoft JhengHei" charset="0"/>
                         <a:cs typeface="Microsoft JhengHei" charset="0"/>
@@ -22762,7 +22492,7 @@
                         <a:buNone/>
                       </a:pPr>
                       <a:r>
-                        <a:rPr lang="en-US" sz="900" dirty="0">
+                        <a:rPr lang="en-US" sz="1000" dirty="0">
                           <a:solidFill>
                             <a:srgbClr val="111118"/>
                           </a:solidFill>
@@ -22770,9 +22500,9 @@
                           <a:ea typeface="Microsoft JhengHei" pitchFamily="34" charset="-122"/>
                           <a:cs typeface="Microsoft JhengHei" pitchFamily="34" charset="-120"/>
                         </a:rPr>
-                        <a:t>CC0</a:t>
+                        <a:t>CC BY-SA 4.0</a:t>
                       </a:r>
-                      <a:endParaRPr lang="en-US" sz="900" dirty="0">
+                      <a:endParaRPr lang="en-US" sz="1000" dirty="0">
                         <a:latin typeface="Microsoft JhengHei" charset="0"/>
                         <a:ea typeface="Microsoft JhengHei" charset="0"/>
                         <a:cs typeface="Microsoft JhengHei" charset="0"/>
@@ -22804,7 +22534,7 @@
                   </a:tcPr>
                 </a:tc>
               </a:tr>
-              <a:tr h="358140">
+              <a:tr h="365760">
                 <a:tc>
                   <a:txBody>
                     <a:bodyPr/>
@@ -22814,7 +22544,7 @@
                         <a:buNone/>
                       </a:pPr>
                       <a:r>
-                        <a:rPr lang="en-US" sz="900" dirty="0">
+                        <a:rPr lang="en-US" sz="1000" dirty="0">
                           <a:solidFill>
                             <a:srgbClr val="111118"/>
                           </a:solidFill>
@@ -22822,9 +22552,9 @@
                           <a:ea typeface="Microsoft JhengHei" pitchFamily="34" charset="-122"/>
                           <a:cs typeface="Microsoft JhengHei" pitchFamily="34" charset="-120"/>
                         </a:rPr>
-                        <a:t>005</a:t>
+                        <a:t>020</a:t>
                       </a:r>
-                      <a:endParaRPr lang="en-US" sz="900" dirty="0">
+                      <a:endParaRPr lang="en-US" sz="1000" dirty="0">
                         <a:latin typeface="Microsoft JhengHei" charset="0"/>
                         <a:ea typeface="Microsoft JhengHei" charset="0"/>
                         <a:cs typeface="Microsoft JhengHei" charset="0"/>
@@ -22864,7 +22594,7 @@
                         <a:buNone/>
                       </a:pPr>
                       <a:r>
-                        <a:rPr lang="en-US" sz="900" dirty="0">
+                        <a:rPr lang="en-US" sz="1000" dirty="0">
                           <a:solidFill>
                             <a:srgbClr val="111118"/>
                           </a:solidFill>
@@ -22872,9 +22602,9 @@
                           <a:ea typeface="Microsoft JhengHei" pitchFamily="34" charset="-122"/>
                           <a:cs typeface="Microsoft JhengHei" pitchFamily="34" charset="-120"/>
                         </a:rPr>
-                        <a:t>Starbucks en la aĉetcentro Kristall (Tjumeno).webm</a:t>
+                        <a:t>Espresso video.ogv</a:t>
                       </a:r>
-                      <a:endParaRPr lang="en-US" sz="900" dirty="0">
+                      <a:endParaRPr lang="en-US" sz="1000" dirty="0">
                         <a:latin typeface="Microsoft JhengHei" charset="0"/>
                         <a:ea typeface="Microsoft JhengHei" charset="0"/>
                         <a:cs typeface="Microsoft JhengHei" charset="0"/>
@@ -22914,7 +22644,7 @@
                         <a:buNone/>
                       </a:pPr>
                       <a:r>
-                        <a:rPr lang="en-US" sz="900" dirty="0">
+                        <a:rPr lang="en-US" sz="1000" dirty="0">
                           <a:solidFill>
                             <a:srgbClr val="111118"/>
                           </a:solidFill>
@@ -22922,9 +22652,9 @@
                           <a:ea typeface="Microsoft JhengHei" pitchFamily="34" charset="-122"/>
                           <a:cs typeface="Microsoft JhengHei" pitchFamily="34" charset="-120"/>
                         </a:rPr>
-                        <a:t>RG72</a:t>
+                        <a:t>Rosatrieu</a:t>
                       </a:r>
-                      <a:endParaRPr lang="en-US" sz="900" dirty="0">
+                      <a:endParaRPr lang="en-US" sz="1000" dirty="0">
                         <a:latin typeface="Microsoft JhengHei" charset="0"/>
                         <a:ea typeface="Microsoft JhengHei" charset="0"/>
                         <a:cs typeface="Microsoft JhengHei" charset="0"/>
@@ -22964,7 +22694,7 @@
                         <a:buNone/>
                       </a:pPr>
                       <a:r>
-                        <a:rPr lang="en-US" sz="900" dirty="0">
+                        <a:rPr lang="en-US" sz="1000" dirty="0">
                           <a:solidFill>
                             <a:srgbClr val="111118"/>
                           </a:solidFill>
@@ -22972,9 +22702,9 @@
                           <a:ea typeface="Microsoft JhengHei" pitchFamily="34" charset="-122"/>
                           <a:cs typeface="Microsoft JhengHei" pitchFamily="34" charset="-120"/>
                         </a:rPr>
-                        <a:t>CC BY-SA 4.0</a:t>
+                        <a:t>CC BY-SA 3.0</a:t>
                       </a:r>
-                      <a:endParaRPr lang="en-US" sz="900" dirty="0">
+                      <a:endParaRPr lang="en-US" sz="1000" dirty="0">
                         <a:latin typeface="Microsoft JhengHei" charset="0"/>
                         <a:ea typeface="Microsoft JhengHei" charset="0"/>
                         <a:cs typeface="Microsoft JhengHei" charset="0"/>
@@ -23006,7 +22736,7 @@
                   </a:tcPr>
                 </a:tc>
               </a:tr>
-              <a:tr h="358140">
+              <a:tr h="365760">
                 <a:tc>
                   <a:txBody>
                     <a:bodyPr/>
@@ -23016,7 +22746,7 @@
                         <a:buNone/>
                       </a:pPr>
                       <a:r>
-                        <a:rPr lang="en-US" sz="900" dirty="0">
+                        <a:rPr lang="en-US" sz="1000" dirty="0">
                           <a:solidFill>
                             <a:srgbClr val="111118"/>
                           </a:solidFill>
@@ -23024,9 +22754,9 @@
                           <a:ea typeface="Microsoft JhengHei" pitchFamily="34" charset="-122"/>
                           <a:cs typeface="Microsoft JhengHei" pitchFamily="34" charset="-120"/>
                         </a:rPr>
-                        <a:t>006</a:t>
+                        <a:t>026</a:t>
                       </a:r>
-                      <a:endParaRPr lang="en-US" sz="900" dirty="0">
+                      <a:endParaRPr lang="en-US" sz="1000" dirty="0">
                         <a:latin typeface="Microsoft JhengHei" charset="0"/>
                         <a:ea typeface="Microsoft JhengHei" charset="0"/>
                         <a:cs typeface="Microsoft JhengHei" charset="0"/>
@@ -23066,7 +22796,7 @@
                         <a:buNone/>
                       </a:pPr>
                       <a:r>
-                        <a:rPr lang="en-US" sz="900" dirty="0">
+                        <a:rPr lang="en-US" sz="1000" dirty="0">
                           <a:solidFill>
                             <a:srgbClr val="111118"/>
                           </a:solidFill>
@@ -23074,9 +22804,9 @@
                           <a:ea typeface="Microsoft JhengHei" pitchFamily="34" charset="-122"/>
                           <a:cs typeface="Microsoft JhengHei" pitchFamily="34" charset="-120"/>
                         </a:rPr>
-                        <a:t>Interior Paragon Café Katoomba.ogv</a:t>
+                        <a:t>Latte art flower - 01.ogv</a:t>
                       </a:r>
-                      <a:endParaRPr lang="en-US" sz="900" dirty="0">
+                      <a:endParaRPr lang="en-US" sz="1000" dirty="0">
                         <a:latin typeface="Microsoft JhengHei" charset="0"/>
                         <a:ea typeface="Microsoft JhengHei" charset="0"/>
                         <a:cs typeface="Microsoft JhengHei" charset="0"/>
@@ -23116,7 +22846,7 @@
                         <a:buNone/>
                       </a:pPr>
                       <a:r>
-                        <a:rPr lang="en-US" sz="900" dirty="0">
+                        <a:rPr lang="en-US" sz="1000" dirty="0">
                           <a:solidFill>
                             <a:srgbClr val="111118"/>
                           </a:solidFill>
@@ -23124,9 +22854,9 @@
                           <a:ea typeface="Microsoft JhengHei" pitchFamily="34" charset="-122"/>
                           <a:cs typeface="Microsoft JhengHei" pitchFamily="34" charset="-120"/>
                         </a:rPr>
-                        <a:t>Bluedawe</a:t>
+                        <a:t>Anna Frodesiak</a:t>
                       </a:r>
-                      <a:endParaRPr lang="en-US" sz="900" dirty="0">
+                      <a:endParaRPr lang="en-US" sz="1000" dirty="0">
                         <a:latin typeface="Microsoft JhengHei" charset="0"/>
                         <a:ea typeface="Microsoft JhengHei" charset="0"/>
                         <a:cs typeface="Microsoft JhengHei" charset="0"/>
@@ -23166,7 +22896,7 @@
                         <a:buNone/>
                       </a:pPr>
                       <a:r>
-                        <a:rPr lang="en-US" sz="900" dirty="0">
+                        <a:rPr lang="en-US" sz="1000" dirty="0">
                           <a:solidFill>
                             <a:srgbClr val="111118"/>
                           </a:solidFill>
@@ -23174,9 +22904,9 @@
                           <a:ea typeface="Microsoft JhengHei" pitchFamily="34" charset="-122"/>
                           <a:cs typeface="Microsoft JhengHei" pitchFamily="34" charset="-120"/>
                         </a:rPr>
-                        <a:t>CC BY-SA 3.0</a:t>
+                        <a:t>CC0</a:t>
                       </a:r>
-                      <a:endParaRPr lang="en-US" sz="900" dirty="0">
+                      <a:endParaRPr lang="en-US" sz="1000" dirty="0">
                         <a:latin typeface="Microsoft JhengHei" charset="0"/>
                         <a:ea typeface="Microsoft JhengHei" charset="0"/>
                         <a:cs typeface="Microsoft JhengHei" charset="0"/>
@@ -23208,7 +22938,7 @@
                   </a:tcPr>
                 </a:tc>
               </a:tr>
-              <a:tr h="358140">
+              <a:tr h="365760">
                 <a:tc>
                   <a:txBody>
                     <a:bodyPr/>
@@ -23218,7 +22948,7 @@
                         <a:buNone/>
                       </a:pPr>
                       <a:r>
-                        <a:rPr lang="en-US" sz="900" dirty="0">
+                        <a:rPr lang="en-US" sz="1000" dirty="0">
                           <a:solidFill>
                             <a:srgbClr val="111118"/>
                           </a:solidFill>
@@ -23226,9 +22956,9 @@
                           <a:ea typeface="Microsoft JhengHei" pitchFamily="34" charset="-122"/>
                           <a:cs typeface="Microsoft JhengHei" pitchFamily="34" charset="-120"/>
                         </a:rPr>
-                        <a:t>007</a:t>
+                        <a:t>032</a:t>
                       </a:r>
-                      <a:endParaRPr lang="en-US" sz="900" dirty="0">
+                      <a:endParaRPr lang="en-US" sz="1000" dirty="0">
                         <a:latin typeface="Microsoft JhengHei" charset="0"/>
                         <a:ea typeface="Microsoft JhengHei" charset="0"/>
                         <a:cs typeface="Microsoft JhengHei" charset="0"/>
@@ -23268,7 +22998,7 @@
                         <a:buNone/>
                       </a:pPr>
                       <a:r>
-                        <a:rPr lang="en-US" sz="900" dirty="0">
+                        <a:rPr lang="en-US" sz="1000" dirty="0">
                           <a:solidFill>
                             <a:srgbClr val="111118"/>
                           </a:solidFill>
@@ -23276,9 +23006,9 @@
                           <a:ea typeface="Microsoft JhengHei" pitchFamily="34" charset="-122"/>
                           <a:cs typeface="Microsoft JhengHei" pitchFamily="34" charset="-120"/>
                         </a:rPr>
-                        <a:t>Café Lomi, Paris - Vimeo.webm</a:t>
+                        <a:t>Sugar falling into coffee.webm</a:t>
                       </a:r>
-                      <a:endParaRPr lang="en-US" sz="900" dirty="0">
+                      <a:endParaRPr lang="en-US" sz="1000" dirty="0">
                         <a:latin typeface="Microsoft JhengHei" charset="0"/>
                         <a:ea typeface="Microsoft JhengHei" charset="0"/>
                         <a:cs typeface="Microsoft JhengHei" charset="0"/>
@@ -23318,7 +23048,7 @@
                         <a:buNone/>
                       </a:pPr>
                       <a:r>
-                        <a:rPr lang="en-US" sz="900" dirty="0">
+                        <a:rPr lang="en-US" sz="1000" dirty="0">
                           <a:solidFill>
                             <a:srgbClr val="111118"/>
                           </a:solidFill>
@@ -23326,9 +23056,9 @@
                           <a:ea typeface="Microsoft JhengHei" pitchFamily="34" charset="-122"/>
                           <a:cs typeface="Microsoft JhengHei" pitchFamily="34" charset="-120"/>
                         </a:rPr>
-                        <a:t>ideafarm films</a:t>
+                        <a:t>Anselm Schüler</a:t>
                       </a:r>
-                      <a:endParaRPr lang="en-US" sz="900" dirty="0">
+                      <a:endParaRPr lang="en-US" sz="1000" dirty="0">
                         <a:latin typeface="Microsoft JhengHei" charset="0"/>
                         <a:ea typeface="Microsoft JhengHei" charset="0"/>
                         <a:cs typeface="Microsoft JhengHei" charset="0"/>
@@ -23368,7 +23098,7 @@
                         <a:buNone/>
                       </a:pPr>
                       <a:r>
-                        <a:rPr lang="en-US" sz="900" dirty="0">
+                        <a:rPr lang="en-US" sz="1000" dirty="0">
                           <a:solidFill>
                             <a:srgbClr val="111118"/>
                           </a:solidFill>
@@ -23376,9 +23106,9 @@
                           <a:ea typeface="Microsoft JhengHei" pitchFamily="34" charset="-122"/>
                           <a:cs typeface="Microsoft JhengHei" pitchFamily="34" charset="-120"/>
                         </a:rPr>
-                        <a:t>CC BY 3.0</a:t>
+                        <a:t>CC BY-SA 4.0</a:t>
                       </a:r>
-                      <a:endParaRPr lang="en-US" sz="900" dirty="0">
+                      <a:endParaRPr lang="en-US" sz="1000" dirty="0">
                         <a:latin typeface="Microsoft JhengHei" charset="0"/>
                         <a:ea typeface="Microsoft JhengHei" charset="0"/>
                         <a:cs typeface="Microsoft JhengHei" charset="0"/>
@@ -23410,7 +23140,7 @@
                   </a:tcPr>
                 </a:tc>
               </a:tr>
-              <a:tr h="358140">
+              <a:tr h="365760">
                 <a:tc>
                   <a:txBody>
                     <a:bodyPr/>
@@ -23420,7 +23150,7 @@
                         <a:buNone/>
                       </a:pPr>
                       <a:r>
-                        <a:rPr lang="en-US" sz="900" dirty="0">
+                        <a:rPr lang="en-US" sz="1000" dirty="0">
                           <a:solidFill>
                             <a:srgbClr val="111118"/>
                           </a:solidFill>
@@ -23428,9 +23158,9 @@
                           <a:ea typeface="Microsoft JhengHei" pitchFamily="34" charset="-122"/>
                           <a:cs typeface="Microsoft JhengHei" pitchFamily="34" charset="-120"/>
                         </a:rPr>
-                        <a:t>008</a:t>
+                        <a:t>041</a:t>
                       </a:r>
-                      <a:endParaRPr lang="en-US" sz="900" dirty="0">
+                      <a:endParaRPr lang="en-US" sz="1000" dirty="0">
                         <a:latin typeface="Microsoft JhengHei" charset="0"/>
                         <a:ea typeface="Microsoft JhengHei" charset="0"/>
                         <a:cs typeface="Microsoft JhengHei" charset="0"/>
@@ -23470,7 +23200,7 @@
                         <a:buNone/>
                       </a:pPr>
                       <a:r>
-                        <a:rPr lang="en-US" sz="900" dirty="0">
+                        <a:rPr lang="en-US" sz="1000" dirty="0">
                           <a:solidFill>
                             <a:srgbClr val="111118"/>
                           </a:solidFill>
@@ -23478,9 +23208,9 @@
                           <a:ea typeface="Microsoft JhengHei" pitchFamily="34" charset="-122"/>
                           <a:cs typeface="Microsoft JhengHei" pitchFamily="34" charset="-120"/>
                         </a:rPr>
-                        <a:t>Operation Ghost Stories - Video 01.webm</a:t>
+                        <a:t>Empty Streets of Paris COVID19.webm</a:t>
                       </a:r>
-                      <a:endParaRPr lang="en-US" sz="900" dirty="0">
+                      <a:endParaRPr lang="en-US" sz="1000" dirty="0">
                         <a:latin typeface="Microsoft JhengHei" charset="0"/>
                         <a:ea typeface="Microsoft JhengHei" charset="0"/>
                         <a:cs typeface="Microsoft JhengHei" charset="0"/>
@@ -23520,7 +23250,7 @@
                         <a:buNone/>
                       </a:pPr>
                       <a:r>
-                        <a:rPr lang="en-US" sz="900" dirty="0">
+                        <a:rPr lang="en-US" sz="1000" dirty="0">
                           <a:solidFill>
                             <a:srgbClr val="111118"/>
                           </a:solidFill>
@@ -23528,9 +23258,9 @@
                           <a:ea typeface="Microsoft JhengHei" pitchFamily="34" charset="-122"/>
                           <a:cs typeface="Microsoft JhengHei" pitchFamily="34" charset="-120"/>
                         </a:rPr>
-                        <a:t>FBI – Federal Bureau of Investigation</a:t>
+                        <a:t>CreatorsCloud</a:t>
                       </a:r>
-                      <a:endParaRPr lang="en-US" sz="900" dirty="0">
+                      <a:endParaRPr lang="en-US" sz="1000" dirty="0">
                         <a:latin typeface="Microsoft JhengHei" charset="0"/>
                         <a:ea typeface="Microsoft JhengHei" charset="0"/>
                         <a:cs typeface="Microsoft JhengHei" charset="0"/>
@@ -23570,7 +23300,7 @@
                         <a:buNone/>
                       </a:pPr>
                       <a:r>
-                        <a:rPr lang="en-US" sz="900" dirty="0">
+                        <a:rPr lang="en-US" sz="1000" dirty="0">
                           <a:solidFill>
                             <a:srgbClr val="111118"/>
                           </a:solidFill>
@@ -23578,413 +23308,9 @@
                           <a:ea typeface="Microsoft JhengHei" pitchFamily="34" charset="-122"/>
                           <a:cs typeface="Microsoft JhengHei" pitchFamily="34" charset="-120"/>
                         </a:rPr>
-                        <a:t>Public domain</a:t>
+                        <a:t>CC BY 3.0</a:t>
                       </a:r>
-                      <a:endParaRPr lang="en-US" sz="900" dirty="0">
-                        <a:latin typeface="Microsoft JhengHei" charset="0"/>
-                        <a:ea typeface="Microsoft JhengHei" charset="0"/>
-                        <a:cs typeface="Microsoft JhengHei" charset="0"/>
-                      </a:endParaRPr>
-                    </a:p>
-                  </a:txBody>
-                  <a:tcPr marL="101600" marR="101600" marT="50800" marB="50800" anchor="ctr">
-                    <a:lnL w="0" cap="flat" cmpd="sng" algn="ctr">
-                      <a:noFill/>
-                    </a:lnL>
-                    <a:lnR w="0" cap="flat" cmpd="sng" algn="ctr">
-                      <a:noFill/>
-                    </a:lnR>
-                    <a:lnT w="0" cap="flat" cmpd="sng" algn="ctr">
-                      <a:noFill/>
-                    </a:lnT>
-                    <a:lnB w="6350" cap="flat" cmpd="sng" algn="ctr">
-                      <a:solidFill>
-                        <a:srgbClr val="E5E7EB"/>
-                      </a:solidFill>
-                      <a:prstDash val="solid"/>
-                      <a:round/>
-                      <a:headEnd type="none" w="med" len="med"/>
-                      <a:tailEnd type="none" w="med" len="med"/>
-                    </a:lnB>
-                    <a:solidFill>
-                      <a:srgbClr val="FFFFFF"/>
-                    </a:solidFill>
-                  </a:tcPr>
-                </a:tc>
-              </a:tr>
-              <a:tr h="358140">
-                <a:tc>
-                  <a:txBody>
-                    <a:bodyPr/>
-                    <a:lstStyle/>
-                    <a:p>
-                      <a:pPr indent="0" marL="0">
-                        <a:buNone/>
-                      </a:pPr>
-                      <a:r>
-                        <a:rPr lang="en-US" sz="900" dirty="0">
-                          <a:solidFill>
-                            <a:srgbClr val="111118"/>
-                          </a:solidFill>
-                          <a:latin typeface="Microsoft JhengHei" pitchFamily="34" charset="0"/>
-                          <a:ea typeface="Microsoft JhengHei" pitchFamily="34" charset="-122"/>
-                          <a:cs typeface="Microsoft JhengHei" pitchFamily="34" charset="-120"/>
-                        </a:rPr>
-                        <a:t>009</a:t>
-                      </a:r>
-                      <a:endParaRPr lang="en-US" sz="900" dirty="0">
-                        <a:latin typeface="Microsoft JhengHei" charset="0"/>
-                        <a:ea typeface="Microsoft JhengHei" charset="0"/>
-                        <a:cs typeface="Microsoft JhengHei" charset="0"/>
-                      </a:endParaRPr>
-                    </a:p>
-                  </a:txBody>
-                  <a:tcPr marL="101600" marR="101600" marT="50800" marB="50800" anchor="ctr">
-                    <a:lnL w="0" cap="flat" cmpd="sng" algn="ctr">
-                      <a:noFill/>
-                    </a:lnL>
-                    <a:lnR w="0" cap="flat" cmpd="sng" algn="ctr">
-                      <a:noFill/>
-                    </a:lnR>
-                    <a:lnT w="0" cap="flat" cmpd="sng" algn="ctr">
-                      <a:noFill/>
-                    </a:lnT>
-                    <a:lnB w="6350" cap="flat" cmpd="sng" algn="ctr">
-                      <a:solidFill>
-                        <a:srgbClr val="E5E7EB"/>
-                      </a:solidFill>
-                      <a:prstDash val="solid"/>
-                      <a:round/>
-                      <a:headEnd type="none" w="med" len="med"/>
-                      <a:tailEnd type="none" w="med" len="med"/>
-                    </a:lnB>
-                    <a:solidFill>
-                      <a:srgbClr val="FFFFFF"/>
-                    </a:solidFill>
-                  </a:tcPr>
-                </a:tc>
-                <a:tc>
-                  <a:txBody>
-                    <a:bodyPr/>
-                    <a:lstStyle/>
-                    <a:p>
-                      <a:pPr indent="0" marL="0">
-                        <a:buNone/>
-                      </a:pPr>
-                      <a:r>
-                        <a:rPr lang="en-US" sz="900" dirty="0">
-                          <a:solidFill>
-                            <a:srgbClr val="111118"/>
-                          </a:solidFill>
-                          <a:latin typeface="Microsoft JhengHei" pitchFamily="34" charset="0"/>
-                          <a:ea typeface="Microsoft JhengHei" pitchFamily="34" charset="-122"/>
-                          <a:cs typeface="Microsoft JhengHei" pitchFamily="34" charset="-120"/>
-                        </a:rPr>
-                        <a:t>Coffee Bean &amp; Tea Leaf Process.webm</a:t>
-                      </a:r>
-                      <a:endParaRPr lang="en-US" sz="900" dirty="0">
-                        <a:latin typeface="Microsoft JhengHei" charset="0"/>
-                        <a:ea typeface="Microsoft JhengHei" charset="0"/>
-                        <a:cs typeface="Microsoft JhengHei" charset="0"/>
-                      </a:endParaRPr>
-                    </a:p>
-                  </a:txBody>
-                  <a:tcPr marL="101600" marR="101600" marT="50800" marB="50800" anchor="ctr">
-                    <a:lnL w="0" cap="flat" cmpd="sng" algn="ctr">
-                      <a:noFill/>
-                    </a:lnL>
-                    <a:lnR w="0" cap="flat" cmpd="sng" algn="ctr">
-                      <a:noFill/>
-                    </a:lnR>
-                    <a:lnT w="0" cap="flat" cmpd="sng" algn="ctr">
-                      <a:noFill/>
-                    </a:lnT>
-                    <a:lnB w="6350" cap="flat" cmpd="sng" algn="ctr">
-                      <a:solidFill>
-                        <a:srgbClr val="E5E7EB"/>
-                      </a:solidFill>
-                      <a:prstDash val="solid"/>
-                      <a:round/>
-                      <a:headEnd type="none" w="med" len="med"/>
-                      <a:tailEnd type="none" w="med" len="med"/>
-                    </a:lnB>
-                    <a:solidFill>
-                      <a:srgbClr val="FFFFFF"/>
-                    </a:solidFill>
-                  </a:tcPr>
-                </a:tc>
-                <a:tc>
-                  <a:txBody>
-                    <a:bodyPr/>
-                    <a:lstStyle/>
-                    <a:p>
-                      <a:pPr indent="0" marL="0">
-                        <a:buNone/>
-                      </a:pPr>
-                      <a:r>
-                        <a:rPr lang="en-US" sz="900" dirty="0">
-                          <a:solidFill>
-                            <a:srgbClr val="111118"/>
-                          </a:solidFill>
-                          <a:latin typeface="Microsoft JhengHei" pitchFamily="34" charset="0"/>
-                          <a:ea typeface="Microsoft JhengHei" pitchFamily="34" charset="-122"/>
-                          <a:cs typeface="Microsoft JhengHei" pitchFamily="34" charset="-120"/>
-                        </a:rPr>
-                        <a:t>Kelliks</a:t>
-                      </a:r>
-                      <a:endParaRPr lang="en-US" sz="900" dirty="0">
-                        <a:latin typeface="Microsoft JhengHei" charset="0"/>
-                        <a:ea typeface="Microsoft JhengHei" charset="0"/>
-                        <a:cs typeface="Microsoft JhengHei" charset="0"/>
-                      </a:endParaRPr>
-                    </a:p>
-                  </a:txBody>
-                  <a:tcPr marL="101600" marR="101600" marT="50800" marB="50800" anchor="ctr">
-                    <a:lnL w="0" cap="flat" cmpd="sng" algn="ctr">
-                      <a:noFill/>
-                    </a:lnL>
-                    <a:lnR w="0" cap="flat" cmpd="sng" algn="ctr">
-                      <a:noFill/>
-                    </a:lnR>
-                    <a:lnT w="0" cap="flat" cmpd="sng" algn="ctr">
-                      <a:noFill/>
-                    </a:lnT>
-                    <a:lnB w="6350" cap="flat" cmpd="sng" algn="ctr">
-                      <a:solidFill>
-                        <a:srgbClr val="E5E7EB"/>
-                      </a:solidFill>
-                      <a:prstDash val="solid"/>
-                      <a:round/>
-                      <a:headEnd type="none" w="med" len="med"/>
-                      <a:tailEnd type="none" w="med" len="med"/>
-                    </a:lnB>
-                    <a:solidFill>
-                      <a:srgbClr val="FFFFFF"/>
-                    </a:solidFill>
-                  </a:tcPr>
-                </a:tc>
-                <a:tc>
-                  <a:txBody>
-                    <a:bodyPr/>
-                    <a:lstStyle/>
-                    <a:p>
-                      <a:pPr indent="0" marL="0">
-                        <a:buNone/>
-                      </a:pPr>
-                      <a:r>
-                        <a:rPr lang="en-US" sz="900" dirty="0">
-                          <a:solidFill>
-                            <a:srgbClr val="111118"/>
-                          </a:solidFill>
-                          <a:latin typeface="Microsoft JhengHei" pitchFamily="34" charset="0"/>
-                          <a:ea typeface="Microsoft JhengHei" pitchFamily="34" charset="-122"/>
-                          <a:cs typeface="Microsoft JhengHei" pitchFamily="34" charset="-120"/>
-                        </a:rPr>
-                        <a:t>CC BY-SA 3.0</a:t>
-                      </a:r>
-                      <a:endParaRPr lang="en-US" sz="900" dirty="0">
-                        <a:latin typeface="Microsoft JhengHei" charset="0"/>
-                        <a:ea typeface="Microsoft JhengHei" charset="0"/>
-                        <a:cs typeface="Microsoft JhengHei" charset="0"/>
-                      </a:endParaRPr>
-                    </a:p>
-                  </a:txBody>
-                  <a:tcPr marL="101600" marR="101600" marT="50800" marB="50800" anchor="ctr">
-                    <a:lnL w="0" cap="flat" cmpd="sng" algn="ctr">
-                      <a:noFill/>
-                    </a:lnL>
-                    <a:lnR w="0" cap="flat" cmpd="sng" algn="ctr">
-                      <a:noFill/>
-                    </a:lnR>
-                    <a:lnT w="0" cap="flat" cmpd="sng" algn="ctr">
-                      <a:noFill/>
-                    </a:lnT>
-                    <a:lnB w="6350" cap="flat" cmpd="sng" algn="ctr">
-                      <a:solidFill>
-                        <a:srgbClr val="E5E7EB"/>
-                      </a:solidFill>
-                      <a:prstDash val="solid"/>
-                      <a:round/>
-                      <a:headEnd type="none" w="med" len="med"/>
-                      <a:tailEnd type="none" w="med" len="med"/>
-                    </a:lnB>
-                    <a:solidFill>
-                      <a:srgbClr val="FFFFFF"/>
-                    </a:solidFill>
-                  </a:tcPr>
-                </a:tc>
-              </a:tr>
-              <a:tr h="358140">
-                <a:tc>
-                  <a:txBody>
-                    <a:bodyPr/>
-                    <a:lstStyle/>
-                    <a:p>
-                      <a:pPr indent="0" marL="0">
-                        <a:buNone/>
-                      </a:pPr>
-                      <a:r>
-                        <a:rPr lang="en-US" sz="900" dirty="0">
-                          <a:solidFill>
-                            <a:srgbClr val="111118"/>
-                          </a:solidFill>
-                          <a:latin typeface="Microsoft JhengHei" pitchFamily="34" charset="0"/>
-                          <a:ea typeface="Microsoft JhengHei" pitchFamily="34" charset="-122"/>
-                          <a:cs typeface="Microsoft JhengHei" pitchFamily="34" charset="-120"/>
-                        </a:rPr>
-                        <a:t>010</a:t>
-                      </a:r>
-                      <a:endParaRPr lang="en-US" sz="900" dirty="0">
-                        <a:latin typeface="Microsoft JhengHei" charset="0"/>
-                        <a:ea typeface="Microsoft JhengHei" charset="0"/>
-                        <a:cs typeface="Microsoft JhengHei" charset="0"/>
-                      </a:endParaRPr>
-                    </a:p>
-                  </a:txBody>
-                  <a:tcPr marL="101600" marR="101600" marT="50800" marB="50800" anchor="ctr">
-                    <a:lnL w="0" cap="flat" cmpd="sng" algn="ctr">
-                      <a:noFill/>
-                    </a:lnL>
-                    <a:lnR w="0" cap="flat" cmpd="sng" algn="ctr">
-                      <a:noFill/>
-                    </a:lnR>
-                    <a:lnT w="0" cap="flat" cmpd="sng" algn="ctr">
-                      <a:noFill/>
-                    </a:lnT>
-                    <a:lnB w="6350" cap="flat" cmpd="sng" algn="ctr">
-                      <a:solidFill>
-                        <a:srgbClr val="E5E7EB"/>
-                      </a:solidFill>
-                      <a:prstDash val="solid"/>
-                      <a:round/>
-                      <a:headEnd type="none" w="med" len="med"/>
-                      <a:tailEnd type="none" w="med" len="med"/>
-                    </a:lnB>
-                    <a:solidFill>
-                      <a:srgbClr val="FFFFFF"/>
-                    </a:solidFill>
-                  </a:tcPr>
-                </a:tc>
-                <a:tc>
-                  <a:txBody>
-                    <a:bodyPr/>
-                    <a:lstStyle/>
-                    <a:p>
-                      <a:pPr indent="0" marL="0">
-                        <a:buNone/>
-                      </a:pPr>
-                      <a:r>
-                        <a:rPr lang="en-US" sz="900" dirty="0">
-                          <a:solidFill>
-                            <a:srgbClr val="111118"/>
-                          </a:solidFill>
-                          <a:latin typeface="Microsoft JhengHei" pitchFamily="34" charset="0"/>
-                          <a:ea typeface="Microsoft JhengHei" pitchFamily="34" charset="-122"/>
-                          <a:cs typeface="Microsoft JhengHei" pitchFamily="34" charset="-120"/>
-                        </a:rPr>
-                        <a:t>“走线客”过境墨西哥 不忘来杯星巴克.webm</a:t>
-                      </a:r>
-                      <a:endParaRPr lang="en-US" sz="900" dirty="0">
-                        <a:latin typeface="Microsoft JhengHei" charset="0"/>
-                        <a:ea typeface="Microsoft JhengHei" charset="0"/>
-                        <a:cs typeface="Microsoft JhengHei" charset="0"/>
-                      </a:endParaRPr>
-                    </a:p>
-                  </a:txBody>
-                  <a:tcPr marL="101600" marR="101600" marT="50800" marB="50800" anchor="ctr">
-                    <a:lnL w="0" cap="flat" cmpd="sng" algn="ctr">
-                      <a:noFill/>
-                    </a:lnL>
-                    <a:lnR w="0" cap="flat" cmpd="sng" algn="ctr">
-                      <a:noFill/>
-                    </a:lnR>
-                    <a:lnT w="0" cap="flat" cmpd="sng" algn="ctr">
-                      <a:noFill/>
-                    </a:lnT>
-                    <a:lnB w="6350" cap="flat" cmpd="sng" algn="ctr">
-                      <a:solidFill>
-                        <a:srgbClr val="E5E7EB"/>
-                      </a:solidFill>
-                      <a:prstDash val="solid"/>
-                      <a:round/>
-                      <a:headEnd type="none" w="med" len="med"/>
-                      <a:tailEnd type="none" w="med" len="med"/>
-                    </a:lnB>
-                    <a:solidFill>
-                      <a:srgbClr val="FFFFFF"/>
-                    </a:solidFill>
-                  </a:tcPr>
-                </a:tc>
-                <a:tc>
-                  <a:txBody>
-                    <a:bodyPr/>
-                    <a:lstStyle/>
-                    <a:p>
-                      <a:pPr indent="0" marL="0">
-                        <a:buNone/>
-                      </a:pPr>
-                      <a:r>
-                        <a:rPr lang="en-US" sz="900" dirty="0">
-                          <a:solidFill>
-                            <a:srgbClr val="111118"/>
-                          </a:solidFill>
-                          <a:latin typeface="Microsoft JhengHei" pitchFamily="34" charset="0"/>
-                          <a:ea typeface="Microsoft JhengHei" pitchFamily="34" charset="-122"/>
-                          <a:cs typeface="Microsoft JhengHei" pitchFamily="34" charset="-120"/>
-                        </a:rPr>
-                        <a:t>美国之音中文网</a:t>
-                      </a:r>
-                      <a:endParaRPr lang="en-US" sz="900" dirty="0">
-                        <a:latin typeface="Microsoft JhengHei" charset="0"/>
-                        <a:ea typeface="Microsoft JhengHei" charset="0"/>
-                        <a:cs typeface="Microsoft JhengHei" charset="0"/>
-                      </a:endParaRPr>
-                    </a:p>
-                  </a:txBody>
-                  <a:tcPr marL="101600" marR="101600" marT="50800" marB="50800" anchor="ctr">
-                    <a:lnL w="0" cap="flat" cmpd="sng" algn="ctr">
-                      <a:noFill/>
-                    </a:lnL>
-                    <a:lnR w="0" cap="flat" cmpd="sng" algn="ctr">
-                      <a:noFill/>
-                    </a:lnR>
-                    <a:lnT w="0" cap="flat" cmpd="sng" algn="ctr">
-                      <a:noFill/>
-                    </a:lnT>
-                    <a:lnB w="6350" cap="flat" cmpd="sng" algn="ctr">
-                      <a:solidFill>
-                        <a:srgbClr val="E5E7EB"/>
-                      </a:solidFill>
-                      <a:prstDash val="solid"/>
-                      <a:round/>
-                      <a:headEnd type="none" w="med" len="med"/>
-                      <a:tailEnd type="none" w="med" len="med"/>
-                    </a:lnB>
-                    <a:solidFill>
-                      <a:srgbClr val="FFFFFF"/>
-                    </a:solidFill>
-                  </a:tcPr>
-                </a:tc>
-                <a:tc>
-                  <a:txBody>
-                    <a:bodyPr/>
-                    <a:lstStyle/>
-                    <a:p>
-                      <a:pPr indent="0" marL="0">
-                        <a:buNone/>
-                      </a:pPr>
-                      <a:r>
-                        <a:rPr lang="en-US" sz="900" dirty="0">
-                          <a:solidFill>
-                            <a:srgbClr val="111118"/>
-                          </a:solidFill>
-                          <a:latin typeface="Microsoft JhengHei" pitchFamily="34" charset="0"/>
-                          <a:ea typeface="Microsoft JhengHei" pitchFamily="34" charset="-122"/>
-                          <a:cs typeface="Microsoft JhengHei" pitchFamily="34" charset="-120"/>
-                        </a:rPr>
-                        <a:t>Public domain</a:t>
-                      </a:r>
-                      <a:endParaRPr lang="en-US" sz="900" dirty="0">
+                      <a:endParaRPr lang="en-US" sz="1000" dirty="0">
                         <a:latin typeface="Microsoft JhengHei" charset="0"/>
                         <a:ea typeface="Microsoft JhengHei" charset="0"/>
                         <a:cs typeface="Microsoft JhengHei" charset="0"/>
@@ -24022,6 +23348,65 @@
       </p:graphicFrame>
       <p:sp>
         <p:nvSpPr>
+          <p:cNvPr id="6" name="Shape 3"/>
+          <p:cNvSpPr/>
+          <p:nvPr/>
+        </p:nvSpPr>
+        <p:spPr>
+          <a:xfrm>
+            <a:off x="640080" y="5413248"/>
+            <a:ext cx="0" cy="384048"/>
+          </a:xfrm>
+          <a:prstGeom prst="line">
+            <a:avLst/>
+          </a:prstGeom>
+          <a:noFill/>
+          <a:ln w="38100">
+            <a:solidFill>
+              <a:srgbClr val="6C4CF5"/>
+            </a:solidFill>
+            <a:prstDash val="solid"/>
+          </a:ln>
+        </p:spPr>
+      </p:sp>
+      <p:sp>
+        <p:nvSpPr>
+          <p:cNvPr id="7" name="Text 4"/>
+          <p:cNvSpPr txBox="1"/>
+          <p:nvPr/>
+        </p:nvSpPr>
+        <p:spPr>
+          <a:xfrm>
+            <a:off x="841248" y="5376672"/>
+            <a:ext cx="10607040" cy="457200"/>
+          </a:xfrm>
+          <a:prstGeom prst="rect">
+            <a:avLst/>
+          </a:prstGeom>
+          <a:noFill/>
+          <a:ln/>
+        </p:spPr>
+        <p:txBody>
+          <a:bodyPr wrap="square" lIns="0" tIns="0" rIns="0" bIns="0" rtlCol="0" anchor="ctr"/>
+          <a:lstStyle/>
+          <a:p>
+            <a:pPr indent="0" marL="0">
+              <a:buNone/>
+            </a:pPr>
+            <a:r>
+              <a:rPr lang="en-US" sz="1350" b="1" dirty="0">
+                <a:solidFill>
+                  <a:srgbClr val="111118"/>
+                </a:solidFill>
+              </a:rPr>
+              <a:t>Screenshots and cover frames come from these 9 clips. All 44 clips used in the evaluation, with links: docs/CREDITS.md in the repository.</a:t>
+            </a:r>
+            <a:endParaRPr lang="en-US" sz="1350" dirty="0"/>
+          </a:p>
+        </p:txBody>
+      </p:sp>
+      <p:sp>
+        <p:nvSpPr>
           <p:cNvPr id="25" name="Slide Number Placeholder 0"/>
           <p:cNvSpPr>
             <a:spLocks noGrp="1"/>
@@ -24060,7914 +23445,6 @@
             <a:fld id="{F7021451-1387-4CA6-816F-3879F97B5CBC}" type="slidenum">
               <a:rPr b="0" lang="en-US"/>
               <a:t>24</a:t>
-            </a:fld>
-            <a:endParaRPr lang="en-US"/>
-          </a:p>
-        </p:txBody>
-      </p:sp>
-    </p:spTree>
-  </p:cSld>
-  <p:clrMapOvr>
-    <a:masterClrMapping/>
-  </p:clrMapOvr>
-</p:sld>
-</file>
-
-<file path=ppt/slides/slide25.xml><?xml version="1.0" encoding="utf-8"?>
-<p:sld xmlns:a="http://schemas.openxmlformats.org/drawingml/2006/main" xmlns:r="http://schemas.openxmlformats.org/officeDocument/2006/relationships" xmlns:p="http://schemas.openxmlformats.org/presentationml/2006/main">
-  <p:cSld name="Slide 25">
-    <p:spTree>
-      <p:nvGrpSpPr>
-        <p:cNvPr id="1" name=""/>
-        <p:cNvGrpSpPr/>
-        <p:nvPr/>
-      </p:nvGrpSpPr>
-      <p:grpSpPr>
-        <a:xfrm>
-          <a:off x="0" y="0"/>
-          <a:ext cx="0" cy="0"/>
-          <a:chOff x="0" y="0"/>
-          <a:chExt cx="0" cy="0"/>
-        </a:xfrm>
-      </p:grpSpPr>
-      <p:sp>
-        <p:nvSpPr>
-          <p:cNvPr id="2" name="Text 0"/>
-          <p:cNvSpPr/>
-          <p:nvPr>
-            <p:ph idx="100" type="title" hasCustomPrompt="1"/>
-          </p:nvPr>
-        </p:nvSpPr>
-        <p:spPr>
-          <a:xfrm>
-            <a:off x="640080" y="502920"/>
-            <a:ext cx="10881360" cy="914400"/>
-          </a:xfrm>
-          <a:prstGeom prst="rect">
-            <a:avLst/>
-          </a:prstGeom>
-          <a:noFill/>
-          <a:ln/>
-        </p:spPr>
-        <p:txBody>
-          <a:bodyPr wrap="square" lIns="0" tIns="0" rIns="0" bIns="0" rtlCol="0" anchor="t"/>
-          <a:lstStyle/>
-          <a:p>
-            <a:pPr algn="l" indent="0" marL="0">
-              <a:buNone/>
-            </a:pPr>
-            <a:r>
-              <a:rPr lang="en-US" sz="2800" b="1" dirty="0">
-                <a:solidFill>
-                  <a:srgbClr val="111118"/>
-                </a:solidFill>
-              </a:rPr>
-              <a:t>A5 · Footage credits (2 of 4)</a:t>
-            </a:r>
-            <a:endParaRPr lang="en-US" sz="2800" dirty="0"/>
-          </a:p>
-        </p:txBody>
-      </p:sp>
-      <p:sp>
-        <p:nvSpPr>
-          <p:cNvPr id="3" name="Text 1"/>
-          <p:cNvSpPr txBox="1"/>
-          <p:nvPr/>
-        </p:nvSpPr>
-        <p:spPr>
-          <a:xfrm>
-            <a:off x="640080" y="274320"/>
-            <a:ext cx="8229600" cy="256032"/>
-          </a:xfrm>
-          <a:prstGeom prst="rect">
-            <a:avLst/>
-          </a:prstGeom>
-          <a:noFill/>
-          <a:ln/>
-        </p:spPr>
-        <p:txBody>
-          <a:bodyPr wrap="square" lIns="0" tIns="0" rIns="0" bIns="0" rtlCol="0" anchor="ctr"/>
-          <a:lstStyle/>
-          <a:p>
-            <a:pPr indent="0" marL="0">
-              <a:buNone/>
-            </a:pPr>
-            <a:r>
-              <a:rPr lang="en-US" sz="1050" b="1" spc="300" kern="0" dirty="0">
-                <a:solidFill>
-                  <a:srgbClr val="6C4CF5"/>
-                </a:solidFill>
-              </a:rPr>
-              <a:t>APPENDIX</a:t>
-            </a:r>
-            <a:endParaRPr lang="en-US" sz="1050" dirty="0"/>
-          </a:p>
-        </p:txBody>
-      </p:sp>
-      <p:sp>
-        <p:nvSpPr>
-          <p:cNvPr id="4" name="Text 2"/>
-          <p:cNvSpPr txBox="1"/>
-          <p:nvPr/>
-        </p:nvSpPr>
-        <p:spPr>
-          <a:xfrm>
-            <a:off x="640080" y="6355080"/>
-            <a:ext cx="5486400" cy="274320"/>
-          </a:xfrm>
-          <a:prstGeom prst="rect">
-            <a:avLst/>
-          </a:prstGeom>
-          <a:noFill/>
-          <a:ln/>
-        </p:spPr>
-        <p:txBody>
-          <a:bodyPr wrap="square" lIns="0" tIns="0" rIns="0" bIns="0" rtlCol="0" anchor="ctr"/>
-          <a:lstStyle/>
-          <a:p>
-            <a:pPr indent="0" marL="0">
-              <a:buNone/>
-            </a:pPr>
-            <a:r>
-              <a:rPr lang="en-US" sz="1000" dirty="0">
-                <a:solidFill>
-                  <a:srgbClr val="9CA3AF"/>
-                </a:solidFill>
-              </a:rPr>
-              <a:t>SceneGap Edge · Stage I</a:t>
-            </a:r>
-            <a:endParaRPr lang="en-US" sz="1000" dirty="0"/>
-          </a:p>
-        </p:txBody>
-      </p:sp>
-      <p:graphicFrame>
-        <p:nvGraphicFramePr>
-          <p:cNvPr id="26" name="Table 0"/>
-          <p:cNvGraphicFramePr>
-            <a:graphicFrameLocks noGrp="1"/>
-          </p:cNvGraphicFramePr>
-          <p:nvPr>
-            <p:extLst>
-              <p:ext uri="{D42A27DB-BD31-4B8C-83A1-F6EECF244321}">
-                <p14:modId xmlns:p14="http://schemas.microsoft.com/office/powerpoint/2010/main" val="1579011935"/>
-              </p:ext>
-            </p:extLst>
-          </p:nvPr>
-        </p:nvGraphicFramePr>
-        <p:xfrm>
-          <a:off x="640080" y="1600200"/>
-          <a:ext cx="10881360" cy="914400"/>
-        </p:xfrm>
-        <a:graphic>
-          <a:graphicData uri="http://schemas.openxmlformats.org/drawingml/2006/table">
-            <a:tbl>
-              <a:tblPr/>
-              <a:tblGrid>
-                <a:gridCol w="539572"/>
-                <a:gridCol w="5935287"/>
-                <a:gridCol w="2787786"/>
-                <a:gridCol w="1618715"/>
-              </a:tblGrid>
-              <a:tr h="358140">
-                <a:tc>
-                  <a:txBody>
-                    <a:bodyPr/>
-                    <a:lstStyle/>
-                    <a:p>
-                      <a:pPr indent="0" marL="0">
-                        <a:buNone/>
-                      </a:pPr>
-                      <a:r>
-                        <a:rPr lang="en-US" sz="1000" b="1" dirty="0">
-                          <a:solidFill>
-                            <a:srgbClr val="6B7280"/>
-                          </a:solidFill>
-                          <a:latin typeface="Microsoft JhengHei" pitchFamily="34" charset="0"/>
-                          <a:ea typeface="Microsoft JhengHei" pitchFamily="34" charset="-122"/>
-                          <a:cs typeface="Microsoft JhengHei" pitchFamily="34" charset="-120"/>
-                        </a:rPr>
-                        <a:t>#</a:t>
-                      </a:r>
-                      <a:endParaRPr lang="en-US" sz="1000" dirty="0">
-                        <a:latin typeface="Microsoft JhengHei" charset="0"/>
-                        <a:ea typeface="Microsoft JhengHei" charset="0"/>
-                        <a:cs typeface="Microsoft JhengHei" charset="0"/>
-                      </a:endParaRPr>
-                    </a:p>
-                  </a:txBody>
-                  <a:tcPr marL="101600" marR="101600" marT="50800" marB="50800" anchor="ctr">
-                    <a:lnL w="0" cap="flat" cmpd="sng" algn="ctr">
-                      <a:noFill/>
-                    </a:lnL>
-                    <a:lnR w="0" cap="flat" cmpd="sng" algn="ctr">
-                      <a:noFill/>
-                    </a:lnR>
-                    <a:lnT w="0" cap="flat" cmpd="sng" algn="ctr">
-                      <a:noFill/>
-                    </a:lnT>
-                    <a:lnB w="15875" cap="flat" cmpd="sng" algn="ctr">
-                      <a:solidFill>
-                        <a:srgbClr val="111118"/>
-                      </a:solidFill>
-                      <a:prstDash val="solid"/>
-                      <a:round/>
-                      <a:headEnd type="none" w="med" len="med"/>
-                      <a:tailEnd type="none" w="med" len="med"/>
-                    </a:lnB>
-                    <a:solidFill>
-                      <a:srgbClr val="FFFFFF"/>
-                    </a:solidFill>
-                  </a:tcPr>
-                </a:tc>
-                <a:tc>
-                  <a:txBody>
-                    <a:bodyPr/>
-                    <a:lstStyle/>
-                    <a:p>
-                      <a:pPr indent="0" marL="0">
-                        <a:buNone/>
-                      </a:pPr>
-                      <a:r>
-                        <a:rPr lang="en-US" sz="1000" b="1" dirty="0">
-                          <a:solidFill>
-                            <a:srgbClr val="6B7280"/>
-                          </a:solidFill>
-                          <a:latin typeface="Microsoft JhengHei" pitchFamily="34" charset="0"/>
-                          <a:ea typeface="Microsoft JhengHei" pitchFamily="34" charset="-122"/>
-                          <a:cs typeface="Microsoft JhengHei" pitchFamily="34" charset="-120"/>
-                        </a:rPr>
-                        <a:t>WIKIMEDIA COMMONS FILE</a:t>
-                      </a:r>
-                      <a:endParaRPr lang="en-US" sz="1000" dirty="0">
-                        <a:latin typeface="Microsoft JhengHei" charset="0"/>
-                        <a:ea typeface="Microsoft JhengHei" charset="0"/>
-                        <a:cs typeface="Microsoft JhengHei" charset="0"/>
-                      </a:endParaRPr>
-                    </a:p>
-                  </a:txBody>
-                  <a:tcPr marL="101600" marR="101600" marT="50800" marB="50800" anchor="ctr">
-                    <a:lnL w="0" cap="flat" cmpd="sng" algn="ctr">
-                      <a:noFill/>
-                    </a:lnL>
-                    <a:lnR w="0" cap="flat" cmpd="sng" algn="ctr">
-                      <a:noFill/>
-                    </a:lnR>
-                    <a:lnT w="0" cap="flat" cmpd="sng" algn="ctr">
-                      <a:noFill/>
-                    </a:lnT>
-                    <a:lnB w="15875" cap="flat" cmpd="sng" algn="ctr">
-                      <a:solidFill>
-                        <a:srgbClr val="111118"/>
-                      </a:solidFill>
-                      <a:prstDash val="solid"/>
-                      <a:round/>
-                      <a:headEnd type="none" w="med" len="med"/>
-                      <a:tailEnd type="none" w="med" len="med"/>
-                    </a:lnB>
-                    <a:solidFill>
-                      <a:srgbClr val="FFFFFF"/>
-                    </a:solidFill>
-                  </a:tcPr>
-                </a:tc>
-                <a:tc>
-                  <a:txBody>
-                    <a:bodyPr/>
-                    <a:lstStyle/>
-                    <a:p>
-                      <a:pPr indent="0" marL="0">
-                        <a:buNone/>
-                      </a:pPr>
-                      <a:r>
-                        <a:rPr lang="en-US" sz="1000" b="1" dirty="0">
-                          <a:solidFill>
-                            <a:srgbClr val="6B7280"/>
-                          </a:solidFill>
-                          <a:latin typeface="Microsoft JhengHei" pitchFamily="34" charset="0"/>
-                          <a:ea typeface="Microsoft JhengHei" pitchFamily="34" charset="-122"/>
-                          <a:cs typeface="Microsoft JhengHei" pitchFamily="34" charset="-120"/>
-                        </a:rPr>
-                        <a:t>AUTHOR</a:t>
-                      </a:r>
-                      <a:endParaRPr lang="en-US" sz="1000" dirty="0">
-                        <a:latin typeface="Microsoft JhengHei" charset="0"/>
-                        <a:ea typeface="Microsoft JhengHei" charset="0"/>
-                        <a:cs typeface="Microsoft JhengHei" charset="0"/>
-                      </a:endParaRPr>
-                    </a:p>
-                  </a:txBody>
-                  <a:tcPr marL="101600" marR="101600" marT="50800" marB="50800" anchor="ctr">
-                    <a:lnL w="0" cap="flat" cmpd="sng" algn="ctr">
-                      <a:noFill/>
-                    </a:lnL>
-                    <a:lnR w="0" cap="flat" cmpd="sng" algn="ctr">
-                      <a:noFill/>
-                    </a:lnR>
-                    <a:lnT w="0" cap="flat" cmpd="sng" algn="ctr">
-                      <a:noFill/>
-                    </a:lnT>
-                    <a:lnB w="15875" cap="flat" cmpd="sng" algn="ctr">
-                      <a:solidFill>
-                        <a:srgbClr val="111118"/>
-                      </a:solidFill>
-                      <a:prstDash val="solid"/>
-                      <a:round/>
-                      <a:headEnd type="none" w="med" len="med"/>
-                      <a:tailEnd type="none" w="med" len="med"/>
-                    </a:lnB>
-                    <a:solidFill>
-                      <a:srgbClr val="FFFFFF"/>
-                    </a:solidFill>
-                  </a:tcPr>
-                </a:tc>
-                <a:tc>
-                  <a:txBody>
-                    <a:bodyPr/>
-                    <a:lstStyle/>
-                    <a:p>
-                      <a:pPr indent="0" marL="0">
-                        <a:buNone/>
-                      </a:pPr>
-                      <a:r>
-                        <a:rPr lang="en-US" sz="1000" b="1" dirty="0">
-                          <a:solidFill>
-                            <a:srgbClr val="6B7280"/>
-                          </a:solidFill>
-                          <a:latin typeface="Microsoft JhengHei" pitchFamily="34" charset="0"/>
-                          <a:ea typeface="Microsoft JhengHei" pitchFamily="34" charset="-122"/>
-                          <a:cs typeface="Microsoft JhengHei" pitchFamily="34" charset="-120"/>
-                        </a:rPr>
-                        <a:t>LICENCE</a:t>
-                      </a:r>
-                      <a:endParaRPr lang="en-US" sz="1000" dirty="0">
-                        <a:latin typeface="Microsoft JhengHei" charset="0"/>
-                        <a:ea typeface="Microsoft JhengHei" charset="0"/>
-                        <a:cs typeface="Microsoft JhengHei" charset="0"/>
-                      </a:endParaRPr>
-                    </a:p>
-                  </a:txBody>
-                  <a:tcPr marL="101600" marR="101600" marT="50800" marB="50800" anchor="ctr">
-                    <a:lnL w="0" cap="flat" cmpd="sng" algn="ctr">
-                      <a:noFill/>
-                    </a:lnL>
-                    <a:lnR w="0" cap="flat" cmpd="sng" algn="ctr">
-                      <a:noFill/>
-                    </a:lnR>
-                    <a:lnT w="0" cap="flat" cmpd="sng" algn="ctr">
-                      <a:noFill/>
-                    </a:lnT>
-                    <a:lnB w="15875" cap="flat" cmpd="sng" algn="ctr">
-                      <a:solidFill>
-                        <a:srgbClr val="111118"/>
-                      </a:solidFill>
-                      <a:prstDash val="solid"/>
-                      <a:round/>
-                      <a:headEnd type="none" w="med" len="med"/>
-                      <a:tailEnd type="none" w="med" len="med"/>
-                    </a:lnB>
-                    <a:solidFill>
-                      <a:srgbClr val="FFFFFF"/>
-                    </a:solidFill>
-                  </a:tcPr>
-                </a:tc>
-              </a:tr>
-              <a:tr h="358140">
-                <a:tc>
-                  <a:txBody>
-                    <a:bodyPr/>
-                    <a:lstStyle/>
-                    <a:p>
-                      <a:pPr indent="0" marL="0">
-                        <a:buNone/>
-                      </a:pPr>
-                      <a:r>
-                        <a:rPr lang="en-US" sz="900" dirty="0">
-                          <a:solidFill>
-                            <a:srgbClr val="111118"/>
-                          </a:solidFill>
-                          <a:latin typeface="Microsoft JhengHei" pitchFamily="34" charset="0"/>
-                          <a:ea typeface="Microsoft JhengHei" pitchFamily="34" charset="-122"/>
-                          <a:cs typeface="Microsoft JhengHei" pitchFamily="34" charset="-120"/>
-                        </a:rPr>
-                        <a:t>011</a:t>
-                      </a:r>
-                      <a:endParaRPr lang="en-US" sz="900" dirty="0">
-                        <a:latin typeface="Microsoft JhengHei" charset="0"/>
-                        <a:ea typeface="Microsoft JhengHei" charset="0"/>
-                        <a:cs typeface="Microsoft JhengHei" charset="0"/>
-                      </a:endParaRPr>
-                    </a:p>
-                  </a:txBody>
-                  <a:tcPr marL="101600" marR="101600" marT="50800" marB="50800" anchor="ctr">
-                    <a:lnL w="0" cap="flat" cmpd="sng" algn="ctr">
-                      <a:noFill/>
-                    </a:lnL>
-                    <a:lnR w="0" cap="flat" cmpd="sng" algn="ctr">
-                      <a:noFill/>
-                    </a:lnR>
-                    <a:lnT w="0" cap="flat" cmpd="sng" algn="ctr">
-                      <a:noFill/>
-                    </a:lnT>
-                    <a:lnB w="6350" cap="flat" cmpd="sng" algn="ctr">
-                      <a:solidFill>
-                        <a:srgbClr val="E5E7EB"/>
-                      </a:solidFill>
-                      <a:prstDash val="solid"/>
-                      <a:round/>
-                      <a:headEnd type="none" w="med" len="med"/>
-                      <a:tailEnd type="none" w="med" len="med"/>
-                    </a:lnB>
-                    <a:solidFill>
-                      <a:srgbClr val="FFFFFF"/>
-                    </a:solidFill>
-                  </a:tcPr>
-                </a:tc>
-                <a:tc>
-                  <a:txBody>
-                    <a:bodyPr/>
-                    <a:lstStyle/>
-                    <a:p>
-                      <a:pPr indent="0" marL="0">
-                        <a:buNone/>
-                      </a:pPr>
-                      <a:r>
-                        <a:rPr lang="en-US" sz="900" dirty="0">
-                          <a:solidFill>
-                            <a:srgbClr val="111118"/>
-                          </a:solidFill>
-                          <a:latin typeface="Microsoft JhengHei" pitchFamily="34" charset="0"/>
-                          <a:ea typeface="Microsoft JhengHei" pitchFamily="34" charset="-122"/>
-                          <a:cs typeface="Microsoft JhengHei" pitchFamily="34" charset="-120"/>
-                        </a:rPr>
-                        <a:t>Color sorter coffeebeans.webm</a:t>
-                      </a:r>
-                      <a:endParaRPr lang="en-US" sz="900" dirty="0">
-                        <a:latin typeface="Microsoft JhengHei" charset="0"/>
-                        <a:ea typeface="Microsoft JhengHei" charset="0"/>
-                        <a:cs typeface="Microsoft JhengHei" charset="0"/>
-                      </a:endParaRPr>
-                    </a:p>
-                  </a:txBody>
-                  <a:tcPr marL="101600" marR="101600" marT="50800" marB="50800" anchor="ctr">
-                    <a:lnL w="0" cap="flat" cmpd="sng" algn="ctr">
-                      <a:noFill/>
-                    </a:lnL>
-                    <a:lnR w="0" cap="flat" cmpd="sng" algn="ctr">
-                      <a:noFill/>
-                    </a:lnR>
-                    <a:lnT w="0" cap="flat" cmpd="sng" algn="ctr">
-                      <a:noFill/>
-                    </a:lnT>
-                    <a:lnB w="6350" cap="flat" cmpd="sng" algn="ctr">
-                      <a:solidFill>
-                        <a:srgbClr val="E5E7EB"/>
-                      </a:solidFill>
-                      <a:prstDash val="solid"/>
-                      <a:round/>
-                      <a:headEnd type="none" w="med" len="med"/>
-                      <a:tailEnd type="none" w="med" len="med"/>
-                    </a:lnB>
-                    <a:solidFill>
-                      <a:srgbClr val="FFFFFF"/>
-                    </a:solidFill>
-                  </a:tcPr>
-                </a:tc>
-                <a:tc>
-                  <a:txBody>
-                    <a:bodyPr/>
-                    <a:lstStyle/>
-                    <a:p>
-                      <a:pPr indent="0" marL="0">
-                        <a:buNone/>
-                      </a:pPr>
-                      <a:r>
-                        <a:rPr lang="en-US" sz="900" dirty="0">
-                          <a:solidFill>
-                            <a:srgbClr val="111118"/>
-                          </a:solidFill>
-                          <a:latin typeface="Microsoft JhengHei" pitchFamily="34" charset="0"/>
-                          <a:ea typeface="Microsoft JhengHei" pitchFamily="34" charset="-122"/>
-                          <a:cs typeface="Microsoft JhengHei" pitchFamily="34" charset="-120"/>
-                        </a:rPr>
-                        <a:t>AlexanderKlink</a:t>
-                      </a:r>
-                      <a:endParaRPr lang="en-US" sz="900" dirty="0">
-                        <a:latin typeface="Microsoft JhengHei" charset="0"/>
-                        <a:ea typeface="Microsoft JhengHei" charset="0"/>
-                        <a:cs typeface="Microsoft JhengHei" charset="0"/>
-                      </a:endParaRPr>
-                    </a:p>
-                  </a:txBody>
-                  <a:tcPr marL="101600" marR="101600" marT="50800" marB="50800" anchor="ctr">
-                    <a:lnL w="0" cap="flat" cmpd="sng" algn="ctr">
-                      <a:noFill/>
-                    </a:lnL>
-                    <a:lnR w="0" cap="flat" cmpd="sng" algn="ctr">
-                      <a:noFill/>
-                    </a:lnR>
-                    <a:lnT w="0" cap="flat" cmpd="sng" algn="ctr">
-                      <a:noFill/>
-                    </a:lnT>
-                    <a:lnB w="6350" cap="flat" cmpd="sng" algn="ctr">
-                      <a:solidFill>
-                        <a:srgbClr val="E5E7EB"/>
-                      </a:solidFill>
-                      <a:prstDash val="solid"/>
-                      <a:round/>
-                      <a:headEnd type="none" w="med" len="med"/>
-                      <a:tailEnd type="none" w="med" len="med"/>
-                    </a:lnB>
-                    <a:solidFill>
-                      <a:srgbClr val="FFFFFF"/>
-                    </a:solidFill>
-                  </a:tcPr>
-                </a:tc>
-                <a:tc>
-                  <a:txBody>
-                    <a:bodyPr/>
-                    <a:lstStyle/>
-                    <a:p>
-                      <a:pPr indent="0" marL="0">
-                        <a:buNone/>
-                      </a:pPr>
-                      <a:r>
-                        <a:rPr lang="en-US" sz="900" dirty="0">
-                          <a:solidFill>
-                            <a:srgbClr val="111118"/>
-                          </a:solidFill>
-                          <a:latin typeface="Microsoft JhengHei" pitchFamily="34" charset="0"/>
-                          <a:ea typeface="Microsoft JhengHei" pitchFamily="34" charset="-122"/>
-                          <a:cs typeface="Microsoft JhengHei" pitchFamily="34" charset="-120"/>
-                        </a:rPr>
-                        <a:t>CC0</a:t>
-                      </a:r>
-                      <a:endParaRPr lang="en-US" sz="900" dirty="0">
-                        <a:latin typeface="Microsoft JhengHei" charset="0"/>
-                        <a:ea typeface="Microsoft JhengHei" charset="0"/>
-                        <a:cs typeface="Microsoft JhengHei" charset="0"/>
-                      </a:endParaRPr>
-                    </a:p>
-                  </a:txBody>
-                  <a:tcPr marL="101600" marR="101600" marT="50800" marB="50800" anchor="ctr">
-                    <a:lnL w="0" cap="flat" cmpd="sng" algn="ctr">
-                      <a:noFill/>
-                    </a:lnL>
-                    <a:lnR w="0" cap="flat" cmpd="sng" algn="ctr">
-                      <a:noFill/>
-                    </a:lnR>
-                    <a:lnT w="0" cap="flat" cmpd="sng" algn="ctr">
-                      <a:noFill/>
-                    </a:lnT>
-                    <a:lnB w="6350" cap="flat" cmpd="sng" algn="ctr">
-                      <a:solidFill>
-                        <a:srgbClr val="E5E7EB"/>
-                      </a:solidFill>
-                      <a:prstDash val="solid"/>
-                      <a:round/>
-                      <a:headEnd type="none" w="med" len="med"/>
-                      <a:tailEnd type="none" w="med" len="med"/>
-                    </a:lnB>
-                    <a:solidFill>
-                      <a:srgbClr val="FFFFFF"/>
-                    </a:solidFill>
-                  </a:tcPr>
-                </a:tc>
-              </a:tr>
-              <a:tr h="358140">
-                <a:tc>
-                  <a:txBody>
-                    <a:bodyPr/>
-                    <a:lstStyle/>
-                    <a:p>
-                      <a:pPr indent="0" marL="0">
-                        <a:buNone/>
-                      </a:pPr>
-                      <a:r>
-                        <a:rPr lang="en-US" sz="900" dirty="0">
-                          <a:solidFill>
-                            <a:srgbClr val="111118"/>
-                          </a:solidFill>
-                          <a:latin typeface="Microsoft JhengHei" pitchFamily="34" charset="0"/>
-                          <a:ea typeface="Microsoft JhengHei" pitchFamily="34" charset="-122"/>
-                          <a:cs typeface="Microsoft JhengHei" pitchFamily="34" charset="-120"/>
-                        </a:rPr>
-                        <a:t>012</a:t>
-                      </a:r>
-                      <a:endParaRPr lang="en-US" sz="900" dirty="0">
-                        <a:latin typeface="Microsoft JhengHei" charset="0"/>
-                        <a:ea typeface="Microsoft JhengHei" charset="0"/>
-                        <a:cs typeface="Microsoft JhengHei" charset="0"/>
-                      </a:endParaRPr>
-                    </a:p>
-                  </a:txBody>
-                  <a:tcPr marL="101600" marR="101600" marT="50800" marB="50800" anchor="ctr">
-                    <a:lnL w="0" cap="flat" cmpd="sng" algn="ctr">
-                      <a:noFill/>
-                    </a:lnL>
-                    <a:lnR w="0" cap="flat" cmpd="sng" algn="ctr">
-                      <a:noFill/>
-                    </a:lnR>
-                    <a:lnT w="0" cap="flat" cmpd="sng" algn="ctr">
-                      <a:noFill/>
-                    </a:lnT>
-                    <a:lnB w="6350" cap="flat" cmpd="sng" algn="ctr">
-                      <a:solidFill>
-                        <a:srgbClr val="E5E7EB"/>
-                      </a:solidFill>
-                      <a:prstDash val="solid"/>
-                      <a:round/>
-                      <a:headEnd type="none" w="med" len="med"/>
-                      <a:tailEnd type="none" w="med" len="med"/>
-                    </a:lnB>
-                    <a:solidFill>
-                      <a:srgbClr val="FFFFFF"/>
-                    </a:solidFill>
-                  </a:tcPr>
-                </a:tc>
-                <a:tc>
-                  <a:txBody>
-                    <a:bodyPr/>
-                    <a:lstStyle/>
-                    <a:p>
-                      <a:pPr indent="0" marL="0">
-                        <a:buNone/>
-                      </a:pPr>
-                      <a:r>
-                        <a:rPr lang="en-US" sz="900" dirty="0">
-                          <a:solidFill>
-                            <a:srgbClr val="111118"/>
-                          </a:solidFill>
-                          <a:latin typeface="Microsoft JhengHei" pitchFamily="34" charset="0"/>
-                          <a:ea typeface="Microsoft JhengHei" pitchFamily="34" charset="-122"/>
-                          <a:cs typeface="Microsoft JhengHei" pitchFamily="34" charset="-120"/>
-                        </a:rPr>
-                        <a:t>Kaffe - Ystad-2024.ogg</a:t>
-                      </a:r>
-                      <a:endParaRPr lang="en-US" sz="900" dirty="0">
-                        <a:latin typeface="Microsoft JhengHei" charset="0"/>
-                        <a:ea typeface="Microsoft JhengHei" charset="0"/>
-                        <a:cs typeface="Microsoft JhengHei" charset="0"/>
-                      </a:endParaRPr>
-                    </a:p>
-                  </a:txBody>
-                  <a:tcPr marL="101600" marR="101600" marT="50800" marB="50800" anchor="ctr">
-                    <a:lnL w="0" cap="flat" cmpd="sng" algn="ctr">
-                      <a:noFill/>
-                    </a:lnL>
-                    <a:lnR w="0" cap="flat" cmpd="sng" algn="ctr">
-                      <a:noFill/>
-                    </a:lnR>
-                    <a:lnT w="0" cap="flat" cmpd="sng" algn="ctr">
-                      <a:noFill/>
-                    </a:lnT>
-                    <a:lnB w="6350" cap="flat" cmpd="sng" algn="ctr">
-                      <a:solidFill>
-                        <a:srgbClr val="E5E7EB"/>
-                      </a:solidFill>
-                      <a:prstDash val="solid"/>
-                      <a:round/>
-                      <a:headEnd type="none" w="med" len="med"/>
-                      <a:tailEnd type="none" w="med" len="med"/>
-                    </a:lnB>
-                    <a:solidFill>
-                      <a:srgbClr val="FFFFFF"/>
-                    </a:solidFill>
-                  </a:tcPr>
-                </a:tc>
-                <a:tc>
-                  <a:txBody>
-                    <a:bodyPr/>
-                    <a:lstStyle/>
-                    <a:p>
-                      <a:pPr indent="0" marL="0">
-                        <a:buNone/>
-                      </a:pPr>
-                      <a:r>
-                        <a:rPr lang="en-US" sz="900" dirty="0">
-                          <a:solidFill>
-                            <a:srgbClr val="111118"/>
-                          </a:solidFill>
-                          <a:latin typeface="Microsoft JhengHei" pitchFamily="34" charset="0"/>
-                          <a:ea typeface="Microsoft JhengHei" pitchFamily="34" charset="-122"/>
-                          <a:cs typeface="Microsoft JhengHei" pitchFamily="34" charset="-120"/>
-                        </a:rPr>
-                        <a:t>Jonn Leffmann</a:t>
-                      </a:r>
-                      <a:endParaRPr lang="en-US" sz="900" dirty="0">
-                        <a:latin typeface="Microsoft JhengHei" charset="0"/>
-                        <a:ea typeface="Microsoft JhengHei" charset="0"/>
-                        <a:cs typeface="Microsoft JhengHei" charset="0"/>
-                      </a:endParaRPr>
-                    </a:p>
-                  </a:txBody>
-                  <a:tcPr marL="101600" marR="101600" marT="50800" marB="50800" anchor="ctr">
-                    <a:lnL w="0" cap="flat" cmpd="sng" algn="ctr">
-                      <a:noFill/>
-                    </a:lnL>
-                    <a:lnR w="0" cap="flat" cmpd="sng" algn="ctr">
-                      <a:noFill/>
-                    </a:lnR>
-                    <a:lnT w="0" cap="flat" cmpd="sng" algn="ctr">
-                      <a:noFill/>
-                    </a:lnT>
-                    <a:lnB w="6350" cap="flat" cmpd="sng" algn="ctr">
-                      <a:solidFill>
-                        <a:srgbClr val="E5E7EB"/>
-                      </a:solidFill>
-                      <a:prstDash val="solid"/>
-                      <a:round/>
-                      <a:headEnd type="none" w="med" len="med"/>
-                      <a:tailEnd type="none" w="med" len="med"/>
-                    </a:lnB>
-                    <a:solidFill>
-                      <a:srgbClr val="FFFFFF"/>
-                    </a:solidFill>
-                  </a:tcPr>
-                </a:tc>
-                <a:tc>
-                  <a:txBody>
-                    <a:bodyPr/>
-                    <a:lstStyle/>
-                    <a:p>
-                      <a:pPr indent="0" marL="0">
-                        <a:buNone/>
-                      </a:pPr>
-                      <a:r>
-                        <a:rPr lang="en-US" sz="900" dirty="0">
-                          <a:solidFill>
-                            <a:srgbClr val="111118"/>
-                          </a:solidFill>
-                          <a:latin typeface="Microsoft JhengHei" pitchFamily="34" charset="0"/>
-                          <a:ea typeface="Microsoft JhengHei" pitchFamily="34" charset="-122"/>
-                          <a:cs typeface="Microsoft JhengHei" pitchFamily="34" charset="-120"/>
-                        </a:rPr>
-                        <a:t>CC BY 3.0</a:t>
-                      </a:r>
-                      <a:endParaRPr lang="en-US" sz="900" dirty="0">
-                        <a:latin typeface="Microsoft JhengHei" charset="0"/>
-                        <a:ea typeface="Microsoft JhengHei" charset="0"/>
-                        <a:cs typeface="Microsoft JhengHei" charset="0"/>
-                      </a:endParaRPr>
-                    </a:p>
-                  </a:txBody>
-                  <a:tcPr marL="101600" marR="101600" marT="50800" marB="50800" anchor="ctr">
-                    <a:lnL w="0" cap="flat" cmpd="sng" algn="ctr">
-                      <a:noFill/>
-                    </a:lnL>
-                    <a:lnR w="0" cap="flat" cmpd="sng" algn="ctr">
-                      <a:noFill/>
-                    </a:lnR>
-                    <a:lnT w="0" cap="flat" cmpd="sng" algn="ctr">
-                      <a:noFill/>
-                    </a:lnT>
-                    <a:lnB w="6350" cap="flat" cmpd="sng" algn="ctr">
-                      <a:solidFill>
-                        <a:srgbClr val="E5E7EB"/>
-                      </a:solidFill>
-                      <a:prstDash val="solid"/>
-                      <a:round/>
-                      <a:headEnd type="none" w="med" len="med"/>
-                      <a:tailEnd type="none" w="med" len="med"/>
-                    </a:lnB>
-                    <a:solidFill>
-                      <a:srgbClr val="FFFFFF"/>
-                    </a:solidFill>
-                  </a:tcPr>
-                </a:tc>
-              </a:tr>
-              <a:tr h="358140">
-                <a:tc>
-                  <a:txBody>
-                    <a:bodyPr/>
-                    <a:lstStyle/>
-                    <a:p>
-                      <a:pPr indent="0" marL="0">
-                        <a:buNone/>
-                      </a:pPr>
-                      <a:r>
-                        <a:rPr lang="en-US" sz="900" dirty="0">
-                          <a:solidFill>
-                            <a:srgbClr val="111118"/>
-                          </a:solidFill>
-                          <a:latin typeface="Microsoft JhengHei" pitchFamily="34" charset="0"/>
-                          <a:ea typeface="Microsoft JhengHei" pitchFamily="34" charset="-122"/>
-                          <a:cs typeface="Microsoft JhengHei" pitchFamily="34" charset="-120"/>
-                        </a:rPr>
-                        <a:t>013</a:t>
-                      </a:r>
-                      <a:endParaRPr lang="en-US" sz="900" dirty="0">
-                        <a:latin typeface="Microsoft JhengHei" charset="0"/>
-                        <a:ea typeface="Microsoft JhengHei" charset="0"/>
-                        <a:cs typeface="Microsoft JhengHei" charset="0"/>
-                      </a:endParaRPr>
-                    </a:p>
-                  </a:txBody>
-                  <a:tcPr marL="101600" marR="101600" marT="50800" marB="50800" anchor="ctr">
-                    <a:lnL w="0" cap="flat" cmpd="sng" algn="ctr">
-                      <a:noFill/>
-                    </a:lnL>
-                    <a:lnR w="0" cap="flat" cmpd="sng" algn="ctr">
-                      <a:noFill/>
-                    </a:lnR>
-                    <a:lnT w="0" cap="flat" cmpd="sng" algn="ctr">
-                      <a:noFill/>
-                    </a:lnT>
-                    <a:lnB w="6350" cap="flat" cmpd="sng" algn="ctr">
-                      <a:solidFill>
-                        <a:srgbClr val="E5E7EB"/>
-                      </a:solidFill>
-                      <a:prstDash val="solid"/>
-                      <a:round/>
-                      <a:headEnd type="none" w="med" len="med"/>
-                      <a:tailEnd type="none" w="med" len="med"/>
-                    </a:lnB>
-                    <a:solidFill>
-                      <a:srgbClr val="FFFFFF"/>
-                    </a:solidFill>
-                  </a:tcPr>
-                </a:tc>
-                <a:tc>
-                  <a:txBody>
-                    <a:bodyPr/>
-                    <a:lstStyle/>
-                    <a:p>
-                      <a:pPr indent="0" marL="0">
-                        <a:buNone/>
-                      </a:pPr>
-                      <a:r>
-                        <a:rPr lang="en-US" sz="900" dirty="0">
-                          <a:solidFill>
-                            <a:srgbClr val="111118"/>
-                          </a:solidFill>
-                          <a:latin typeface="Microsoft JhengHei" pitchFamily="34" charset="0"/>
-                          <a:ea typeface="Microsoft JhengHei" pitchFamily="34" charset="-122"/>
-                          <a:cs typeface="Microsoft JhengHei" pitchFamily="34" charset="-120"/>
-                        </a:rPr>
-                        <a:t>Coffee from dan 2.webm</a:t>
-                      </a:r>
-                      <a:endParaRPr lang="en-US" sz="900" dirty="0">
-                        <a:latin typeface="Microsoft JhengHei" charset="0"/>
-                        <a:ea typeface="Microsoft JhengHei" charset="0"/>
-                        <a:cs typeface="Microsoft JhengHei" charset="0"/>
-                      </a:endParaRPr>
-                    </a:p>
-                  </a:txBody>
-                  <a:tcPr marL="101600" marR="101600" marT="50800" marB="50800" anchor="ctr">
-                    <a:lnL w="0" cap="flat" cmpd="sng" algn="ctr">
-                      <a:noFill/>
-                    </a:lnL>
-                    <a:lnR w="0" cap="flat" cmpd="sng" algn="ctr">
-                      <a:noFill/>
-                    </a:lnR>
-                    <a:lnT w="0" cap="flat" cmpd="sng" algn="ctr">
-                      <a:noFill/>
-                    </a:lnT>
-                    <a:lnB w="6350" cap="flat" cmpd="sng" algn="ctr">
-                      <a:solidFill>
-                        <a:srgbClr val="E5E7EB"/>
-                      </a:solidFill>
-                      <a:prstDash val="solid"/>
-                      <a:round/>
-                      <a:headEnd type="none" w="med" len="med"/>
-                      <a:tailEnd type="none" w="med" len="med"/>
-                    </a:lnB>
-                    <a:solidFill>
-                      <a:srgbClr val="FFFFFF"/>
-                    </a:solidFill>
-                  </a:tcPr>
-                </a:tc>
-                <a:tc>
-                  <a:txBody>
-                    <a:bodyPr/>
-                    <a:lstStyle/>
-                    <a:p>
-                      <a:pPr indent="0" marL="0">
-                        <a:buNone/>
-                      </a:pPr>
-                      <a:r>
-                        <a:rPr lang="en-US" sz="900" dirty="0">
-                          <a:solidFill>
-                            <a:srgbClr val="111118"/>
-                          </a:solidFill>
-                          <a:latin typeface="Microsoft JhengHei" pitchFamily="34" charset="0"/>
-                          <a:ea typeface="Microsoft JhengHei" pitchFamily="34" charset="-122"/>
-                          <a:cs typeface="Microsoft JhengHei" pitchFamily="34" charset="-120"/>
-                        </a:rPr>
-                        <a:t>Denis kasozi</a:t>
-                      </a:r>
-                      <a:endParaRPr lang="en-US" sz="900" dirty="0">
-                        <a:latin typeface="Microsoft JhengHei" charset="0"/>
-                        <a:ea typeface="Microsoft JhengHei" charset="0"/>
-                        <a:cs typeface="Microsoft JhengHei" charset="0"/>
-                      </a:endParaRPr>
-                    </a:p>
-                  </a:txBody>
-                  <a:tcPr marL="101600" marR="101600" marT="50800" marB="50800" anchor="ctr">
-                    <a:lnL w="0" cap="flat" cmpd="sng" algn="ctr">
-                      <a:noFill/>
-                    </a:lnL>
-                    <a:lnR w="0" cap="flat" cmpd="sng" algn="ctr">
-                      <a:noFill/>
-                    </a:lnR>
-                    <a:lnT w="0" cap="flat" cmpd="sng" algn="ctr">
-                      <a:noFill/>
-                    </a:lnT>
-                    <a:lnB w="6350" cap="flat" cmpd="sng" algn="ctr">
-                      <a:solidFill>
-                        <a:srgbClr val="E5E7EB"/>
-                      </a:solidFill>
-                      <a:prstDash val="solid"/>
-                      <a:round/>
-                      <a:headEnd type="none" w="med" len="med"/>
-                      <a:tailEnd type="none" w="med" len="med"/>
-                    </a:lnB>
-                    <a:solidFill>
-                      <a:srgbClr val="FFFFFF"/>
-                    </a:solidFill>
-                  </a:tcPr>
-                </a:tc>
-                <a:tc>
-                  <a:txBody>
-                    <a:bodyPr/>
-                    <a:lstStyle/>
-                    <a:p>
-                      <a:pPr indent="0" marL="0">
-                        <a:buNone/>
-                      </a:pPr>
-                      <a:r>
-                        <a:rPr lang="en-US" sz="900" dirty="0">
-                          <a:solidFill>
-                            <a:srgbClr val="111118"/>
-                          </a:solidFill>
-                          <a:latin typeface="Microsoft JhengHei" pitchFamily="34" charset="0"/>
-                          <a:ea typeface="Microsoft JhengHei" pitchFamily="34" charset="-122"/>
-                          <a:cs typeface="Microsoft JhengHei" pitchFamily="34" charset="-120"/>
-                        </a:rPr>
-                        <a:t>CC BY-SA 4.0</a:t>
-                      </a:r>
-                      <a:endParaRPr lang="en-US" sz="900" dirty="0">
-                        <a:latin typeface="Microsoft JhengHei" charset="0"/>
-                        <a:ea typeface="Microsoft JhengHei" charset="0"/>
-                        <a:cs typeface="Microsoft JhengHei" charset="0"/>
-                      </a:endParaRPr>
-                    </a:p>
-                  </a:txBody>
-                  <a:tcPr marL="101600" marR="101600" marT="50800" marB="50800" anchor="ctr">
-                    <a:lnL w="0" cap="flat" cmpd="sng" algn="ctr">
-                      <a:noFill/>
-                    </a:lnL>
-                    <a:lnR w="0" cap="flat" cmpd="sng" algn="ctr">
-                      <a:noFill/>
-                    </a:lnR>
-                    <a:lnT w="0" cap="flat" cmpd="sng" algn="ctr">
-                      <a:noFill/>
-                    </a:lnT>
-                    <a:lnB w="6350" cap="flat" cmpd="sng" algn="ctr">
-                      <a:solidFill>
-                        <a:srgbClr val="E5E7EB"/>
-                      </a:solidFill>
-                      <a:prstDash val="solid"/>
-                      <a:round/>
-                      <a:headEnd type="none" w="med" len="med"/>
-                      <a:tailEnd type="none" w="med" len="med"/>
-                    </a:lnB>
-                    <a:solidFill>
-                      <a:srgbClr val="FFFFFF"/>
-                    </a:solidFill>
-                  </a:tcPr>
-                </a:tc>
-              </a:tr>
-              <a:tr h="358140">
-                <a:tc>
-                  <a:txBody>
-                    <a:bodyPr/>
-                    <a:lstStyle/>
-                    <a:p>
-                      <a:pPr indent="0" marL="0">
-                        <a:buNone/>
-                      </a:pPr>
-                      <a:r>
-                        <a:rPr lang="en-US" sz="900" dirty="0">
-                          <a:solidFill>
-                            <a:srgbClr val="111118"/>
-                          </a:solidFill>
-                          <a:latin typeface="Microsoft JhengHei" pitchFamily="34" charset="0"/>
-                          <a:ea typeface="Microsoft JhengHei" pitchFamily="34" charset="-122"/>
-                          <a:cs typeface="Microsoft JhengHei" pitchFamily="34" charset="-120"/>
-                        </a:rPr>
-                        <a:t>014</a:t>
-                      </a:r>
-                      <a:endParaRPr lang="en-US" sz="900" dirty="0">
-                        <a:latin typeface="Microsoft JhengHei" charset="0"/>
-                        <a:ea typeface="Microsoft JhengHei" charset="0"/>
-                        <a:cs typeface="Microsoft JhengHei" charset="0"/>
-                      </a:endParaRPr>
-                    </a:p>
-                  </a:txBody>
-                  <a:tcPr marL="101600" marR="101600" marT="50800" marB="50800" anchor="ctr">
-                    <a:lnL w="0" cap="flat" cmpd="sng" algn="ctr">
-                      <a:noFill/>
-                    </a:lnL>
-                    <a:lnR w="0" cap="flat" cmpd="sng" algn="ctr">
-                      <a:noFill/>
-                    </a:lnR>
-                    <a:lnT w="0" cap="flat" cmpd="sng" algn="ctr">
-                      <a:noFill/>
-                    </a:lnT>
-                    <a:lnB w="6350" cap="flat" cmpd="sng" algn="ctr">
-                      <a:solidFill>
-                        <a:srgbClr val="E5E7EB"/>
-                      </a:solidFill>
-                      <a:prstDash val="solid"/>
-                      <a:round/>
-                      <a:headEnd type="none" w="med" len="med"/>
-                      <a:tailEnd type="none" w="med" len="med"/>
-                    </a:lnB>
-                    <a:solidFill>
-                      <a:srgbClr val="FFFFFF"/>
-                    </a:solidFill>
-                  </a:tcPr>
-                </a:tc>
-                <a:tc>
-                  <a:txBody>
-                    <a:bodyPr/>
-                    <a:lstStyle/>
-                    <a:p>
-                      <a:pPr indent="0" marL="0">
-                        <a:buNone/>
-                      </a:pPr>
-                      <a:r>
-                        <a:rPr lang="en-US" sz="900" dirty="0">
-                          <a:solidFill>
-                            <a:srgbClr val="111118"/>
-                          </a:solidFill>
-                          <a:latin typeface="Microsoft JhengHei" pitchFamily="34" charset="0"/>
-                          <a:ea typeface="Microsoft JhengHei" pitchFamily="34" charset="-122"/>
-                          <a:cs typeface="Microsoft JhengHei" pitchFamily="34" charset="-120"/>
-                        </a:rPr>
-                        <a:t>Traditional Ethiopian Coffee Roasting Ceremony.webm</a:t>
-                      </a:r>
-                      <a:endParaRPr lang="en-US" sz="900" dirty="0">
-                        <a:latin typeface="Microsoft JhengHei" charset="0"/>
-                        <a:ea typeface="Microsoft JhengHei" charset="0"/>
-                        <a:cs typeface="Microsoft JhengHei" charset="0"/>
-                      </a:endParaRPr>
-                    </a:p>
-                  </a:txBody>
-                  <a:tcPr marL="101600" marR="101600" marT="50800" marB="50800" anchor="ctr">
-                    <a:lnL w="0" cap="flat" cmpd="sng" algn="ctr">
-                      <a:noFill/>
-                    </a:lnL>
-                    <a:lnR w="0" cap="flat" cmpd="sng" algn="ctr">
-                      <a:noFill/>
-                    </a:lnR>
-                    <a:lnT w="0" cap="flat" cmpd="sng" algn="ctr">
-                      <a:noFill/>
-                    </a:lnT>
-                    <a:lnB w="6350" cap="flat" cmpd="sng" algn="ctr">
-                      <a:solidFill>
-                        <a:srgbClr val="E5E7EB"/>
-                      </a:solidFill>
-                      <a:prstDash val="solid"/>
-                      <a:round/>
-                      <a:headEnd type="none" w="med" len="med"/>
-                      <a:tailEnd type="none" w="med" len="med"/>
-                    </a:lnB>
-                    <a:solidFill>
-                      <a:srgbClr val="FFFFFF"/>
-                    </a:solidFill>
-                  </a:tcPr>
-                </a:tc>
-                <a:tc>
-                  <a:txBody>
-                    <a:bodyPr/>
-                    <a:lstStyle/>
-                    <a:p>
-                      <a:pPr indent="0" marL="0">
-                        <a:buNone/>
-                      </a:pPr>
-                      <a:r>
-                        <a:rPr lang="en-US" sz="900" dirty="0">
-                          <a:solidFill>
-                            <a:srgbClr val="111118"/>
-                          </a:solidFill>
-                          <a:latin typeface="Microsoft JhengHei" pitchFamily="34" charset="0"/>
-                          <a:ea typeface="Microsoft JhengHei" pitchFamily="34" charset="-122"/>
-                          <a:cs typeface="Microsoft JhengHei" pitchFamily="34" charset="-120"/>
-                        </a:rPr>
-                        <a:t>Keria T</a:t>
-                      </a:r>
-                      <a:endParaRPr lang="en-US" sz="900" dirty="0">
-                        <a:latin typeface="Microsoft JhengHei" charset="0"/>
-                        <a:ea typeface="Microsoft JhengHei" charset="0"/>
-                        <a:cs typeface="Microsoft JhengHei" charset="0"/>
-                      </a:endParaRPr>
-                    </a:p>
-                  </a:txBody>
-                  <a:tcPr marL="101600" marR="101600" marT="50800" marB="50800" anchor="ctr">
-                    <a:lnL w="0" cap="flat" cmpd="sng" algn="ctr">
-                      <a:noFill/>
-                    </a:lnL>
-                    <a:lnR w="0" cap="flat" cmpd="sng" algn="ctr">
-                      <a:noFill/>
-                    </a:lnR>
-                    <a:lnT w="0" cap="flat" cmpd="sng" algn="ctr">
-                      <a:noFill/>
-                    </a:lnT>
-                    <a:lnB w="6350" cap="flat" cmpd="sng" algn="ctr">
-                      <a:solidFill>
-                        <a:srgbClr val="E5E7EB"/>
-                      </a:solidFill>
-                      <a:prstDash val="solid"/>
-                      <a:round/>
-                      <a:headEnd type="none" w="med" len="med"/>
-                      <a:tailEnd type="none" w="med" len="med"/>
-                    </a:lnB>
-                    <a:solidFill>
-                      <a:srgbClr val="FFFFFF"/>
-                    </a:solidFill>
-                  </a:tcPr>
-                </a:tc>
-                <a:tc>
-                  <a:txBody>
-                    <a:bodyPr/>
-                    <a:lstStyle/>
-                    <a:p>
-                      <a:pPr indent="0" marL="0">
-                        <a:buNone/>
-                      </a:pPr>
-                      <a:r>
-                        <a:rPr lang="en-US" sz="900" dirty="0">
-                          <a:solidFill>
-                            <a:srgbClr val="111118"/>
-                          </a:solidFill>
-                          <a:latin typeface="Microsoft JhengHei" pitchFamily="34" charset="0"/>
-                          <a:ea typeface="Microsoft JhengHei" pitchFamily="34" charset="-122"/>
-                          <a:cs typeface="Microsoft JhengHei" pitchFamily="34" charset="-120"/>
-                        </a:rPr>
-                        <a:t>CC BY-SA 4.0</a:t>
-                      </a:r>
-                      <a:endParaRPr lang="en-US" sz="900" dirty="0">
-                        <a:latin typeface="Microsoft JhengHei" charset="0"/>
-                        <a:ea typeface="Microsoft JhengHei" charset="0"/>
-                        <a:cs typeface="Microsoft JhengHei" charset="0"/>
-                      </a:endParaRPr>
-                    </a:p>
-                  </a:txBody>
-                  <a:tcPr marL="101600" marR="101600" marT="50800" marB="50800" anchor="ctr">
-                    <a:lnL w="0" cap="flat" cmpd="sng" algn="ctr">
-                      <a:noFill/>
-                    </a:lnL>
-                    <a:lnR w="0" cap="flat" cmpd="sng" algn="ctr">
-                      <a:noFill/>
-                    </a:lnR>
-                    <a:lnT w="0" cap="flat" cmpd="sng" algn="ctr">
-                      <a:noFill/>
-                    </a:lnT>
-                    <a:lnB w="6350" cap="flat" cmpd="sng" algn="ctr">
-                      <a:solidFill>
-                        <a:srgbClr val="E5E7EB"/>
-                      </a:solidFill>
-                      <a:prstDash val="solid"/>
-                      <a:round/>
-                      <a:headEnd type="none" w="med" len="med"/>
-                      <a:tailEnd type="none" w="med" len="med"/>
-                    </a:lnB>
-                    <a:solidFill>
-                      <a:srgbClr val="FFFFFF"/>
-                    </a:solidFill>
-                  </a:tcPr>
-                </a:tc>
-              </a:tr>
-              <a:tr h="358140">
-                <a:tc>
-                  <a:txBody>
-                    <a:bodyPr/>
-                    <a:lstStyle/>
-                    <a:p>
-                      <a:pPr indent="0" marL="0">
-                        <a:buNone/>
-                      </a:pPr>
-                      <a:r>
-                        <a:rPr lang="en-US" sz="900" dirty="0">
-                          <a:solidFill>
-                            <a:srgbClr val="111118"/>
-                          </a:solidFill>
-                          <a:latin typeface="Microsoft JhengHei" pitchFamily="34" charset="0"/>
-                          <a:ea typeface="Microsoft JhengHei" pitchFamily="34" charset="-122"/>
-                          <a:cs typeface="Microsoft JhengHei" pitchFamily="34" charset="-120"/>
-                        </a:rPr>
-                        <a:t>015</a:t>
-                      </a:r>
-                      <a:endParaRPr lang="en-US" sz="900" dirty="0">
-                        <a:latin typeface="Microsoft JhengHei" charset="0"/>
-                        <a:ea typeface="Microsoft JhengHei" charset="0"/>
-                        <a:cs typeface="Microsoft JhengHei" charset="0"/>
-                      </a:endParaRPr>
-                    </a:p>
-                  </a:txBody>
-                  <a:tcPr marL="101600" marR="101600" marT="50800" marB="50800" anchor="ctr">
-                    <a:lnL w="0" cap="flat" cmpd="sng" algn="ctr">
-                      <a:noFill/>
-                    </a:lnL>
-                    <a:lnR w="0" cap="flat" cmpd="sng" algn="ctr">
-                      <a:noFill/>
-                    </a:lnR>
-                    <a:lnT w="0" cap="flat" cmpd="sng" algn="ctr">
-                      <a:noFill/>
-                    </a:lnT>
-                    <a:lnB w="6350" cap="flat" cmpd="sng" algn="ctr">
-                      <a:solidFill>
-                        <a:srgbClr val="E5E7EB"/>
-                      </a:solidFill>
-                      <a:prstDash val="solid"/>
-                      <a:round/>
-                      <a:headEnd type="none" w="med" len="med"/>
-                      <a:tailEnd type="none" w="med" len="med"/>
-                    </a:lnB>
-                    <a:solidFill>
-                      <a:srgbClr val="FFFFFF"/>
-                    </a:solidFill>
-                  </a:tcPr>
-                </a:tc>
-                <a:tc>
-                  <a:txBody>
-                    <a:bodyPr/>
-                    <a:lstStyle/>
-                    <a:p>
-                      <a:pPr indent="0" marL="0">
-                        <a:buNone/>
-                      </a:pPr>
-                      <a:r>
-                        <a:rPr lang="en-US" sz="900" dirty="0">
-                          <a:solidFill>
-                            <a:srgbClr val="111118"/>
-                          </a:solidFill>
-                          <a:latin typeface="Microsoft JhengHei" pitchFamily="34" charset="0"/>
-                          <a:ea typeface="Microsoft JhengHei" pitchFamily="34" charset="-122"/>
-                          <a:cs typeface="Microsoft JhengHei" pitchFamily="34" charset="-120"/>
-                        </a:rPr>
-                        <a:t>Despulpadora.ogg</a:t>
-                      </a:r>
-                      <a:endParaRPr lang="en-US" sz="900" dirty="0">
-                        <a:latin typeface="Microsoft JhengHei" charset="0"/>
-                        <a:ea typeface="Microsoft JhengHei" charset="0"/>
-                        <a:cs typeface="Microsoft JhengHei" charset="0"/>
-                      </a:endParaRPr>
-                    </a:p>
-                  </a:txBody>
-                  <a:tcPr marL="101600" marR="101600" marT="50800" marB="50800" anchor="ctr">
-                    <a:lnL w="0" cap="flat" cmpd="sng" algn="ctr">
-                      <a:noFill/>
-                    </a:lnL>
-                    <a:lnR w="0" cap="flat" cmpd="sng" algn="ctr">
-                      <a:noFill/>
-                    </a:lnR>
-                    <a:lnT w="0" cap="flat" cmpd="sng" algn="ctr">
-                      <a:noFill/>
-                    </a:lnT>
-                    <a:lnB w="6350" cap="flat" cmpd="sng" algn="ctr">
-                      <a:solidFill>
-                        <a:srgbClr val="E5E7EB"/>
-                      </a:solidFill>
-                      <a:prstDash val="solid"/>
-                      <a:round/>
-                      <a:headEnd type="none" w="med" len="med"/>
-                      <a:tailEnd type="none" w="med" len="med"/>
-                    </a:lnB>
-                    <a:solidFill>
-                      <a:srgbClr val="FFFFFF"/>
-                    </a:solidFill>
-                  </a:tcPr>
-                </a:tc>
-                <a:tc>
-                  <a:txBody>
-                    <a:bodyPr/>
-                    <a:lstStyle/>
-                    <a:p>
-                      <a:pPr indent="0" marL="0">
-                        <a:buNone/>
-                      </a:pPr>
-                      <a:r>
-                        <a:rPr lang="en-US" sz="900" dirty="0">
-                          <a:solidFill>
-                            <a:srgbClr val="111118"/>
-                          </a:solidFill>
-                          <a:latin typeface="Microsoft JhengHei" pitchFamily="34" charset="0"/>
-                          <a:ea typeface="Microsoft JhengHei" pitchFamily="34" charset="-122"/>
-                          <a:cs typeface="Microsoft JhengHei" pitchFamily="34" charset="-120"/>
-                        </a:rPr>
-                        <a:t>Jhonespe150102</a:t>
-                      </a:r>
-                      <a:endParaRPr lang="en-US" sz="900" dirty="0">
-                        <a:latin typeface="Microsoft JhengHei" charset="0"/>
-                        <a:ea typeface="Microsoft JhengHei" charset="0"/>
-                        <a:cs typeface="Microsoft JhengHei" charset="0"/>
-                      </a:endParaRPr>
-                    </a:p>
-                  </a:txBody>
-                  <a:tcPr marL="101600" marR="101600" marT="50800" marB="50800" anchor="ctr">
-                    <a:lnL w="0" cap="flat" cmpd="sng" algn="ctr">
-                      <a:noFill/>
-                    </a:lnL>
-                    <a:lnR w="0" cap="flat" cmpd="sng" algn="ctr">
-                      <a:noFill/>
-                    </a:lnR>
-                    <a:lnT w="0" cap="flat" cmpd="sng" algn="ctr">
-                      <a:noFill/>
-                    </a:lnT>
-                    <a:lnB w="6350" cap="flat" cmpd="sng" algn="ctr">
-                      <a:solidFill>
-                        <a:srgbClr val="E5E7EB"/>
-                      </a:solidFill>
-                      <a:prstDash val="solid"/>
-                      <a:round/>
-                      <a:headEnd type="none" w="med" len="med"/>
-                      <a:tailEnd type="none" w="med" len="med"/>
-                    </a:lnB>
-                    <a:solidFill>
-                      <a:srgbClr val="FFFFFF"/>
-                    </a:solidFill>
-                  </a:tcPr>
-                </a:tc>
-                <a:tc>
-                  <a:txBody>
-                    <a:bodyPr/>
-                    <a:lstStyle/>
-                    <a:p>
-                      <a:pPr indent="0" marL="0">
-                        <a:buNone/>
-                      </a:pPr>
-                      <a:r>
-                        <a:rPr lang="en-US" sz="900" dirty="0">
-                          <a:solidFill>
-                            <a:srgbClr val="111118"/>
-                          </a:solidFill>
-                          <a:latin typeface="Microsoft JhengHei" pitchFamily="34" charset="0"/>
-                          <a:ea typeface="Microsoft JhengHei" pitchFamily="34" charset="-122"/>
-                          <a:cs typeface="Microsoft JhengHei" pitchFamily="34" charset="-120"/>
-                        </a:rPr>
-                        <a:t>CC BY-SA 4.0</a:t>
-                      </a:r>
-                      <a:endParaRPr lang="en-US" sz="900" dirty="0">
-                        <a:latin typeface="Microsoft JhengHei" charset="0"/>
-                        <a:ea typeface="Microsoft JhengHei" charset="0"/>
-                        <a:cs typeface="Microsoft JhengHei" charset="0"/>
-                      </a:endParaRPr>
-                    </a:p>
-                  </a:txBody>
-                  <a:tcPr marL="101600" marR="101600" marT="50800" marB="50800" anchor="ctr">
-                    <a:lnL w="0" cap="flat" cmpd="sng" algn="ctr">
-                      <a:noFill/>
-                    </a:lnL>
-                    <a:lnR w="0" cap="flat" cmpd="sng" algn="ctr">
-                      <a:noFill/>
-                    </a:lnR>
-                    <a:lnT w="0" cap="flat" cmpd="sng" algn="ctr">
-                      <a:noFill/>
-                    </a:lnT>
-                    <a:lnB w="6350" cap="flat" cmpd="sng" algn="ctr">
-                      <a:solidFill>
-                        <a:srgbClr val="E5E7EB"/>
-                      </a:solidFill>
-                      <a:prstDash val="solid"/>
-                      <a:round/>
-                      <a:headEnd type="none" w="med" len="med"/>
-                      <a:tailEnd type="none" w="med" len="med"/>
-                    </a:lnB>
-                    <a:solidFill>
-                      <a:srgbClr val="FFFFFF"/>
-                    </a:solidFill>
-                  </a:tcPr>
-                </a:tc>
-              </a:tr>
-              <a:tr h="358140">
-                <a:tc>
-                  <a:txBody>
-                    <a:bodyPr/>
-                    <a:lstStyle/>
-                    <a:p>
-                      <a:pPr indent="0" marL="0">
-                        <a:buNone/>
-                      </a:pPr>
-                      <a:r>
-                        <a:rPr lang="en-US" sz="900" dirty="0">
-                          <a:solidFill>
-                            <a:srgbClr val="111118"/>
-                          </a:solidFill>
-                          <a:latin typeface="Microsoft JhengHei" pitchFamily="34" charset="0"/>
-                          <a:ea typeface="Microsoft JhengHei" pitchFamily="34" charset="-122"/>
-                          <a:cs typeface="Microsoft JhengHei" pitchFamily="34" charset="-120"/>
-                        </a:rPr>
-                        <a:t>016</a:t>
-                      </a:r>
-                      <a:endParaRPr lang="en-US" sz="900" dirty="0">
-                        <a:latin typeface="Microsoft JhengHei" charset="0"/>
-                        <a:ea typeface="Microsoft JhengHei" charset="0"/>
-                        <a:cs typeface="Microsoft JhengHei" charset="0"/>
-                      </a:endParaRPr>
-                    </a:p>
-                  </a:txBody>
-                  <a:tcPr marL="101600" marR="101600" marT="50800" marB="50800" anchor="ctr">
-                    <a:lnL w="0" cap="flat" cmpd="sng" algn="ctr">
-                      <a:noFill/>
-                    </a:lnL>
-                    <a:lnR w="0" cap="flat" cmpd="sng" algn="ctr">
-                      <a:noFill/>
-                    </a:lnR>
-                    <a:lnT w="0" cap="flat" cmpd="sng" algn="ctr">
-                      <a:noFill/>
-                    </a:lnT>
-                    <a:lnB w="6350" cap="flat" cmpd="sng" algn="ctr">
-                      <a:solidFill>
-                        <a:srgbClr val="E5E7EB"/>
-                      </a:solidFill>
-                      <a:prstDash val="solid"/>
-                      <a:round/>
-                      <a:headEnd type="none" w="med" len="med"/>
-                      <a:tailEnd type="none" w="med" len="med"/>
-                    </a:lnB>
-                    <a:solidFill>
-                      <a:srgbClr val="FFFFFF"/>
-                    </a:solidFill>
-                  </a:tcPr>
-                </a:tc>
-                <a:tc>
-                  <a:txBody>
-                    <a:bodyPr/>
-                    <a:lstStyle/>
-                    <a:p>
-                      <a:pPr indent="0" marL="0">
-                        <a:buNone/>
-                      </a:pPr>
-                      <a:r>
-                        <a:rPr lang="en-US" sz="900" dirty="0">
-                          <a:solidFill>
-                            <a:srgbClr val="111118"/>
-                          </a:solidFill>
-                          <a:latin typeface="Microsoft JhengHei" pitchFamily="34" charset="0"/>
-                          <a:ea typeface="Microsoft JhengHei" pitchFamily="34" charset="-122"/>
-                          <a:cs typeface="Microsoft JhengHei" pitchFamily="34" charset="-120"/>
-                        </a:rPr>
-                        <a:t>Lions Almelo zamelt koffie in voor Voedselbank.webm</a:t>
-                      </a:r>
-                      <a:endParaRPr lang="en-US" sz="900" dirty="0">
-                        <a:latin typeface="Microsoft JhengHei" charset="0"/>
-                        <a:ea typeface="Microsoft JhengHei" charset="0"/>
-                        <a:cs typeface="Microsoft JhengHei" charset="0"/>
-                      </a:endParaRPr>
-                    </a:p>
-                  </a:txBody>
-                  <a:tcPr marL="101600" marR="101600" marT="50800" marB="50800" anchor="ctr">
-                    <a:lnL w="0" cap="flat" cmpd="sng" algn="ctr">
-                      <a:noFill/>
-                    </a:lnL>
-                    <a:lnR w="0" cap="flat" cmpd="sng" algn="ctr">
-                      <a:noFill/>
-                    </a:lnR>
-                    <a:lnT w="0" cap="flat" cmpd="sng" algn="ctr">
-                      <a:noFill/>
-                    </a:lnT>
-                    <a:lnB w="6350" cap="flat" cmpd="sng" algn="ctr">
-                      <a:solidFill>
-                        <a:srgbClr val="E5E7EB"/>
-                      </a:solidFill>
-                      <a:prstDash val="solid"/>
-                      <a:round/>
-                      <a:headEnd type="none" w="med" len="med"/>
-                      <a:tailEnd type="none" w="med" len="med"/>
-                    </a:lnB>
-                    <a:solidFill>
-                      <a:srgbClr val="FFFFFF"/>
-                    </a:solidFill>
-                  </a:tcPr>
-                </a:tc>
-                <a:tc>
-                  <a:txBody>
-                    <a:bodyPr/>
-                    <a:lstStyle/>
-                    <a:p>
-                      <a:pPr indent="0" marL="0">
-                        <a:buNone/>
-                      </a:pPr>
-                      <a:r>
-                        <a:rPr lang="en-US" sz="900" dirty="0">
-                          <a:solidFill>
-                            <a:srgbClr val="111118"/>
-                          </a:solidFill>
-                          <a:latin typeface="Microsoft JhengHei" pitchFamily="34" charset="0"/>
-                          <a:ea typeface="Microsoft JhengHei" pitchFamily="34" charset="-122"/>
-                          <a:cs typeface="Microsoft JhengHei" pitchFamily="34" charset="-120"/>
-                        </a:rPr>
-                        <a:t>AAVISIE</a:t>
-                      </a:r>
-                      <a:endParaRPr lang="en-US" sz="900" dirty="0">
-                        <a:latin typeface="Microsoft JhengHei" charset="0"/>
-                        <a:ea typeface="Microsoft JhengHei" charset="0"/>
-                        <a:cs typeface="Microsoft JhengHei" charset="0"/>
-                      </a:endParaRPr>
-                    </a:p>
-                  </a:txBody>
-                  <a:tcPr marL="101600" marR="101600" marT="50800" marB="50800" anchor="ctr">
-                    <a:lnL w="0" cap="flat" cmpd="sng" algn="ctr">
-                      <a:noFill/>
-                    </a:lnL>
-                    <a:lnR w="0" cap="flat" cmpd="sng" algn="ctr">
-                      <a:noFill/>
-                    </a:lnR>
-                    <a:lnT w="0" cap="flat" cmpd="sng" algn="ctr">
-                      <a:noFill/>
-                    </a:lnT>
-                    <a:lnB w="6350" cap="flat" cmpd="sng" algn="ctr">
-                      <a:solidFill>
-                        <a:srgbClr val="E5E7EB"/>
-                      </a:solidFill>
-                      <a:prstDash val="solid"/>
-                      <a:round/>
-                      <a:headEnd type="none" w="med" len="med"/>
-                      <a:tailEnd type="none" w="med" len="med"/>
-                    </a:lnB>
-                    <a:solidFill>
-                      <a:srgbClr val="FFFFFF"/>
-                    </a:solidFill>
-                  </a:tcPr>
-                </a:tc>
-                <a:tc>
-                  <a:txBody>
-                    <a:bodyPr/>
-                    <a:lstStyle/>
-                    <a:p>
-                      <a:pPr indent="0" marL="0">
-                        <a:buNone/>
-                      </a:pPr>
-                      <a:r>
-                        <a:rPr lang="en-US" sz="900" dirty="0">
-                          <a:solidFill>
-                            <a:srgbClr val="111118"/>
-                          </a:solidFill>
-                          <a:latin typeface="Microsoft JhengHei" pitchFamily="34" charset="0"/>
-                          <a:ea typeface="Microsoft JhengHei" pitchFamily="34" charset="-122"/>
-                          <a:cs typeface="Microsoft JhengHei" pitchFamily="34" charset="-120"/>
-                        </a:rPr>
-                        <a:t>CC BY 3.0</a:t>
-                      </a:r>
-                      <a:endParaRPr lang="en-US" sz="900" dirty="0">
-                        <a:latin typeface="Microsoft JhengHei" charset="0"/>
-                        <a:ea typeface="Microsoft JhengHei" charset="0"/>
-                        <a:cs typeface="Microsoft JhengHei" charset="0"/>
-                      </a:endParaRPr>
-                    </a:p>
-                  </a:txBody>
-                  <a:tcPr marL="101600" marR="101600" marT="50800" marB="50800" anchor="ctr">
-                    <a:lnL w="0" cap="flat" cmpd="sng" algn="ctr">
-                      <a:noFill/>
-                    </a:lnL>
-                    <a:lnR w="0" cap="flat" cmpd="sng" algn="ctr">
-                      <a:noFill/>
-                    </a:lnR>
-                    <a:lnT w="0" cap="flat" cmpd="sng" algn="ctr">
-                      <a:noFill/>
-                    </a:lnT>
-                    <a:lnB w="6350" cap="flat" cmpd="sng" algn="ctr">
-                      <a:solidFill>
-                        <a:srgbClr val="E5E7EB"/>
-                      </a:solidFill>
-                      <a:prstDash val="solid"/>
-                      <a:round/>
-                      <a:headEnd type="none" w="med" len="med"/>
-                      <a:tailEnd type="none" w="med" len="med"/>
-                    </a:lnB>
-                    <a:solidFill>
-                      <a:srgbClr val="FFFFFF"/>
-                    </a:solidFill>
-                  </a:tcPr>
-                </a:tc>
-              </a:tr>
-              <a:tr h="358140">
-                <a:tc>
-                  <a:txBody>
-                    <a:bodyPr/>
-                    <a:lstStyle/>
-                    <a:p>
-                      <a:pPr indent="0" marL="0">
-                        <a:buNone/>
-                      </a:pPr>
-                      <a:r>
-                        <a:rPr lang="en-US" sz="900" dirty="0">
-                          <a:solidFill>
-                            <a:srgbClr val="111118"/>
-                          </a:solidFill>
-                          <a:latin typeface="Microsoft JhengHei" pitchFamily="34" charset="0"/>
-                          <a:ea typeface="Microsoft JhengHei" pitchFamily="34" charset="-122"/>
-                          <a:cs typeface="Microsoft JhengHei" pitchFamily="34" charset="-120"/>
-                        </a:rPr>
-                        <a:t>017</a:t>
-                      </a:r>
-                      <a:endParaRPr lang="en-US" sz="900" dirty="0">
-                        <a:latin typeface="Microsoft JhengHei" charset="0"/>
-                        <a:ea typeface="Microsoft JhengHei" charset="0"/>
-                        <a:cs typeface="Microsoft JhengHei" charset="0"/>
-                      </a:endParaRPr>
-                    </a:p>
-                  </a:txBody>
-                  <a:tcPr marL="101600" marR="101600" marT="50800" marB="50800" anchor="ctr">
-                    <a:lnL w="0" cap="flat" cmpd="sng" algn="ctr">
-                      <a:noFill/>
-                    </a:lnL>
-                    <a:lnR w="0" cap="flat" cmpd="sng" algn="ctr">
-                      <a:noFill/>
-                    </a:lnR>
-                    <a:lnT w="0" cap="flat" cmpd="sng" algn="ctr">
-                      <a:noFill/>
-                    </a:lnT>
-                    <a:lnB w="6350" cap="flat" cmpd="sng" algn="ctr">
-                      <a:solidFill>
-                        <a:srgbClr val="E5E7EB"/>
-                      </a:solidFill>
-                      <a:prstDash val="solid"/>
-                      <a:round/>
-                      <a:headEnd type="none" w="med" len="med"/>
-                      <a:tailEnd type="none" w="med" len="med"/>
-                    </a:lnB>
-                    <a:solidFill>
-                      <a:srgbClr val="FFFFFF"/>
-                    </a:solidFill>
-                  </a:tcPr>
-                </a:tc>
-                <a:tc>
-                  <a:txBody>
-                    <a:bodyPr/>
-                    <a:lstStyle/>
-                    <a:p>
-                      <a:pPr indent="0" marL="0">
-                        <a:buNone/>
-                      </a:pPr>
-                      <a:r>
-                        <a:rPr lang="en-US" sz="900" dirty="0">
-                          <a:solidFill>
-                            <a:srgbClr val="111118"/>
-                          </a:solidFill>
-                          <a:latin typeface="Microsoft JhengHei" pitchFamily="34" charset="0"/>
-                          <a:ea typeface="Microsoft JhengHei" pitchFamily="34" charset="-122"/>
-                          <a:cs typeface="Microsoft JhengHei" pitchFamily="34" charset="-120"/>
-                        </a:rPr>
-                        <a:t>Sunday Morning Espresso Routine - Grind + distribute + tamp + extraction (15-Second Abridged Version).webm</a:t>
-                      </a:r>
-                      <a:endParaRPr lang="en-US" sz="900" dirty="0">
-                        <a:latin typeface="Microsoft JhengHei" charset="0"/>
-                        <a:ea typeface="Microsoft JhengHei" charset="0"/>
-                        <a:cs typeface="Microsoft JhengHei" charset="0"/>
-                      </a:endParaRPr>
-                    </a:p>
-                  </a:txBody>
-                  <a:tcPr marL="101600" marR="101600" marT="50800" marB="50800" anchor="ctr">
-                    <a:lnL w="0" cap="flat" cmpd="sng" algn="ctr">
-                      <a:noFill/>
-                    </a:lnL>
-                    <a:lnR w="0" cap="flat" cmpd="sng" algn="ctr">
-                      <a:noFill/>
-                    </a:lnR>
-                    <a:lnT w="0" cap="flat" cmpd="sng" algn="ctr">
-                      <a:noFill/>
-                    </a:lnT>
-                    <a:lnB w="6350" cap="flat" cmpd="sng" algn="ctr">
-                      <a:solidFill>
-                        <a:srgbClr val="E5E7EB"/>
-                      </a:solidFill>
-                      <a:prstDash val="solid"/>
-                      <a:round/>
-                      <a:headEnd type="none" w="med" len="med"/>
-                      <a:tailEnd type="none" w="med" len="med"/>
-                    </a:lnB>
-                    <a:solidFill>
-                      <a:srgbClr val="FFFFFF"/>
-                    </a:solidFill>
-                  </a:tcPr>
-                </a:tc>
-                <a:tc>
-                  <a:txBody>
-                    <a:bodyPr/>
-                    <a:lstStyle/>
-                    <a:p>
-                      <a:pPr indent="0" marL="0">
-                        <a:buNone/>
-                      </a:pPr>
-                      <a:r>
-                        <a:rPr lang="en-US" sz="900" dirty="0">
-                          <a:solidFill>
-                            <a:srgbClr val="111118"/>
-                          </a:solidFill>
-                          <a:latin typeface="Microsoft JhengHei" pitchFamily="34" charset="0"/>
-                          <a:ea typeface="Microsoft JhengHei" pitchFamily="34" charset="-122"/>
-                          <a:cs typeface="Microsoft JhengHei" pitchFamily="34" charset="-120"/>
-                        </a:rPr>
-                        <a:t>Scott Schiller from San Francisco, CA, USA</a:t>
-                      </a:r>
-                      <a:endParaRPr lang="en-US" sz="900" dirty="0">
-                        <a:latin typeface="Microsoft JhengHei" charset="0"/>
-                        <a:ea typeface="Microsoft JhengHei" charset="0"/>
-                        <a:cs typeface="Microsoft JhengHei" charset="0"/>
-                      </a:endParaRPr>
-                    </a:p>
-                  </a:txBody>
-                  <a:tcPr marL="101600" marR="101600" marT="50800" marB="50800" anchor="ctr">
-                    <a:lnL w="0" cap="flat" cmpd="sng" algn="ctr">
-                      <a:noFill/>
-                    </a:lnL>
-                    <a:lnR w="0" cap="flat" cmpd="sng" algn="ctr">
-                      <a:noFill/>
-                    </a:lnR>
-                    <a:lnT w="0" cap="flat" cmpd="sng" algn="ctr">
-                      <a:noFill/>
-                    </a:lnT>
-                    <a:lnB w="6350" cap="flat" cmpd="sng" algn="ctr">
-                      <a:solidFill>
-                        <a:srgbClr val="E5E7EB"/>
-                      </a:solidFill>
-                      <a:prstDash val="solid"/>
-                      <a:round/>
-                      <a:headEnd type="none" w="med" len="med"/>
-                      <a:tailEnd type="none" w="med" len="med"/>
-                    </a:lnB>
-                    <a:solidFill>
-                      <a:srgbClr val="FFFFFF"/>
-                    </a:solidFill>
-                  </a:tcPr>
-                </a:tc>
-                <a:tc>
-                  <a:txBody>
-                    <a:bodyPr/>
-                    <a:lstStyle/>
-                    <a:p>
-                      <a:pPr indent="0" marL="0">
-                        <a:buNone/>
-                      </a:pPr>
-                      <a:r>
-                        <a:rPr lang="en-US" sz="900" dirty="0">
-                          <a:solidFill>
-                            <a:srgbClr val="111118"/>
-                          </a:solidFill>
-                          <a:latin typeface="Microsoft JhengHei" pitchFamily="34" charset="0"/>
-                          <a:ea typeface="Microsoft JhengHei" pitchFamily="34" charset="-122"/>
-                          <a:cs typeface="Microsoft JhengHei" pitchFamily="34" charset="-120"/>
-                        </a:rPr>
-                        <a:t>CC BY 2.0</a:t>
-                      </a:r>
-                      <a:endParaRPr lang="en-US" sz="900" dirty="0">
-                        <a:latin typeface="Microsoft JhengHei" charset="0"/>
-                        <a:ea typeface="Microsoft JhengHei" charset="0"/>
-                        <a:cs typeface="Microsoft JhengHei" charset="0"/>
-                      </a:endParaRPr>
-                    </a:p>
-                  </a:txBody>
-                  <a:tcPr marL="101600" marR="101600" marT="50800" marB="50800" anchor="ctr">
-                    <a:lnL w="0" cap="flat" cmpd="sng" algn="ctr">
-                      <a:noFill/>
-                    </a:lnL>
-                    <a:lnR w="0" cap="flat" cmpd="sng" algn="ctr">
-                      <a:noFill/>
-                    </a:lnR>
-                    <a:lnT w="0" cap="flat" cmpd="sng" algn="ctr">
-                      <a:noFill/>
-                    </a:lnT>
-                    <a:lnB w="6350" cap="flat" cmpd="sng" algn="ctr">
-                      <a:solidFill>
-                        <a:srgbClr val="E5E7EB"/>
-                      </a:solidFill>
-                      <a:prstDash val="solid"/>
-                      <a:round/>
-                      <a:headEnd type="none" w="med" len="med"/>
-                      <a:tailEnd type="none" w="med" len="med"/>
-                    </a:lnB>
-                    <a:solidFill>
-                      <a:srgbClr val="FFFFFF"/>
-                    </a:solidFill>
-                  </a:tcPr>
-                </a:tc>
-              </a:tr>
-              <a:tr h="358140">
-                <a:tc>
-                  <a:txBody>
-                    <a:bodyPr/>
-                    <a:lstStyle/>
-                    <a:p>
-                      <a:pPr indent="0" marL="0">
-                        <a:buNone/>
-                      </a:pPr>
-                      <a:r>
-                        <a:rPr lang="en-US" sz="900" dirty="0">
-                          <a:solidFill>
-                            <a:srgbClr val="111118"/>
-                          </a:solidFill>
-                          <a:latin typeface="Microsoft JhengHei" pitchFamily="34" charset="0"/>
-                          <a:ea typeface="Microsoft JhengHei" pitchFamily="34" charset="-122"/>
-                          <a:cs typeface="Microsoft JhengHei" pitchFamily="34" charset="-120"/>
-                        </a:rPr>
-                        <a:t>018</a:t>
-                      </a:r>
-                      <a:endParaRPr lang="en-US" sz="900" dirty="0">
-                        <a:latin typeface="Microsoft JhengHei" charset="0"/>
-                        <a:ea typeface="Microsoft JhengHei" charset="0"/>
-                        <a:cs typeface="Microsoft JhengHei" charset="0"/>
-                      </a:endParaRPr>
-                    </a:p>
-                  </a:txBody>
-                  <a:tcPr marL="101600" marR="101600" marT="50800" marB="50800" anchor="ctr">
-                    <a:lnL w="0" cap="flat" cmpd="sng" algn="ctr">
-                      <a:noFill/>
-                    </a:lnL>
-                    <a:lnR w="0" cap="flat" cmpd="sng" algn="ctr">
-                      <a:noFill/>
-                    </a:lnR>
-                    <a:lnT w="0" cap="flat" cmpd="sng" algn="ctr">
-                      <a:noFill/>
-                    </a:lnT>
-                    <a:lnB w="6350" cap="flat" cmpd="sng" algn="ctr">
-                      <a:solidFill>
-                        <a:srgbClr val="E5E7EB"/>
-                      </a:solidFill>
-                      <a:prstDash val="solid"/>
-                      <a:round/>
-                      <a:headEnd type="none" w="med" len="med"/>
-                      <a:tailEnd type="none" w="med" len="med"/>
-                    </a:lnB>
-                    <a:solidFill>
-                      <a:srgbClr val="FFFFFF"/>
-                    </a:solidFill>
-                  </a:tcPr>
-                </a:tc>
-                <a:tc>
-                  <a:txBody>
-                    <a:bodyPr/>
-                    <a:lstStyle/>
-                    <a:p>
-                      <a:pPr indent="0" marL="0">
-                        <a:buNone/>
-                      </a:pPr>
-                      <a:r>
-                        <a:rPr lang="en-US" sz="900" dirty="0">
-                          <a:solidFill>
-                            <a:srgbClr val="111118"/>
-                          </a:solidFill>
-                          <a:latin typeface="Microsoft JhengHei" pitchFamily="34" charset="0"/>
-                          <a:ea typeface="Microsoft JhengHei" pitchFamily="34" charset="-122"/>
-                          <a:cs typeface="Microsoft JhengHei" pitchFamily="34" charset="-120"/>
-                        </a:rPr>
-                        <a:t>Кофемельница JURA 43.webm</a:t>
-                      </a:r>
-                      <a:endParaRPr lang="en-US" sz="900" dirty="0">
-                        <a:latin typeface="Microsoft JhengHei" charset="0"/>
-                        <a:ea typeface="Microsoft JhengHei" charset="0"/>
-                        <a:cs typeface="Microsoft JhengHei" charset="0"/>
-                      </a:endParaRPr>
-                    </a:p>
-                  </a:txBody>
-                  <a:tcPr marL="101600" marR="101600" marT="50800" marB="50800" anchor="ctr">
-                    <a:lnL w="0" cap="flat" cmpd="sng" algn="ctr">
-                      <a:noFill/>
-                    </a:lnL>
-                    <a:lnR w="0" cap="flat" cmpd="sng" algn="ctr">
-                      <a:noFill/>
-                    </a:lnR>
-                    <a:lnT w="0" cap="flat" cmpd="sng" algn="ctr">
-                      <a:noFill/>
-                    </a:lnT>
-                    <a:lnB w="6350" cap="flat" cmpd="sng" algn="ctr">
-                      <a:solidFill>
-                        <a:srgbClr val="E5E7EB"/>
-                      </a:solidFill>
-                      <a:prstDash val="solid"/>
-                      <a:round/>
-                      <a:headEnd type="none" w="med" len="med"/>
-                      <a:tailEnd type="none" w="med" len="med"/>
-                    </a:lnB>
-                    <a:solidFill>
-                      <a:srgbClr val="FFFFFF"/>
-                    </a:solidFill>
-                  </a:tcPr>
-                </a:tc>
-                <a:tc>
-                  <a:txBody>
-                    <a:bodyPr/>
-                    <a:lstStyle/>
-                    <a:p>
-                      <a:pPr indent="0" marL="0">
-                        <a:buNone/>
-                      </a:pPr>
-                      <a:r>
-                        <a:rPr lang="en-US" sz="900" dirty="0">
-                          <a:solidFill>
-                            <a:srgbClr val="111118"/>
-                          </a:solidFill>
-                          <a:latin typeface="Microsoft JhengHei" pitchFamily="34" charset="0"/>
-                          <a:ea typeface="Microsoft JhengHei" pitchFamily="34" charset="-122"/>
-                          <a:cs typeface="Microsoft JhengHei" pitchFamily="34" charset="-120"/>
-                        </a:rPr>
-                        <a:t>Gontcharik.petr</a:t>
-                      </a:r>
-                      <a:endParaRPr lang="en-US" sz="900" dirty="0">
-                        <a:latin typeface="Microsoft JhengHei" charset="0"/>
-                        <a:ea typeface="Microsoft JhengHei" charset="0"/>
-                        <a:cs typeface="Microsoft JhengHei" charset="0"/>
-                      </a:endParaRPr>
-                    </a:p>
-                  </a:txBody>
-                  <a:tcPr marL="101600" marR="101600" marT="50800" marB="50800" anchor="ctr">
-                    <a:lnL w="0" cap="flat" cmpd="sng" algn="ctr">
-                      <a:noFill/>
-                    </a:lnL>
-                    <a:lnR w="0" cap="flat" cmpd="sng" algn="ctr">
-                      <a:noFill/>
-                    </a:lnR>
-                    <a:lnT w="0" cap="flat" cmpd="sng" algn="ctr">
-                      <a:noFill/>
-                    </a:lnT>
-                    <a:lnB w="6350" cap="flat" cmpd="sng" algn="ctr">
-                      <a:solidFill>
-                        <a:srgbClr val="E5E7EB"/>
-                      </a:solidFill>
-                      <a:prstDash val="solid"/>
-                      <a:round/>
-                      <a:headEnd type="none" w="med" len="med"/>
-                      <a:tailEnd type="none" w="med" len="med"/>
-                    </a:lnB>
-                    <a:solidFill>
-                      <a:srgbClr val="FFFFFF"/>
-                    </a:solidFill>
-                  </a:tcPr>
-                </a:tc>
-                <a:tc>
-                  <a:txBody>
-                    <a:bodyPr/>
-                    <a:lstStyle/>
-                    <a:p>
-                      <a:pPr indent="0" marL="0">
-                        <a:buNone/>
-                      </a:pPr>
-                      <a:r>
-                        <a:rPr lang="en-US" sz="900" dirty="0">
-                          <a:solidFill>
-                            <a:srgbClr val="111118"/>
-                          </a:solidFill>
-                          <a:latin typeface="Microsoft JhengHei" pitchFamily="34" charset="0"/>
-                          <a:ea typeface="Microsoft JhengHei" pitchFamily="34" charset="-122"/>
-                          <a:cs typeface="Microsoft JhengHei" pitchFamily="34" charset="-120"/>
-                        </a:rPr>
-                        <a:t>CC BY-SA 4.0</a:t>
-                      </a:r>
-                      <a:endParaRPr lang="en-US" sz="900" dirty="0">
-                        <a:latin typeface="Microsoft JhengHei" charset="0"/>
-                        <a:ea typeface="Microsoft JhengHei" charset="0"/>
-                        <a:cs typeface="Microsoft JhengHei" charset="0"/>
-                      </a:endParaRPr>
-                    </a:p>
-                  </a:txBody>
-                  <a:tcPr marL="101600" marR="101600" marT="50800" marB="50800" anchor="ctr">
-                    <a:lnL w="0" cap="flat" cmpd="sng" algn="ctr">
-                      <a:noFill/>
-                    </a:lnL>
-                    <a:lnR w="0" cap="flat" cmpd="sng" algn="ctr">
-                      <a:noFill/>
-                    </a:lnR>
-                    <a:lnT w="0" cap="flat" cmpd="sng" algn="ctr">
-                      <a:noFill/>
-                    </a:lnT>
-                    <a:lnB w="6350" cap="flat" cmpd="sng" algn="ctr">
-                      <a:solidFill>
-                        <a:srgbClr val="E5E7EB"/>
-                      </a:solidFill>
-                      <a:prstDash val="solid"/>
-                      <a:round/>
-                      <a:headEnd type="none" w="med" len="med"/>
-                      <a:tailEnd type="none" w="med" len="med"/>
-                    </a:lnB>
-                    <a:solidFill>
-                      <a:srgbClr val="FFFFFF"/>
-                    </a:solidFill>
-                  </a:tcPr>
-                </a:tc>
-              </a:tr>
-              <a:tr h="358140">
-                <a:tc>
-                  <a:txBody>
-                    <a:bodyPr/>
-                    <a:lstStyle/>
-                    <a:p>
-                      <a:pPr indent="0" marL="0">
-                        <a:buNone/>
-                      </a:pPr>
-                      <a:r>
-                        <a:rPr lang="en-US" sz="900" dirty="0">
-                          <a:solidFill>
-                            <a:srgbClr val="111118"/>
-                          </a:solidFill>
-                          <a:latin typeface="Microsoft JhengHei" pitchFamily="34" charset="0"/>
-                          <a:ea typeface="Microsoft JhengHei" pitchFamily="34" charset="-122"/>
-                          <a:cs typeface="Microsoft JhengHei" pitchFamily="34" charset="-120"/>
-                        </a:rPr>
-                        <a:t>019</a:t>
-                      </a:r>
-                      <a:endParaRPr lang="en-US" sz="900" dirty="0">
-                        <a:latin typeface="Microsoft JhengHei" charset="0"/>
-                        <a:ea typeface="Microsoft JhengHei" charset="0"/>
-                        <a:cs typeface="Microsoft JhengHei" charset="0"/>
-                      </a:endParaRPr>
-                    </a:p>
-                  </a:txBody>
-                  <a:tcPr marL="101600" marR="101600" marT="50800" marB="50800" anchor="ctr">
-                    <a:lnL w="0" cap="flat" cmpd="sng" algn="ctr">
-                      <a:noFill/>
-                    </a:lnL>
-                    <a:lnR w="0" cap="flat" cmpd="sng" algn="ctr">
-                      <a:noFill/>
-                    </a:lnR>
-                    <a:lnT w="0" cap="flat" cmpd="sng" algn="ctr">
-                      <a:noFill/>
-                    </a:lnT>
-                    <a:lnB w="6350" cap="flat" cmpd="sng" algn="ctr">
-                      <a:solidFill>
-                        <a:srgbClr val="E5E7EB"/>
-                      </a:solidFill>
-                      <a:prstDash val="solid"/>
-                      <a:round/>
-                      <a:headEnd type="none" w="med" len="med"/>
-                      <a:tailEnd type="none" w="med" len="med"/>
-                    </a:lnB>
-                    <a:solidFill>
-                      <a:srgbClr val="FFFFFF"/>
-                    </a:solidFill>
-                  </a:tcPr>
-                </a:tc>
-                <a:tc>
-                  <a:txBody>
-                    <a:bodyPr/>
-                    <a:lstStyle/>
-                    <a:p>
-                      <a:pPr indent="0" marL="0">
-                        <a:buNone/>
-                      </a:pPr>
-                      <a:r>
-                        <a:rPr lang="en-US" sz="900" dirty="0">
-                          <a:solidFill>
-                            <a:srgbClr val="111118"/>
-                          </a:solidFill>
-                          <a:latin typeface="Microsoft JhengHei" pitchFamily="34" charset="0"/>
-                          <a:ea typeface="Microsoft JhengHei" pitchFamily="34" charset="-122"/>
-                          <a:cs typeface="Microsoft JhengHei" pitchFamily="34" charset="-120"/>
-                        </a:rPr>
-                        <a:t>MoliendoCafeEnLicuadora ohs02.webm</a:t>
-                      </a:r>
-                      <a:endParaRPr lang="en-US" sz="900" dirty="0">
-                        <a:latin typeface="Microsoft JhengHei" charset="0"/>
-                        <a:ea typeface="Microsoft JhengHei" charset="0"/>
-                        <a:cs typeface="Microsoft JhengHei" charset="0"/>
-                      </a:endParaRPr>
-                    </a:p>
-                  </a:txBody>
-                  <a:tcPr marL="101600" marR="101600" marT="50800" marB="50800" anchor="ctr">
-                    <a:lnL w="0" cap="flat" cmpd="sng" algn="ctr">
-                      <a:noFill/>
-                    </a:lnL>
-                    <a:lnR w="0" cap="flat" cmpd="sng" algn="ctr">
-                      <a:noFill/>
-                    </a:lnR>
-                    <a:lnT w="0" cap="flat" cmpd="sng" algn="ctr">
-                      <a:noFill/>
-                    </a:lnT>
-                    <a:lnB w="6350" cap="flat" cmpd="sng" algn="ctr">
-                      <a:solidFill>
-                        <a:srgbClr val="E5E7EB"/>
-                      </a:solidFill>
-                      <a:prstDash val="solid"/>
-                      <a:round/>
-                      <a:headEnd type="none" w="med" len="med"/>
-                      <a:tailEnd type="none" w="med" len="med"/>
-                    </a:lnB>
-                    <a:solidFill>
-                      <a:srgbClr val="FFFFFF"/>
-                    </a:solidFill>
-                  </a:tcPr>
-                </a:tc>
-                <a:tc>
-                  <a:txBody>
-                    <a:bodyPr/>
-                    <a:lstStyle/>
-                    <a:p>
-                      <a:pPr indent="0" marL="0">
-                        <a:buNone/>
-                      </a:pPr>
-                      <a:r>
-                        <a:rPr lang="en-US" sz="900" dirty="0">
-                          <a:solidFill>
-                            <a:srgbClr val="111118"/>
-                          </a:solidFill>
-                          <a:latin typeface="Microsoft JhengHei" pitchFamily="34" charset="0"/>
-                          <a:ea typeface="Microsoft JhengHei" pitchFamily="34" charset="-122"/>
-                          <a:cs typeface="Microsoft JhengHei" pitchFamily="34" charset="-120"/>
-                        </a:rPr>
-                        <a:t>PetrohsW</a:t>
-                      </a:r>
-                      <a:endParaRPr lang="en-US" sz="900" dirty="0">
-                        <a:latin typeface="Microsoft JhengHei" charset="0"/>
-                        <a:ea typeface="Microsoft JhengHei" charset="0"/>
-                        <a:cs typeface="Microsoft JhengHei" charset="0"/>
-                      </a:endParaRPr>
-                    </a:p>
-                  </a:txBody>
-                  <a:tcPr marL="101600" marR="101600" marT="50800" marB="50800" anchor="ctr">
-                    <a:lnL w="0" cap="flat" cmpd="sng" algn="ctr">
-                      <a:noFill/>
-                    </a:lnL>
-                    <a:lnR w="0" cap="flat" cmpd="sng" algn="ctr">
-                      <a:noFill/>
-                    </a:lnR>
-                    <a:lnT w="0" cap="flat" cmpd="sng" algn="ctr">
-                      <a:noFill/>
-                    </a:lnT>
-                    <a:lnB w="6350" cap="flat" cmpd="sng" algn="ctr">
-                      <a:solidFill>
-                        <a:srgbClr val="E5E7EB"/>
-                      </a:solidFill>
-                      <a:prstDash val="solid"/>
-                      <a:round/>
-                      <a:headEnd type="none" w="med" len="med"/>
-                      <a:tailEnd type="none" w="med" len="med"/>
-                    </a:lnB>
-                    <a:solidFill>
-                      <a:srgbClr val="FFFFFF"/>
-                    </a:solidFill>
-                  </a:tcPr>
-                </a:tc>
-                <a:tc>
-                  <a:txBody>
-                    <a:bodyPr/>
-                    <a:lstStyle/>
-                    <a:p>
-                      <a:pPr indent="0" marL="0">
-                        <a:buNone/>
-                      </a:pPr>
-                      <a:r>
-                        <a:rPr lang="en-US" sz="900" dirty="0">
-                          <a:solidFill>
-                            <a:srgbClr val="111118"/>
-                          </a:solidFill>
-                          <a:latin typeface="Microsoft JhengHei" pitchFamily="34" charset="0"/>
-                          <a:ea typeface="Microsoft JhengHei" pitchFamily="34" charset="-122"/>
-                          <a:cs typeface="Microsoft JhengHei" pitchFamily="34" charset="-120"/>
-                        </a:rPr>
-                        <a:t>CC BY-SA 4.0</a:t>
-                      </a:r>
-                      <a:endParaRPr lang="en-US" sz="900" dirty="0">
-                        <a:latin typeface="Microsoft JhengHei" charset="0"/>
-                        <a:ea typeface="Microsoft JhengHei" charset="0"/>
-                        <a:cs typeface="Microsoft JhengHei" charset="0"/>
-                      </a:endParaRPr>
-                    </a:p>
-                  </a:txBody>
-                  <a:tcPr marL="101600" marR="101600" marT="50800" marB="50800" anchor="ctr">
-                    <a:lnL w="0" cap="flat" cmpd="sng" algn="ctr">
-                      <a:noFill/>
-                    </a:lnL>
-                    <a:lnR w="0" cap="flat" cmpd="sng" algn="ctr">
-                      <a:noFill/>
-                    </a:lnR>
-                    <a:lnT w="0" cap="flat" cmpd="sng" algn="ctr">
-                      <a:noFill/>
-                    </a:lnT>
-                    <a:lnB w="6350" cap="flat" cmpd="sng" algn="ctr">
-                      <a:solidFill>
-                        <a:srgbClr val="E5E7EB"/>
-                      </a:solidFill>
-                      <a:prstDash val="solid"/>
-                      <a:round/>
-                      <a:headEnd type="none" w="med" len="med"/>
-                      <a:tailEnd type="none" w="med" len="med"/>
-                    </a:lnB>
-                    <a:solidFill>
-                      <a:srgbClr val="FFFFFF"/>
-                    </a:solidFill>
-                  </a:tcPr>
-                </a:tc>
-              </a:tr>
-              <a:tr h="358140">
-                <a:tc>
-                  <a:txBody>
-                    <a:bodyPr/>
-                    <a:lstStyle/>
-                    <a:p>
-                      <a:pPr indent="0" marL="0">
-                        <a:buNone/>
-                      </a:pPr>
-                      <a:r>
-                        <a:rPr lang="en-US" sz="900" dirty="0">
-                          <a:solidFill>
-                            <a:srgbClr val="111118"/>
-                          </a:solidFill>
-                          <a:latin typeface="Microsoft JhengHei" pitchFamily="34" charset="0"/>
-                          <a:ea typeface="Microsoft JhengHei" pitchFamily="34" charset="-122"/>
-                          <a:cs typeface="Microsoft JhengHei" pitchFamily="34" charset="-120"/>
-                        </a:rPr>
-                        <a:t>020</a:t>
-                      </a:r>
-                      <a:endParaRPr lang="en-US" sz="900" dirty="0">
-                        <a:latin typeface="Microsoft JhengHei" charset="0"/>
-                        <a:ea typeface="Microsoft JhengHei" charset="0"/>
-                        <a:cs typeface="Microsoft JhengHei" charset="0"/>
-                      </a:endParaRPr>
-                    </a:p>
-                  </a:txBody>
-                  <a:tcPr marL="101600" marR="101600" marT="50800" marB="50800" anchor="ctr">
-                    <a:lnL w="0" cap="flat" cmpd="sng" algn="ctr">
-                      <a:noFill/>
-                    </a:lnL>
-                    <a:lnR w="0" cap="flat" cmpd="sng" algn="ctr">
-                      <a:noFill/>
-                    </a:lnR>
-                    <a:lnT w="0" cap="flat" cmpd="sng" algn="ctr">
-                      <a:noFill/>
-                    </a:lnT>
-                    <a:lnB w="6350" cap="flat" cmpd="sng" algn="ctr">
-                      <a:solidFill>
-                        <a:srgbClr val="E5E7EB"/>
-                      </a:solidFill>
-                      <a:prstDash val="solid"/>
-                      <a:round/>
-                      <a:headEnd type="none" w="med" len="med"/>
-                      <a:tailEnd type="none" w="med" len="med"/>
-                    </a:lnB>
-                    <a:solidFill>
-                      <a:srgbClr val="FFFFFF"/>
-                    </a:solidFill>
-                  </a:tcPr>
-                </a:tc>
-                <a:tc>
-                  <a:txBody>
-                    <a:bodyPr/>
-                    <a:lstStyle/>
-                    <a:p>
-                      <a:pPr indent="0" marL="0">
-                        <a:buNone/>
-                      </a:pPr>
-                      <a:r>
-                        <a:rPr lang="en-US" sz="900" dirty="0">
-                          <a:solidFill>
-                            <a:srgbClr val="111118"/>
-                          </a:solidFill>
-                          <a:latin typeface="Microsoft JhengHei" pitchFamily="34" charset="0"/>
-                          <a:ea typeface="Microsoft JhengHei" pitchFamily="34" charset="-122"/>
-                          <a:cs typeface="Microsoft JhengHei" pitchFamily="34" charset="-120"/>
-                        </a:rPr>
-                        <a:t>Espresso video.ogv</a:t>
-                      </a:r>
-                      <a:endParaRPr lang="en-US" sz="900" dirty="0">
-                        <a:latin typeface="Microsoft JhengHei" charset="0"/>
-                        <a:ea typeface="Microsoft JhengHei" charset="0"/>
-                        <a:cs typeface="Microsoft JhengHei" charset="0"/>
-                      </a:endParaRPr>
-                    </a:p>
-                  </a:txBody>
-                  <a:tcPr marL="101600" marR="101600" marT="50800" marB="50800" anchor="ctr">
-                    <a:lnL w="0" cap="flat" cmpd="sng" algn="ctr">
-                      <a:noFill/>
-                    </a:lnL>
-                    <a:lnR w="0" cap="flat" cmpd="sng" algn="ctr">
-                      <a:noFill/>
-                    </a:lnR>
-                    <a:lnT w="0" cap="flat" cmpd="sng" algn="ctr">
-                      <a:noFill/>
-                    </a:lnT>
-                    <a:lnB w="6350" cap="flat" cmpd="sng" algn="ctr">
-                      <a:solidFill>
-                        <a:srgbClr val="E5E7EB"/>
-                      </a:solidFill>
-                      <a:prstDash val="solid"/>
-                      <a:round/>
-                      <a:headEnd type="none" w="med" len="med"/>
-                      <a:tailEnd type="none" w="med" len="med"/>
-                    </a:lnB>
-                    <a:solidFill>
-                      <a:srgbClr val="FFFFFF"/>
-                    </a:solidFill>
-                  </a:tcPr>
-                </a:tc>
-                <a:tc>
-                  <a:txBody>
-                    <a:bodyPr/>
-                    <a:lstStyle/>
-                    <a:p>
-                      <a:pPr indent="0" marL="0">
-                        <a:buNone/>
-                      </a:pPr>
-                      <a:r>
-                        <a:rPr lang="en-US" sz="900" dirty="0">
-                          <a:solidFill>
-                            <a:srgbClr val="111118"/>
-                          </a:solidFill>
-                          <a:latin typeface="Microsoft JhengHei" pitchFamily="34" charset="0"/>
-                          <a:ea typeface="Microsoft JhengHei" pitchFamily="34" charset="-122"/>
-                          <a:cs typeface="Microsoft JhengHei" pitchFamily="34" charset="-120"/>
-                        </a:rPr>
-                        <a:t>Rosatrieu</a:t>
-                      </a:r>
-                      <a:endParaRPr lang="en-US" sz="900" dirty="0">
-                        <a:latin typeface="Microsoft JhengHei" charset="0"/>
-                        <a:ea typeface="Microsoft JhengHei" charset="0"/>
-                        <a:cs typeface="Microsoft JhengHei" charset="0"/>
-                      </a:endParaRPr>
-                    </a:p>
-                  </a:txBody>
-                  <a:tcPr marL="101600" marR="101600" marT="50800" marB="50800" anchor="ctr">
-                    <a:lnL w="0" cap="flat" cmpd="sng" algn="ctr">
-                      <a:noFill/>
-                    </a:lnL>
-                    <a:lnR w="0" cap="flat" cmpd="sng" algn="ctr">
-                      <a:noFill/>
-                    </a:lnR>
-                    <a:lnT w="0" cap="flat" cmpd="sng" algn="ctr">
-                      <a:noFill/>
-                    </a:lnT>
-                    <a:lnB w="6350" cap="flat" cmpd="sng" algn="ctr">
-                      <a:solidFill>
-                        <a:srgbClr val="E5E7EB"/>
-                      </a:solidFill>
-                      <a:prstDash val="solid"/>
-                      <a:round/>
-                      <a:headEnd type="none" w="med" len="med"/>
-                      <a:tailEnd type="none" w="med" len="med"/>
-                    </a:lnB>
-                    <a:solidFill>
-                      <a:srgbClr val="FFFFFF"/>
-                    </a:solidFill>
-                  </a:tcPr>
-                </a:tc>
-                <a:tc>
-                  <a:txBody>
-                    <a:bodyPr/>
-                    <a:lstStyle/>
-                    <a:p>
-                      <a:pPr indent="0" marL="0">
-                        <a:buNone/>
-                      </a:pPr>
-                      <a:r>
-                        <a:rPr lang="en-US" sz="900" dirty="0">
-                          <a:solidFill>
-                            <a:srgbClr val="111118"/>
-                          </a:solidFill>
-                          <a:latin typeface="Microsoft JhengHei" pitchFamily="34" charset="0"/>
-                          <a:ea typeface="Microsoft JhengHei" pitchFamily="34" charset="-122"/>
-                          <a:cs typeface="Microsoft JhengHei" pitchFamily="34" charset="-120"/>
-                        </a:rPr>
-                        <a:t>CC BY-SA 3.0</a:t>
-                      </a:r>
-                      <a:endParaRPr lang="en-US" sz="900" dirty="0">
-                        <a:latin typeface="Microsoft JhengHei" charset="0"/>
-                        <a:ea typeface="Microsoft JhengHei" charset="0"/>
-                        <a:cs typeface="Microsoft JhengHei" charset="0"/>
-                      </a:endParaRPr>
-                    </a:p>
-                  </a:txBody>
-                  <a:tcPr marL="101600" marR="101600" marT="50800" marB="50800" anchor="ctr">
-                    <a:lnL w="0" cap="flat" cmpd="sng" algn="ctr">
-                      <a:noFill/>
-                    </a:lnL>
-                    <a:lnR w="0" cap="flat" cmpd="sng" algn="ctr">
-                      <a:noFill/>
-                    </a:lnR>
-                    <a:lnT w="0" cap="flat" cmpd="sng" algn="ctr">
-                      <a:noFill/>
-                    </a:lnT>
-                    <a:lnB w="6350" cap="flat" cmpd="sng" algn="ctr">
-                      <a:solidFill>
-                        <a:srgbClr val="E5E7EB"/>
-                      </a:solidFill>
-                      <a:prstDash val="solid"/>
-                      <a:round/>
-                      <a:headEnd type="none" w="med" len="med"/>
-                      <a:tailEnd type="none" w="med" len="med"/>
-                    </a:lnB>
-                    <a:solidFill>
-                      <a:srgbClr val="FFFFFF"/>
-                    </a:solidFill>
-                  </a:tcPr>
-                </a:tc>
-              </a:tr>
-              <a:tr h="358140">
-                <a:tc>
-                  <a:txBody>
-                    <a:bodyPr/>
-                    <a:lstStyle/>
-                    <a:p>
-                      <a:pPr indent="0" marL="0">
-                        <a:buNone/>
-                      </a:pPr>
-                      <a:r>
-                        <a:rPr lang="en-US" sz="900" dirty="0">
-                          <a:solidFill>
-                            <a:srgbClr val="111118"/>
-                          </a:solidFill>
-                          <a:latin typeface="Microsoft JhengHei" pitchFamily="34" charset="0"/>
-                          <a:ea typeface="Microsoft JhengHei" pitchFamily="34" charset="-122"/>
-                          <a:cs typeface="Microsoft JhengHei" pitchFamily="34" charset="-120"/>
-                        </a:rPr>
-                        <a:t>021</a:t>
-                      </a:r>
-                      <a:endParaRPr lang="en-US" sz="900" dirty="0">
-                        <a:latin typeface="Microsoft JhengHei" charset="0"/>
-                        <a:ea typeface="Microsoft JhengHei" charset="0"/>
-                        <a:cs typeface="Microsoft JhengHei" charset="0"/>
-                      </a:endParaRPr>
-                    </a:p>
-                  </a:txBody>
-                  <a:tcPr marL="101600" marR="101600" marT="50800" marB="50800" anchor="ctr">
-                    <a:lnL w="0" cap="flat" cmpd="sng" algn="ctr">
-                      <a:noFill/>
-                    </a:lnL>
-                    <a:lnR w="0" cap="flat" cmpd="sng" algn="ctr">
-                      <a:noFill/>
-                    </a:lnR>
-                    <a:lnT w="0" cap="flat" cmpd="sng" algn="ctr">
-                      <a:noFill/>
-                    </a:lnT>
-                    <a:lnB w="6350" cap="flat" cmpd="sng" algn="ctr">
-                      <a:solidFill>
-                        <a:srgbClr val="E5E7EB"/>
-                      </a:solidFill>
-                      <a:prstDash val="solid"/>
-                      <a:round/>
-                      <a:headEnd type="none" w="med" len="med"/>
-                      <a:tailEnd type="none" w="med" len="med"/>
-                    </a:lnB>
-                    <a:solidFill>
-                      <a:srgbClr val="FFFFFF"/>
-                    </a:solidFill>
-                  </a:tcPr>
-                </a:tc>
-                <a:tc>
-                  <a:txBody>
-                    <a:bodyPr/>
-                    <a:lstStyle/>
-                    <a:p>
-                      <a:pPr indent="0" marL="0">
-                        <a:buNone/>
-                      </a:pPr>
-                      <a:r>
-                        <a:rPr lang="en-US" sz="900" dirty="0">
-                          <a:solidFill>
-                            <a:srgbClr val="111118"/>
-                          </a:solidFill>
-                          <a:latin typeface="Microsoft JhengHei" pitchFamily="34" charset="0"/>
-                          <a:ea typeface="Microsoft JhengHei" pitchFamily="34" charset="-122"/>
-                          <a:cs typeface="Microsoft JhengHei" pitchFamily="34" charset="-120"/>
-                        </a:rPr>
-                        <a:t>Macro Espresso Process.webm</a:t>
-                      </a:r>
-                      <a:endParaRPr lang="en-US" sz="900" dirty="0">
-                        <a:latin typeface="Microsoft JhengHei" charset="0"/>
-                        <a:ea typeface="Microsoft JhengHei" charset="0"/>
-                        <a:cs typeface="Microsoft JhengHei" charset="0"/>
-                      </a:endParaRPr>
-                    </a:p>
-                  </a:txBody>
-                  <a:tcPr marL="101600" marR="101600" marT="50800" marB="50800" anchor="ctr">
-                    <a:lnL w="0" cap="flat" cmpd="sng" algn="ctr">
-                      <a:noFill/>
-                    </a:lnL>
-                    <a:lnR w="0" cap="flat" cmpd="sng" algn="ctr">
-                      <a:noFill/>
-                    </a:lnR>
-                    <a:lnT w="0" cap="flat" cmpd="sng" algn="ctr">
-                      <a:noFill/>
-                    </a:lnT>
-                    <a:lnB w="6350" cap="flat" cmpd="sng" algn="ctr">
-                      <a:solidFill>
-                        <a:srgbClr val="E5E7EB"/>
-                      </a:solidFill>
-                      <a:prstDash val="solid"/>
-                      <a:round/>
-                      <a:headEnd type="none" w="med" len="med"/>
-                      <a:tailEnd type="none" w="med" len="med"/>
-                    </a:lnB>
-                    <a:solidFill>
-                      <a:srgbClr val="FFFFFF"/>
-                    </a:solidFill>
-                  </a:tcPr>
-                </a:tc>
-                <a:tc>
-                  <a:txBody>
-                    <a:bodyPr/>
-                    <a:lstStyle/>
-                    <a:p>
-                      <a:pPr indent="0" marL="0">
-                        <a:buNone/>
-                      </a:pPr>
-                      <a:r>
-                        <a:rPr lang="en-US" sz="900" dirty="0">
-                          <a:solidFill>
-                            <a:srgbClr val="111118"/>
-                          </a:solidFill>
-                          <a:latin typeface="Microsoft JhengHei" pitchFamily="34" charset="0"/>
-                          <a:ea typeface="Microsoft JhengHei" pitchFamily="34" charset="-122"/>
-                          <a:cs typeface="Microsoft JhengHei" pitchFamily="34" charset="-120"/>
-                        </a:rPr>
-                        <a:t>Scott Schiller from San Francisco, CA, USA</a:t>
-                      </a:r>
-                      <a:endParaRPr lang="en-US" sz="900" dirty="0">
-                        <a:latin typeface="Microsoft JhengHei" charset="0"/>
-                        <a:ea typeface="Microsoft JhengHei" charset="0"/>
-                        <a:cs typeface="Microsoft JhengHei" charset="0"/>
-                      </a:endParaRPr>
-                    </a:p>
-                  </a:txBody>
-                  <a:tcPr marL="101600" marR="101600" marT="50800" marB="50800" anchor="ctr">
-                    <a:lnL w="0" cap="flat" cmpd="sng" algn="ctr">
-                      <a:noFill/>
-                    </a:lnL>
-                    <a:lnR w="0" cap="flat" cmpd="sng" algn="ctr">
-                      <a:noFill/>
-                    </a:lnR>
-                    <a:lnT w="0" cap="flat" cmpd="sng" algn="ctr">
-                      <a:noFill/>
-                    </a:lnT>
-                    <a:lnB w="6350" cap="flat" cmpd="sng" algn="ctr">
-                      <a:solidFill>
-                        <a:srgbClr val="E5E7EB"/>
-                      </a:solidFill>
-                      <a:prstDash val="solid"/>
-                      <a:round/>
-                      <a:headEnd type="none" w="med" len="med"/>
-                      <a:tailEnd type="none" w="med" len="med"/>
-                    </a:lnB>
-                    <a:solidFill>
-                      <a:srgbClr val="FFFFFF"/>
-                    </a:solidFill>
-                  </a:tcPr>
-                </a:tc>
-                <a:tc>
-                  <a:txBody>
-                    <a:bodyPr/>
-                    <a:lstStyle/>
-                    <a:p>
-                      <a:pPr indent="0" marL="0">
-                        <a:buNone/>
-                      </a:pPr>
-                      <a:r>
-                        <a:rPr lang="en-US" sz="900" dirty="0">
-                          <a:solidFill>
-                            <a:srgbClr val="111118"/>
-                          </a:solidFill>
-                          <a:latin typeface="Microsoft JhengHei" pitchFamily="34" charset="0"/>
-                          <a:ea typeface="Microsoft JhengHei" pitchFamily="34" charset="-122"/>
-                          <a:cs typeface="Microsoft JhengHei" pitchFamily="34" charset="-120"/>
-                        </a:rPr>
-                        <a:t>CC BY 2.0</a:t>
-                      </a:r>
-                      <a:endParaRPr lang="en-US" sz="900" dirty="0">
-                        <a:latin typeface="Microsoft JhengHei" charset="0"/>
-                        <a:ea typeface="Microsoft JhengHei" charset="0"/>
-                        <a:cs typeface="Microsoft JhengHei" charset="0"/>
-                      </a:endParaRPr>
-                    </a:p>
-                  </a:txBody>
-                  <a:tcPr marL="101600" marR="101600" marT="50800" marB="50800" anchor="ctr">
-                    <a:lnL w="0" cap="flat" cmpd="sng" algn="ctr">
-                      <a:noFill/>
-                    </a:lnL>
-                    <a:lnR w="0" cap="flat" cmpd="sng" algn="ctr">
-                      <a:noFill/>
-                    </a:lnR>
-                    <a:lnT w="0" cap="flat" cmpd="sng" algn="ctr">
-                      <a:noFill/>
-                    </a:lnT>
-                    <a:lnB w="6350" cap="flat" cmpd="sng" algn="ctr">
-                      <a:solidFill>
-                        <a:srgbClr val="E5E7EB"/>
-                      </a:solidFill>
-                      <a:prstDash val="solid"/>
-                      <a:round/>
-                      <a:headEnd type="none" w="med" len="med"/>
-                      <a:tailEnd type="none" w="med" len="med"/>
-                    </a:lnB>
-                    <a:solidFill>
-                      <a:srgbClr val="FFFFFF"/>
-                    </a:solidFill>
-                  </a:tcPr>
-                </a:tc>
-              </a:tr>
-            </a:tbl>
-          </a:graphicData>
-        </a:graphic>
-      </p:graphicFrame>
-      <p:sp>
-        <p:nvSpPr>
-          <p:cNvPr id="25" name="Slide Number Placeholder 0"/>
-          <p:cNvSpPr>
-            <a:spLocks noGrp="1"/>
-          </p:cNvSpPr>
-          <p:nvPr>
-            <p:ph type="sldNum" sz="quarter" idx="4294967295"/>
-          </p:nvPr>
-        </p:nvSpPr>
-        <p:spPr>
-          <a:xfrm>
-            <a:off x="11109960" y="6355080"/>
-            <a:ext cx="457200" cy="274320"/>
-          </a:xfrm>
-          <a:prstGeom prst="rect">
-            <a:avLst/>
-          </a:prstGeom>
-          <a:extLst>
-            <a:ext uri="{C572A759-6A51-4108-AA02-DFA0A04FC94B}">
-              <ma14:wrappingTextBoxFlag xmlns:ma14="http://schemas.microsoft.com/office/mac/drawingml/2011/main" val="0"/>
-            </a:ext>
-          </a:extLst>
-        </p:spPr>
-        <p:txBody>
-          <a:bodyPr/>
-          <a:lstStyle>
-            <a:lvl1pPr>
-              <a:defRPr sz="1000">
-                <a:solidFill>
-                  <a:srgbClr val="9CA3AF"/>
-                </a:solidFill>
-              </a:defRPr>
-            </a:lvl1pPr>
-          </a:lstStyle>
-          <a:p>
-            <a:pPr algn="r"/>
-            <a:fld id="{F7021451-1387-4CA6-816F-3879F97B5CBC}" type="slidenum">
-              <a:rPr b="0" lang="en-US"/>
-              <a:t>25</a:t>
-            </a:fld>
-            <a:endParaRPr lang="en-US"/>
-          </a:p>
-        </p:txBody>
-      </p:sp>
-    </p:spTree>
-  </p:cSld>
-  <p:clrMapOvr>
-    <a:masterClrMapping/>
-  </p:clrMapOvr>
-</p:sld>
-</file>
-
-<file path=ppt/slides/slide26.xml><?xml version="1.0" encoding="utf-8"?>
-<p:sld xmlns:a="http://schemas.openxmlformats.org/drawingml/2006/main" xmlns:r="http://schemas.openxmlformats.org/officeDocument/2006/relationships" xmlns:p="http://schemas.openxmlformats.org/presentationml/2006/main">
-  <p:cSld name="Slide 26">
-    <p:spTree>
-      <p:nvGrpSpPr>
-        <p:cNvPr id="1" name=""/>
-        <p:cNvGrpSpPr/>
-        <p:nvPr/>
-      </p:nvGrpSpPr>
-      <p:grpSpPr>
-        <a:xfrm>
-          <a:off x="0" y="0"/>
-          <a:ext cx="0" cy="0"/>
-          <a:chOff x="0" y="0"/>
-          <a:chExt cx="0" cy="0"/>
-        </a:xfrm>
-      </p:grpSpPr>
-      <p:sp>
-        <p:nvSpPr>
-          <p:cNvPr id="2" name="Text 0"/>
-          <p:cNvSpPr/>
-          <p:nvPr>
-            <p:ph idx="100" type="title" hasCustomPrompt="1"/>
-          </p:nvPr>
-        </p:nvSpPr>
-        <p:spPr>
-          <a:xfrm>
-            <a:off x="640080" y="502920"/>
-            <a:ext cx="10881360" cy="914400"/>
-          </a:xfrm>
-          <a:prstGeom prst="rect">
-            <a:avLst/>
-          </a:prstGeom>
-          <a:noFill/>
-          <a:ln/>
-        </p:spPr>
-        <p:txBody>
-          <a:bodyPr wrap="square" lIns="0" tIns="0" rIns="0" bIns="0" rtlCol="0" anchor="t"/>
-          <a:lstStyle/>
-          <a:p>
-            <a:pPr algn="l" indent="0" marL="0">
-              <a:buNone/>
-            </a:pPr>
-            <a:r>
-              <a:rPr lang="en-US" sz="2800" b="1" dirty="0">
-                <a:solidFill>
-                  <a:srgbClr val="111118"/>
-                </a:solidFill>
-              </a:rPr>
-              <a:t>A6 · Footage credits (3 of 4)</a:t>
-            </a:r>
-            <a:endParaRPr lang="en-US" sz="2800" dirty="0"/>
-          </a:p>
-        </p:txBody>
-      </p:sp>
-      <p:sp>
-        <p:nvSpPr>
-          <p:cNvPr id="3" name="Text 1"/>
-          <p:cNvSpPr txBox="1"/>
-          <p:nvPr/>
-        </p:nvSpPr>
-        <p:spPr>
-          <a:xfrm>
-            <a:off x="640080" y="274320"/>
-            <a:ext cx="8229600" cy="256032"/>
-          </a:xfrm>
-          <a:prstGeom prst="rect">
-            <a:avLst/>
-          </a:prstGeom>
-          <a:noFill/>
-          <a:ln/>
-        </p:spPr>
-        <p:txBody>
-          <a:bodyPr wrap="square" lIns="0" tIns="0" rIns="0" bIns="0" rtlCol="0" anchor="ctr"/>
-          <a:lstStyle/>
-          <a:p>
-            <a:pPr indent="0" marL="0">
-              <a:buNone/>
-            </a:pPr>
-            <a:r>
-              <a:rPr lang="en-US" sz="1050" b="1" spc="300" kern="0" dirty="0">
-                <a:solidFill>
-                  <a:srgbClr val="6C4CF5"/>
-                </a:solidFill>
-              </a:rPr>
-              <a:t>APPENDIX</a:t>
-            </a:r>
-            <a:endParaRPr lang="en-US" sz="1050" dirty="0"/>
-          </a:p>
-        </p:txBody>
-      </p:sp>
-      <p:sp>
-        <p:nvSpPr>
-          <p:cNvPr id="4" name="Text 2"/>
-          <p:cNvSpPr txBox="1"/>
-          <p:nvPr/>
-        </p:nvSpPr>
-        <p:spPr>
-          <a:xfrm>
-            <a:off x="640080" y="6355080"/>
-            <a:ext cx="5486400" cy="274320"/>
-          </a:xfrm>
-          <a:prstGeom prst="rect">
-            <a:avLst/>
-          </a:prstGeom>
-          <a:noFill/>
-          <a:ln/>
-        </p:spPr>
-        <p:txBody>
-          <a:bodyPr wrap="square" lIns="0" tIns="0" rIns="0" bIns="0" rtlCol="0" anchor="ctr"/>
-          <a:lstStyle/>
-          <a:p>
-            <a:pPr indent="0" marL="0">
-              <a:buNone/>
-            </a:pPr>
-            <a:r>
-              <a:rPr lang="en-US" sz="1000" dirty="0">
-                <a:solidFill>
-                  <a:srgbClr val="9CA3AF"/>
-                </a:solidFill>
-              </a:rPr>
-              <a:t>SceneGap Edge · Stage I</a:t>
-            </a:r>
-            <a:endParaRPr lang="en-US" sz="1000" dirty="0"/>
-          </a:p>
-        </p:txBody>
-      </p:sp>
-      <p:graphicFrame>
-        <p:nvGraphicFramePr>
-          <p:cNvPr id="27" name="Table 0"/>
-          <p:cNvGraphicFramePr>
-            <a:graphicFrameLocks noGrp="1"/>
-          </p:cNvGraphicFramePr>
-          <p:nvPr>
-            <p:extLst>
-              <p:ext uri="{D42A27DB-BD31-4B8C-83A1-F6EECF244321}">
-                <p14:modId xmlns:p14="http://schemas.microsoft.com/office/powerpoint/2010/main" val="1579011935"/>
-              </p:ext>
-            </p:extLst>
-          </p:nvPr>
-        </p:nvGraphicFramePr>
-        <p:xfrm>
-          <a:off x="640080" y="1600200"/>
-          <a:ext cx="10881360" cy="914400"/>
-        </p:xfrm>
-        <a:graphic>
-          <a:graphicData uri="http://schemas.openxmlformats.org/drawingml/2006/table">
-            <a:tbl>
-              <a:tblPr/>
-              <a:tblGrid>
-                <a:gridCol w="539572"/>
-                <a:gridCol w="5935287"/>
-                <a:gridCol w="2787786"/>
-                <a:gridCol w="1618715"/>
-              </a:tblGrid>
-              <a:tr h="358140">
-                <a:tc>
-                  <a:txBody>
-                    <a:bodyPr/>
-                    <a:lstStyle/>
-                    <a:p>
-                      <a:pPr indent="0" marL="0">
-                        <a:buNone/>
-                      </a:pPr>
-                      <a:r>
-                        <a:rPr lang="en-US" sz="1000" b="1" dirty="0">
-                          <a:solidFill>
-                            <a:srgbClr val="6B7280"/>
-                          </a:solidFill>
-                          <a:latin typeface="Microsoft JhengHei" pitchFamily="34" charset="0"/>
-                          <a:ea typeface="Microsoft JhengHei" pitchFamily="34" charset="-122"/>
-                          <a:cs typeface="Microsoft JhengHei" pitchFamily="34" charset="-120"/>
-                        </a:rPr>
-                        <a:t>#</a:t>
-                      </a:r>
-                      <a:endParaRPr lang="en-US" sz="1000" dirty="0">
-                        <a:latin typeface="Microsoft JhengHei" charset="0"/>
-                        <a:ea typeface="Microsoft JhengHei" charset="0"/>
-                        <a:cs typeface="Microsoft JhengHei" charset="0"/>
-                      </a:endParaRPr>
-                    </a:p>
-                  </a:txBody>
-                  <a:tcPr marL="101600" marR="101600" marT="50800" marB="50800" anchor="ctr">
-                    <a:lnL w="0" cap="flat" cmpd="sng" algn="ctr">
-                      <a:noFill/>
-                    </a:lnL>
-                    <a:lnR w="0" cap="flat" cmpd="sng" algn="ctr">
-                      <a:noFill/>
-                    </a:lnR>
-                    <a:lnT w="0" cap="flat" cmpd="sng" algn="ctr">
-                      <a:noFill/>
-                    </a:lnT>
-                    <a:lnB w="15875" cap="flat" cmpd="sng" algn="ctr">
-                      <a:solidFill>
-                        <a:srgbClr val="111118"/>
-                      </a:solidFill>
-                      <a:prstDash val="solid"/>
-                      <a:round/>
-                      <a:headEnd type="none" w="med" len="med"/>
-                      <a:tailEnd type="none" w="med" len="med"/>
-                    </a:lnB>
-                    <a:solidFill>
-                      <a:srgbClr val="FFFFFF"/>
-                    </a:solidFill>
-                  </a:tcPr>
-                </a:tc>
-                <a:tc>
-                  <a:txBody>
-                    <a:bodyPr/>
-                    <a:lstStyle/>
-                    <a:p>
-                      <a:pPr indent="0" marL="0">
-                        <a:buNone/>
-                      </a:pPr>
-                      <a:r>
-                        <a:rPr lang="en-US" sz="1000" b="1" dirty="0">
-                          <a:solidFill>
-                            <a:srgbClr val="6B7280"/>
-                          </a:solidFill>
-                          <a:latin typeface="Microsoft JhengHei" pitchFamily="34" charset="0"/>
-                          <a:ea typeface="Microsoft JhengHei" pitchFamily="34" charset="-122"/>
-                          <a:cs typeface="Microsoft JhengHei" pitchFamily="34" charset="-120"/>
-                        </a:rPr>
-                        <a:t>WIKIMEDIA COMMONS FILE</a:t>
-                      </a:r>
-                      <a:endParaRPr lang="en-US" sz="1000" dirty="0">
-                        <a:latin typeface="Microsoft JhengHei" charset="0"/>
-                        <a:ea typeface="Microsoft JhengHei" charset="0"/>
-                        <a:cs typeface="Microsoft JhengHei" charset="0"/>
-                      </a:endParaRPr>
-                    </a:p>
-                  </a:txBody>
-                  <a:tcPr marL="101600" marR="101600" marT="50800" marB="50800" anchor="ctr">
-                    <a:lnL w="0" cap="flat" cmpd="sng" algn="ctr">
-                      <a:noFill/>
-                    </a:lnL>
-                    <a:lnR w="0" cap="flat" cmpd="sng" algn="ctr">
-                      <a:noFill/>
-                    </a:lnR>
-                    <a:lnT w="0" cap="flat" cmpd="sng" algn="ctr">
-                      <a:noFill/>
-                    </a:lnT>
-                    <a:lnB w="15875" cap="flat" cmpd="sng" algn="ctr">
-                      <a:solidFill>
-                        <a:srgbClr val="111118"/>
-                      </a:solidFill>
-                      <a:prstDash val="solid"/>
-                      <a:round/>
-                      <a:headEnd type="none" w="med" len="med"/>
-                      <a:tailEnd type="none" w="med" len="med"/>
-                    </a:lnB>
-                    <a:solidFill>
-                      <a:srgbClr val="FFFFFF"/>
-                    </a:solidFill>
-                  </a:tcPr>
-                </a:tc>
-                <a:tc>
-                  <a:txBody>
-                    <a:bodyPr/>
-                    <a:lstStyle/>
-                    <a:p>
-                      <a:pPr indent="0" marL="0">
-                        <a:buNone/>
-                      </a:pPr>
-                      <a:r>
-                        <a:rPr lang="en-US" sz="1000" b="1" dirty="0">
-                          <a:solidFill>
-                            <a:srgbClr val="6B7280"/>
-                          </a:solidFill>
-                          <a:latin typeface="Microsoft JhengHei" pitchFamily="34" charset="0"/>
-                          <a:ea typeface="Microsoft JhengHei" pitchFamily="34" charset="-122"/>
-                          <a:cs typeface="Microsoft JhengHei" pitchFamily="34" charset="-120"/>
-                        </a:rPr>
-                        <a:t>AUTHOR</a:t>
-                      </a:r>
-                      <a:endParaRPr lang="en-US" sz="1000" dirty="0">
-                        <a:latin typeface="Microsoft JhengHei" charset="0"/>
-                        <a:ea typeface="Microsoft JhengHei" charset="0"/>
-                        <a:cs typeface="Microsoft JhengHei" charset="0"/>
-                      </a:endParaRPr>
-                    </a:p>
-                  </a:txBody>
-                  <a:tcPr marL="101600" marR="101600" marT="50800" marB="50800" anchor="ctr">
-                    <a:lnL w="0" cap="flat" cmpd="sng" algn="ctr">
-                      <a:noFill/>
-                    </a:lnL>
-                    <a:lnR w="0" cap="flat" cmpd="sng" algn="ctr">
-                      <a:noFill/>
-                    </a:lnR>
-                    <a:lnT w="0" cap="flat" cmpd="sng" algn="ctr">
-                      <a:noFill/>
-                    </a:lnT>
-                    <a:lnB w="15875" cap="flat" cmpd="sng" algn="ctr">
-                      <a:solidFill>
-                        <a:srgbClr val="111118"/>
-                      </a:solidFill>
-                      <a:prstDash val="solid"/>
-                      <a:round/>
-                      <a:headEnd type="none" w="med" len="med"/>
-                      <a:tailEnd type="none" w="med" len="med"/>
-                    </a:lnB>
-                    <a:solidFill>
-                      <a:srgbClr val="FFFFFF"/>
-                    </a:solidFill>
-                  </a:tcPr>
-                </a:tc>
-                <a:tc>
-                  <a:txBody>
-                    <a:bodyPr/>
-                    <a:lstStyle/>
-                    <a:p>
-                      <a:pPr indent="0" marL="0">
-                        <a:buNone/>
-                      </a:pPr>
-                      <a:r>
-                        <a:rPr lang="en-US" sz="1000" b="1" dirty="0">
-                          <a:solidFill>
-                            <a:srgbClr val="6B7280"/>
-                          </a:solidFill>
-                          <a:latin typeface="Microsoft JhengHei" pitchFamily="34" charset="0"/>
-                          <a:ea typeface="Microsoft JhengHei" pitchFamily="34" charset="-122"/>
-                          <a:cs typeface="Microsoft JhengHei" pitchFamily="34" charset="-120"/>
-                        </a:rPr>
-                        <a:t>LICENCE</a:t>
-                      </a:r>
-                      <a:endParaRPr lang="en-US" sz="1000" dirty="0">
-                        <a:latin typeface="Microsoft JhengHei" charset="0"/>
-                        <a:ea typeface="Microsoft JhengHei" charset="0"/>
-                        <a:cs typeface="Microsoft JhengHei" charset="0"/>
-                      </a:endParaRPr>
-                    </a:p>
-                  </a:txBody>
-                  <a:tcPr marL="101600" marR="101600" marT="50800" marB="50800" anchor="ctr">
-                    <a:lnL w="0" cap="flat" cmpd="sng" algn="ctr">
-                      <a:noFill/>
-                    </a:lnL>
-                    <a:lnR w="0" cap="flat" cmpd="sng" algn="ctr">
-                      <a:noFill/>
-                    </a:lnR>
-                    <a:lnT w="0" cap="flat" cmpd="sng" algn="ctr">
-                      <a:noFill/>
-                    </a:lnT>
-                    <a:lnB w="15875" cap="flat" cmpd="sng" algn="ctr">
-                      <a:solidFill>
-                        <a:srgbClr val="111118"/>
-                      </a:solidFill>
-                      <a:prstDash val="solid"/>
-                      <a:round/>
-                      <a:headEnd type="none" w="med" len="med"/>
-                      <a:tailEnd type="none" w="med" len="med"/>
-                    </a:lnB>
-                    <a:solidFill>
-                      <a:srgbClr val="FFFFFF"/>
-                    </a:solidFill>
-                  </a:tcPr>
-                </a:tc>
-              </a:tr>
-              <a:tr h="358140">
-                <a:tc>
-                  <a:txBody>
-                    <a:bodyPr/>
-                    <a:lstStyle/>
-                    <a:p>
-                      <a:pPr indent="0" marL="0">
-                        <a:buNone/>
-                      </a:pPr>
-                      <a:r>
-                        <a:rPr lang="en-US" sz="900" dirty="0">
-                          <a:solidFill>
-                            <a:srgbClr val="111118"/>
-                          </a:solidFill>
-                          <a:latin typeface="Microsoft JhengHei" pitchFamily="34" charset="0"/>
-                          <a:ea typeface="Microsoft JhengHei" pitchFamily="34" charset="-122"/>
-                          <a:cs typeface="Microsoft JhengHei" pitchFamily="34" charset="-120"/>
-                        </a:rPr>
-                        <a:t>022</a:t>
-                      </a:r>
-                      <a:endParaRPr lang="en-US" sz="900" dirty="0">
-                        <a:latin typeface="Microsoft JhengHei" charset="0"/>
-                        <a:ea typeface="Microsoft JhengHei" charset="0"/>
-                        <a:cs typeface="Microsoft JhengHei" charset="0"/>
-                      </a:endParaRPr>
-                    </a:p>
-                  </a:txBody>
-                  <a:tcPr marL="101600" marR="101600" marT="50800" marB="50800" anchor="ctr">
-                    <a:lnL w="0" cap="flat" cmpd="sng" algn="ctr">
-                      <a:noFill/>
-                    </a:lnL>
-                    <a:lnR w="0" cap="flat" cmpd="sng" algn="ctr">
-                      <a:noFill/>
-                    </a:lnR>
-                    <a:lnT w="0" cap="flat" cmpd="sng" algn="ctr">
-                      <a:noFill/>
-                    </a:lnT>
-                    <a:lnB w="6350" cap="flat" cmpd="sng" algn="ctr">
-                      <a:solidFill>
-                        <a:srgbClr val="E5E7EB"/>
-                      </a:solidFill>
-                      <a:prstDash val="solid"/>
-                      <a:round/>
-                      <a:headEnd type="none" w="med" len="med"/>
-                      <a:tailEnd type="none" w="med" len="med"/>
-                    </a:lnB>
-                    <a:solidFill>
-                      <a:srgbClr val="FFFFFF"/>
-                    </a:solidFill>
-                  </a:tcPr>
-                </a:tc>
-                <a:tc>
-                  <a:txBody>
-                    <a:bodyPr/>
-                    <a:lstStyle/>
-                    <a:p>
-                      <a:pPr indent="0" marL="0">
-                        <a:buNone/>
-                      </a:pPr>
-                      <a:r>
-                        <a:rPr lang="en-US" sz="900" dirty="0">
-                          <a:solidFill>
-                            <a:srgbClr val="111118"/>
-                          </a:solidFill>
-                          <a:latin typeface="Microsoft JhengHei" pitchFamily="34" charset="0"/>
-                          <a:ea typeface="Microsoft JhengHei" pitchFamily="34" charset="-122"/>
-                          <a:cs typeface="Microsoft JhengHei" pitchFamily="34" charset="-120"/>
-                        </a:rPr>
-                        <a:t>Der perfekte Espresso aus dem Siebträger.ogv</a:t>
-                      </a:r>
-                      <a:endParaRPr lang="en-US" sz="900" dirty="0">
-                        <a:latin typeface="Microsoft JhengHei" charset="0"/>
-                        <a:ea typeface="Microsoft JhengHei" charset="0"/>
-                        <a:cs typeface="Microsoft JhengHei" charset="0"/>
-                      </a:endParaRPr>
-                    </a:p>
-                  </a:txBody>
-                  <a:tcPr marL="101600" marR="101600" marT="50800" marB="50800" anchor="ctr">
-                    <a:lnL w="0" cap="flat" cmpd="sng" algn="ctr">
-                      <a:noFill/>
-                    </a:lnL>
-                    <a:lnR w="0" cap="flat" cmpd="sng" algn="ctr">
-                      <a:noFill/>
-                    </a:lnR>
-                    <a:lnT w="0" cap="flat" cmpd="sng" algn="ctr">
-                      <a:noFill/>
-                    </a:lnT>
-                    <a:lnB w="6350" cap="flat" cmpd="sng" algn="ctr">
-                      <a:solidFill>
-                        <a:srgbClr val="E5E7EB"/>
-                      </a:solidFill>
-                      <a:prstDash val="solid"/>
-                      <a:round/>
-                      <a:headEnd type="none" w="med" len="med"/>
-                      <a:tailEnd type="none" w="med" len="med"/>
-                    </a:lnB>
-                    <a:solidFill>
-                      <a:srgbClr val="FFFFFF"/>
-                    </a:solidFill>
-                  </a:tcPr>
-                </a:tc>
-                <a:tc>
-                  <a:txBody>
-                    <a:bodyPr/>
-                    <a:lstStyle/>
-                    <a:p>
-                      <a:pPr indent="0" marL="0">
-                        <a:buNone/>
-                      </a:pPr>
-                      <a:r>
-                        <a:rPr lang="en-US" sz="900" dirty="0">
-                          <a:solidFill>
-                            <a:srgbClr val="111118"/>
-                          </a:solidFill>
-                          <a:latin typeface="Microsoft JhengHei" pitchFamily="34" charset="0"/>
-                          <a:ea typeface="Microsoft JhengHei" pitchFamily="34" charset="-122"/>
-                          <a:cs typeface="Microsoft JhengHei" pitchFamily="34" charset="-120"/>
-                        </a:rPr>
-                        <a:t>Max Duchardt, Katrin Engel</a:t>
-                      </a:r>
-                      <a:endParaRPr lang="en-US" sz="900" dirty="0">
-                        <a:latin typeface="Microsoft JhengHei" charset="0"/>
-                        <a:ea typeface="Microsoft JhengHei" charset="0"/>
-                        <a:cs typeface="Microsoft JhengHei" charset="0"/>
-                      </a:endParaRPr>
-                    </a:p>
-                  </a:txBody>
-                  <a:tcPr marL="101600" marR="101600" marT="50800" marB="50800" anchor="ctr">
-                    <a:lnL w="0" cap="flat" cmpd="sng" algn="ctr">
-                      <a:noFill/>
-                    </a:lnL>
-                    <a:lnR w="0" cap="flat" cmpd="sng" algn="ctr">
-                      <a:noFill/>
-                    </a:lnR>
-                    <a:lnT w="0" cap="flat" cmpd="sng" algn="ctr">
-                      <a:noFill/>
-                    </a:lnT>
-                    <a:lnB w="6350" cap="flat" cmpd="sng" algn="ctr">
-                      <a:solidFill>
-                        <a:srgbClr val="E5E7EB"/>
-                      </a:solidFill>
-                      <a:prstDash val="solid"/>
-                      <a:round/>
-                      <a:headEnd type="none" w="med" len="med"/>
-                      <a:tailEnd type="none" w="med" len="med"/>
-                    </a:lnB>
-                    <a:solidFill>
-                      <a:srgbClr val="FFFFFF"/>
-                    </a:solidFill>
-                  </a:tcPr>
-                </a:tc>
-                <a:tc>
-                  <a:txBody>
-                    <a:bodyPr/>
-                    <a:lstStyle/>
-                    <a:p>
-                      <a:pPr indent="0" marL="0">
-                        <a:buNone/>
-                      </a:pPr>
-                      <a:r>
-                        <a:rPr lang="en-US" sz="900" dirty="0">
-                          <a:solidFill>
-                            <a:srgbClr val="111118"/>
-                          </a:solidFill>
-                          <a:latin typeface="Microsoft JhengHei" pitchFamily="34" charset="0"/>
-                          <a:ea typeface="Microsoft JhengHei" pitchFamily="34" charset="-122"/>
-                          <a:cs typeface="Microsoft JhengHei" pitchFamily="34" charset="-120"/>
-                        </a:rPr>
-                        <a:t>CC BY 3.0</a:t>
-                      </a:r>
-                      <a:endParaRPr lang="en-US" sz="900" dirty="0">
-                        <a:latin typeface="Microsoft JhengHei" charset="0"/>
-                        <a:ea typeface="Microsoft JhengHei" charset="0"/>
-                        <a:cs typeface="Microsoft JhengHei" charset="0"/>
-                      </a:endParaRPr>
-                    </a:p>
-                  </a:txBody>
-                  <a:tcPr marL="101600" marR="101600" marT="50800" marB="50800" anchor="ctr">
-                    <a:lnL w="0" cap="flat" cmpd="sng" algn="ctr">
-                      <a:noFill/>
-                    </a:lnL>
-                    <a:lnR w="0" cap="flat" cmpd="sng" algn="ctr">
-                      <a:noFill/>
-                    </a:lnR>
-                    <a:lnT w="0" cap="flat" cmpd="sng" algn="ctr">
-                      <a:noFill/>
-                    </a:lnT>
-                    <a:lnB w="6350" cap="flat" cmpd="sng" algn="ctr">
-                      <a:solidFill>
-                        <a:srgbClr val="E5E7EB"/>
-                      </a:solidFill>
-                      <a:prstDash val="solid"/>
-                      <a:round/>
-                      <a:headEnd type="none" w="med" len="med"/>
-                      <a:tailEnd type="none" w="med" len="med"/>
-                    </a:lnB>
-                    <a:solidFill>
-                      <a:srgbClr val="FFFFFF"/>
-                    </a:solidFill>
-                  </a:tcPr>
-                </a:tc>
-              </a:tr>
-              <a:tr h="358140">
-                <a:tc>
-                  <a:txBody>
-                    <a:bodyPr/>
-                    <a:lstStyle/>
-                    <a:p>
-                      <a:pPr indent="0" marL="0">
-                        <a:buNone/>
-                      </a:pPr>
-                      <a:r>
-                        <a:rPr lang="en-US" sz="900" dirty="0">
-                          <a:solidFill>
-                            <a:srgbClr val="111118"/>
-                          </a:solidFill>
-                          <a:latin typeface="Microsoft JhengHei" pitchFamily="34" charset="0"/>
-                          <a:ea typeface="Microsoft JhengHei" pitchFamily="34" charset="-122"/>
-                          <a:cs typeface="Microsoft JhengHei" pitchFamily="34" charset="-120"/>
-                        </a:rPr>
-                        <a:t>023</a:t>
-                      </a:r>
-                      <a:endParaRPr lang="en-US" sz="900" dirty="0">
-                        <a:latin typeface="Microsoft JhengHei" charset="0"/>
-                        <a:ea typeface="Microsoft JhengHei" charset="0"/>
-                        <a:cs typeface="Microsoft JhengHei" charset="0"/>
-                      </a:endParaRPr>
-                    </a:p>
-                  </a:txBody>
-                  <a:tcPr marL="101600" marR="101600" marT="50800" marB="50800" anchor="ctr">
-                    <a:lnL w="0" cap="flat" cmpd="sng" algn="ctr">
-                      <a:noFill/>
-                    </a:lnL>
-                    <a:lnR w="0" cap="flat" cmpd="sng" algn="ctr">
-                      <a:noFill/>
-                    </a:lnR>
-                    <a:lnT w="0" cap="flat" cmpd="sng" algn="ctr">
-                      <a:noFill/>
-                    </a:lnT>
-                    <a:lnB w="6350" cap="flat" cmpd="sng" algn="ctr">
-                      <a:solidFill>
-                        <a:srgbClr val="E5E7EB"/>
-                      </a:solidFill>
-                      <a:prstDash val="solid"/>
-                      <a:round/>
-                      <a:headEnd type="none" w="med" len="med"/>
-                      <a:tailEnd type="none" w="med" len="med"/>
-                    </a:lnB>
-                    <a:solidFill>
-                      <a:srgbClr val="FFFFFF"/>
-                    </a:solidFill>
-                  </a:tcPr>
-                </a:tc>
-                <a:tc>
-                  <a:txBody>
-                    <a:bodyPr/>
-                    <a:lstStyle/>
-                    <a:p>
-                      <a:pPr indent="0" marL="0">
-                        <a:buNone/>
-                      </a:pPr>
-                      <a:r>
-                        <a:rPr lang="en-US" sz="900" dirty="0">
-                          <a:solidFill>
-                            <a:srgbClr val="111118"/>
-                          </a:solidFill>
-                          <a:latin typeface="Microsoft JhengHei" pitchFamily="34" charset="0"/>
-                          <a:ea typeface="Microsoft JhengHei" pitchFamily="34" charset="-122"/>
-                          <a:cs typeface="Microsoft JhengHei" pitchFamily="34" charset="-120"/>
-                        </a:rPr>
-                        <a:t>Pour Over.ogv</a:t>
-                      </a:r>
-                      <a:endParaRPr lang="en-US" sz="900" dirty="0">
-                        <a:latin typeface="Microsoft JhengHei" charset="0"/>
-                        <a:ea typeface="Microsoft JhengHei" charset="0"/>
-                        <a:cs typeface="Microsoft JhengHei" charset="0"/>
-                      </a:endParaRPr>
-                    </a:p>
-                  </a:txBody>
-                  <a:tcPr marL="101600" marR="101600" marT="50800" marB="50800" anchor="ctr">
-                    <a:lnL w="0" cap="flat" cmpd="sng" algn="ctr">
-                      <a:noFill/>
-                    </a:lnL>
-                    <a:lnR w="0" cap="flat" cmpd="sng" algn="ctr">
-                      <a:noFill/>
-                    </a:lnR>
-                    <a:lnT w="0" cap="flat" cmpd="sng" algn="ctr">
-                      <a:noFill/>
-                    </a:lnT>
-                    <a:lnB w="6350" cap="flat" cmpd="sng" algn="ctr">
-                      <a:solidFill>
-                        <a:srgbClr val="E5E7EB"/>
-                      </a:solidFill>
-                      <a:prstDash val="solid"/>
-                      <a:round/>
-                      <a:headEnd type="none" w="med" len="med"/>
-                      <a:tailEnd type="none" w="med" len="med"/>
-                    </a:lnB>
-                    <a:solidFill>
-                      <a:srgbClr val="FFFFFF"/>
-                    </a:solidFill>
-                  </a:tcPr>
-                </a:tc>
-                <a:tc>
-                  <a:txBody>
-                    <a:bodyPr/>
-                    <a:lstStyle/>
-                    <a:p>
-                      <a:pPr indent="0" marL="0">
-                        <a:buNone/>
-                      </a:pPr>
-                      <a:r>
-                        <a:rPr lang="en-US" sz="900" dirty="0">
-                          <a:solidFill>
-                            <a:srgbClr val="111118"/>
-                          </a:solidFill>
-                          <a:latin typeface="Microsoft JhengHei" pitchFamily="34" charset="0"/>
-                          <a:ea typeface="Microsoft JhengHei" pitchFamily="34" charset="-122"/>
-                          <a:cs typeface="Microsoft JhengHei" pitchFamily="34" charset="-120"/>
-                        </a:rPr>
-                        <a:t>Lev Lazinskiy</a:t>
-                      </a:r>
-                      <a:endParaRPr lang="en-US" sz="900" dirty="0">
-                        <a:latin typeface="Microsoft JhengHei" charset="0"/>
-                        <a:ea typeface="Microsoft JhengHei" charset="0"/>
-                        <a:cs typeface="Microsoft JhengHei" charset="0"/>
-                      </a:endParaRPr>
-                    </a:p>
-                  </a:txBody>
-                  <a:tcPr marL="101600" marR="101600" marT="50800" marB="50800" anchor="ctr">
-                    <a:lnL w="0" cap="flat" cmpd="sng" algn="ctr">
-                      <a:noFill/>
-                    </a:lnL>
-                    <a:lnR w="0" cap="flat" cmpd="sng" algn="ctr">
-                      <a:noFill/>
-                    </a:lnR>
-                    <a:lnT w="0" cap="flat" cmpd="sng" algn="ctr">
-                      <a:noFill/>
-                    </a:lnT>
-                    <a:lnB w="6350" cap="flat" cmpd="sng" algn="ctr">
-                      <a:solidFill>
-                        <a:srgbClr val="E5E7EB"/>
-                      </a:solidFill>
-                      <a:prstDash val="solid"/>
-                      <a:round/>
-                      <a:headEnd type="none" w="med" len="med"/>
-                      <a:tailEnd type="none" w="med" len="med"/>
-                    </a:lnB>
-                    <a:solidFill>
-                      <a:srgbClr val="FFFFFF"/>
-                    </a:solidFill>
-                  </a:tcPr>
-                </a:tc>
-                <a:tc>
-                  <a:txBody>
-                    <a:bodyPr/>
-                    <a:lstStyle/>
-                    <a:p>
-                      <a:pPr indent="0" marL="0">
-                        <a:buNone/>
-                      </a:pPr>
-                      <a:r>
-                        <a:rPr lang="en-US" sz="900" dirty="0">
-                          <a:solidFill>
-                            <a:srgbClr val="111118"/>
-                          </a:solidFill>
-                          <a:latin typeface="Microsoft JhengHei" pitchFamily="34" charset="0"/>
-                          <a:ea typeface="Microsoft JhengHei" pitchFamily="34" charset="-122"/>
-                          <a:cs typeface="Microsoft JhengHei" pitchFamily="34" charset="-120"/>
-                        </a:rPr>
-                        <a:t>CC BY-SA 4.0</a:t>
-                      </a:r>
-                      <a:endParaRPr lang="en-US" sz="900" dirty="0">
-                        <a:latin typeface="Microsoft JhengHei" charset="0"/>
-                        <a:ea typeface="Microsoft JhengHei" charset="0"/>
-                        <a:cs typeface="Microsoft JhengHei" charset="0"/>
-                      </a:endParaRPr>
-                    </a:p>
-                  </a:txBody>
-                  <a:tcPr marL="101600" marR="101600" marT="50800" marB="50800" anchor="ctr">
-                    <a:lnL w="0" cap="flat" cmpd="sng" algn="ctr">
-                      <a:noFill/>
-                    </a:lnL>
-                    <a:lnR w="0" cap="flat" cmpd="sng" algn="ctr">
-                      <a:noFill/>
-                    </a:lnR>
-                    <a:lnT w="0" cap="flat" cmpd="sng" algn="ctr">
-                      <a:noFill/>
-                    </a:lnT>
-                    <a:lnB w="6350" cap="flat" cmpd="sng" algn="ctr">
-                      <a:solidFill>
-                        <a:srgbClr val="E5E7EB"/>
-                      </a:solidFill>
-                      <a:prstDash val="solid"/>
-                      <a:round/>
-                      <a:headEnd type="none" w="med" len="med"/>
-                      <a:tailEnd type="none" w="med" len="med"/>
-                    </a:lnB>
-                    <a:solidFill>
-                      <a:srgbClr val="FFFFFF"/>
-                    </a:solidFill>
-                  </a:tcPr>
-                </a:tc>
-              </a:tr>
-              <a:tr h="358140">
-                <a:tc>
-                  <a:txBody>
-                    <a:bodyPr/>
-                    <a:lstStyle/>
-                    <a:p>
-                      <a:pPr indent="0" marL="0">
-                        <a:buNone/>
-                      </a:pPr>
-                      <a:r>
-                        <a:rPr lang="en-US" sz="900" dirty="0">
-                          <a:solidFill>
-                            <a:srgbClr val="111118"/>
-                          </a:solidFill>
-                          <a:latin typeface="Microsoft JhengHei" pitchFamily="34" charset="0"/>
-                          <a:ea typeface="Microsoft JhengHei" pitchFamily="34" charset="-122"/>
-                          <a:cs typeface="Microsoft JhengHei" pitchFamily="34" charset="-120"/>
-                        </a:rPr>
-                        <a:t>024</a:t>
-                      </a:r>
-                      <a:endParaRPr lang="en-US" sz="900" dirty="0">
-                        <a:latin typeface="Microsoft JhengHei" charset="0"/>
-                        <a:ea typeface="Microsoft JhengHei" charset="0"/>
-                        <a:cs typeface="Microsoft JhengHei" charset="0"/>
-                      </a:endParaRPr>
-                    </a:p>
-                  </a:txBody>
-                  <a:tcPr marL="101600" marR="101600" marT="50800" marB="50800" anchor="ctr">
-                    <a:lnL w="0" cap="flat" cmpd="sng" algn="ctr">
-                      <a:noFill/>
-                    </a:lnL>
-                    <a:lnR w="0" cap="flat" cmpd="sng" algn="ctr">
-                      <a:noFill/>
-                    </a:lnR>
-                    <a:lnT w="0" cap="flat" cmpd="sng" algn="ctr">
-                      <a:noFill/>
-                    </a:lnT>
-                    <a:lnB w="6350" cap="flat" cmpd="sng" algn="ctr">
-                      <a:solidFill>
-                        <a:srgbClr val="E5E7EB"/>
-                      </a:solidFill>
-                      <a:prstDash val="solid"/>
-                      <a:round/>
-                      <a:headEnd type="none" w="med" len="med"/>
-                      <a:tailEnd type="none" w="med" len="med"/>
-                    </a:lnB>
-                    <a:solidFill>
-                      <a:srgbClr val="FFFFFF"/>
-                    </a:solidFill>
-                  </a:tcPr>
-                </a:tc>
-                <a:tc>
-                  <a:txBody>
-                    <a:bodyPr/>
-                    <a:lstStyle/>
-                    <a:p>
-                      <a:pPr indent="0" marL="0">
-                        <a:buNone/>
-                      </a:pPr>
-                      <a:r>
-                        <a:rPr lang="en-US" sz="900" dirty="0">
-                          <a:solidFill>
-                            <a:srgbClr val="111118"/>
-                          </a:solidFill>
-                          <a:latin typeface="Microsoft JhengHei" pitchFamily="34" charset="0"/>
-                          <a:ea typeface="Microsoft JhengHei" pitchFamily="34" charset="-122"/>
-                          <a:cs typeface="Microsoft JhengHei" pitchFamily="34" charset="-120"/>
-                        </a:rPr>
-                        <a:t>Use of a coffee press.ogv</a:t>
-                      </a:r>
-                      <a:endParaRPr lang="en-US" sz="900" dirty="0">
-                        <a:latin typeface="Microsoft JhengHei" charset="0"/>
-                        <a:ea typeface="Microsoft JhengHei" charset="0"/>
-                        <a:cs typeface="Microsoft JhengHei" charset="0"/>
-                      </a:endParaRPr>
-                    </a:p>
-                  </a:txBody>
-                  <a:tcPr marL="101600" marR="101600" marT="50800" marB="50800" anchor="ctr">
-                    <a:lnL w="0" cap="flat" cmpd="sng" algn="ctr">
-                      <a:noFill/>
-                    </a:lnL>
-                    <a:lnR w="0" cap="flat" cmpd="sng" algn="ctr">
-                      <a:noFill/>
-                    </a:lnR>
-                    <a:lnT w="0" cap="flat" cmpd="sng" algn="ctr">
-                      <a:noFill/>
-                    </a:lnT>
-                    <a:lnB w="6350" cap="flat" cmpd="sng" algn="ctr">
-                      <a:solidFill>
-                        <a:srgbClr val="E5E7EB"/>
-                      </a:solidFill>
-                      <a:prstDash val="solid"/>
-                      <a:round/>
-                      <a:headEnd type="none" w="med" len="med"/>
-                      <a:tailEnd type="none" w="med" len="med"/>
-                    </a:lnB>
-                    <a:solidFill>
-                      <a:srgbClr val="FFFFFF"/>
-                    </a:solidFill>
-                  </a:tcPr>
-                </a:tc>
-                <a:tc>
-                  <a:txBody>
-                    <a:bodyPr/>
-                    <a:lstStyle/>
-                    <a:p>
-                      <a:pPr indent="0" marL="0">
-                        <a:buNone/>
-                      </a:pPr>
-                      <a:r>
-                        <a:rPr lang="en-US" sz="900" dirty="0">
-                          <a:solidFill>
-                            <a:srgbClr val="111118"/>
-                          </a:solidFill>
-                          <a:latin typeface="Microsoft JhengHei" pitchFamily="34" charset="0"/>
-                          <a:ea typeface="Microsoft JhengHei" pitchFamily="34" charset="-122"/>
-                          <a:cs typeface="Microsoft JhengHei" pitchFamily="34" charset="-120"/>
-                        </a:rPr>
-                        <a:t>Daniel Case</a:t>
-                      </a:r>
-                      <a:endParaRPr lang="en-US" sz="900" dirty="0">
-                        <a:latin typeface="Microsoft JhengHei" charset="0"/>
-                        <a:ea typeface="Microsoft JhengHei" charset="0"/>
-                        <a:cs typeface="Microsoft JhengHei" charset="0"/>
-                      </a:endParaRPr>
-                    </a:p>
-                  </a:txBody>
-                  <a:tcPr marL="101600" marR="101600" marT="50800" marB="50800" anchor="ctr">
-                    <a:lnL w="0" cap="flat" cmpd="sng" algn="ctr">
-                      <a:noFill/>
-                    </a:lnL>
-                    <a:lnR w="0" cap="flat" cmpd="sng" algn="ctr">
-                      <a:noFill/>
-                    </a:lnR>
-                    <a:lnT w="0" cap="flat" cmpd="sng" algn="ctr">
-                      <a:noFill/>
-                    </a:lnT>
-                    <a:lnB w="6350" cap="flat" cmpd="sng" algn="ctr">
-                      <a:solidFill>
-                        <a:srgbClr val="E5E7EB"/>
-                      </a:solidFill>
-                      <a:prstDash val="solid"/>
-                      <a:round/>
-                      <a:headEnd type="none" w="med" len="med"/>
-                      <a:tailEnd type="none" w="med" len="med"/>
-                    </a:lnB>
-                    <a:solidFill>
-                      <a:srgbClr val="FFFFFF"/>
-                    </a:solidFill>
-                  </a:tcPr>
-                </a:tc>
-                <a:tc>
-                  <a:txBody>
-                    <a:bodyPr/>
-                    <a:lstStyle/>
-                    <a:p>
-                      <a:pPr indent="0" marL="0">
-                        <a:buNone/>
-                      </a:pPr>
-                      <a:r>
-                        <a:rPr lang="en-US" sz="900" dirty="0">
-                          <a:solidFill>
-                            <a:srgbClr val="111118"/>
-                          </a:solidFill>
-                          <a:latin typeface="Microsoft JhengHei" pitchFamily="34" charset="0"/>
-                          <a:ea typeface="Microsoft JhengHei" pitchFamily="34" charset="-122"/>
-                          <a:cs typeface="Microsoft JhengHei" pitchFamily="34" charset="-120"/>
-                        </a:rPr>
-                        <a:t>CC BY-SA 3.0</a:t>
-                      </a:r>
-                      <a:endParaRPr lang="en-US" sz="900" dirty="0">
-                        <a:latin typeface="Microsoft JhengHei" charset="0"/>
-                        <a:ea typeface="Microsoft JhengHei" charset="0"/>
-                        <a:cs typeface="Microsoft JhengHei" charset="0"/>
-                      </a:endParaRPr>
-                    </a:p>
-                  </a:txBody>
-                  <a:tcPr marL="101600" marR="101600" marT="50800" marB="50800" anchor="ctr">
-                    <a:lnL w="0" cap="flat" cmpd="sng" algn="ctr">
-                      <a:noFill/>
-                    </a:lnL>
-                    <a:lnR w="0" cap="flat" cmpd="sng" algn="ctr">
-                      <a:noFill/>
-                    </a:lnR>
-                    <a:lnT w="0" cap="flat" cmpd="sng" algn="ctr">
-                      <a:noFill/>
-                    </a:lnT>
-                    <a:lnB w="6350" cap="flat" cmpd="sng" algn="ctr">
-                      <a:solidFill>
-                        <a:srgbClr val="E5E7EB"/>
-                      </a:solidFill>
-                      <a:prstDash val="solid"/>
-                      <a:round/>
-                      <a:headEnd type="none" w="med" len="med"/>
-                      <a:tailEnd type="none" w="med" len="med"/>
-                    </a:lnB>
-                    <a:solidFill>
-                      <a:srgbClr val="FFFFFF"/>
-                    </a:solidFill>
-                  </a:tcPr>
-                </a:tc>
-              </a:tr>
-              <a:tr h="358140">
-                <a:tc>
-                  <a:txBody>
-                    <a:bodyPr/>
-                    <a:lstStyle/>
-                    <a:p>
-                      <a:pPr indent="0" marL="0">
-                        <a:buNone/>
-                      </a:pPr>
-                      <a:r>
-                        <a:rPr lang="en-US" sz="900" dirty="0">
-                          <a:solidFill>
-                            <a:srgbClr val="111118"/>
-                          </a:solidFill>
-                          <a:latin typeface="Microsoft JhengHei" pitchFamily="34" charset="0"/>
-                          <a:ea typeface="Microsoft JhengHei" pitchFamily="34" charset="-122"/>
-                          <a:cs typeface="Microsoft JhengHei" pitchFamily="34" charset="-120"/>
-                        </a:rPr>
-                        <a:t>025</a:t>
-                      </a:r>
-                      <a:endParaRPr lang="en-US" sz="900" dirty="0">
-                        <a:latin typeface="Microsoft JhengHei" charset="0"/>
-                        <a:ea typeface="Microsoft JhengHei" charset="0"/>
-                        <a:cs typeface="Microsoft JhengHei" charset="0"/>
-                      </a:endParaRPr>
-                    </a:p>
-                  </a:txBody>
-                  <a:tcPr marL="101600" marR="101600" marT="50800" marB="50800" anchor="ctr">
-                    <a:lnL w="0" cap="flat" cmpd="sng" algn="ctr">
-                      <a:noFill/>
-                    </a:lnL>
-                    <a:lnR w="0" cap="flat" cmpd="sng" algn="ctr">
-                      <a:noFill/>
-                    </a:lnR>
-                    <a:lnT w="0" cap="flat" cmpd="sng" algn="ctr">
-                      <a:noFill/>
-                    </a:lnT>
-                    <a:lnB w="6350" cap="flat" cmpd="sng" algn="ctr">
-                      <a:solidFill>
-                        <a:srgbClr val="E5E7EB"/>
-                      </a:solidFill>
-                      <a:prstDash val="solid"/>
-                      <a:round/>
-                      <a:headEnd type="none" w="med" len="med"/>
-                      <a:tailEnd type="none" w="med" len="med"/>
-                    </a:lnB>
-                    <a:solidFill>
-                      <a:srgbClr val="FFFFFF"/>
-                    </a:solidFill>
-                  </a:tcPr>
-                </a:tc>
-                <a:tc>
-                  <a:txBody>
-                    <a:bodyPr/>
-                    <a:lstStyle/>
-                    <a:p>
-                      <a:pPr indent="0" marL="0">
-                        <a:buNone/>
-                      </a:pPr>
-                      <a:r>
-                        <a:rPr lang="en-US" sz="900" dirty="0">
-                          <a:solidFill>
-                            <a:srgbClr val="111118"/>
-                          </a:solidFill>
-                          <a:latin typeface="Microsoft JhengHei" pitchFamily="34" charset="0"/>
-                          <a:ea typeface="Microsoft JhengHei" pitchFamily="34" charset="-122"/>
-                          <a:cs typeface="Microsoft JhengHei" pitchFamily="34" charset="-120"/>
-                        </a:rPr>
-                        <a:t>Schritt für Schritt - Kaffeezubereitung mit der Chemex.ogv</a:t>
-                      </a:r>
-                      <a:endParaRPr lang="en-US" sz="900" dirty="0">
-                        <a:latin typeface="Microsoft JhengHei" charset="0"/>
-                        <a:ea typeface="Microsoft JhengHei" charset="0"/>
-                        <a:cs typeface="Microsoft JhengHei" charset="0"/>
-                      </a:endParaRPr>
-                    </a:p>
-                  </a:txBody>
-                  <a:tcPr marL="101600" marR="101600" marT="50800" marB="50800" anchor="ctr">
-                    <a:lnL w="0" cap="flat" cmpd="sng" algn="ctr">
-                      <a:noFill/>
-                    </a:lnL>
-                    <a:lnR w="0" cap="flat" cmpd="sng" algn="ctr">
-                      <a:noFill/>
-                    </a:lnR>
-                    <a:lnT w="0" cap="flat" cmpd="sng" algn="ctr">
-                      <a:noFill/>
-                    </a:lnT>
-                    <a:lnB w="6350" cap="flat" cmpd="sng" algn="ctr">
-                      <a:solidFill>
-                        <a:srgbClr val="E5E7EB"/>
-                      </a:solidFill>
-                      <a:prstDash val="solid"/>
-                      <a:round/>
-                      <a:headEnd type="none" w="med" len="med"/>
-                      <a:tailEnd type="none" w="med" len="med"/>
-                    </a:lnB>
-                    <a:solidFill>
-                      <a:srgbClr val="FFFFFF"/>
-                    </a:solidFill>
-                  </a:tcPr>
-                </a:tc>
-                <a:tc>
-                  <a:txBody>
-                    <a:bodyPr/>
-                    <a:lstStyle/>
-                    <a:p>
-                      <a:pPr indent="0" marL="0">
-                        <a:buNone/>
-                      </a:pPr>
-                      <a:r>
-                        <a:rPr lang="en-US" sz="900" dirty="0">
-                          <a:solidFill>
-                            <a:srgbClr val="111118"/>
-                          </a:solidFill>
-                          <a:latin typeface="Microsoft JhengHei" pitchFamily="34" charset="0"/>
-                          <a:ea typeface="Microsoft JhengHei" pitchFamily="34" charset="-122"/>
-                          <a:cs typeface="Microsoft JhengHei" pitchFamily="34" charset="-120"/>
-                        </a:rPr>
-                        <a:t>Max Duchardt, Katrin Engel</a:t>
-                      </a:r>
-                      <a:endParaRPr lang="en-US" sz="900" dirty="0">
-                        <a:latin typeface="Microsoft JhengHei" charset="0"/>
-                        <a:ea typeface="Microsoft JhengHei" charset="0"/>
-                        <a:cs typeface="Microsoft JhengHei" charset="0"/>
-                      </a:endParaRPr>
-                    </a:p>
-                  </a:txBody>
-                  <a:tcPr marL="101600" marR="101600" marT="50800" marB="50800" anchor="ctr">
-                    <a:lnL w="0" cap="flat" cmpd="sng" algn="ctr">
-                      <a:noFill/>
-                    </a:lnL>
-                    <a:lnR w="0" cap="flat" cmpd="sng" algn="ctr">
-                      <a:noFill/>
-                    </a:lnR>
-                    <a:lnT w="0" cap="flat" cmpd="sng" algn="ctr">
-                      <a:noFill/>
-                    </a:lnT>
-                    <a:lnB w="6350" cap="flat" cmpd="sng" algn="ctr">
-                      <a:solidFill>
-                        <a:srgbClr val="E5E7EB"/>
-                      </a:solidFill>
-                      <a:prstDash val="solid"/>
-                      <a:round/>
-                      <a:headEnd type="none" w="med" len="med"/>
-                      <a:tailEnd type="none" w="med" len="med"/>
-                    </a:lnB>
-                    <a:solidFill>
-                      <a:srgbClr val="FFFFFF"/>
-                    </a:solidFill>
-                  </a:tcPr>
-                </a:tc>
-                <a:tc>
-                  <a:txBody>
-                    <a:bodyPr/>
-                    <a:lstStyle/>
-                    <a:p>
-                      <a:pPr indent="0" marL="0">
-                        <a:buNone/>
-                      </a:pPr>
-                      <a:r>
-                        <a:rPr lang="en-US" sz="900" dirty="0">
-                          <a:solidFill>
-                            <a:srgbClr val="111118"/>
-                          </a:solidFill>
-                          <a:latin typeface="Microsoft JhengHei" pitchFamily="34" charset="0"/>
-                          <a:ea typeface="Microsoft JhengHei" pitchFamily="34" charset="-122"/>
-                          <a:cs typeface="Microsoft JhengHei" pitchFamily="34" charset="-120"/>
-                        </a:rPr>
-                        <a:t>CC BY 3.0</a:t>
-                      </a:r>
-                      <a:endParaRPr lang="en-US" sz="900" dirty="0">
-                        <a:latin typeface="Microsoft JhengHei" charset="0"/>
-                        <a:ea typeface="Microsoft JhengHei" charset="0"/>
-                        <a:cs typeface="Microsoft JhengHei" charset="0"/>
-                      </a:endParaRPr>
-                    </a:p>
-                  </a:txBody>
-                  <a:tcPr marL="101600" marR="101600" marT="50800" marB="50800" anchor="ctr">
-                    <a:lnL w="0" cap="flat" cmpd="sng" algn="ctr">
-                      <a:noFill/>
-                    </a:lnL>
-                    <a:lnR w="0" cap="flat" cmpd="sng" algn="ctr">
-                      <a:noFill/>
-                    </a:lnR>
-                    <a:lnT w="0" cap="flat" cmpd="sng" algn="ctr">
-                      <a:noFill/>
-                    </a:lnT>
-                    <a:lnB w="6350" cap="flat" cmpd="sng" algn="ctr">
-                      <a:solidFill>
-                        <a:srgbClr val="E5E7EB"/>
-                      </a:solidFill>
-                      <a:prstDash val="solid"/>
-                      <a:round/>
-                      <a:headEnd type="none" w="med" len="med"/>
-                      <a:tailEnd type="none" w="med" len="med"/>
-                    </a:lnB>
-                    <a:solidFill>
-                      <a:srgbClr val="FFFFFF"/>
-                    </a:solidFill>
-                  </a:tcPr>
-                </a:tc>
-              </a:tr>
-              <a:tr h="358140">
-                <a:tc>
-                  <a:txBody>
-                    <a:bodyPr/>
-                    <a:lstStyle/>
-                    <a:p>
-                      <a:pPr indent="0" marL="0">
-                        <a:buNone/>
-                      </a:pPr>
-                      <a:r>
-                        <a:rPr lang="en-US" sz="900" dirty="0">
-                          <a:solidFill>
-                            <a:srgbClr val="111118"/>
-                          </a:solidFill>
-                          <a:latin typeface="Microsoft JhengHei" pitchFamily="34" charset="0"/>
-                          <a:ea typeface="Microsoft JhengHei" pitchFamily="34" charset="-122"/>
-                          <a:cs typeface="Microsoft JhengHei" pitchFamily="34" charset="-120"/>
-                        </a:rPr>
-                        <a:t>026</a:t>
-                      </a:r>
-                      <a:endParaRPr lang="en-US" sz="900" dirty="0">
-                        <a:latin typeface="Microsoft JhengHei" charset="0"/>
-                        <a:ea typeface="Microsoft JhengHei" charset="0"/>
-                        <a:cs typeface="Microsoft JhengHei" charset="0"/>
-                      </a:endParaRPr>
-                    </a:p>
-                  </a:txBody>
-                  <a:tcPr marL="101600" marR="101600" marT="50800" marB="50800" anchor="ctr">
-                    <a:lnL w="0" cap="flat" cmpd="sng" algn="ctr">
-                      <a:noFill/>
-                    </a:lnL>
-                    <a:lnR w="0" cap="flat" cmpd="sng" algn="ctr">
-                      <a:noFill/>
-                    </a:lnR>
-                    <a:lnT w="0" cap="flat" cmpd="sng" algn="ctr">
-                      <a:noFill/>
-                    </a:lnT>
-                    <a:lnB w="6350" cap="flat" cmpd="sng" algn="ctr">
-                      <a:solidFill>
-                        <a:srgbClr val="E5E7EB"/>
-                      </a:solidFill>
-                      <a:prstDash val="solid"/>
-                      <a:round/>
-                      <a:headEnd type="none" w="med" len="med"/>
-                      <a:tailEnd type="none" w="med" len="med"/>
-                    </a:lnB>
-                    <a:solidFill>
-                      <a:srgbClr val="FFFFFF"/>
-                    </a:solidFill>
-                  </a:tcPr>
-                </a:tc>
-                <a:tc>
-                  <a:txBody>
-                    <a:bodyPr/>
-                    <a:lstStyle/>
-                    <a:p>
-                      <a:pPr indent="0" marL="0">
-                        <a:buNone/>
-                      </a:pPr>
-                      <a:r>
-                        <a:rPr lang="en-US" sz="900" dirty="0">
-                          <a:solidFill>
-                            <a:srgbClr val="111118"/>
-                          </a:solidFill>
-                          <a:latin typeface="Microsoft JhengHei" pitchFamily="34" charset="0"/>
-                          <a:ea typeface="Microsoft JhengHei" pitchFamily="34" charset="-122"/>
-                          <a:cs typeface="Microsoft JhengHei" pitchFamily="34" charset="-120"/>
-                        </a:rPr>
-                        <a:t>Latte art flower - 01.ogv</a:t>
-                      </a:r>
-                      <a:endParaRPr lang="en-US" sz="900" dirty="0">
-                        <a:latin typeface="Microsoft JhengHei" charset="0"/>
-                        <a:ea typeface="Microsoft JhengHei" charset="0"/>
-                        <a:cs typeface="Microsoft JhengHei" charset="0"/>
-                      </a:endParaRPr>
-                    </a:p>
-                  </a:txBody>
-                  <a:tcPr marL="101600" marR="101600" marT="50800" marB="50800" anchor="ctr">
-                    <a:lnL w="0" cap="flat" cmpd="sng" algn="ctr">
-                      <a:noFill/>
-                    </a:lnL>
-                    <a:lnR w="0" cap="flat" cmpd="sng" algn="ctr">
-                      <a:noFill/>
-                    </a:lnR>
-                    <a:lnT w="0" cap="flat" cmpd="sng" algn="ctr">
-                      <a:noFill/>
-                    </a:lnT>
-                    <a:lnB w="6350" cap="flat" cmpd="sng" algn="ctr">
-                      <a:solidFill>
-                        <a:srgbClr val="E5E7EB"/>
-                      </a:solidFill>
-                      <a:prstDash val="solid"/>
-                      <a:round/>
-                      <a:headEnd type="none" w="med" len="med"/>
-                      <a:tailEnd type="none" w="med" len="med"/>
-                    </a:lnB>
-                    <a:solidFill>
-                      <a:srgbClr val="FFFFFF"/>
-                    </a:solidFill>
-                  </a:tcPr>
-                </a:tc>
-                <a:tc>
-                  <a:txBody>
-                    <a:bodyPr/>
-                    <a:lstStyle/>
-                    <a:p>
-                      <a:pPr indent="0" marL="0">
-                        <a:buNone/>
-                      </a:pPr>
-                      <a:r>
-                        <a:rPr lang="en-US" sz="900" dirty="0">
-                          <a:solidFill>
-                            <a:srgbClr val="111118"/>
-                          </a:solidFill>
-                          <a:latin typeface="Microsoft JhengHei" pitchFamily="34" charset="0"/>
-                          <a:ea typeface="Microsoft JhengHei" pitchFamily="34" charset="-122"/>
-                          <a:cs typeface="Microsoft JhengHei" pitchFamily="34" charset="-120"/>
-                        </a:rPr>
-                        <a:t>Anna Frodesiak</a:t>
-                      </a:r>
-                      <a:endParaRPr lang="en-US" sz="900" dirty="0">
-                        <a:latin typeface="Microsoft JhengHei" charset="0"/>
-                        <a:ea typeface="Microsoft JhengHei" charset="0"/>
-                        <a:cs typeface="Microsoft JhengHei" charset="0"/>
-                      </a:endParaRPr>
-                    </a:p>
-                  </a:txBody>
-                  <a:tcPr marL="101600" marR="101600" marT="50800" marB="50800" anchor="ctr">
-                    <a:lnL w="0" cap="flat" cmpd="sng" algn="ctr">
-                      <a:noFill/>
-                    </a:lnL>
-                    <a:lnR w="0" cap="flat" cmpd="sng" algn="ctr">
-                      <a:noFill/>
-                    </a:lnR>
-                    <a:lnT w="0" cap="flat" cmpd="sng" algn="ctr">
-                      <a:noFill/>
-                    </a:lnT>
-                    <a:lnB w="6350" cap="flat" cmpd="sng" algn="ctr">
-                      <a:solidFill>
-                        <a:srgbClr val="E5E7EB"/>
-                      </a:solidFill>
-                      <a:prstDash val="solid"/>
-                      <a:round/>
-                      <a:headEnd type="none" w="med" len="med"/>
-                      <a:tailEnd type="none" w="med" len="med"/>
-                    </a:lnB>
-                    <a:solidFill>
-                      <a:srgbClr val="FFFFFF"/>
-                    </a:solidFill>
-                  </a:tcPr>
-                </a:tc>
-                <a:tc>
-                  <a:txBody>
-                    <a:bodyPr/>
-                    <a:lstStyle/>
-                    <a:p>
-                      <a:pPr indent="0" marL="0">
-                        <a:buNone/>
-                      </a:pPr>
-                      <a:r>
-                        <a:rPr lang="en-US" sz="900" dirty="0">
-                          <a:solidFill>
-                            <a:srgbClr val="111118"/>
-                          </a:solidFill>
-                          <a:latin typeface="Microsoft JhengHei" pitchFamily="34" charset="0"/>
-                          <a:ea typeface="Microsoft JhengHei" pitchFamily="34" charset="-122"/>
-                          <a:cs typeface="Microsoft JhengHei" pitchFamily="34" charset="-120"/>
-                        </a:rPr>
-                        <a:t>CC0</a:t>
-                      </a:r>
-                      <a:endParaRPr lang="en-US" sz="900" dirty="0">
-                        <a:latin typeface="Microsoft JhengHei" charset="0"/>
-                        <a:ea typeface="Microsoft JhengHei" charset="0"/>
-                        <a:cs typeface="Microsoft JhengHei" charset="0"/>
-                      </a:endParaRPr>
-                    </a:p>
-                  </a:txBody>
-                  <a:tcPr marL="101600" marR="101600" marT="50800" marB="50800" anchor="ctr">
-                    <a:lnL w="0" cap="flat" cmpd="sng" algn="ctr">
-                      <a:noFill/>
-                    </a:lnL>
-                    <a:lnR w="0" cap="flat" cmpd="sng" algn="ctr">
-                      <a:noFill/>
-                    </a:lnR>
-                    <a:lnT w="0" cap="flat" cmpd="sng" algn="ctr">
-                      <a:noFill/>
-                    </a:lnT>
-                    <a:lnB w="6350" cap="flat" cmpd="sng" algn="ctr">
-                      <a:solidFill>
-                        <a:srgbClr val="E5E7EB"/>
-                      </a:solidFill>
-                      <a:prstDash val="solid"/>
-                      <a:round/>
-                      <a:headEnd type="none" w="med" len="med"/>
-                      <a:tailEnd type="none" w="med" len="med"/>
-                    </a:lnB>
-                    <a:solidFill>
-                      <a:srgbClr val="FFFFFF"/>
-                    </a:solidFill>
-                  </a:tcPr>
-                </a:tc>
-              </a:tr>
-              <a:tr h="358140">
-                <a:tc>
-                  <a:txBody>
-                    <a:bodyPr/>
-                    <a:lstStyle/>
-                    <a:p>
-                      <a:pPr indent="0" marL="0">
-                        <a:buNone/>
-                      </a:pPr>
-                      <a:r>
-                        <a:rPr lang="en-US" sz="900" dirty="0">
-                          <a:solidFill>
-                            <a:srgbClr val="111118"/>
-                          </a:solidFill>
-                          <a:latin typeface="Microsoft JhengHei" pitchFamily="34" charset="0"/>
-                          <a:ea typeface="Microsoft JhengHei" pitchFamily="34" charset="-122"/>
-                          <a:cs typeface="Microsoft JhengHei" pitchFamily="34" charset="-120"/>
-                        </a:rPr>
-                        <a:t>027</a:t>
-                      </a:r>
-                      <a:endParaRPr lang="en-US" sz="900" dirty="0">
-                        <a:latin typeface="Microsoft JhengHei" charset="0"/>
-                        <a:ea typeface="Microsoft JhengHei" charset="0"/>
-                        <a:cs typeface="Microsoft JhengHei" charset="0"/>
-                      </a:endParaRPr>
-                    </a:p>
-                  </a:txBody>
-                  <a:tcPr marL="101600" marR="101600" marT="50800" marB="50800" anchor="ctr">
-                    <a:lnL w="0" cap="flat" cmpd="sng" algn="ctr">
-                      <a:noFill/>
-                    </a:lnL>
-                    <a:lnR w="0" cap="flat" cmpd="sng" algn="ctr">
-                      <a:noFill/>
-                    </a:lnR>
-                    <a:lnT w="0" cap="flat" cmpd="sng" algn="ctr">
-                      <a:noFill/>
-                    </a:lnT>
-                    <a:lnB w="6350" cap="flat" cmpd="sng" algn="ctr">
-                      <a:solidFill>
-                        <a:srgbClr val="E5E7EB"/>
-                      </a:solidFill>
-                      <a:prstDash val="solid"/>
-                      <a:round/>
-                      <a:headEnd type="none" w="med" len="med"/>
-                      <a:tailEnd type="none" w="med" len="med"/>
-                    </a:lnB>
-                    <a:solidFill>
-                      <a:srgbClr val="FFFFFF"/>
-                    </a:solidFill>
-                  </a:tcPr>
-                </a:tc>
-                <a:tc>
-                  <a:txBody>
-                    <a:bodyPr/>
-                    <a:lstStyle/>
-                    <a:p>
-                      <a:pPr indent="0" marL="0">
-                        <a:buNone/>
-                      </a:pPr>
-                      <a:r>
-                        <a:rPr lang="en-US" sz="900" dirty="0">
-                          <a:solidFill>
-                            <a:srgbClr val="111118"/>
-                          </a:solidFill>
-                          <a:latin typeface="Microsoft JhengHei" pitchFamily="34" charset="0"/>
-                          <a:ea typeface="Microsoft JhengHei" pitchFamily="34" charset="-122"/>
-                          <a:cs typeface="Microsoft JhengHei" pitchFamily="34" charset="-120"/>
-                        </a:rPr>
-                        <a:t>Latte art leaf - 01.ogv</a:t>
-                      </a:r>
-                      <a:endParaRPr lang="en-US" sz="900" dirty="0">
-                        <a:latin typeface="Microsoft JhengHei" charset="0"/>
-                        <a:ea typeface="Microsoft JhengHei" charset="0"/>
-                        <a:cs typeface="Microsoft JhengHei" charset="0"/>
-                      </a:endParaRPr>
-                    </a:p>
-                  </a:txBody>
-                  <a:tcPr marL="101600" marR="101600" marT="50800" marB="50800" anchor="ctr">
-                    <a:lnL w="0" cap="flat" cmpd="sng" algn="ctr">
-                      <a:noFill/>
-                    </a:lnL>
-                    <a:lnR w="0" cap="flat" cmpd="sng" algn="ctr">
-                      <a:noFill/>
-                    </a:lnR>
-                    <a:lnT w="0" cap="flat" cmpd="sng" algn="ctr">
-                      <a:noFill/>
-                    </a:lnT>
-                    <a:lnB w="6350" cap="flat" cmpd="sng" algn="ctr">
-                      <a:solidFill>
-                        <a:srgbClr val="E5E7EB"/>
-                      </a:solidFill>
-                      <a:prstDash val="solid"/>
-                      <a:round/>
-                      <a:headEnd type="none" w="med" len="med"/>
-                      <a:tailEnd type="none" w="med" len="med"/>
-                    </a:lnB>
-                    <a:solidFill>
-                      <a:srgbClr val="FFFFFF"/>
-                    </a:solidFill>
-                  </a:tcPr>
-                </a:tc>
-                <a:tc>
-                  <a:txBody>
-                    <a:bodyPr/>
-                    <a:lstStyle/>
-                    <a:p>
-                      <a:pPr indent="0" marL="0">
-                        <a:buNone/>
-                      </a:pPr>
-                      <a:r>
-                        <a:rPr lang="en-US" sz="900" dirty="0">
-                          <a:solidFill>
-                            <a:srgbClr val="111118"/>
-                          </a:solidFill>
-                          <a:latin typeface="Microsoft JhengHei" pitchFamily="34" charset="0"/>
-                          <a:ea typeface="Microsoft JhengHei" pitchFamily="34" charset="-122"/>
-                          <a:cs typeface="Microsoft JhengHei" pitchFamily="34" charset="-120"/>
-                        </a:rPr>
-                        <a:t>Anna Frodesiak</a:t>
-                      </a:r>
-                      <a:endParaRPr lang="en-US" sz="900" dirty="0">
-                        <a:latin typeface="Microsoft JhengHei" charset="0"/>
-                        <a:ea typeface="Microsoft JhengHei" charset="0"/>
-                        <a:cs typeface="Microsoft JhengHei" charset="0"/>
-                      </a:endParaRPr>
-                    </a:p>
-                  </a:txBody>
-                  <a:tcPr marL="101600" marR="101600" marT="50800" marB="50800" anchor="ctr">
-                    <a:lnL w="0" cap="flat" cmpd="sng" algn="ctr">
-                      <a:noFill/>
-                    </a:lnL>
-                    <a:lnR w="0" cap="flat" cmpd="sng" algn="ctr">
-                      <a:noFill/>
-                    </a:lnR>
-                    <a:lnT w="0" cap="flat" cmpd="sng" algn="ctr">
-                      <a:noFill/>
-                    </a:lnT>
-                    <a:lnB w="6350" cap="flat" cmpd="sng" algn="ctr">
-                      <a:solidFill>
-                        <a:srgbClr val="E5E7EB"/>
-                      </a:solidFill>
-                      <a:prstDash val="solid"/>
-                      <a:round/>
-                      <a:headEnd type="none" w="med" len="med"/>
-                      <a:tailEnd type="none" w="med" len="med"/>
-                    </a:lnB>
-                    <a:solidFill>
-                      <a:srgbClr val="FFFFFF"/>
-                    </a:solidFill>
-                  </a:tcPr>
-                </a:tc>
-                <a:tc>
-                  <a:txBody>
-                    <a:bodyPr/>
-                    <a:lstStyle/>
-                    <a:p>
-                      <a:pPr indent="0" marL="0">
-                        <a:buNone/>
-                      </a:pPr>
-                      <a:r>
-                        <a:rPr lang="en-US" sz="900" dirty="0">
-                          <a:solidFill>
-                            <a:srgbClr val="111118"/>
-                          </a:solidFill>
-                          <a:latin typeface="Microsoft JhengHei" pitchFamily="34" charset="0"/>
-                          <a:ea typeface="Microsoft JhengHei" pitchFamily="34" charset="-122"/>
-                          <a:cs typeface="Microsoft JhengHei" pitchFamily="34" charset="-120"/>
-                        </a:rPr>
-                        <a:t>CC0</a:t>
-                      </a:r>
-                      <a:endParaRPr lang="en-US" sz="900" dirty="0">
-                        <a:latin typeface="Microsoft JhengHei" charset="0"/>
-                        <a:ea typeface="Microsoft JhengHei" charset="0"/>
-                        <a:cs typeface="Microsoft JhengHei" charset="0"/>
-                      </a:endParaRPr>
-                    </a:p>
-                  </a:txBody>
-                  <a:tcPr marL="101600" marR="101600" marT="50800" marB="50800" anchor="ctr">
-                    <a:lnL w="0" cap="flat" cmpd="sng" algn="ctr">
-                      <a:noFill/>
-                    </a:lnL>
-                    <a:lnR w="0" cap="flat" cmpd="sng" algn="ctr">
-                      <a:noFill/>
-                    </a:lnR>
-                    <a:lnT w="0" cap="flat" cmpd="sng" algn="ctr">
-                      <a:noFill/>
-                    </a:lnT>
-                    <a:lnB w="6350" cap="flat" cmpd="sng" algn="ctr">
-                      <a:solidFill>
-                        <a:srgbClr val="E5E7EB"/>
-                      </a:solidFill>
-                      <a:prstDash val="solid"/>
-                      <a:round/>
-                      <a:headEnd type="none" w="med" len="med"/>
-                      <a:tailEnd type="none" w="med" len="med"/>
-                    </a:lnB>
-                    <a:solidFill>
-                      <a:srgbClr val="FFFFFF"/>
-                    </a:solidFill>
-                  </a:tcPr>
-                </a:tc>
-              </a:tr>
-              <a:tr h="358140">
-                <a:tc>
-                  <a:txBody>
-                    <a:bodyPr/>
-                    <a:lstStyle/>
-                    <a:p>
-                      <a:pPr indent="0" marL="0">
-                        <a:buNone/>
-                      </a:pPr>
-                      <a:r>
-                        <a:rPr lang="en-US" sz="900" dirty="0">
-                          <a:solidFill>
-                            <a:srgbClr val="111118"/>
-                          </a:solidFill>
-                          <a:latin typeface="Microsoft JhengHei" pitchFamily="34" charset="0"/>
-                          <a:ea typeface="Microsoft JhengHei" pitchFamily="34" charset="-122"/>
-                          <a:cs typeface="Microsoft JhengHei" pitchFamily="34" charset="-120"/>
-                        </a:rPr>
-                        <a:t>028</a:t>
-                      </a:r>
-                      <a:endParaRPr lang="en-US" sz="900" dirty="0">
-                        <a:latin typeface="Microsoft JhengHei" charset="0"/>
-                        <a:ea typeface="Microsoft JhengHei" charset="0"/>
-                        <a:cs typeface="Microsoft JhengHei" charset="0"/>
-                      </a:endParaRPr>
-                    </a:p>
-                  </a:txBody>
-                  <a:tcPr marL="101600" marR="101600" marT="50800" marB="50800" anchor="ctr">
-                    <a:lnL w="0" cap="flat" cmpd="sng" algn="ctr">
-                      <a:noFill/>
-                    </a:lnL>
-                    <a:lnR w="0" cap="flat" cmpd="sng" algn="ctr">
-                      <a:noFill/>
-                    </a:lnR>
-                    <a:lnT w="0" cap="flat" cmpd="sng" algn="ctr">
-                      <a:noFill/>
-                    </a:lnT>
-                    <a:lnB w="6350" cap="flat" cmpd="sng" algn="ctr">
-                      <a:solidFill>
-                        <a:srgbClr val="E5E7EB"/>
-                      </a:solidFill>
-                      <a:prstDash val="solid"/>
-                      <a:round/>
-                      <a:headEnd type="none" w="med" len="med"/>
-                      <a:tailEnd type="none" w="med" len="med"/>
-                    </a:lnB>
-                    <a:solidFill>
-                      <a:srgbClr val="FFFFFF"/>
-                    </a:solidFill>
-                  </a:tcPr>
-                </a:tc>
-                <a:tc>
-                  <a:txBody>
-                    <a:bodyPr/>
-                    <a:lstStyle/>
-                    <a:p>
-                      <a:pPr indent="0" marL="0">
-                        <a:buNone/>
-                      </a:pPr>
-                      <a:r>
-                        <a:rPr lang="en-US" sz="900" dirty="0">
-                          <a:solidFill>
-                            <a:srgbClr val="111118"/>
-                          </a:solidFill>
-                          <a:latin typeface="Microsoft JhengHei" pitchFamily="34" charset="0"/>
-                          <a:ea typeface="Microsoft JhengHei" pitchFamily="34" charset="-122"/>
-                          <a:cs typeface="Microsoft JhengHei" pitchFamily="34" charset="-120"/>
-                        </a:rPr>
-                        <a:t>Nespresso machine.ogv</a:t>
-                      </a:r>
-                      <a:endParaRPr lang="en-US" sz="900" dirty="0">
-                        <a:latin typeface="Microsoft JhengHei" charset="0"/>
-                        <a:ea typeface="Microsoft JhengHei" charset="0"/>
-                        <a:cs typeface="Microsoft JhengHei" charset="0"/>
-                      </a:endParaRPr>
-                    </a:p>
-                  </a:txBody>
-                  <a:tcPr marL="101600" marR="101600" marT="50800" marB="50800" anchor="ctr">
-                    <a:lnL w="0" cap="flat" cmpd="sng" algn="ctr">
-                      <a:noFill/>
-                    </a:lnL>
-                    <a:lnR w="0" cap="flat" cmpd="sng" algn="ctr">
-                      <a:noFill/>
-                    </a:lnR>
-                    <a:lnT w="0" cap="flat" cmpd="sng" algn="ctr">
-                      <a:noFill/>
-                    </a:lnT>
-                    <a:lnB w="6350" cap="flat" cmpd="sng" algn="ctr">
-                      <a:solidFill>
-                        <a:srgbClr val="E5E7EB"/>
-                      </a:solidFill>
-                      <a:prstDash val="solid"/>
-                      <a:round/>
-                      <a:headEnd type="none" w="med" len="med"/>
-                      <a:tailEnd type="none" w="med" len="med"/>
-                    </a:lnB>
-                    <a:solidFill>
-                      <a:srgbClr val="FFFFFF"/>
-                    </a:solidFill>
-                  </a:tcPr>
-                </a:tc>
-                <a:tc>
-                  <a:txBody>
-                    <a:bodyPr/>
-                    <a:lstStyle/>
-                    <a:p>
-                      <a:pPr indent="0" marL="0">
-                        <a:buNone/>
-                      </a:pPr>
-                      <a:r>
-                        <a:rPr lang="en-US" sz="900" dirty="0">
-                          <a:solidFill>
-                            <a:srgbClr val="111118"/>
-                          </a:solidFill>
-                          <a:latin typeface="Microsoft JhengHei" pitchFamily="34" charset="0"/>
-                          <a:ea typeface="Microsoft JhengHei" pitchFamily="34" charset="-122"/>
-                          <a:cs typeface="Microsoft JhengHei" pitchFamily="34" charset="-120"/>
-                        </a:rPr>
-                        <a:t>Kjetil Ree</a:t>
-                      </a:r>
-                      <a:endParaRPr lang="en-US" sz="900" dirty="0">
-                        <a:latin typeface="Microsoft JhengHei" charset="0"/>
-                        <a:ea typeface="Microsoft JhengHei" charset="0"/>
-                        <a:cs typeface="Microsoft JhengHei" charset="0"/>
-                      </a:endParaRPr>
-                    </a:p>
-                  </a:txBody>
-                  <a:tcPr marL="101600" marR="101600" marT="50800" marB="50800" anchor="ctr">
-                    <a:lnL w="0" cap="flat" cmpd="sng" algn="ctr">
-                      <a:noFill/>
-                    </a:lnL>
-                    <a:lnR w="0" cap="flat" cmpd="sng" algn="ctr">
-                      <a:noFill/>
-                    </a:lnR>
-                    <a:lnT w="0" cap="flat" cmpd="sng" algn="ctr">
-                      <a:noFill/>
-                    </a:lnT>
-                    <a:lnB w="6350" cap="flat" cmpd="sng" algn="ctr">
-                      <a:solidFill>
-                        <a:srgbClr val="E5E7EB"/>
-                      </a:solidFill>
-                      <a:prstDash val="solid"/>
-                      <a:round/>
-                      <a:headEnd type="none" w="med" len="med"/>
-                      <a:tailEnd type="none" w="med" len="med"/>
-                    </a:lnB>
-                    <a:solidFill>
-                      <a:srgbClr val="FFFFFF"/>
-                    </a:solidFill>
-                  </a:tcPr>
-                </a:tc>
-                <a:tc>
-                  <a:txBody>
-                    <a:bodyPr/>
-                    <a:lstStyle/>
-                    <a:p>
-                      <a:pPr indent="0" marL="0">
-                        <a:buNone/>
-                      </a:pPr>
-                      <a:r>
-                        <a:rPr lang="en-US" sz="900" dirty="0">
-                          <a:solidFill>
-                            <a:srgbClr val="111118"/>
-                          </a:solidFill>
-                          <a:latin typeface="Microsoft JhengHei" pitchFamily="34" charset="0"/>
-                          <a:ea typeface="Microsoft JhengHei" pitchFamily="34" charset="-122"/>
-                          <a:cs typeface="Microsoft JhengHei" pitchFamily="34" charset="-120"/>
-                        </a:rPr>
-                        <a:t>CC0</a:t>
-                      </a:r>
-                      <a:endParaRPr lang="en-US" sz="900" dirty="0">
-                        <a:latin typeface="Microsoft JhengHei" charset="0"/>
-                        <a:ea typeface="Microsoft JhengHei" charset="0"/>
-                        <a:cs typeface="Microsoft JhengHei" charset="0"/>
-                      </a:endParaRPr>
-                    </a:p>
-                  </a:txBody>
-                  <a:tcPr marL="101600" marR="101600" marT="50800" marB="50800" anchor="ctr">
-                    <a:lnL w="0" cap="flat" cmpd="sng" algn="ctr">
-                      <a:noFill/>
-                    </a:lnL>
-                    <a:lnR w="0" cap="flat" cmpd="sng" algn="ctr">
-                      <a:noFill/>
-                    </a:lnR>
-                    <a:lnT w="0" cap="flat" cmpd="sng" algn="ctr">
-                      <a:noFill/>
-                    </a:lnT>
-                    <a:lnB w="6350" cap="flat" cmpd="sng" algn="ctr">
-                      <a:solidFill>
-                        <a:srgbClr val="E5E7EB"/>
-                      </a:solidFill>
-                      <a:prstDash val="solid"/>
-                      <a:round/>
-                      <a:headEnd type="none" w="med" len="med"/>
-                      <a:tailEnd type="none" w="med" len="med"/>
-                    </a:lnB>
-                    <a:solidFill>
-                      <a:srgbClr val="FFFFFF"/>
-                    </a:solidFill>
-                  </a:tcPr>
-                </a:tc>
-              </a:tr>
-              <a:tr h="358140">
-                <a:tc>
-                  <a:txBody>
-                    <a:bodyPr/>
-                    <a:lstStyle/>
-                    <a:p>
-                      <a:pPr indent="0" marL="0">
-                        <a:buNone/>
-                      </a:pPr>
-                      <a:r>
-                        <a:rPr lang="en-US" sz="900" dirty="0">
-                          <a:solidFill>
-                            <a:srgbClr val="111118"/>
-                          </a:solidFill>
-                          <a:latin typeface="Microsoft JhengHei" pitchFamily="34" charset="0"/>
-                          <a:ea typeface="Microsoft JhengHei" pitchFamily="34" charset="-122"/>
-                          <a:cs typeface="Microsoft JhengHei" pitchFamily="34" charset="-120"/>
-                        </a:rPr>
-                        <a:t>029</a:t>
-                      </a:r>
-                      <a:endParaRPr lang="en-US" sz="900" dirty="0">
-                        <a:latin typeface="Microsoft JhengHei" charset="0"/>
-                        <a:ea typeface="Microsoft JhengHei" charset="0"/>
-                        <a:cs typeface="Microsoft JhengHei" charset="0"/>
-                      </a:endParaRPr>
-                    </a:p>
-                  </a:txBody>
-                  <a:tcPr marL="101600" marR="101600" marT="50800" marB="50800" anchor="ctr">
-                    <a:lnL w="0" cap="flat" cmpd="sng" algn="ctr">
-                      <a:noFill/>
-                    </a:lnL>
-                    <a:lnR w="0" cap="flat" cmpd="sng" algn="ctr">
-                      <a:noFill/>
-                    </a:lnR>
-                    <a:lnT w="0" cap="flat" cmpd="sng" algn="ctr">
-                      <a:noFill/>
-                    </a:lnT>
-                    <a:lnB w="6350" cap="flat" cmpd="sng" algn="ctr">
-                      <a:solidFill>
-                        <a:srgbClr val="E5E7EB"/>
-                      </a:solidFill>
-                      <a:prstDash val="solid"/>
-                      <a:round/>
-                      <a:headEnd type="none" w="med" len="med"/>
-                      <a:tailEnd type="none" w="med" len="med"/>
-                    </a:lnB>
-                    <a:solidFill>
-                      <a:srgbClr val="FFFFFF"/>
-                    </a:solidFill>
-                  </a:tcPr>
-                </a:tc>
-                <a:tc>
-                  <a:txBody>
-                    <a:bodyPr/>
-                    <a:lstStyle/>
-                    <a:p>
-                      <a:pPr indent="0" marL="0">
-                        <a:buNone/>
-                      </a:pPr>
-                      <a:r>
-                        <a:rPr lang="en-US" sz="900" dirty="0">
-                          <a:solidFill>
-                            <a:srgbClr val="111118"/>
-                          </a:solidFill>
-                          <a:latin typeface="Microsoft JhengHei" pitchFamily="34" charset="0"/>
-                          <a:ea typeface="Microsoft JhengHei" pitchFamily="34" charset="-122"/>
-                          <a:cs typeface="Microsoft JhengHei" pitchFamily="34" charset="-120"/>
-                        </a:rPr>
-                        <a:t>A man pours Arabic coffee.ogv</a:t>
-                      </a:r>
-                      <a:endParaRPr lang="en-US" sz="900" dirty="0">
-                        <a:latin typeface="Microsoft JhengHei" charset="0"/>
-                        <a:ea typeface="Microsoft JhengHei" charset="0"/>
-                        <a:cs typeface="Microsoft JhengHei" charset="0"/>
-                      </a:endParaRPr>
-                    </a:p>
-                  </a:txBody>
-                  <a:tcPr marL="101600" marR="101600" marT="50800" marB="50800" anchor="ctr">
-                    <a:lnL w="0" cap="flat" cmpd="sng" algn="ctr">
-                      <a:noFill/>
-                    </a:lnL>
-                    <a:lnR w="0" cap="flat" cmpd="sng" algn="ctr">
-                      <a:noFill/>
-                    </a:lnR>
-                    <a:lnT w="0" cap="flat" cmpd="sng" algn="ctr">
-                      <a:noFill/>
-                    </a:lnT>
-                    <a:lnB w="6350" cap="flat" cmpd="sng" algn="ctr">
-                      <a:solidFill>
-                        <a:srgbClr val="E5E7EB"/>
-                      </a:solidFill>
-                      <a:prstDash val="solid"/>
-                      <a:round/>
-                      <a:headEnd type="none" w="med" len="med"/>
-                      <a:tailEnd type="none" w="med" len="med"/>
-                    </a:lnB>
-                    <a:solidFill>
-                      <a:srgbClr val="FFFFFF"/>
-                    </a:solidFill>
-                  </a:tcPr>
-                </a:tc>
-                <a:tc>
-                  <a:txBody>
-                    <a:bodyPr/>
-                    <a:lstStyle/>
-                    <a:p>
-                      <a:pPr indent="0" marL="0">
-                        <a:buNone/>
-                      </a:pPr>
-                      <a:r>
-                        <a:rPr lang="en-US" sz="900" dirty="0">
-                          <a:solidFill>
-                            <a:srgbClr val="111118"/>
-                          </a:solidFill>
-                          <a:latin typeface="Microsoft JhengHei" pitchFamily="34" charset="0"/>
-                          <a:ea typeface="Microsoft JhengHei" pitchFamily="34" charset="-122"/>
-                          <a:cs typeface="Microsoft JhengHei" pitchFamily="34" charset="-120"/>
-                        </a:rPr>
-                        <a:t>Sarah Canbel</a:t>
-                      </a:r>
-                      <a:endParaRPr lang="en-US" sz="900" dirty="0">
-                        <a:latin typeface="Microsoft JhengHei" charset="0"/>
-                        <a:ea typeface="Microsoft JhengHei" charset="0"/>
-                        <a:cs typeface="Microsoft JhengHei" charset="0"/>
-                      </a:endParaRPr>
-                    </a:p>
-                  </a:txBody>
-                  <a:tcPr marL="101600" marR="101600" marT="50800" marB="50800" anchor="ctr">
-                    <a:lnL w="0" cap="flat" cmpd="sng" algn="ctr">
-                      <a:noFill/>
-                    </a:lnL>
-                    <a:lnR w="0" cap="flat" cmpd="sng" algn="ctr">
-                      <a:noFill/>
-                    </a:lnR>
-                    <a:lnT w="0" cap="flat" cmpd="sng" algn="ctr">
-                      <a:noFill/>
-                    </a:lnT>
-                    <a:lnB w="6350" cap="flat" cmpd="sng" algn="ctr">
-                      <a:solidFill>
-                        <a:srgbClr val="E5E7EB"/>
-                      </a:solidFill>
-                      <a:prstDash val="solid"/>
-                      <a:round/>
-                      <a:headEnd type="none" w="med" len="med"/>
-                      <a:tailEnd type="none" w="med" len="med"/>
-                    </a:lnB>
-                    <a:solidFill>
-                      <a:srgbClr val="FFFFFF"/>
-                    </a:solidFill>
-                  </a:tcPr>
-                </a:tc>
-                <a:tc>
-                  <a:txBody>
-                    <a:bodyPr/>
-                    <a:lstStyle/>
-                    <a:p>
-                      <a:pPr indent="0" marL="0">
-                        <a:buNone/>
-                      </a:pPr>
-                      <a:r>
-                        <a:rPr lang="en-US" sz="900" dirty="0">
-                          <a:solidFill>
-                            <a:srgbClr val="111118"/>
-                          </a:solidFill>
-                          <a:latin typeface="Microsoft JhengHei" pitchFamily="34" charset="0"/>
-                          <a:ea typeface="Microsoft JhengHei" pitchFamily="34" charset="-122"/>
-                          <a:cs typeface="Microsoft JhengHei" pitchFamily="34" charset="-120"/>
-                        </a:rPr>
-                        <a:t>CC BY-SA 4.0</a:t>
-                      </a:r>
-                      <a:endParaRPr lang="en-US" sz="900" dirty="0">
-                        <a:latin typeface="Microsoft JhengHei" charset="0"/>
-                        <a:ea typeface="Microsoft JhengHei" charset="0"/>
-                        <a:cs typeface="Microsoft JhengHei" charset="0"/>
-                      </a:endParaRPr>
-                    </a:p>
-                  </a:txBody>
-                  <a:tcPr marL="101600" marR="101600" marT="50800" marB="50800" anchor="ctr">
-                    <a:lnL w="0" cap="flat" cmpd="sng" algn="ctr">
-                      <a:noFill/>
-                    </a:lnL>
-                    <a:lnR w="0" cap="flat" cmpd="sng" algn="ctr">
-                      <a:noFill/>
-                    </a:lnR>
-                    <a:lnT w="0" cap="flat" cmpd="sng" algn="ctr">
-                      <a:noFill/>
-                    </a:lnT>
-                    <a:lnB w="6350" cap="flat" cmpd="sng" algn="ctr">
-                      <a:solidFill>
-                        <a:srgbClr val="E5E7EB"/>
-                      </a:solidFill>
-                      <a:prstDash val="solid"/>
-                      <a:round/>
-                      <a:headEnd type="none" w="med" len="med"/>
-                      <a:tailEnd type="none" w="med" len="med"/>
-                    </a:lnB>
-                    <a:solidFill>
-                      <a:srgbClr val="FFFFFF"/>
-                    </a:solidFill>
-                  </a:tcPr>
-                </a:tc>
-              </a:tr>
-              <a:tr h="358140">
-                <a:tc>
-                  <a:txBody>
-                    <a:bodyPr/>
-                    <a:lstStyle/>
-                    <a:p>
-                      <a:pPr indent="0" marL="0">
-                        <a:buNone/>
-                      </a:pPr>
-                      <a:r>
-                        <a:rPr lang="en-US" sz="900" dirty="0">
-                          <a:solidFill>
-                            <a:srgbClr val="111118"/>
-                          </a:solidFill>
-                          <a:latin typeface="Microsoft JhengHei" pitchFamily="34" charset="0"/>
-                          <a:ea typeface="Microsoft JhengHei" pitchFamily="34" charset="-122"/>
-                          <a:cs typeface="Microsoft JhengHei" pitchFamily="34" charset="-120"/>
-                        </a:rPr>
-                        <a:t>030</a:t>
-                      </a:r>
-                      <a:endParaRPr lang="en-US" sz="900" dirty="0">
-                        <a:latin typeface="Microsoft JhengHei" charset="0"/>
-                        <a:ea typeface="Microsoft JhengHei" charset="0"/>
-                        <a:cs typeface="Microsoft JhengHei" charset="0"/>
-                      </a:endParaRPr>
-                    </a:p>
-                  </a:txBody>
-                  <a:tcPr marL="101600" marR="101600" marT="50800" marB="50800" anchor="ctr">
-                    <a:lnL w="0" cap="flat" cmpd="sng" algn="ctr">
-                      <a:noFill/>
-                    </a:lnL>
-                    <a:lnR w="0" cap="flat" cmpd="sng" algn="ctr">
-                      <a:noFill/>
-                    </a:lnR>
-                    <a:lnT w="0" cap="flat" cmpd="sng" algn="ctr">
-                      <a:noFill/>
-                    </a:lnT>
-                    <a:lnB w="6350" cap="flat" cmpd="sng" algn="ctr">
-                      <a:solidFill>
-                        <a:srgbClr val="E5E7EB"/>
-                      </a:solidFill>
-                      <a:prstDash val="solid"/>
-                      <a:round/>
-                      <a:headEnd type="none" w="med" len="med"/>
-                      <a:tailEnd type="none" w="med" len="med"/>
-                    </a:lnB>
-                    <a:solidFill>
-                      <a:srgbClr val="FFFFFF"/>
-                    </a:solidFill>
-                  </a:tcPr>
-                </a:tc>
-                <a:tc>
-                  <a:txBody>
-                    <a:bodyPr/>
-                    <a:lstStyle/>
-                    <a:p>
-                      <a:pPr indent="0" marL="0">
-                        <a:buNone/>
-                      </a:pPr>
-                      <a:r>
-                        <a:rPr lang="en-US" sz="900" dirty="0">
-                          <a:solidFill>
-                            <a:srgbClr val="111118"/>
-                          </a:solidFill>
-                          <a:latin typeface="Microsoft JhengHei" pitchFamily="34" charset="0"/>
-                          <a:ea typeface="Microsoft JhengHei" pitchFamily="34" charset="-122"/>
-                          <a:cs typeface="Microsoft JhengHei" pitchFamily="34" charset="-120"/>
-                        </a:rPr>
-                        <a:t>Servido tradicional de café etíope.webm</a:t>
-                      </a:r>
-                      <a:endParaRPr lang="en-US" sz="900" dirty="0">
-                        <a:latin typeface="Microsoft JhengHei" charset="0"/>
-                        <a:ea typeface="Microsoft JhengHei" charset="0"/>
-                        <a:cs typeface="Microsoft JhengHei" charset="0"/>
-                      </a:endParaRPr>
-                    </a:p>
-                  </a:txBody>
-                  <a:tcPr marL="101600" marR="101600" marT="50800" marB="50800" anchor="ctr">
-                    <a:lnL w="0" cap="flat" cmpd="sng" algn="ctr">
-                      <a:noFill/>
-                    </a:lnL>
-                    <a:lnR w="0" cap="flat" cmpd="sng" algn="ctr">
-                      <a:noFill/>
-                    </a:lnR>
-                    <a:lnT w="0" cap="flat" cmpd="sng" algn="ctr">
-                      <a:noFill/>
-                    </a:lnT>
-                    <a:lnB w="6350" cap="flat" cmpd="sng" algn="ctr">
-                      <a:solidFill>
-                        <a:srgbClr val="E5E7EB"/>
-                      </a:solidFill>
-                      <a:prstDash val="solid"/>
-                      <a:round/>
-                      <a:headEnd type="none" w="med" len="med"/>
-                      <a:tailEnd type="none" w="med" len="med"/>
-                    </a:lnB>
-                    <a:solidFill>
-                      <a:srgbClr val="FFFFFF"/>
-                    </a:solidFill>
-                  </a:tcPr>
-                </a:tc>
-                <a:tc>
-                  <a:txBody>
-                    <a:bodyPr/>
-                    <a:lstStyle/>
-                    <a:p>
-                      <a:pPr indent="0" marL="0">
-                        <a:buNone/>
-                      </a:pPr>
-                      <a:r>
-                        <a:rPr lang="en-US" sz="900" dirty="0">
-                          <a:solidFill>
-                            <a:srgbClr val="111118"/>
-                          </a:solidFill>
-                          <a:latin typeface="Microsoft JhengHei" pitchFamily="34" charset="0"/>
-                          <a:ea typeface="Microsoft JhengHei" pitchFamily="34" charset="-122"/>
-                          <a:cs typeface="Microsoft JhengHei" pitchFamily="34" charset="-120"/>
-                        </a:rPr>
-                        <a:t>ProtoplasmaKid</a:t>
-                      </a:r>
-                      <a:endParaRPr lang="en-US" sz="900" dirty="0">
-                        <a:latin typeface="Microsoft JhengHei" charset="0"/>
-                        <a:ea typeface="Microsoft JhengHei" charset="0"/>
-                        <a:cs typeface="Microsoft JhengHei" charset="0"/>
-                      </a:endParaRPr>
-                    </a:p>
-                  </a:txBody>
-                  <a:tcPr marL="101600" marR="101600" marT="50800" marB="50800" anchor="ctr">
-                    <a:lnL w="0" cap="flat" cmpd="sng" algn="ctr">
-                      <a:noFill/>
-                    </a:lnL>
-                    <a:lnR w="0" cap="flat" cmpd="sng" algn="ctr">
-                      <a:noFill/>
-                    </a:lnR>
-                    <a:lnT w="0" cap="flat" cmpd="sng" algn="ctr">
-                      <a:noFill/>
-                    </a:lnT>
-                    <a:lnB w="6350" cap="flat" cmpd="sng" algn="ctr">
-                      <a:solidFill>
-                        <a:srgbClr val="E5E7EB"/>
-                      </a:solidFill>
-                      <a:prstDash val="solid"/>
-                      <a:round/>
-                      <a:headEnd type="none" w="med" len="med"/>
-                      <a:tailEnd type="none" w="med" len="med"/>
-                    </a:lnB>
-                    <a:solidFill>
-                      <a:srgbClr val="FFFFFF"/>
-                    </a:solidFill>
-                  </a:tcPr>
-                </a:tc>
-                <a:tc>
-                  <a:txBody>
-                    <a:bodyPr/>
-                    <a:lstStyle/>
-                    <a:p>
-                      <a:pPr indent="0" marL="0">
-                        <a:buNone/>
-                      </a:pPr>
-                      <a:r>
-                        <a:rPr lang="en-US" sz="900" dirty="0">
-                          <a:solidFill>
-                            <a:srgbClr val="111118"/>
-                          </a:solidFill>
-                          <a:latin typeface="Microsoft JhengHei" pitchFamily="34" charset="0"/>
-                          <a:ea typeface="Microsoft JhengHei" pitchFamily="34" charset="-122"/>
-                          <a:cs typeface="Microsoft JhengHei" pitchFamily="34" charset="-120"/>
-                        </a:rPr>
-                        <a:t>CC BY 4.0</a:t>
-                      </a:r>
-                      <a:endParaRPr lang="en-US" sz="900" dirty="0">
-                        <a:latin typeface="Microsoft JhengHei" charset="0"/>
-                        <a:ea typeface="Microsoft JhengHei" charset="0"/>
-                        <a:cs typeface="Microsoft JhengHei" charset="0"/>
-                      </a:endParaRPr>
-                    </a:p>
-                  </a:txBody>
-                  <a:tcPr marL="101600" marR="101600" marT="50800" marB="50800" anchor="ctr">
-                    <a:lnL w="0" cap="flat" cmpd="sng" algn="ctr">
-                      <a:noFill/>
-                    </a:lnL>
-                    <a:lnR w="0" cap="flat" cmpd="sng" algn="ctr">
-                      <a:noFill/>
-                    </a:lnR>
-                    <a:lnT w="0" cap="flat" cmpd="sng" algn="ctr">
-                      <a:noFill/>
-                    </a:lnT>
-                    <a:lnB w="6350" cap="flat" cmpd="sng" algn="ctr">
-                      <a:solidFill>
-                        <a:srgbClr val="E5E7EB"/>
-                      </a:solidFill>
-                      <a:prstDash val="solid"/>
-                      <a:round/>
-                      <a:headEnd type="none" w="med" len="med"/>
-                      <a:tailEnd type="none" w="med" len="med"/>
-                    </a:lnB>
-                    <a:solidFill>
-                      <a:srgbClr val="FFFFFF"/>
-                    </a:solidFill>
-                  </a:tcPr>
-                </a:tc>
-              </a:tr>
-              <a:tr h="358140">
-                <a:tc>
-                  <a:txBody>
-                    <a:bodyPr/>
-                    <a:lstStyle/>
-                    <a:p>
-                      <a:pPr indent="0" marL="0">
-                        <a:buNone/>
-                      </a:pPr>
-                      <a:r>
-                        <a:rPr lang="en-US" sz="900" dirty="0">
-                          <a:solidFill>
-                            <a:srgbClr val="111118"/>
-                          </a:solidFill>
-                          <a:latin typeface="Microsoft JhengHei" pitchFamily="34" charset="0"/>
-                          <a:ea typeface="Microsoft JhengHei" pitchFamily="34" charset="-122"/>
-                          <a:cs typeface="Microsoft JhengHei" pitchFamily="34" charset="-120"/>
-                        </a:rPr>
-                        <a:t>031</a:t>
-                      </a:r>
-                      <a:endParaRPr lang="en-US" sz="900" dirty="0">
-                        <a:latin typeface="Microsoft JhengHei" charset="0"/>
-                        <a:ea typeface="Microsoft JhengHei" charset="0"/>
-                        <a:cs typeface="Microsoft JhengHei" charset="0"/>
-                      </a:endParaRPr>
-                    </a:p>
-                  </a:txBody>
-                  <a:tcPr marL="101600" marR="101600" marT="50800" marB="50800" anchor="ctr">
-                    <a:lnL w="0" cap="flat" cmpd="sng" algn="ctr">
-                      <a:noFill/>
-                    </a:lnL>
-                    <a:lnR w="0" cap="flat" cmpd="sng" algn="ctr">
-                      <a:noFill/>
-                    </a:lnR>
-                    <a:lnT w="0" cap="flat" cmpd="sng" algn="ctr">
-                      <a:noFill/>
-                    </a:lnT>
-                    <a:lnB w="6350" cap="flat" cmpd="sng" algn="ctr">
-                      <a:solidFill>
-                        <a:srgbClr val="E5E7EB"/>
-                      </a:solidFill>
-                      <a:prstDash val="solid"/>
-                      <a:round/>
-                      <a:headEnd type="none" w="med" len="med"/>
-                      <a:tailEnd type="none" w="med" len="med"/>
-                    </a:lnB>
-                    <a:solidFill>
-                      <a:srgbClr val="FFFFFF"/>
-                    </a:solidFill>
-                  </a:tcPr>
-                </a:tc>
-                <a:tc>
-                  <a:txBody>
-                    <a:bodyPr/>
-                    <a:lstStyle/>
-                    <a:p>
-                      <a:pPr indent="0" marL="0">
-                        <a:buNone/>
-                      </a:pPr>
-                      <a:r>
-                        <a:rPr lang="en-US" sz="900" dirty="0">
-                          <a:solidFill>
-                            <a:srgbClr val="111118"/>
-                          </a:solidFill>
-                          <a:latin typeface="Microsoft JhengHei" pitchFamily="34" charset="0"/>
-                          <a:ea typeface="Microsoft JhengHei" pitchFamily="34" charset="-122"/>
-                          <a:cs typeface="Microsoft JhengHei" pitchFamily="34" charset="-120"/>
-                        </a:rPr>
-                        <a:t>How to brew Coffee using the laws of physics - with the Hario Syphon Technica.webm</a:t>
-                      </a:r>
-                      <a:endParaRPr lang="en-US" sz="900" dirty="0">
-                        <a:latin typeface="Microsoft JhengHei" charset="0"/>
-                        <a:ea typeface="Microsoft JhengHei" charset="0"/>
-                        <a:cs typeface="Microsoft JhengHei" charset="0"/>
-                      </a:endParaRPr>
-                    </a:p>
-                  </a:txBody>
-                  <a:tcPr marL="101600" marR="101600" marT="50800" marB="50800" anchor="ctr">
-                    <a:lnL w="0" cap="flat" cmpd="sng" algn="ctr">
-                      <a:noFill/>
-                    </a:lnL>
-                    <a:lnR w="0" cap="flat" cmpd="sng" algn="ctr">
-                      <a:noFill/>
-                    </a:lnR>
-                    <a:lnT w="0" cap="flat" cmpd="sng" algn="ctr">
-                      <a:noFill/>
-                    </a:lnT>
-                    <a:lnB w="6350" cap="flat" cmpd="sng" algn="ctr">
-                      <a:solidFill>
-                        <a:srgbClr val="E5E7EB"/>
-                      </a:solidFill>
-                      <a:prstDash val="solid"/>
-                      <a:round/>
-                      <a:headEnd type="none" w="med" len="med"/>
-                      <a:tailEnd type="none" w="med" len="med"/>
-                    </a:lnB>
-                    <a:solidFill>
-                      <a:srgbClr val="FFFFFF"/>
-                    </a:solidFill>
-                  </a:tcPr>
-                </a:tc>
-                <a:tc>
-                  <a:txBody>
-                    <a:bodyPr/>
-                    <a:lstStyle/>
-                    <a:p>
-                      <a:pPr indent="0" marL="0">
-                        <a:buNone/>
-                      </a:pPr>
-                      <a:r>
-                        <a:rPr lang="en-US" sz="900" dirty="0">
-                          <a:solidFill>
-                            <a:srgbClr val="111118"/>
-                          </a:solidFill>
-                          <a:latin typeface="Microsoft JhengHei" pitchFamily="34" charset="0"/>
-                          <a:ea typeface="Microsoft JhengHei" pitchFamily="34" charset="-122"/>
-                          <a:cs typeface="Microsoft JhengHei" pitchFamily="34" charset="-120"/>
-                        </a:rPr>
-                        <a:t>Coffee Circle</a:t>
-                      </a:r>
-                      <a:endParaRPr lang="en-US" sz="900" dirty="0">
-                        <a:latin typeface="Microsoft JhengHei" charset="0"/>
-                        <a:ea typeface="Microsoft JhengHei" charset="0"/>
-                        <a:cs typeface="Microsoft JhengHei" charset="0"/>
-                      </a:endParaRPr>
-                    </a:p>
-                  </a:txBody>
-                  <a:tcPr marL="101600" marR="101600" marT="50800" marB="50800" anchor="ctr">
-                    <a:lnL w="0" cap="flat" cmpd="sng" algn="ctr">
-                      <a:noFill/>
-                    </a:lnL>
-                    <a:lnR w="0" cap="flat" cmpd="sng" algn="ctr">
-                      <a:noFill/>
-                    </a:lnR>
-                    <a:lnT w="0" cap="flat" cmpd="sng" algn="ctr">
-                      <a:noFill/>
-                    </a:lnT>
-                    <a:lnB w="6350" cap="flat" cmpd="sng" algn="ctr">
-                      <a:solidFill>
-                        <a:srgbClr val="E5E7EB"/>
-                      </a:solidFill>
-                      <a:prstDash val="solid"/>
-                      <a:round/>
-                      <a:headEnd type="none" w="med" len="med"/>
-                      <a:tailEnd type="none" w="med" len="med"/>
-                    </a:lnB>
-                    <a:solidFill>
-                      <a:srgbClr val="FFFFFF"/>
-                    </a:solidFill>
-                  </a:tcPr>
-                </a:tc>
-                <a:tc>
-                  <a:txBody>
-                    <a:bodyPr/>
-                    <a:lstStyle/>
-                    <a:p>
-                      <a:pPr indent="0" marL="0">
-                        <a:buNone/>
-                      </a:pPr>
-                      <a:r>
-                        <a:rPr lang="en-US" sz="900" dirty="0">
-                          <a:solidFill>
-                            <a:srgbClr val="111118"/>
-                          </a:solidFill>
-                          <a:latin typeface="Microsoft JhengHei" pitchFamily="34" charset="0"/>
-                          <a:ea typeface="Microsoft JhengHei" pitchFamily="34" charset="-122"/>
-                          <a:cs typeface="Microsoft JhengHei" pitchFamily="34" charset="-120"/>
-                        </a:rPr>
-                        <a:t>CC BY 3.0</a:t>
-                      </a:r>
-                      <a:endParaRPr lang="en-US" sz="900" dirty="0">
-                        <a:latin typeface="Microsoft JhengHei" charset="0"/>
-                        <a:ea typeface="Microsoft JhengHei" charset="0"/>
-                        <a:cs typeface="Microsoft JhengHei" charset="0"/>
-                      </a:endParaRPr>
-                    </a:p>
-                  </a:txBody>
-                  <a:tcPr marL="101600" marR="101600" marT="50800" marB="50800" anchor="ctr">
-                    <a:lnL w="0" cap="flat" cmpd="sng" algn="ctr">
-                      <a:noFill/>
-                    </a:lnL>
-                    <a:lnR w="0" cap="flat" cmpd="sng" algn="ctr">
-                      <a:noFill/>
-                    </a:lnR>
-                    <a:lnT w="0" cap="flat" cmpd="sng" algn="ctr">
-                      <a:noFill/>
-                    </a:lnT>
-                    <a:lnB w="6350" cap="flat" cmpd="sng" algn="ctr">
-                      <a:solidFill>
-                        <a:srgbClr val="E5E7EB"/>
-                      </a:solidFill>
-                      <a:prstDash val="solid"/>
-                      <a:round/>
-                      <a:headEnd type="none" w="med" len="med"/>
-                      <a:tailEnd type="none" w="med" len="med"/>
-                    </a:lnB>
-                    <a:solidFill>
-                      <a:srgbClr val="FFFFFF"/>
-                    </a:solidFill>
-                  </a:tcPr>
-                </a:tc>
-              </a:tr>
-              <a:tr h="358140">
-                <a:tc>
-                  <a:txBody>
-                    <a:bodyPr/>
-                    <a:lstStyle/>
-                    <a:p>
-                      <a:pPr indent="0" marL="0">
-                        <a:buNone/>
-                      </a:pPr>
-                      <a:r>
-                        <a:rPr lang="en-US" sz="900" dirty="0">
-                          <a:solidFill>
-                            <a:srgbClr val="111118"/>
-                          </a:solidFill>
-                          <a:latin typeface="Microsoft JhengHei" pitchFamily="34" charset="0"/>
-                          <a:ea typeface="Microsoft JhengHei" pitchFamily="34" charset="-122"/>
-                          <a:cs typeface="Microsoft JhengHei" pitchFamily="34" charset="-120"/>
-                        </a:rPr>
-                        <a:t>032</a:t>
-                      </a:r>
-                      <a:endParaRPr lang="en-US" sz="900" dirty="0">
-                        <a:latin typeface="Microsoft JhengHei" charset="0"/>
-                        <a:ea typeface="Microsoft JhengHei" charset="0"/>
-                        <a:cs typeface="Microsoft JhengHei" charset="0"/>
-                      </a:endParaRPr>
-                    </a:p>
-                  </a:txBody>
-                  <a:tcPr marL="101600" marR="101600" marT="50800" marB="50800" anchor="ctr">
-                    <a:lnL w="0" cap="flat" cmpd="sng" algn="ctr">
-                      <a:noFill/>
-                    </a:lnL>
-                    <a:lnR w="0" cap="flat" cmpd="sng" algn="ctr">
-                      <a:noFill/>
-                    </a:lnR>
-                    <a:lnT w="0" cap="flat" cmpd="sng" algn="ctr">
-                      <a:noFill/>
-                    </a:lnT>
-                    <a:lnB w="6350" cap="flat" cmpd="sng" algn="ctr">
-                      <a:solidFill>
-                        <a:srgbClr val="E5E7EB"/>
-                      </a:solidFill>
-                      <a:prstDash val="solid"/>
-                      <a:round/>
-                      <a:headEnd type="none" w="med" len="med"/>
-                      <a:tailEnd type="none" w="med" len="med"/>
-                    </a:lnB>
-                    <a:solidFill>
-                      <a:srgbClr val="FFFFFF"/>
-                    </a:solidFill>
-                  </a:tcPr>
-                </a:tc>
-                <a:tc>
-                  <a:txBody>
-                    <a:bodyPr/>
-                    <a:lstStyle/>
-                    <a:p>
-                      <a:pPr indent="0" marL="0">
-                        <a:buNone/>
-                      </a:pPr>
-                      <a:r>
-                        <a:rPr lang="en-US" sz="900" dirty="0">
-                          <a:solidFill>
-                            <a:srgbClr val="111118"/>
-                          </a:solidFill>
-                          <a:latin typeface="Microsoft JhengHei" pitchFamily="34" charset="0"/>
-                          <a:ea typeface="Microsoft JhengHei" pitchFamily="34" charset="-122"/>
-                          <a:cs typeface="Microsoft JhengHei" pitchFamily="34" charset="-120"/>
-                        </a:rPr>
-                        <a:t>Sugar falling into coffee.webm</a:t>
-                      </a:r>
-                      <a:endParaRPr lang="en-US" sz="900" dirty="0">
-                        <a:latin typeface="Microsoft JhengHei" charset="0"/>
-                        <a:ea typeface="Microsoft JhengHei" charset="0"/>
-                        <a:cs typeface="Microsoft JhengHei" charset="0"/>
-                      </a:endParaRPr>
-                    </a:p>
-                  </a:txBody>
-                  <a:tcPr marL="101600" marR="101600" marT="50800" marB="50800" anchor="ctr">
-                    <a:lnL w="0" cap="flat" cmpd="sng" algn="ctr">
-                      <a:noFill/>
-                    </a:lnL>
-                    <a:lnR w="0" cap="flat" cmpd="sng" algn="ctr">
-                      <a:noFill/>
-                    </a:lnR>
-                    <a:lnT w="0" cap="flat" cmpd="sng" algn="ctr">
-                      <a:noFill/>
-                    </a:lnT>
-                    <a:lnB w="6350" cap="flat" cmpd="sng" algn="ctr">
-                      <a:solidFill>
-                        <a:srgbClr val="E5E7EB"/>
-                      </a:solidFill>
-                      <a:prstDash val="solid"/>
-                      <a:round/>
-                      <a:headEnd type="none" w="med" len="med"/>
-                      <a:tailEnd type="none" w="med" len="med"/>
-                    </a:lnB>
-                    <a:solidFill>
-                      <a:srgbClr val="FFFFFF"/>
-                    </a:solidFill>
-                  </a:tcPr>
-                </a:tc>
-                <a:tc>
-                  <a:txBody>
-                    <a:bodyPr/>
-                    <a:lstStyle/>
-                    <a:p>
-                      <a:pPr indent="0" marL="0">
-                        <a:buNone/>
-                      </a:pPr>
-                      <a:r>
-                        <a:rPr lang="en-US" sz="900" dirty="0">
-                          <a:solidFill>
-                            <a:srgbClr val="111118"/>
-                          </a:solidFill>
-                          <a:latin typeface="Microsoft JhengHei" pitchFamily="34" charset="0"/>
-                          <a:ea typeface="Microsoft JhengHei" pitchFamily="34" charset="-122"/>
-                          <a:cs typeface="Microsoft JhengHei" pitchFamily="34" charset="-120"/>
-                        </a:rPr>
-                        <a:t>Anselm Schüler</a:t>
-                      </a:r>
-                      <a:endParaRPr lang="en-US" sz="900" dirty="0">
-                        <a:latin typeface="Microsoft JhengHei" charset="0"/>
-                        <a:ea typeface="Microsoft JhengHei" charset="0"/>
-                        <a:cs typeface="Microsoft JhengHei" charset="0"/>
-                      </a:endParaRPr>
-                    </a:p>
-                  </a:txBody>
-                  <a:tcPr marL="101600" marR="101600" marT="50800" marB="50800" anchor="ctr">
-                    <a:lnL w="0" cap="flat" cmpd="sng" algn="ctr">
-                      <a:noFill/>
-                    </a:lnL>
-                    <a:lnR w="0" cap="flat" cmpd="sng" algn="ctr">
-                      <a:noFill/>
-                    </a:lnR>
-                    <a:lnT w="0" cap="flat" cmpd="sng" algn="ctr">
-                      <a:noFill/>
-                    </a:lnT>
-                    <a:lnB w="6350" cap="flat" cmpd="sng" algn="ctr">
-                      <a:solidFill>
-                        <a:srgbClr val="E5E7EB"/>
-                      </a:solidFill>
-                      <a:prstDash val="solid"/>
-                      <a:round/>
-                      <a:headEnd type="none" w="med" len="med"/>
-                      <a:tailEnd type="none" w="med" len="med"/>
-                    </a:lnB>
-                    <a:solidFill>
-                      <a:srgbClr val="FFFFFF"/>
-                    </a:solidFill>
-                  </a:tcPr>
-                </a:tc>
-                <a:tc>
-                  <a:txBody>
-                    <a:bodyPr/>
-                    <a:lstStyle/>
-                    <a:p>
-                      <a:pPr indent="0" marL="0">
-                        <a:buNone/>
-                      </a:pPr>
-                      <a:r>
-                        <a:rPr lang="en-US" sz="900" dirty="0">
-                          <a:solidFill>
-                            <a:srgbClr val="111118"/>
-                          </a:solidFill>
-                          <a:latin typeface="Microsoft JhengHei" pitchFamily="34" charset="0"/>
-                          <a:ea typeface="Microsoft JhengHei" pitchFamily="34" charset="-122"/>
-                          <a:cs typeface="Microsoft JhengHei" pitchFamily="34" charset="-120"/>
-                        </a:rPr>
-                        <a:t>CC BY-SA 4.0</a:t>
-                      </a:r>
-                      <a:endParaRPr lang="en-US" sz="900" dirty="0">
-                        <a:latin typeface="Microsoft JhengHei" charset="0"/>
-                        <a:ea typeface="Microsoft JhengHei" charset="0"/>
-                        <a:cs typeface="Microsoft JhengHei" charset="0"/>
-                      </a:endParaRPr>
-                    </a:p>
-                  </a:txBody>
-                  <a:tcPr marL="101600" marR="101600" marT="50800" marB="50800" anchor="ctr">
-                    <a:lnL w="0" cap="flat" cmpd="sng" algn="ctr">
-                      <a:noFill/>
-                    </a:lnL>
-                    <a:lnR w="0" cap="flat" cmpd="sng" algn="ctr">
-                      <a:noFill/>
-                    </a:lnR>
-                    <a:lnT w="0" cap="flat" cmpd="sng" algn="ctr">
-                      <a:noFill/>
-                    </a:lnT>
-                    <a:lnB w="6350" cap="flat" cmpd="sng" algn="ctr">
-                      <a:solidFill>
-                        <a:srgbClr val="E5E7EB"/>
-                      </a:solidFill>
-                      <a:prstDash val="solid"/>
-                      <a:round/>
-                      <a:headEnd type="none" w="med" len="med"/>
-                      <a:tailEnd type="none" w="med" len="med"/>
-                    </a:lnB>
-                    <a:solidFill>
-                      <a:srgbClr val="FFFFFF"/>
-                    </a:solidFill>
-                  </a:tcPr>
-                </a:tc>
-              </a:tr>
-            </a:tbl>
-          </a:graphicData>
-        </a:graphic>
-      </p:graphicFrame>
-      <p:sp>
-        <p:nvSpPr>
-          <p:cNvPr id="25" name="Slide Number Placeholder 0"/>
-          <p:cNvSpPr>
-            <a:spLocks noGrp="1"/>
-          </p:cNvSpPr>
-          <p:nvPr>
-            <p:ph type="sldNum" sz="quarter" idx="4294967295"/>
-          </p:nvPr>
-        </p:nvSpPr>
-        <p:spPr>
-          <a:xfrm>
-            <a:off x="11109960" y="6355080"/>
-            <a:ext cx="457200" cy="274320"/>
-          </a:xfrm>
-          <a:prstGeom prst="rect">
-            <a:avLst/>
-          </a:prstGeom>
-          <a:extLst>
-            <a:ext uri="{C572A759-6A51-4108-AA02-DFA0A04FC94B}">
-              <ma14:wrappingTextBoxFlag xmlns:ma14="http://schemas.microsoft.com/office/mac/drawingml/2011/main" val="0"/>
-            </a:ext>
-          </a:extLst>
-        </p:spPr>
-        <p:txBody>
-          <a:bodyPr/>
-          <a:lstStyle>
-            <a:lvl1pPr>
-              <a:defRPr sz="1000">
-                <a:solidFill>
-                  <a:srgbClr val="9CA3AF"/>
-                </a:solidFill>
-              </a:defRPr>
-            </a:lvl1pPr>
-          </a:lstStyle>
-          <a:p>
-            <a:pPr algn="r"/>
-            <a:fld id="{F7021451-1387-4CA6-816F-3879F97B5CBC}" type="slidenum">
-              <a:rPr b="0" lang="en-US"/>
-              <a:t>26</a:t>
-            </a:fld>
-            <a:endParaRPr lang="en-US"/>
-          </a:p>
-        </p:txBody>
-      </p:sp>
-    </p:spTree>
-  </p:cSld>
-  <p:clrMapOvr>
-    <a:masterClrMapping/>
-  </p:clrMapOvr>
-</p:sld>
-</file>
-
-<file path=ppt/slides/slide27.xml><?xml version="1.0" encoding="utf-8"?>
-<p:sld xmlns:a="http://schemas.openxmlformats.org/drawingml/2006/main" xmlns:r="http://schemas.openxmlformats.org/officeDocument/2006/relationships" xmlns:p="http://schemas.openxmlformats.org/presentationml/2006/main">
-  <p:cSld name="Slide 27">
-    <p:spTree>
-      <p:nvGrpSpPr>
-        <p:cNvPr id="1" name=""/>
-        <p:cNvGrpSpPr/>
-        <p:nvPr/>
-      </p:nvGrpSpPr>
-      <p:grpSpPr>
-        <a:xfrm>
-          <a:off x="0" y="0"/>
-          <a:ext cx="0" cy="0"/>
-          <a:chOff x="0" y="0"/>
-          <a:chExt cx="0" cy="0"/>
-        </a:xfrm>
-      </p:grpSpPr>
-      <p:sp>
-        <p:nvSpPr>
-          <p:cNvPr id="2" name="Text 0"/>
-          <p:cNvSpPr/>
-          <p:nvPr>
-            <p:ph idx="100" type="title" hasCustomPrompt="1"/>
-          </p:nvPr>
-        </p:nvSpPr>
-        <p:spPr>
-          <a:xfrm>
-            <a:off x="640080" y="502920"/>
-            <a:ext cx="10881360" cy="914400"/>
-          </a:xfrm>
-          <a:prstGeom prst="rect">
-            <a:avLst/>
-          </a:prstGeom>
-          <a:noFill/>
-          <a:ln/>
-        </p:spPr>
-        <p:txBody>
-          <a:bodyPr wrap="square" lIns="0" tIns="0" rIns="0" bIns="0" rtlCol="0" anchor="t"/>
-          <a:lstStyle/>
-          <a:p>
-            <a:pPr algn="l" indent="0" marL="0">
-              <a:buNone/>
-            </a:pPr>
-            <a:r>
-              <a:rPr lang="en-US" sz="2800" b="1" dirty="0">
-                <a:solidFill>
-                  <a:srgbClr val="111118"/>
-                </a:solidFill>
-              </a:rPr>
-              <a:t>A7 · Footage credits (4 of 4)</a:t>
-            </a:r>
-            <a:endParaRPr lang="en-US" sz="2800" dirty="0"/>
-          </a:p>
-        </p:txBody>
-      </p:sp>
-      <p:sp>
-        <p:nvSpPr>
-          <p:cNvPr id="3" name="Text 1"/>
-          <p:cNvSpPr txBox="1"/>
-          <p:nvPr/>
-        </p:nvSpPr>
-        <p:spPr>
-          <a:xfrm>
-            <a:off x="640080" y="274320"/>
-            <a:ext cx="8229600" cy="256032"/>
-          </a:xfrm>
-          <a:prstGeom prst="rect">
-            <a:avLst/>
-          </a:prstGeom>
-          <a:noFill/>
-          <a:ln/>
-        </p:spPr>
-        <p:txBody>
-          <a:bodyPr wrap="square" lIns="0" tIns="0" rIns="0" bIns="0" rtlCol="0" anchor="ctr"/>
-          <a:lstStyle/>
-          <a:p>
-            <a:pPr indent="0" marL="0">
-              <a:buNone/>
-            </a:pPr>
-            <a:r>
-              <a:rPr lang="en-US" sz="1050" b="1" spc="300" kern="0" dirty="0">
-                <a:solidFill>
-                  <a:srgbClr val="6C4CF5"/>
-                </a:solidFill>
-              </a:rPr>
-              <a:t>APPENDIX</a:t>
-            </a:r>
-            <a:endParaRPr lang="en-US" sz="1050" dirty="0"/>
-          </a:p>
-        </p:txBody>
-      </p:sp>
-      <p:sp>
-        <p:nvSpPr>
-          <p:cNvPr id="4" name="Text 2"/>
-          <p:cNvSpPr txBox="1"/>
-          <p:nvPr/>
-        </p:nvSpPr>
-        <p:spPr>
-          <a:xfrm>
-            <a:off x="640080" y="6355080"/>
-            <a:ext cx="5486400" cy="274320"/>
-          </a:xfrm>
-          <a:prstGeom prst="rect">
-            <a:avLst/>
-          </a:prstGeom>
-          <a:noFill/>
-          <a:ln/>
-        </p:spPr>
-        <p:txBody>
-          <a:bodyPr wrap="square" lIns="0" tIns="0" rIns="0" bIns="0" rtlCol="0" anchor="ctr"/>
-          <a:lstStyle/>
-          <a:p>
-            <a:pPr indent="0" marL="0">
-              <a:buNone/>
-            </a:pPr>
-            <a:r>
-              <a:rPr lang="en-US" sz="1000" dirty="0">
-                <a:solidFill>
-                  <a:srgbClr val="9CA3AF"/>
-                </a:solidFill>
-              </a:rPr>
-              <a:t>SceneGap Edge · Stage I</a:t>
-            </a:r>
-            <a:endParaRPr lang="en-US" sz="1000" dirty="0"/>
-          </a:p>
-        </p:txBody>
-      </p:sp>
-      <p:graphicFrame>
-        <p:nvGraphicFramePr>
-          <p:cNvPr id="28" name="Table 0"/>
-          <p:cNvGraphicFramePr>
-            <a:graphicFrameLocks noGrp="1"/>
-          </p:cNvGraphicFramePr>
-          <p:nvPr>
-            <p:extLst>
-              <p:ext uri="{D42A27DB-BD31-4B8C-83A1-F6EECF244321}">
-                <p14:modId xmlns:p14="http://schemas.microsoft.com/office/powerpoint/2010/main" val="1579011935"/>
-              </p:ext>
-            </p:extLst>
-          </p:nvPr>
-        </p:nvGraphicFramePr>
-        <p:xfrm>
-          <a:off x="640080" y="1600200"/>
-          <a:ext cx="10881360" cy="914400"/>
-        </p:xfrm>
-        <a:graphic>
-          <a:graphicData uri="http://schemas.openxmlformats.org/drawingml/2006/table">
-            <a:tbl>
-              <a:tblPr/>
-              <a:tblGrid>
-                <a:gridCol w="539572"/>
-                <a:gridCol w="5935287"/>
-                <a:gridCol w="2787786"/>
-                <a:gridCol w="1618715"/>
-              </a:tblGrid>
-              <a:tr h="358140">
-                <a:tc>
-                  <a:txBody>
-                    <a:bodyPr/>
-                    <a:lstStyle/>
-                    <a:p>
-                      <a:pPr indent="0" marL="0">
-                        <a:buNone/>
-                      </a:pPr>
-                      <a:r>
-                        <a:rPr lang="en-US" sz="1000" b="1" dirty="0">
-                          <a:solidFill>
-                            <a:srgbClr val="6B7280"/>
-                          </a:solidFill>
-                          <a:latin typeface="Microsoft JhengHei" pitchFamily="34" charset="0"/>
-                          <a:ea typeface="Microsoft JhengHei" pitchFamily="34" charset="-122"/>
-                          <a:cs typeface="Microsoft JhengHei" pitchFamily="34" charset="-120"/>
-                        </a:rPr>
-                        <a:t>#</a:t>
-                      </a:r>
-                      <a:endParaRPr lang="en-US" sz="1000" dirty="0">
-                        <a:latin typeface="Microsoft JhengHei" charset="0"/>
-                        <a:ea typeface="Microsoft JhengHei" charset="0"/>
-                        <a:cs typeface="Microsoft JhengHei" charset="0"/>
-                      </a:endParaRPr>
-                    </a:p>
-                  </a:txBody>
-                  <a:tcPr marL="101600" marR="101600" marT="50800" marB="50800" anchor="ctr">
-                    <a:lnL w="0" cap="flat" cmpd="sng" algn="ctr">
-                      <a:noFill/>
-                    </a:lnL>
-                    <a:lnR w="0" cap="flat" cmpd="sng" algn="ctr">
-                      <a:noFill/>
-                    </a:lnR>
-                    <a:lnT w="0" cap="flat" cmpd="sng" algn="ctr">
-                      <a:noFill/>
-                    </a:lnT>
-                    <a:lnB w="15875" cap="flat" cmpd="sng" algn="ctr">
-                      <a:solidFill>
-                        <a:srgbClr val="111118"/>
-                      </a:solidFill>
-                      <a:prstDash val="solid"/>
-                      <a:round/>
-                      <a:headEnd type="none" w="med" len="med"/>
-                      <a:tailEnd type="none" w="med" len="med"/>
-                    </a:lnB>
-                    <a:solidFill>
-                      <a:srgbClr val="FFFFFF"/>
-                    </a:solidFill>
-                  </a:tcPr>
-                </a:tc>
-                <a:tc>
-                  <a:txBody>
-                    <a:bodyPr/>
-                    <a:lstStyle/>
-                    <a:p>
-                      <a:pPr indent="0" marL="0">
-                        <a:buNone/>
-                      </a:pPr>
-                      <a:r>
-                        <a:rPr lang="en-US" sz="1000" b="1" dirty="0">
-                          <a:solidFill>
-                            <a:srgbClr val="6B7280"/>
-                          </a:solidFill>
-                          <a:latin typeface="Microsoft JhengHei" pitchFamily="34" charset="0"/>
-                          <a:ea typeface="Microsoft JhengHei" pitchFamily="34" charset="-122"/>
-                          <a:cs typeface="Microsoft JhengHei" pitchFamily="34" charset="-120"/>
-                        </a:rPr>
-                        <a:t>WIKIMEDIA COMMONS FILE</a:t>
-                      </a:r>
-                      <a:endParaRPr lang="en-US" sz="1000" dirty="0">
-                        <a:latin typeface="Microsoft JhengHei" charset="0"/>
-                        <a:ea typeface="Microsoft JhengHei" charset="0"/>
-                        <a:cs typeface="Microsoft JhengHei" charset="0"/>
-                      </a:endParaRPr>
-                    </a:p>
-                  </a:txBody>
-                  <a:tcPr marL="101600" marR="101600" marT="50800" marB="50800" anchor="ctr">
-                    <a:lnL w="0" cap="flat" cmpd="sng" algn="ctr">
-                      <a:noFill/>
-                    </a:lnL>
-                    <a:lnR w="0" cap="flat" cmpd="sng" algn="ctr">
-                      <a:noFill/>
-                    </a:lnR>
-                    <a:lnT w="0" cap="flat" cmpd="sng" algn="ctr">
-                      <a:noFill/>
-                    </a:lnT>
-                    <a:lnB w="15875" cap="flat" cmpd="sng" algn="ctr">
-                      <a:solidFill>
-                        <a:srgbClr val="111118"/>
-                      </a:solidFill>
-                      <a:prstDash val="solid"/>
-                      <a:round/>
-                      <a:headEnd type="none" w="med" len="med"/>
-                      <a:tailEnd type="none" w="med" len="med"/>
-                    </a:lnB>
-                    <a:solidFill>
-                      <a:srgbClr val="FFFFFF"/>
-                    </a:solidFill>
-                  </a:tcPr>
-                </a:tc>
-                <a:tc>
-                  <a:txBody>
-                    <a:bodyPr/>
-                    <a:lstStyle/>
-                    <a:p>
-                      <a:pPr indent="0" marL="0">
-                        <a:buNone/>
-                      </a:pPr>
-                      <a:r>
-                        <a:rPr lang="en-US" sz="1000" b="1" dirty="0">
-                          <a:solidFill>
-                            <a:srgbClr val="6B7280"/>
-                          </a:solidFill>
-                          <a:latin typeface="Microsoft JhengHei" pitchFamily="34" charset="0"/>
-                          <a:ea typeface="Microsoft JhengHei" pitchFamily="34" charset="-122"/>
-                          <a:cs typeface="Microsoft JhengHei" pitchFamily="34" charset="-120"/>
-                        </a:rPr>
-                        <a:t>AUTHOR</a:t>
-                      </a:r>
-                      <a:endParaRPr lang="en-US" sz="1000" dirty="0">
-                        <a:latin typeface="Microsoft JhengHei" charset="0"/>
-                        <a:ea typeface="Microsoft JhengHei" charset="0"/>
-                        <a:cs typeface="Microsoft JhengHei" charset="0"/>
-                      </a:endParaRPr>
-                    </a:p>
-                  </a:txBody>
-                  <a:tcPr marL="101600" marR="101600" marT="50800" marB="50800" anchor="ctr">
-                    <a:lnL w="0" cap="flat" cmpd="sng" algn="ctr">
-                      <a:noFill/>
-                    </a:lnL>
-                    <a:lnR w="0" cap="flat" cmpd="sng" algn="ctr">
-                      <a:noFill/>
-                    </a:lnR>
-                    <a:lnT w="0" cap="flat" cmpd="sng" algn="ctr">
-                      <a:noFill/>
-                    </a:lnT>
-                    <a:lnB w="15875" cap="flat" cmpd="sng" algn="ctr">
-                      <a:solidFill>
-                        <a:srgbClr val="111118"/>
-                      </a:solidFill>
-                      <a:prstDash val="solid"/>
-                      <a:round/>
-                      <a:headEnd type="none" w="med" len="med"/>
-                      <a:tailEnd type="none" w="med" len="med"/>
-                    </a:lnB>
-                    <a:solidFill>
-                      <a:srgbClr val="FFFFFF"/>
-                    </a:solidFill>
-                  </a:tcPr>
-                </a:tc>
-                <a:tc>
-                  <a:txBody>
-                    <a:bodyPr/>
-                    <a:lstStyle/>
-                    <a:p>
-                      <a:pPr indent="0" marL="0">
-                        <a:buNone/>
-                      </a:pPr>
-                      <a:r>
-                        <a:rPr lang="en-US" sz="1000" b="1" dirty="0">
-                          <a:solidFill>
-                            <a:srgbClr val="6B7280"/>
-                          </a:solidFill>
-                          <a:latin typeface="Microsoft JhengHei" pitchFamily="34" charset="0"/>
-                          <a:ea typeface="Microsoft JhengHei" pitchFamily="34" charset="-122"/>
-                          <a:cs typeface="Microsoft JhengHei" pitchFamily="34" charset="-120"/>
-                        </a:rPr>
-                        <a:t>LICENCE</a:t>
-                      </a:r>
-                      <a:endParaRPr lang="en-US" sz="1000" dirty="0">
-                        <a:latin typeface="Microsoft JhengHei" charset="0"/>
-                        <a:ea typeface="Microsoft JhengHei" charset="0"/>
-                        <a:cs typeface="Microsoft JhengHei" charset="0"/>
-                      </a:endParaRPr>
-                    </a:p>
-                  </a:txBody>
-                  <a:tcPr marL="101600" marR="101600" marT="50800" marB="50800" anchor="ctr">
-                    <a:lnL w="0" cap="flat" cmpd="sng" algn="ctr">
-                      <a:noFill/>
-                    </a:lnL>
-                    <a:lnR w="0" cap="flat" cmpd="sng" algn="ctr">
-                      <a:noFill/>
-                    </a:lnR>
-                    <a:lnT w="0" cap="flat" cmpd="sng" algn="ctr">
-                      <a:noFill/>
-                    </a:lnT>
-                    <a:lnB w="15875" cap="flat" cmpd="sng" algn="ctr">
-                      <a:solidFill>
-                        <a:srgbClr val="111118"/>
-                      </a:solidFill>
-                      <a:prstDash val="solid"/>
-                      <a:round/>
-                      <a:headEnd type="none" w="med" len="med"/>
-                      <a:tailEnd type="none" w="med" len="med"/>
-                    </a:lnB>
-                    <a:solidFill>
-                      <a:srgbClr val="FFFFFF"/>
-                    </a:solidFill>
-                  </a:tcPr>
-                </a:tc>
-              </a:tr>
-              <a:tr h="358140">
-                <a:tc>
-                  <a:txBody>
-                    <a:bodyPr/>
-                    <a:lstStyle/>
-                    <a:p>
-                      <a:pPr indent="0" marL="0">
-                        <a:buNone/>
-                      </a:pPr>
-                      <a:r>
-                        <a:rPr lang="en-US" sz="900" dirty="0">
-                          <a:solidFill>
-                            <a:srgbClr val="111118"/>
-                          </a:solidFill>
-                          <a:latin typeface="Microsoft JhengHei" pitchFamily="34" charset="0"/>
-                          <a:ea typeface="Microsoft JhengHei" pitchFamily="34" charset="-122"/>
-                          <a:cs typeface="Microsoft JhengHei" pitchFamily="34" charset="-120"/>
-                        </a:rPr>
-                        <a:t>033</a:t>
-                      </a:r>
-                      <a:endParaRPr lang="en-US" sz="900" dirty="0">
-                        <a:latin typeface="Microsoft JhengHei" charset="0"/>
-                        <a:ea typeface="Microsoft JhengHei" charset="0"/>
-                        <a:cs typeface="Microsoft JhengHei" charset="0"/>
-                      </a:endParaRPr>
-                    </a:p>
-                  </a:txBody>
-                  <a:tcPr marL="101600" marR="101600" marT="50800" marB="50800" anchor="ctr">
-                    <a:lnL w="0" cap="flat" cmpd="sng" algn="ctr">
-                      <a:noFill/>
-                    </a:lnL>
-                    <a:lnR w="0" cap="flat" cmpd="sng" algn="ctr">
-                      <a:noFill/>
-                    </a:lnR>
-                    <a:lnT w="0" cap="flat" cmpd="sng" algn="ctr">
-                      <a:noFill/>
-                    </a:lnT>
-                    <a:lnB w="6350" cap="flat" cmpd="sng" algn="ctr">
-                      <a:solidFill>
-                        <a:srgbClr val="E5E7EB"/>
-                      </a:solidFill>
-                      <a:prstDash val="solid"/>
-                      <a:round/>
-                      <a:headEnd type="none" w="med" len="med"/>
-                      <a:tailEnd type="none" w="med" len="med"/>
-                    </a:lnB>
-                    <a:solidFill>
-                      <a:srgbClr val="FFFFFF"/>
-                    </a:solidFill>
-                  </a:tcPr>
-                </a:tc>
-                <a:tc>
-                  <a:txBody>
-                    <a:bodyPr/>
-                    <a:lstStyle/>
-                    <a:p>
-                      <a:pPr indent="0" marL="0">
-                        <a:buNone/>
-                      </a:pPr>
-                      <a:r>
-                        <a:rPr lang="en-US" sz="900" dirty="0">
-                          <a:solidFill>
-                            <a:srgbClr val="111118"/>
-                          </a:solidFill>
-                          <a:latin typeface="Microsoft JhengHei" pitchFamily="34" charset="0"/>
-                          <a:ea typeface="Microsoft JhengHei" pitchFamily="34" charset="-122"/>
-                          <a:cs typeface="Microsoft JhengHei" pitchFamily="34" charset="-120"/>
-                        </a:rPr>
-                        <a:t>Bosnian coffee with rahat lokum, Kujundziluk and Old Bridge in Mostar - Bosnia and Herzegovina (2026)-bs.webm</a:t>
-                      </a:r>
-                      <a:endParaRPr lang="en-US" sz="900" dirty="0">
-                        <a:latin typeface="Microsoft JhengHei" charset="0"/>
-                        <a:ea typeface="Microsoft JhengHei" charset="0"/>
-                        <a:cs typeface="Microsoft JhengHei" charset="0"/>
-                      </a:endParaRPr>
-                    </a:p>
-                  </a:txBody>
-                  <a:tcPr marL="101600" marR="101600" marT="50800" marB="50800" anchor="ctr">
-                    <a:lnL w="0" cap="flat" cmpd="sng" algn="ctr">
-                      <a:noFill/>
-                    </a:lnL>
-                    <a:lnR w="0" cap="flat" cmpd="sng" algn="ctr">
-                      <a:noFill/>
-                    </a:lnR>
-                    <a:lnT w="0" cap="flat" cmpd="sng" algn="ctr">
-                      <a:noFill/>
-                    </a:lnT>
-                    <a:lnB w="6350" cap="flat" cmpd="sng" algn="ctr">
-                      <a:solidFill>
-                        <a:srgbClr val="E5E7EB"/>
-                      </a:solidFill>
-                      <a:prstDash val="solid"/>
-                      <a:round/>
-                      <a:headEnd type="none" w="med" len="med"/>
-                      <a:tailEnd type="none" w="med" len="med"/>
-                    </a:lnB>
-                    <a:solidFill>
-                      <a:srgbClr val="FFFFFF"/>
-                    </a:solidFill>
-                  </a:tcPr>
-                </a:tc>
-                <a:tc>
-                  <a:txBody>
-                    <a:bodyPr/>
-                    <a:lstStyle/>
-                    <a:p>
-                      <a:pPr indent="0" marL="0">
-                        <a:buNone/>
-                      </a:pPr>
-                      <a:r>
-                        <a:rPr lang="en-US" sz="900" dirty="0">
-                          <a:solidFill>
-                            <a:srgbClr val="111118"/>
-                          </a:solidFill>
-                          <a:latin typeface="Microsoft JhengHei" pitchFamily="34" charset="0"/>
-                          <a:ea typeface="Microsoft JhengHei" pitchFamily="34" charset="-122"/>
-                          <a:cs typeface="Microsoft JhengHei" pitchFamily="34" charset="-120"/>
-                        </a:rPr>
-                        <a:t>Minja Klarić</a:t>
-                      </a:r>
-                      <a:endParaRPr lang="en-US" sz="900" dirty="0">
-                        <a:latin typeface="Microsoft JhengHei" charset="0"/>
-                        <a:ea typeface="Microsoft JhengHei" charset="0"/>
-                        <a:cs typeface="Microsoft JhengHei" charset="0"/>
-                      </a:endParaRPr>
-                    </a:p>
-                  </a:txBody>
-                  <a:tcPr marL="101600" marR="101600" marT="50800" marB="50800" anchor="ctr">
-                    <a:lnL w="0" cap="flat" cmpd="sng" algn="ctr">
-                      <a:noFill/>
-                    </a:lnL>
-                    <a:lnR w="0" cap="flat" cmpd="sng" algn="ctr">
-                      <a:noFill/>
-                    </a:lnR>
-                    <a:lnT w="0" cap="flat" cmpd="sng" algn="ctr">
-                      <a:noFill/>
-                    </a:lnT>
-                    <a:lnB w="6350" cap="flat" cmpd="sng" algn="ctr">
-                      <a:solidFill>
-                        <a:srgbClr val="E5E7EB"/>
-                      </a:solidFill>
-                      <a:prstDash val="solid"/>
-                      <a:round/>
-                      <a:headEnd type="none" w="med" len="med"/>
-                      <a:tailEnd type="none" w="med" len="med"/>
-                    </a:lnB>
-                    <a:solidFill>
-                      <a:srgbClr val="FFFFFF"/>
-                    </a:solidFill>
-                  </a:tcPr>
-                </a:tc>
-                <a:tc>
-                  <a:txBody>
-                    <a:bodyPr/>
-                    <a:lstStyle/>
-                    <a:p>
-                      <a:pPr indent="0" marL="0">
-                        <a:buNone/>
-                      </a:pPr>
-                      <a:r>
-                        <a:rPr lang="en-US" sz="900" dirty="0">
-                          <a:solidFill>
-                            <a:srgbClr val="111118"/>
-                          </a:solidFill>
-                          <a:latin typeface="Microsoft JhengHei" pitchFamily="34" charset="0"/>
-                          <a:ea typeface="Microsoft JhengHei" pitchFamily="34" charset="-122"/>
-                          <a:cs typeface="Microsoft JhengHei" pitchFamily="34" charset="-120"/>
-                        </a:rPr>
-                        <a:t>CC BY-SA 4.0</a:t>
-                      </a:r>
-                      <a:endParaRPr lang="en-US" sz="900" dirty="0">
-                        <a:latin typeface="Microsoft JhengHei" charset="0"/>
-                        <a:ea typeface="Microsoft JhengHei" charset="0"/>
-                        <a:cs typeface="Microsoft JhengHei" charset="0"/>
-                      </a:endParaRPr>
-                    </a:p>
-                  </a:txBody>
-                  <a:tcPr marL="101600" marR="101600" marT="50800" marB="50800" anchor="ctr">
-                    <a:lnL w="0" cap="flat" cmpd="sng" algn="ctr">
-                      <a:noFill/>
-                    </a:lnL>
-                    <a:lnR w="0" cap="flat" cmpd="sng" algn="ctr">
-                      <a:noFill/>
-                    </a:lnR>
-                    <a:lnT w="0" cap="flat" cmpd="sng" algn="ctr">
-                      <a:noFill/>
-                    </a:lnT>
-                    <a:lnB w="6350" cap="flat" cmpd="sng" algn="ctr">
-                      <a:solidFill>
-                        <a:srgbClr val="E5E7EB"/>
-                      </a:solidFill>
-                      <a:prstDash val="solid"/>
-                      <a:round/>
-                      <a:headEnd type="none" w="med" len="med"/>
-                      <a:tailEnd type="none" w="med" len="med"/>
-                    </a:lnB>
-                    <a:solidFill>
-                      <a:srgbClr val="FFFFFF"/>
-                    </a:solidFill>
-                  </a:tcPr>
-                </a:tc>
-              </a:tr>
-              <a:tr h="358140">
-                <a:tc>
-                  <a:txBody>
-                    <a:bodyPr/>
-                    <a:lstStyle/>
-                    <a:p>
-                      <a:pPr indent="0" marL="0">
-                        <a:buNone/>
-                      </a:pPr>
-                      <a:r>
-                        <a:rPr lang="en-US" sz="900" dirty="0">
-                          <a:solidFill>
-                            <a:srgbClr val="111118"/>
-                          </a:solidFill>
-                          <a:latin typeface="Microsoft JhengHei" pitchFamily="34" charset="0"/>
-                          <a:ea typeface="Microsoft JhengHei" pitchFamily="34" charset="-122"/>
-                          <a:cs typeface="Microsoft JhengHei" pitchFamily="34" charset="-120"/>
-                        </a:rPr>
-                        <a:t>034</a:t>
-                      </a:r>
-                      <a:endParaRPr lang="en-US" sz="900" dirty="0">
-                        <a:latin typeface="Microsoft JhengHei" charset="0"/>
-                        <a:ea typeface="Microsoft JhengHei" charset="0"/>
-                        <a:cs typeface="Microsoft JhengHei" charset="0"/>
-                      </a:endParaRPr>
-                    </a:p>
-                  </a:txBody>
-                  <a:tcPr marL="101600" marR="101600" marT="50800" marB="50800" anchor="ctr">
-                    <a:lnL w="0" cap="flat" cmpd="sng" algn="ctr">
-                      <a:noFill/>
-                    </a:lnL>
-                    <a:lnR w="0" cap="flat" cmpd="sng" algn="ctr">
-                      <a:noFill/>
-                    </a:lnR>
-                    <a:lnT w="0" cap="flat" cmpd="sng" algn="ctr">
-                      <a:noFill/>
-                    </a:lnT>
-                    <a:lnB w="6350" cap="flat" cmpd="sng" algn="ctr">
-                      <a:solidFill>
-                        <a:srgbClr val="E5E7EB"/>
-                      </a:solidFill>
-                      <a:prstDash val="solid"/>
-                      <a:round/>
-                      <a:headEnd type="none" w="med" len="med"/>
-                      <a:tailEnd type="none" w="med" len="med"/>
-                    </a:lnB>
-                    <a:solidFill>
-                      <a:srgbClr val="FFFFFF"/>
-                    </a:solidFill>
-                  </a:tcPr>
-                </a:tc>
-                <a:tc>
-                  <a:txBody>
-                    <a:bodyPr/>
-                    <a:lstStyle/>
-                    <a:p>
-                      <a:pPr indent="0" marL="0">
-                        <a:buNone/>
-                      </a:pPr>
-                      <a:r>
-                        <a:rPr lang="en-US" sz="900" dirty="0">
-                          <a:solidFill>
-                            <a:srgbClr val="111118"/>
-                          </a:solidFill>
-                          <a:latin typeface="Microsoft JhengHei" pitchFamily="34" charset="0"/>
-                          <a:ea typeface="Microsoft JhengHei" pitchFamily="34" charset="-122"/>
-                          <a:cs typeface="Microsoft JhengHei" pitchFamily="34" charset="-120"/>
-                        </a:rPr>
-                        <a:t>A cup of Kenyan Coffee.webm</a:t>
-                      </a:r>
-                      <a:endParaRPr lang="en-US" sz="900" dirty="0">
-                        <a:latin typeface="Microsoft JhengHei" charset="0"/>
-                        <a:ea typeface="Microsoft JhengHei" charset="0"/>
-                        <a:cs typeface="Microsoft JhengHei" charset="0"/>
-                      </a:endParaRPr>
-                    </a:p>
-                  </a:txBody>
-                  <a:tcPr marL="101600" marR="101600" marT="50800" marB="50800" anchor="ctr">
-                    <a:lnL w="0" cap="flat" cmpd="sng" algn="ctr">
-                      <a:noFill/>
-                    </a:lnL>
-                    <a:lnR w="0" cap="flat" cmpd="sng" algn="ctr">
-                      <a:noFill/>
-                    </a:lnR>
-                    <a:lnT w="0" cap="flat" cmpd="sng" algn="ctr">
-                      <a:noFill/>
-                    </a:lnT>
-                    <a:lnB w="6350" cap="flat" cmpd="sng" algn="ctr">
-                      <a:solidFill>
-                        <a:srgbClr val="E5E7EB"/>
-                      </a:solidFill>
-                      <a:prstDash val="solid"/>
-                      <a:round/>
-                      <a:headEnd type="none" w="med" len="med"/>
-                      <a:tailEnd type="none" w="med" len="med"/>
-                    </a:lnB>
-                    <a:solidFill>
-                      <a:srgbClr val="FFFFFF"/>
-                    </a:solidFill>
-                  </a:tcPr>
-                </a:tc>
-                <a:tc>
-                  <a:txBody>
-                    <a:bodyPr/>
-                    <a:lstStyle/>
-                    <a:p>
-                      <a:pPr indent="0" marL="0">
-                        <a:buNone/>
-                      </a:pPr>
-                      <a:r>
-                        <a:rPr lang="en-US" sz="900" dirty="0">
-                          <a:solidFill>
-                            <a:srgbClr val="111118"/>
-                          </a:solidFill>
-                          <a:latin typeface="Microsoft JhengHei" pitchFamily="34" charset="0"/>
-                          <a:ea typeface="Microsoft JhengHei" pitchFamily="34" charset="-122"/>
-                          <a:cs typeface="Microsoft JhengHei" pitchFamily="34" charset="-120"/>
-                        </a:rPr>
-                        <a:t>Queen Asali</a:t>
-                      </a:r>
-                      <a:endParaRPr lang="en-US" sz="900" dirty="0">
-                        <a:latin typeface="Microsoft JhengHei" charset="0"/>
-                        <a:ea typeface="Microsoft JhengHei" charset="0"/>
-                        <a:cs typeface="Microsoft JhengHei" charset="0"/>
-                      </a:endParaRPr>
-                    </a:p>
-                  </a:txBody>
-                  <a:tcPr marL="101600" marR="101600" marT="50800" marB="50800" anchor="ctr">
-                    <a:lnL w="0" cap="flat" cmpd="sng" algn="ctr">
-                      <a:noFill/>
-                    </a:lnL>
-                    <a:lnR w="0" cap="flat" cmpd="sng" algn="ctr">
-                      <a:noFill/>
-                    </a:lnR>
-                    <a:lnT w="0" cap="flat" cmpd="sng" algn="ctr">
-                      <a:noFill/>
-                    </a:lnT>
-                    <a:lnB w="6350" cap="flat" cmpd="sng" algn="ctr">
-                      <a:solidFill>
-                        <a:srgbClr val="E5E7EB"/>
-                      </a:solidFill>
-                      <a:prstDash val="solid"/>
-                      <a:round/>
-                      <a:headEnd type="none" w="med" len="med"/>
-                      <a:tailEnd type="none" w="med" len="med"/>
-                    </a:lnB>
-                    <a:solidFill>
-                      <a:srgbClr val="FFFFFF"/>
-                    </a:solidFill>
-                  </a:tcPr>
-                </a:tc>
-                <a:tc>
-                  <a:txBody>
-                    <a:bodyPr/>
-                    <a:lstStyle/>
-                    <a:p>
-                      <a:pPr indent="0" marL="0">
-                        <a:buNone/>
-                      </a:pPr>
-                      <a:r>
-                        <a:rPr lang="en-US" sz="900" dirty="0">
-                          <a:solidFill>
-                            <a:srgbClr val="111118"/>
-                          </a:solidFill>
-                          <a:latin typeface="Microsoft JhengHei" pitchFamily="34" charset="0"/>
-                          <a:ea typeface="Microsoft JhengHei" pitchFamily="34" charset="-122"/>
-                          <a:cs typeface="Microsoft JhengHei" pitchFamily="34" charset="-120"/>
-                        </a:rPr>
-                        <a:t>CC BY-SA 4.0</a:t>
-                      </a:r>
-                      <a:endParaRPr lang="en-US" sz="900" dirty="0">
-                        <a:latin typeface="Microsoft JhengHei" charset="0"/>
-                        <a:ea typeface="Microsoft JhengHei" charset="0"/>
-                        <a:cs typeface="Microsoft JhengHei" charset="0"/>
-                      </a:endParaRPr>
-                    </a:p>
-                  </a:txBody>
-                  <a:tcPr marL="101600" marR="101600" marT="50800" marB="50800" anchor="ctr">
-                    <a:lnL w="0" cap="flat" cmpd="sng" algn="ctr">
-                      <a:noFill/>
-                    </a:lnL>
-                    <a:lnR w="0" cap="flat" cmpd="sng" algn="ctr">
-                      <a:noFill/>
-                    </a:lnR>
-                    <a:lnT w="0" cap="flat" cmpd="sng" algn="ctr">
-                      <a:noFill/>
-                    </a:lnT>
-                    <a:lnB w="6350" cap="flat" cmpd="sng" algn="ctr">
-                      <a:solidFill>
-                        <a:srgbClr val="E5E7EB"/>
-                      </a:solidFill>
-                      <a:prstDash val="solid"/>
-                      <a:round/>
-                      <a:headEnd type="none" w="med" len="med"/>
-                      <a:tailEnd type="none" w="med" len="med"/>
-                    </a:lnB>
-                    <a:solidFill>
-                      <a:srgbClr val="FFFFFF"/>
-                    </a:solidFill>
-                  </a:tcPr>
-                </a:tc>
-              </a:tr>
-              <a:tr h="358140">
-                <a:tc>
-                  <a:txBody>
-                    <a:bodyPr/>
-                    <a:lstStyle/>
-                    <a:p>
-                      <a:pPr indent="0" marL="0">
-                        <a:buNone/>
-                      </a:pPr>
-                      <a:r>
-                        <a:rPr lang="en-US" sz="900" dirty="0">
-                          <a:solidFill>
-                            <a:srgbClr val="111118"/>
-                          </a:solidFill>
-                          <a:latin typeface="Microsoft JhengHei" pitchFamily="34" charset="0"/>
-                          <a:ea typeface="Microsoft JhengHei" pitchFamily="34" charset="-122"/>
-                          <a:cs typeface="Microsoft JhengHei" pitchFamily="34" charset="-120"/>
-                        </a:rPr>
-                        <a:t>035</a:t>
-                      </a:r>
-                      <a:endParaRPr lang="en-US" sz="900" dirty="0">
-                        <a:latin typeface="Microsoft JhengHei" charset="0"/>
-                        <a:ea typeface="Microsoft JhengHei" charset="0"/>
-                        <a:cs typeface="Microsoft JhengHei" charset="0"/>
-                      </a:endParaRPr>
-                    </a:p>
-                  </a:txBody>
-                  <a:tcPr marL="101600" marR="101600" marT="50800" marB="50800" anchor="ctr">
-                    <a:lnL w="0" cap="flat" cmpd="sng" algn="ctr">
-                      <a:noFill/>
-                    </a:lnL>
-                    <a:lnR w="0" cap="flat" cmpd="sng" algn="ctr">
-                      <a:noFill/>
-                    </a:lnR>
-                    <a:lnT w="0" cap="flat" cmpd="sng" algn="ctr">
-                      <a:noFill/>
-                    </a:lnT>
-                    <a:lnB w="6350" cap="flat" cmpd="sng" algn="ctr">
-                      <a:solidFill>
-                        <a:srgbClr val="E5E7EB"/>
-                      </a:solidFill>
-                      <a:prstDash val="solid"/>
-                      <a:round/>
-                      <a:headEnd type="none" w="med" len="med"/>
-                      <a:tailEnd type="none" w="med" len="med"/>
-                    </a:lnB>
-                    <a:solidFill>
-                      <a:srgbClr val="FFFFFF"/>
-                    </a:solidFill>
-                  </a:tcPr>
-                </a:tc>
-                <a:tc>
-                  <a:txBody>
-                    <a:bodyPr/>
-                    <a:lstStyle/>
-                    <a:p>
-                      <a:pPr indent="0" marL="0">
-                        <a:buNone/>
-                      </a:pPr>
-                      <a:r>
-                        <a:rPr lang="en-US" sz="900" dirty="0">
-                          <a:solidFill>
-                            <a:srgbClr val="111118"/>
-                          </a:solidFill>
-                          <a:latin typeface="Microsoft JhengHei" pitchFamily="34" charset="0"/>
-                          <a:ea typeface="Microsoft JhengHei" pitchFamily="34" charset="-122"/>
-                          <a:cs typeface="Microsoft JhengHei" pitchFamily="34" charset="-120"/>
-                        </a:rPr>
-                        <a:t>Latte salute.webm</a:t>
-                      </a:r>
-                      <a:endParaRPr lang="en-US" sz="900" dirty="0">
-                        <a:latin typeface="Microsoft JhengHei" charset="0"/>
-                        <a:ea typeface="Microsoft JhengHei" charset="0"/>
-                        <a:cs typeface="Microsoft JhengHei" charset="0"/>
-                      </a:endParaRPr>
-                    </a:p>
-                  </a:txBody>
-                  <a:tcPr marL="101600" marR="101600" marT="50800" marB="50800" anchor="ctr">
-                    <a:lnL w="0" cap="flat" cmpd="sng" algn="ctr">
-                      <a:noFill/>
-                    </a:lnL>
-                    <a:lnR w="0" cap="flat" cmpd="sng" algn="ctr">
-                      <a:noFill/>
-                    </a:lnR>
-                    <a:lnT w="0" cap="flat" cmpd="sng" algn="ctr">
-                      <a:noFill/>
-                    </a:lnT>
-                    <a:lnB w="6350" cap="flat" cmpd="sng" algn="ctr">
-                      <a:solidFill>
-                        <a:srgbClr val="E5E7EB"/>
-                      </a:solidFill>
-                      <a:prstDash val="solid"/>
-                      <a:round/>
-                      <a:headEnd type="none" w="med" len="med"/>
-                      <a:tailEnd type="none" w="med" len="med"/>
-                    </a:lnB>
-                    <a:solidFill>
-                      <a:srgbClr val="FFFFFF"/>
-                    </a:solidFill>
-                  </a:tcPr>
-                </a:tc>
-                <a:tc>
-                  <a:txBody>
-                    <a:bodyPr/>
-                    <a:lstStyle/>
-                    <a:p>
-                      <a:pPr indent="0" marL="0">
-                        <a:buNone/>
-                      </a:pPr>
-                      <a:r>
-                        <a:rPr lang="en-US" sz="900" dirty="0">
-                          <a:solidFill>
-                            <a:srgbClr val="111118"/>
-                          </a:solidFill>
-                          <a:latin typeface="Microsoft JhengHei" pitchFamily="34" charset="0"/>
-                          <a:ea typeface="Microsoft JhengHei" pitchFamily="34" charset="-122"/>
-                          <a:cs typeface="Microsoft JhengHei" pitchFamily="34" charset="-120"/>
-                        </a:rPr>
-                        <a:t>The White House</a:t>
-                      </a:r>
-                      <a:endParaRPr lang="en-US" sz="900" dirty="0">
-                        <a:latin typeface="Microsoft JhengHei" charset="0"/>
-                        <a:ea typeface="Microsoft JhengHei" charset="0"/>
-                        <a:cs typeface="Microsoft JhengHei" charset="0"/>
-                      </a:endParaRPr>
-                    </a:p>
-                  </a:txBody>
-                  <a:tcPr marL="101600" marR="101600" marT="50800" marB="50800" anchor="ctr">
-                    <a:lnL w="0" cap="flat" cmpd="sng" algn="ctr">
-                      <a:noFill/>
-                    </a:lnL>
-                    <a:lnR w="0" cap="flat" cmpd="sng" algn="ctr">
-                      <a:noFill/>
-                    </a:lnR>
-                    <a:lnT w="0" cap="flat" cmpd="sng" algn="ctr">
-                      <a:noFill/>
-                    </a:lnT>
-                    <a:lnB w="6350" cap="flat" cmpd="sng" algn="ctr">
-                      <a:solidFill>
-                        <a:srgbClr val="E5E7EB"/>
-                      </a:solidFill>
-                      <a:prstDash val="solid"/>
-                      <a:round/>
-                      <a:headEnd type="none" w="med" len="med"/>
-                      <a:tailEnd type="none" w="med" len="med"/>
-                    </a:lnB>
-                    <a:solidFill>
-                      <a:srgbClr val="FFFFFF"/>
-                    </a:solidFill>
-                  </a:tcPr>
-                </a:tc>
-                <a:tc>
-                  <a:txBody>
-                    <a:bodyPr/>
-                    <a:lstStyle/>
-                    <a:p>
-                      <a:pPr indent="0" marL="0">
-                        <a:buNone/>
-                      </a:pPr>
-                      <a:r>
-                        <a:rPr lang="en-US" sz="900" dirty="0">
-                          <a:solidFill>
-                            <a:srgbClr val="111118"/>
-                          </a:solidFill>
-                          <a:latin typeface="Microsoft JhengHei" pitchFamily="34" charset="0"/>
-                          <a:ea typeface="Microsoft JhengHei" pitchFamily="34" charset="-122"/>
-                          <a:cs typeface="Microsoft JhengHei" pitchFamily="34" charset="-120"/>
-                        </a:rPr>
-                        <a:t>Public domain</a:t>
-                      </a:r>
-                      <a:endParaRPr lang="en-US" sz="900" dirty="0">
-                        <a:latin typeface="Microsoft JhengHei" charset="0"/>
-                        <a:ea typeface="Microsoft JhengHei" charset="0"/>
-                        <a:cs typeface="Microsoft JhengHei" charset="0"/>
-                      </a:endParaRPr>
-                    </a:p>
-                  </a:txBody>
-                  <a:tcPr marL="101600" marR="101600" marT="50800" marB="50800" anchor="ctr">
-                    <a:lnL w="0" cap="flat" cmpd="sng" algn="ctr">
-                      <a:noFill/>
-                    </a:lnL>
-                    <a:lnR w="0" cap="flat" cmpd="sng" algn="ctr">
-                      <a:noFill/>
-                    </a:lnR>
-                    <a:lnT w="0" cap="flat" cmpd="sng" algn="ctr">
-                      <a:noFill/>
-                    </a:lnT>
-                    <a:lnB w="6350" cap="flat" cmpd="sng" algn="ctr">
-                      <a:solidFill>
-                        <a:srgbClr val="E5E7EB"/>
-                      </a:solidFill>
-                      <a:prstDash val="solid"/>
-                      <a:round/>
-                      <a:headEnd type="none" w="med" len="med"/>
-                      <a:tailEnd type="none" w="med" len="med"/>
-                    </a:lnB>
-                    <a:solidFill>
-                      <a:srgbClr val="FFFFFF"/>
-                    </a:solidFill>
-                  </a:tcPr>
-                </a:tc>
-              </a:tr>
-              <a:tr h="358140">
-                <a:tc>
-                  <a:txBody>
-                    <a:bodyPr/>
-                    <a:lstStyle/>
-                    <a:p>
-                      <a:pPr indent="0" marL="0">
-                        <a:buNone/>
-                      </a:pPr>
-                      <a:r>
-                        <a:rPr lang="en-US" sz="900" dirty="0">
-                          <a:solidFill>
-                            <a:srgbClr val="111118"/>
-                          </a:solidFill>
-                          <a:latin typeface="Microsoft JhengHei" pitchFamily="34" charset="0"/>
-                          <a:ea typeface="Microsoft JhengHei" pitchFamily="34" charset="-122"/>
-                          <a:cs typeface="Microsoft JhengHei" pitchFamily="34" charset="-120"/>
-                        </a:rPr>
-                        <a:t>036</a:t>
-                      </a:r>
-                      <a:endParaRPr lang="en-US" sz="900" dirty="0">
-                        <a:latin typeface="Microsoft JhengHei" charset="0"/>
-                        <a:ea typeface="Microsoft JhengHei" charset="0"/>
-                        <a:cs typeface="Microsoft JhengHei" charset="0"/>
-                      </a:endParaRPr>
-                    </a:p>
-                  </a:txBody>
-                  <a:tcPr marL="101600" marR="101600" marT="50800" marB="50800" anchor="ctr">
-                    <a:lnL w="0" cap="flat" cmpd="sng" algn="ctr">
-                      <a:noFill/>
-                    </a:lnL>
-                    <a:lnR w="0" cap="flat" cmpd="sng" algn="ctr">
-                      <a:noFill/>
-                    </a:lnR>
-                    <a:lnT w="0" cap="flat" cmpd="sng" algn="ctr">
-                      <a:noFill/>
-                    </a:lnT>
-                    <a:lnB w="6350" cap="flat" cmpd="sng" algn="ctr">
-                      <a:solidFill>
-                        <a:srgbClr val="E5E7EB"/>
-                      </a:solidFill>
-                      <a:prstDash val="solid"/>
-                      <a:round/>
-                      <a:headEnd type="none" w="med" len="med"/>
-                      <a:tailEnd type="none" w="med" len="med"/>
-                    </a:lnB>
-                    <a:solidFill>
-                      <a:srgbClr val="FFFFFF"/>
-                    </a:solidFill>
-                  </a:tcPr>
-                </a:tc>
-                <a:tc>
-                  <a:txBody>
-                    <a:bodyPr/>
-                    <a:lstStyle/>
-                    <a:p>
-                      <a:pPr indent="0" marL="0">
-                        <a:buNone/>
-                      </a:pPr>
-                      <a:r>
-                        <a:rPr lang="en-US" sz="900" dirty="0">
-                          <a:solidFill>
-                            <a:srgbClr val="111118"/>
-                          </a:solidFill>
-                          <a:latin typeface="Microsoft JhengHei" pitchFamily="34" charset="0"/>
-                          <a:ea typeface="Microsoft JhengHei" pitchFamily="34" charset="-122"/>
-                          <a:cs typeface="Microsoft JhengHei" pitchFamily="34" charset="-120"/>
-                        </a:rPr>
-                        <a:t>Turkish tea 2015.webm</a:t>
-                      </a:r>
-                      <a:endParaRPr lang="en-US" sz="900" dirty="0">
-                        <a:latin typeface="Microsoft JhengHei" charset="0"/>
-                        <a:ea typeface="Microsoft JhengHei" charset="0"/>
-                        <a:cs typeface="Microsoft JhengHei" charset="0"/>
-                      </a:endParaRPr>
-                    </a:p>
-                  </a:txBody>
-                  <a:tcPr marL="101600" marR="101600" marT="50800" marB="50800" anchor="ctr">
-                    <a:lnL w="0" cap="flat" cmpd="sng" algn="ctr">
-                      <a:noFill/>
-                    </a:lnL>
-                    <a:lnR w="0" cap="flat" cmpd="sng" algn="ctr">
-                      <a:noFill/>
-                    </a:lnR>
-                    <a:lnT w="0" cap="flat" cmpd="sng" algn="ctr">
-                      <a:noFill/>
-                    </a:lnT>
-                    <a:lnB w="6350" cap="flat" cmpd="sng" algn="ctr">
-                      <a:solidFill>
-                        <a:srgbClr val="E5E7EB"/>
-                      </a:solidFill>
-                      <a:prstDash val="solid"/>
-                      <a:round/>
-                      <a:headEnd type="none" w="med" len="med"/>
-                      <a:tailEnd type="none" w="med" len="med"/>
-                    </a:lnB>
-                    <a:solidFill>
-                      <a:srgbClr val="FFFFFF"/>
-                    </a:solidFill>
-                  </a:tcPr>
-                </a:tc>
-                <a:tc>
-                  <a:txBody>
-                    <a:bodyPr/>
-                    <a:lstStyle/>
-                    <a:p>
-                      <a:pPr indent="0" marL="0">
-                        <a:buNone/>
-                      </a:pPr>
-                      <a:r>
-                        <a:rPr lang="en-US" sz="900" dirty="0">
-                          <a:solidFill>
-                            <a:srgbClr val="111118"/>
-                          </a:solidFill>
-                          <a:latin typeface="Microsoft JhengHei" pitchFamily="34" charset="0"/>
-                          <a:ea typeface="Microsoft JhengHei" pitchFamily="34" charset="-122"/>
-                          <a:cs typeface="Microsoft JhengHei" pitchFamily="34" charset="-120"/>
-                        </a:rPr>
-                        <a:t>Klapi</a:t>
-                      </a:r>
-                      <a:endParaRPr lang="en-US" sz="900" dirty="0">
-                        <a:latin typeface="Microsoft JhengHei" charset="0"/>
-                        <a:ea typeface="Microsoft JhengHei" charset="0"/>
-                        <a:cs typeface="Microsoft JhengHei" charset="0"/>
-                      </a:endParaRPr>
-                    </a:p>
-                  </a:txBody>
-                  <a:tcPr marL="101600" marR="101600" marT="50800" marB="50800" anchor="ctr">
-                    <a:lnL w="0" cap="flat" cmpd="sng" algn="ctr">
-                      <a:noFill/>
-                    </a:lnL>
-                    <a:lnR w="0" cap="flat" cmpd="sng" algn="ctr">
-                      <a:noFill/>
-                    </a:lnR>
-                    <a:lnT w="0" cap="flat" cmpd="sng" algn="ctr">
-                      <a:noFill/>
-                    </a:lnT>
-                    <a:lnB w="6350" cap="flat" cmpd="sng" algn="ctr">
-                      <a:solidFill>
-                        <a:srgbClr val="E5E7EB"/>
-                      </a:solidFill>
-                      <a:prstDash val="solid"/>
-                      <a:round/>
-                      <a:headEnd type="none" w="med" len="med"/>
-                      <a:tailEnd type="none" w="med" len="med"/>
-                    </a:lnB>
-                    <a:solidFill>
-                      <a:srgbClr val="FFFFFF"/>
-                    </a:solidFill>
-                  </a:tcPr>
-                </a:tc>
-                <a:tc>
-                  <a:txBody>
-                    <a:bodyPr/>
-                    <a:lstStyle/>
-                    <a:p>
-                      <a:pPr indent="0" marL="0">
-                        <a:buNone/>
-                      </a:pPr>
-                      <a:r>
-                        <a:rPr lang="en-US" sz="900" dirty="0">
-                          <a:solidFill>
-                            <a:srgbClr val="111118"/>
-                          </a:solidFill>
-                          <a:latin typeface="Microsoft JhengHei" pitchFamily="34" charset="0"/>
-                          <a:ea typeface="Microsoft JhengHei" pitchFamily="34" charset="-122"/>
-                          <a:cs typeface="Microsoft JhengHei" pitchFamily="34" charset="-120"/>
-                        </a:rPr>
-                        <a:t>CC BY-SA 4.0</a:t>
-                      </a:r>
-                      <a:endParaRPr lang="en-US" sz="900" dirty="0">
-                        <a:latin typeface="Microsoft JhengHei" charset="0"/>
-                        <a:ea typeface="Microsoft JhengHei" charset="0"/>
-                        <a:cs typeface="Microsoft JhengHei" charset="0"/>
-                      </a:endParaRPr>
-                    </a:p>
-                  </a:txBody>
-                  <a:tcPr marL="101600" marR="101600" marT="50800" marB="50800" anchor="ctr">
-                    <a:lnL w="0" cap="flat" cmpd="sng" algn="ctr">
-                      <a:noFill/>
-                    </a:lnL>
-                    <a:lnR w="0" cap="flat" cmpd="sng" algn="ctr">
-                      <a:noFill/>
-                    </a:lnR>
-                    <a:lnT w="0" cap="flat" cmpd="sng" algn="ctr">
-                      <a:noFill/>
-                    </a:lnT>
-                    <a:lnB w="6350" cap="flat" cmpd="sng" algn="ctr">
-                      <a:solidFill>
-                        <a:srgbClr val="E5E7EB"/>
-                      </a:solidFill>
-                      <a:prstDash val="solid"/>
-                      <a:round/>
-                      <a:headEnd type="none" w="med" len="med"/>
-                      <a:tailEnd type="none" w="med" len="med"/>
-                    </a:lnB>
-                    <a:solidFill>
-                      <a:srgbClr val="FFFFFF"/>
-                    </a:solidFill>
-                  </a:tcPr>
-                </a:tc>
-              </a:tr>
-              <a:tr h="358140">
-                <a:tc>
-                  <a:txBody>
-                    <a:bodyPr/>
-                    <a:lstStyle/>
-                    <a:p>
-                      <a:pPr indent="0" marL="0">
-                        <a:buNone/>
-                      </a:pPr>
-                      <a:r>
-                        <a:rPr lang="en-US" sz="900" dirty="0">
-                          <a:solidFill>
-                            <a:srgbClr val="111118"/>
-                          </a:solidFill>
-                          <a:latin typeface="Microsoft JhengHei" pitchFamily="34" charset="0"/>
-                          <a:ea typeface="Microsoft JhengHei" pitchFamily="34" charset="-122"/>
-                          <a:cs typeface="Microsoft JhengHei" pitchFamily="34" charset="-120"/>
-                        </a:rPr>
-                        <a:t>037</a:t>
-                      </a:r>
-                      <a:endParaRPr lang="en-US" sz="900" dirty="0">
-                        <a:latin typeface="Microsoft JhengHei" charset="0"/>
-                        <a:ea typeface="Microsoft JhengHei" charset="0"/>
-                        <a:cs typeface="Microsoft JhengHei" charset="0"/>
-                      </a:endParaRPr>
-                    </a:p>
-                  </a:txBody>
-                  <a:tcPr marL="101600" marR="101600" marT="50800" marB="50800" anchor="ctr">
-                    <a:lnL w="0" cap="flat" cmpd="sng" algn="ctr">
-                      <a:noFill/>
-                    </a:lnL>
-                    <a:lnR w="0" cap="flat" cmpd="sng" algn="ctr">
-                      <a:noFill/>
-                    </a:lnR>
-                    <a:lnT w="0" cap="flat" cmpd="sng" algn="ctr">
-                      <a:noFill/>
-                    </a:lnT>
-                    <a:lnB w="6350" cap="flat" cmpd="sng" algn="ctr">
-                      <a:solidFill>
-                        <a:srgbClr val="E5E7EB"/>
-                      </a:solidFill>
-                      <a:prstDash val="solid"/>
-                      <a:round/>
-                      <a:headEnd type="none" w="med" len="med"/>
-                      <a:tailEnd type="none" w="med" len="med"/>
-                    </a:lnB>
-                    <a:solidFill>
-                      <a:srgbClr val="FFFFFF"/>
-                    </a:solidFill>
-                  </a:tcPr>
-                </a:tc>
-                <a:tc>
-                  <a:txBody>
-                    <a:bodyPr/>
-                    <a:lstStyle/>
-                    <a:p>
-                      <a:pPr indent="0" marL="0">
-                        <a:buNone/>
-                      </a:pPr>
-                      <a:r>
-                        <a:rPr lang="en-US" sz="900" dirty="0">
-                          <a:solidFill>
-                            <a:srgbClr val="111118"/>
-                          </a:solidFill>
-                          <a:latin typeface="Microsoft JhengHei" pitchFamily="34" charset="0"/>
-                          <a:ea typeface="Microsoft JhengHei" pitchFamily="34" charset="-122"/>
-                          <a:cs typeface="Microsoft JhengHei" pitchFamily="34" charset="-120"/>
-                        </a:rPr>
-                        <a:t>Jane pouring beer fast.webm</a:t>
-                      </a:r>
-                      <a:endParaRPr lang="en-US" sz="900" dirty="0">
-                        <a:latin typeface="Microsoft JhengHei" charset="0"/>
-                        <a:ea typeface="Microsoft JhengHei" charset="0"/>
-                        <a:cs typeface="Microsoft JhengHei" charset="0"/>
-                      </a:endParaRPr>
-                    </a:p>
-                  </a:txBody>
-                  <a:tcPr marL="101600" marR="101600" marT="50800" marB="50800" anchor="ctr">
-                    <a:lnL w="0" cap="flat" cmpd="sng" algn="ctr">
-                      <a:noFill/>
-                    </a:lnL>
-                    <a:lnR w="0" cap="flat" cmpd="sng" algn="ctr">
-                      <a:noFill/>
-                    </a:lnR>
-                    <a:lnT w="0" cap="flat" cmpd="sng" algn="ctr">
-                      <a:noFill/>
-                    </a:lnT>
-                    <a:lnB w="6350" cap="flat" cmpd="sng" algn="ctr">
-                      <a:solidFill>
-                        <a:srgbClr val="E5E7EB"/>
-                      </a:solidFill>
-                      <a:prstDash val="solid"/>
-                      <a:round/>
-                      <a:headEnd type="none" w="med" len="med"/>
-                      <a:tailEnd type="none" w="med" len="med"/>
-                    </a:lnB>
-                    <a:solidFill>
-                      <a:srgbClr val="FFFFFF"/>
-                    </a:solidFill>
-                  </a:tcPr>
-                </a:tc>
-                <a:tc>
-                  <a:txBody>
-                    <a:bodyPr/>
-                    <a:lstStyle/>
-                    <a:p>
-                      <a:pPr indent="0" marL="0">
-                        <a:buNone/>
-                      </a:pPr>
-                      <a:r>
-                        <a:rPr lang="en-US" sz="900" dirty="0">
-                          <a:solidFill>
-                            <a:srgbClr val="111118"/>
-                          </a:solidFill>
-                          <a:latin typeface="Microsoft JhengHei" pitchFamily="34" charset="0"/>
-                          <a:ea typeface="Microsoft JhengHei" pitchFamily="34" charset="-122"/>
-                          <a:cs typeface="Microsoft JhengHei" pitchFamily="34" charset="-120"/>
-                        </a:rPr>
-                        <a:t>Angulidayaaluta</a:t>
-                      </a:r>
-                      <a:endParaRPr lang="en-US" sz="900" dirty="0">
-                        <a:latin typeface="Microsoft JhengHei" charset="0"/>
-                        <a:ea typeface="Microsoft JhengHei" charset="0"/>
-                        <a:cs typeface="Microsoft JhengHei" charset="0"/>
-                      </a:endParaRPr>
-                    </a:p>
-                  </a:txBody>
-                  <a:tcPr marL="101600" marR="101600" marT="50800" marB="50800" anchor="ctr">
-                    <a:lnL w="0" cap="flat" cmpd="sng" algn="ctr">
-                      <a:noFill/>
-                    </a:lnL>
-                    <a:lnR w="0" cap="flat" cmpd="sng" algn="ctr">
-                      <a:noFill/>
-                    </a:lnR>
-                    <a:lnT w="0" cap="flat" cmpd="sng" algn="ctr">
-                      <a:noFill/>
-                    </a:lnT>
-                    <a:lnB w="6350" cap="flat" cmpd="sng" algn="ctr">
-                      <a:solidFill>
-                        <a:srgbClr val="E5E7EB"/>
-                      </a:solidFill>
-                      <a:prstDash val="solid"/>
-                      <a:round/>
-                      <a:headEnd type="none" w="med" len="med"/>
-                      <a:tailEnd type="none" w="med" len="med"/>
-                    </a:lnB>
-                    <a:solidFill>
-                      <a:srgbClr val="FFFFFF"/>
-                    </a:solidFill>
-                  </a:tcPr>
-                </a:tc>
-                <a:tc>
-                  <a:txBody>
-                    <a:bodyPr/>
-                    <a:lstStyle/>
-                    <a:p>
-                      <a:pPr indent="0" marL="0">
-                        <a:buNone/>
-                      </a:pPr>
-                      <a:r>
-                        <a:rPr lang="en-US" sz="900" dirty="0">
-                          <a:solidFill>
-                            <a:srgbClr val="111118"/>
-                          </a:solidFill>
-                          <a:latin typeface="Microsoft JhengHei" pitchFamily="34" charset="0"/>
-                          <a:ea typeface="Microsoft JhengHei" pitchFamily="34" charset="-122"/>
-                          <a:cs typeface="Microsoft JhengHei" pitchFamily="34" charset="-120"/>
-                        </a:rPr>
-                        <a:t>CC BY-SA 4.0</a:t>
-                      </a:r>
-                      <a:endParaRPr lang="en-US" sz="900" dirty="0">
-                        <a:latin typeface="Microsoft JhengHei" charset="0"/>
-                        <a:ea typeface="Microsoft JhengHei" charset="0"/>
-                        <a:cs typeface="Microsoft JhengHei" charset="0"/>
-                      </a:endParaRPr>
-                    </a:p>
-                  </a:txBody>
-                  <a:tcPr marL="101600" marR="101600" marT="50800" marB="50800" anchor="ctr">
-                    <a:lnL w="0" cap="flat" cmpd="sng" algn="ctr">
-                      <a:noFill/>
-                    </a:lnL>
-                    <a:lnR w="0" cap="flat" cmpd="sng" algn="ctr">
-                      <a:noFill/>
-                    </a:lnR>
-                    <a:lnT w="0" cap="flat" cmpd="sng" algn="ctr">
-                      <a:noFill/>
-                    </a:lnT>
-                    <a:lnB w="6350" cap="flat" cmpd="sng" algn="ctr">
-                      <a:solidFill>
-                        <a:srgbClr val="E5E7EB"/>
-                      </a:solidFill>
-                      <a:prstDash val="solid"/>
-                      <a:round/>
-                      <a:headEnd type="none" w="med" len="med"/>
-                      <a:tailEnd type="none" w="med" len="med"/>
-                    </a:lnB>
-                    <a:solidFill>
-                      <a:srgbClr val="FFFFFF"/>
-                    </a:solidFill>
-                  </a:tcPr>
-                </a:tc>
-              </a:tr>
-              <a:tr h="358140">
-                <a:tc>
-                  <a:txBody>
-                    <a:bodyPr/>
-                    <a:lstStyle/>
-                    <a:p>
-                      <a:pPr indent="0" marL="0">
-                        <a:buNone/>
-                      </a:pPr>
-                      <a:r>
-                        <a:rPr lang="en-US" sz="900" dirty="0">
-                          <a:solidFill>
-                            <a:srgbClr val="111118"/>
-                          </a:solidFill>
-                          <a:latin typeface="Microsoft JhengHei" pitchFamily="34" charset="0"/>
-                          <a:ea typeface="Microsoft JhengHei" pitchFamily="34" charset="-122"/>
-                          <a:cs typeface="Microsoft JhengHei" pitchFamily="34" charset="-120"/>
-                        </a:rPr>
-                        <a:t>038</a:t>
-                      </a:r>
-                      <a:endParaRPr lang="en-US" sz="900" dirty="0">
-                        <a:latin typeface="Microsoft JhengHei" charset="0"/>
-                        <a:ea typeface="Microsoft JhengHei" charset="0"/>
-                        <a:cs typeface="Microsoft JhengHei" charset="0"/>
-                      </a:endParaRPr>
-                    </a:p>
-                  </a:txBody>
-                  <a:tcPr marL="101600" marR="101600" marT="50800" marB="50800" anchor="ctr">
-                    <a:lnL w="0" cap="flat" cmpd="sng" algn="ctr">
-                      <a:noFill/>
-                    </a:lnL>
-                    <a:lnR w="0" cap="flat" cmpd="sng" algn="ctr">
-                      <a:noFill/>
-                    </a:lnR>
-                    <a:lnT w="0" cap="flat" cmpd="sng" algn="ctr">
-                      <a:noFill/>
-                    </a:lnT>
-                    <a:lnB w="6350" cap="flat" cmpd="sng" algn="ctr">
-                      <a:solidFill>
-                        <a:srgbClr val="E5E7EB"/>
-                      </a:solidFill>
-                      <a:prstDash val="solid"/>
-                      <a:round/>
-                      <a:headEnd type="none" w="med" len="med"/>
-                      <a:tailEnd type="none" w="med" len="med"/>
-                    </a:lnB>
-                    <a:solidFill>
-                      <a:srgbClr val="FFFFFF"/>
-                    </a:solidFill>
-                  </a:tcPr>
-                </a:tc>
-                <a:tc>
-                  <a:txBody>
-                    <a:bodyPr/>
-                    <a:lstStyle/>
-                    <a:p>
-                      <a:pPr indent="0" marL="0">
-                        <a:buNone/>
-                      </a:pPr>
-                      <a:r>
-                        <a:rPr lang="en-US" sz="900" dirty="0">
-                          <a:solidFill>
-                            <a:srgbClr val="111118"/>
-                          </a:solidFill>
-                          <a:latin typeface="Microsoft JhengHei" pitchFamily="34" charset="0"/>
-                          <a:ea typeface="Microsoft JhengHei" pitchFamily="34" charset="-122"/>
-                          <a:cs typeface="Microsoft JhengHei" pitchFamily="34" charset="-120"/>
-                        </a:rPr>
-                        <a:t>Turkovich Family Wines - June 2019 - Stierch 03.ogv</a:t>
-                      </a:r>
-                      <a:endParaRPr lang="en-US" sz="900" dirty="0">
-                        <a:latin typeface="Microsoft JhengHei" charset="0"/>
-                        <a:ea typeface="Microsoft JhengHei" charset="0"/>
-                        <a:cs typeface="Microsoft JhengHei" charset="0"/>
-                      </a:endParaRPr>
-                    </a:p>
-                  </a:txBody>
-                  <a:tcPr marL="101600" marR="101600" marT="50800" marB="50800" anchor="ctr">
-                    <a:lnL w="0" cap="flat" cmpd="sng" algn="ctr">
-                      <a:noFill/>
-                    </a:lnL>
-                    <a:lnR w="0" cap="flat" cmpd="sng" algn="ctr">
-                      <a:noFill/>
-                    </a:lnR>
-                    <a:lnT w="0" cap="flat" cmpd="sng" algn="ctr">
-                      <a:noFill/>
-                    </a:lnT>
-                    <a:lnB w="6350" cap="flat" cmpd="sng" algn="ctr">
-                      <a:solidFill>
-                        <a:srgbClr val="E5E7EB"/>
-                      </a:solidFill>
-                      <a:prstDash val="solid"/>
-                      <a:round/>
-                      <a:headEnd type="none" w="med" len="med"/>
-                      <a:tailEnd type="none" w="med" len="med"/>
-                    </a:lnB>
-                    <a:solidFill>
-                      <a:srgbClr val="FFFFFF"/>
-                    </a:solidFill>
-                  </a:tcPr>
-                </a:tc>
-                <a:tc>
-                  <a:txBody>
-                    <a:bodyPr/>
-                    <a:lstStyle/>
-                    <a:p>
-                      <a:pPr indent="0" marL="0">
-                        <a:buNone/>
-                      </a:pPr>
-                      <a:r>
-                        <a:rPr lang="en-US" sz="900" dirty="0">
-                          <a:solidFill>
-                            <a:srgbClr val="111118"/>
-                          </a:solidFill>
-                          <a:latin typeface="Microsoft JhengHei" pitchFamily="34" charset="0"/>
-                          <a:ea typeface="Microsoft JhengHei" pitchFamily="34" charset="-122"/>
-                          <a:cs typeface="Microsoft JhengHei" pitchFamily="34" charset="-120"/>
-                        </a:rPr>
-                        <a:t>Missvain</a:t>
-                      </a:r>
-                      <a:endParaRPr lang="en-US" sz="900" dirty="0">
-                        <a:latin typeface="Microsoft JhengHei" charset="0"/>
-                        <a:ea typeface="Microsoft JhengHei" charset="0"/>
-                        <a:cs typeface="Microsoft JhengHei" charset="0"/>
-                      </a:endParaRPr>
-                    </a:p>
-                  </a:txBody>
-                  <a:tcPr marL="101600" marR="101600" marT="50800" marB="50800" anchor="ctr">
-                    <a:lnL w="0" cap="flat" cmpd="sng" algn="ctr">
-                      <a:noFill/>
-                    </a:lnL>
-                    <a:lnR w="0" cap="flat" cmpd="sng" algn="ctr">
-                      <a:noFill/>
-                    </a:lnR>
-                    <a:lnT w="0" cap="flat" cmpd="sng" algn="ctr">
-                      <a:noFill/>
-                    </a:lnT>
-                    <a:lnB w="6350" cap="flat" cmpd="sng" algn="ctr">
-                      <a:solidFill>
-                        <a:srgbClr val="E5E7EB"/>
-                      </a:solidFill>
-                      <a:prstDash val="solid"/>
-                      <a:round/>
-                      <a:headEnd type="none" w="med" len="med"/>
-                      <a:tailEnd type="none" w="med" len="med"/>
-                    </a:lnB>
-                    <a:solidFill>
-                      <a:srgbClr val="FFFFFF"/>
-                    </a:solidFill>
-                  </a:tcPr>
-                </a:tc>
-                <a:tc>
-                  <a:txBody>
-                    <a:bodyPr/>
-                    <a:lstStyle/>
-                    <a:p>
-                      <a:pPr indent="0" marL="0">
-                        <a:buNone/>
-                      </a:pPr>
-                      <a:r>
-                        <a:rPr lang="en-US" sz="900" dirty="0">
-                          <a:solidFill>
-                            <a:srgbClr val="111118"/>
-                          </a:solidFill>
-                          <a:latin typeface="Microsoft JhengHei" pitchFamily="34" charset="0"/>
-                          <a:ea typeface="Microsoft JhengHei" pitchFamily="34" charset="-122"/>
-                          <a:cs typeface="Microsoft JhengHei" pitchFamily="34" charset="-120"/>
-                        </a:rPr>
-                        <a:t>CC BY 4.0</a:t>
-                      </a:r>
-                      <a:endParaRPr lang="en-US" sz="900" dirty="0">
-                        <a:latin typeface="Microsoft JhengHei" charset="0"/>
-                        <a:ea typeface="Microsoft JhengHei" charset="0"/>
-                        <a:cs typeface="Microsoft JhengHei" charset="0"/>
-                      </a:endParaRPr>
-                    </a:p>
-                  </a:txBody>
-                  <a:tcPr marL="101600" marR="101600" marT="50800" marB="50800" anchor="ctr">
-                    <a:lnL w="0" cap="flat" cmpd="sng" algn="ctr">
-                      <a:noFill/>
-                    </a:lnL>
-                    <a:lnR w="0" cap="flat" cmpd="sng" algn="ctr">
-                      <a:noFill/>
-                    </a:lnR>
-                    <a:lnT w="0" cap="flat" cmpd="sng" algn="ctr">
-                      <a:noFill/>
-                    </a:lnT>
-                    <a:lnB w="6350" cap="flat" cmpd="sng" algn="ctr">
-                      <a:solidFill>
-                        <a:srgbClr val="E5E7EB"/>
-                      </a:solidFill>
-                      <a:prstDash val="solid"/>
-                      <a:round/>
-                      <a:headEnd type="none" w="med" len="med"/>
-                      <a:tailEnd type="none" w="med" len="med"/>
-                    </a:lnB>
-                    <a:solidFill>
-                      <a:srgbClr val="FFFFFF"/>
-                    </a:solidFill>
-                  </a:tcPr>
-                </a:tc>
-              </a:tr>
-              <a:tr h="358140">
-                <a:tc>
-                  <a:txBody>
-                    <a:bodyPr/>
-                    <a:lstStyle/>
-                    <a:p>
-                      <a:pPr indent="0" marL="0">
-                        <a:buNone/>
-                      </a:pPr>
-                      <a:r>
-                        <a:rPr lang="en-US" sz="900" dirty="0">
-                          <a:solidFill>
-                            <a:srgbClr val="111118"/>
-                          </a:solidFill>
-                          <a:latin typeface="Microsoft JhengHei" pitchFamily="34" charset="0"/>
-                          <a:ea typeface="Microsoft JhengHei" pitchFamily="34" charset="-122"/>
-                          <a:cs typeface="Microsoft JhengHei" pitchFamily="34" charset="-120"/>
-                        </a:rPr>
-                        <a:t>039</a:t>
-                      </a:r>
-                      <a:endParaRPr lang="en-US" sz="900" dirty="0">
-                        <a:latin typeface="Microsoft JhengHei" charset="0"/>
-                        <a:ea typeface="Microsoft JhengHei" charset="0"/>
-                        <a:cs typeface="Microsoft JhengHei" charset="0"/>
-                      </a:endParaRPr>
-                    </a:p>
-                  </a:txBody>
-                  <a:tcPr marL="101600" marR="101600" marT="50800" marB="50800" anchor="ctr">
-                    <a:lnL w="0" cap="flat" cmpd="sng" algn="ctr">
-                      <a:noFill/>
-                    </a:lnL>
-                    <a:lnR w="0" cap="flat" cmpd="sng" algn="ctr">
-                      <a:noFill/>
-                    </a:lnR>
-                    <a:lnT w="0" cap="flat" cmpd="sng" algn="ctr">
-                      <a:noFill/>
-                    </a:lnT>
-                    <a:lnB w="6350" cap="flat" cmpd="sng" algn="ctr">
-                      <a:solidFill>
-                        <a:srgbClr val="E5E7EB"/>
-                      </a:solidFill>
-                      <a:prstDash val="solid"/>
-                      <a:round/>
-                      <a:headEnd type="none" w="med" len="med"/>
-                      <a:tailEnd type="none" w="med" len="med"/>
-                    </a:lnB>
-                    <a:solidFill>
-                      <a:srgbClr val="FFFFFF"/>
-                    </a:solidFill>
-                  </a:tcPr>
-                </a:tc>
-                <a:tc>
-                  <a:txBody>
-                    <a:bodyPr/>
-                    <a:lstStyle/>
-                    <a:p>
-                      <a:pPr indent="0" marL="0">
-                        <a:buNone/>
-                      </a:pPr>
-                      <a:r>
-                        <a:rPr lang="en-US" sz="900" dirty="0">
-                          <a:solidFill>
-                            <a:srgbClr val="111118"/>
-                          </a:solidFill>
-                          <a:latin typeface="Microsoft JhengHei" pitchFamily="34" charset="0"/>
-                          <a:ea typeface="Microsoft JhengHei" pitchFamily="34" charset="-122"/>
-                          <a:cs typeface="Microsoft JhengHei" pitchFamily="34" charset="-120"/>
-                        </a:rPr>
-                        <a:t>Drinking glass symphony.ogv</a:t>
-                      </a:r>
-                      <a:endParaRPr lang="en-US" sz="900" dirty="0">
-                        <a:latin typeface="Microsoft JhengHei" charset="0"/>
-                        <a:ea typeface="Microsoft JhengHei" charset="0"/>
-                        <a:cs typeface="Microsoft JhengHei" charset="0"/>
-                      </a:endParaRPr>
-                    </a:p>
-                  </a:txBody>
-                  <a:tcPr marL="101600" marR="101600" marT="50800" marB="50800" anchor="ctr">
-                    <a:lnL w="0" cap="flat" cmpd="sng" algn="ctr">
-                      <a:noFill/>
-                    </a:lnL>
-                    <a:lnR w="0" cap="flat" cmpd="sng" algn="ctr">
-                      <a:noFill/>
-                    </a:lnR>
-                    <a:lnT w="0" cap="flat" cmpd="sng" algn="ctr">
-                      <a:noFill/>
-                    </a:lnT>
-                    <a:lnB w="6350" cap="flat" cmpd="sng" algn="ctr">
-                      <a:solidFill>
-                        <a:srgbClr val="E5E7EB"/>
-                      </a:solidFill>
-                      <a:prstDash val="solid"/>
-                      <a:round/>
-                      <a:headEnd type="none" w="med" len="med"/>
-                      <a:tailEnd type="none" w="med" len="med"/>
-                    </a:lnB>
-                    <a:solidFill>
-                      <a:srgbClr val="FFFFFF"/>
-                    </a:solidFill>
-                  </a:tcPr>
-                </a:tc>
-                <a:tc>
-                  <a:txBody>
-                    <a:bodyPr/>
-                    <a:lstStyle/>
-                    <a:p>
-                      <a:pPr indent="0" marL="0">
-                        <a:buNone/>
-                      </a:pPr>
-                      <a:r>
-                        <a:rPr lang="en-US" sz="900" dirty="0">
-                          <a:solidFill>
-                            <a:srgbClr val="111118"/>
-                          </a:solidFill>
-                          <a:latin typeface="Microsoft JhengHei" pitchFamily="34" charset="0"/>
-                          <a:ea typeface="Microsoft JhengHei" pitchFamily="34" charset="-122"/>
-                          <a:cs typeface="Microsoft JhengHei" pitchFamily="34" charset="-120"/>
-                        </a:rPr>
-                        <a:t>IMG 4512</a:t>
-                      </a:r>
-                      <a:endParaRPr lang="en-US" sz="900" dirty="0">
-                        <a:latin typeface="Microsoft JhengHei" charset="0"/>
-                        <a:ea typeface="Microsoft JhengHei" charset="0"/>
-                        <a:cs typeface="Microsoft JhengHei" charset="0"/>
-                      </a:endParaRPr>
-                    </a:p>
-                  </a:txBody>
-                  <a:tcPr marL="101600" marR="101600" marT="50800" marB="50800" anchor="ctr">
-                    <a:lnL w="0" cap="flat" cmpd="sng" algn="ctr">
-                      <a:noFill/>
-                    </a:lnL>
-                    <a:lnR w="0" cap="flat" cmpd="sng" algn="ctr">
-                      <a:noFill/>
-                    </a:lnR>
-                    <a:lnT w="0" cap="flat" cmpd="sng" algn="ctr">
-                      <a:noFill/>
-                    </a:lnT>
-                    <a:lnB w="6350" cap="flat" cmpd="sng" algn="ctr">
-                      <a:solidFill>
-                        <a:srgbClr val="E5E7EB"/>
-                      </a:solidFill>
-                      <a:prstDash val="solid"/>
-                      <a:round/>
-                      <a:headEnd type="none" w="med" len="med"/>
-                      <a:tailEnd type="none" w="med" len="med"/>
-                    </a:lnB>
-                    <a:solidFill>
-                      <a:srgbClr val="FFFFFF"/>
-                    </a:solidFill>
-                  </a:tcPr>
-                </a:tc>
-                <a:tc>
-                  <a:txBody>
-                    <a:bodyPr/>
-                    <a:lstStyle/>
-                    <a:p>
-                      <a:pPr indent="0" marL="0">
-                        <a:buNone/>
-                      </a:pPr>
-                      <a:r>
-                        <a:rPr lang="en-US" sz="900" dirty="0">
-                          <a:solidFill>
-                            <a:srgbClr val="111118"/>
-                          </a:solidFill>
-                          <a:latin typeface="Microsoft JhengHei" pitchFamily="34" charset="0"/>
-                          <a:ea typeface="Microsoft JhengHei" pitchFamily="34" charset="-122"/>
-                          <a:cs typeface="Microsoft JhengHei" pitchFamily="34" charset="-120"/>
-                        </a:rPr>
-                        <a:t>CC0</a:t>
-                      </a:r>
-                      <a:endParaRPr lang="en-US" sz="900" dirty="0">
-                        <a:latin typeface="Microsoft JhengHei" charset="0"/>
-                        <a:ea typeface="Microsoft JhengHei" charset="0"/>
-                        <a:cs typeface="Microsoft JhengHei" charset="0"/>
-                      </a:endParaRPr>
-                    </a:p>
-                  </a:txBody>
-                  <a:tcPr marL="101600" marR="101600" marT="50800" marB="50800" anchor="ctr">
-                    <a:lnL w="0" cap="flat" cmpd="sng" algn="ctr">
-                      <a:noFill/>
-                    </a:lnL>
-                    <a:lnR w="0" cap="flat" cmpd="sng" algn="ctr">
-                      <a:noFill/>
-                    </a:lnR>
-                    <a:lnT w="0" cap="flat" cmpd="sng" algn="ctr">
-                      <a:noFill/>
-                    </a:lnT>
-                    <a:lnB w="6350" cap="flat" cmpd="sng" algn="ctr">
-                      <a:solidFill>
-                        <a:srgbClr val="E5E7EB"/>
-                      </a:solidFill>
-                      <a:prstDash val="solid"/>
-                      <a:round/>
-                      <a:headEnd type="none" w="med" len="med"/>
-                      <a:tailEnd type="none" w="med" len="med"/>
-                    </a:lnB>
-                    <a:solidFill>
-                      <a:srgbClr val="FFFFFF"/>
-                    </a:solidFill>
-                  </a:tcPr>
-                </a:tc>
-              </a:tr>
-              <a:tr h="358140">
-                <a:tc>
-                  <a:txBody>
-                    <a:bodyPr/>
-                    <a:lstStyle/>
-                    <a:p>
-                      <a:pPr indent="0" marL="0">
-                        <a:buNone/>
-                      </a:pPr>
-                      <a:r>
-                        <a:rPr lang="en-US" sz="900" dirty="0">
-                          <a:solidFill>
-                            <a:srgbClr val="111118"/>
-                          </a:solidFill>
-                          <a:latin typeface="Microsoft JhengHei" pitchFamily="34" charset="0"/>
-                          <a:ea typeface="Microsoft JhengHei" pitchFamily="34" charset="-122"/>
-                          <a:cs typeface="Microsoft JhengHei" pitchFamily="34" charset="-120"/>
-                        </a:rPr>
-                        <a:t>040</a:t>
-                      </a:r>
-                      <a:endParaRPr lang="en-US" sz="900" dirty="0">
-                        <a:latin typeface="Microsoft JhengHei" charset="0"/>
-                        <a:ea typeface="Microsoft JhengHei" charset="0"/>
-                        <a:cs typeface="Microsoft JhengHei" charset="0"/>
-                      </a:endParaRPr>
-                    </a:p>
-                  </a:txBody>
-                  <a:tcPr marL="101600" marR="101600" marT="50800" marB="50800" anchor="ctr">
-                    <a:lnL w="0" cap="flat" cmpd="sng" algn="ctr">
-                      <a:noFill/>
-                    </a:lnL>
-                    <a:lnR w="0" cap="flat" cmpd="sng" algn="ctr">
-                      <a:noFill/>
-                    </a:lnR>
-                    <a:lnT w="0" cap="flat" cmpd="sng" algn="ctr">
-                      <a:noFill/>
-                    </a:lnT>
-                    <a:lnB w="6350" cap="flat" cmpd="sng" algn="ctr">
-                      <a:solidFill>
-                        <a:srgbClr val="E5E7EB"/>
-                      </a:solidFill>
-                      <a:prstDash val="solid"/>
-                      <a:round/>
-                      <a:headEnd type="none" w="med" len="med"/>
-                      <a:tailEnd type="none" w="med" len="med"/>
-                    </a:lnB>
-                    <a:solidFill>
-                      <a:srgbClr val="FFFFFF"/>
-                    </a:solidFill>
-                  </a:tcPr>
-                </a:tc>
-                <a:tc>
-                  <a:txBody>
-                    <a:bodyPr/>
-                    <a:lstStyle/>
-                    <a:p>
-                      <a:pPr indent="0" marL="0">
-                        <a:buNone/>
-                      </a:pPr>
-                      <a:r>
-                        <a:rPr lang="en-US" sz="900" dirty="0">
-                          <a:solidFill>
-                            <a:srgbClr val="111118"/>
-                          </a:solidFill>
-                          <a:latin typeface="Microsoft JhengHei" pitchFamily="34" charset="0"/>
-                          <a:ea typeface="Microsoft JhengHei" pitchFamily="34" charset="-122"/>
-                          <a:cs typeface="Microsoft JhengHei" pitchFamily="34" charset="-120"/>
-                        </a:rPr>
-                        <a:t>Thermochromic mug.webm</a:t>
-                      </a:r>
-                      <a:endParaRPr lang="en-US" sz="900" dirty="0">
-                        <a:latin typeface="Microsoft JhengHei" charset="0"/>
-                        <a:ea typeface="Microsoft JhengHei" charset="0"/>
-                        <a:cs typeface="Microsoft JhengHei" charset="0"/>
-                      </a:endParaRPr>
-                    </a:p>
-                  </a:txBody>
-                  <a:tcPr marL="101600" marR="101600" marT="50800" marB="50800" anchor="ctr">
-                    <a:lnL w="0" cap="flat" cmpd="sng" algn="ctr">
-                      <a:noFill/>
-                    </a:lnL>
-                    <a:lnR w="0" cap="flat" cmpd="sng" algn="ctr">
-                      <a:noFill/>
-                    </a:lnR>
-                    <a:lnT w="0" cap="flat" cmpd="sng" algn="ctr">
-                      <a:noFill/>
-                    </a:lnT>
-                    <a:lnB w="6350" cap="flat" cmpd="sng" algn="ctr">
-                      <a:solidFill>
-                        <a:srgbClr val="E5E7EB"/>
-                      </a:solidFill>
-                      <a:prstDash val="solid"/>
-                      <a:round/>
-                      <a:headEnd type="none" w="med" len="med"/>
-                      <a:tailEnd type="none" w="med" len="med"/>
-                    </a:lnB>
-                    <a:solidFill>
-                      <a:srgbClr val="FFFFFF"/>
-                    </a:solidFill>
-                  </a:tcPr>
-                </a:tc>
-                <a:tc>
-                  <a:txBody>
-                    <a:bodyPr/>
-                    <a:lstStyle/>
-                    <a:p>
-                      <a:pPr indent="0" marL="0">
-                        <a:buNone/>
-                      </a:pPr>
-                      <a:r>
-                        <a:rPr lang="en-US" sz="900" dirty="0">
-                          <a:solidFill>
-                            <a:srgbClr val="111118"/>
-                          </a:solidFill>
-                          <a:latin typeface="Microsoft JhengHei" pitchFamily="34" charset="0"/>
-                          <a:ea typeface="Microsoft JhengHei" pitchFamily="34" charset="-122"/>
-                          <a:cs typeface="Microsoft JhengHei" pitchFamily="34" charset="-120"/>
-                        </a:rPr>
-                        <a:t>The wub</a:t>
-                      </a:r>
-                      <a:endParaRPr lang="en-US" sz="900" dirty="0">
-                        <a:latin typeface="Microsoft JhengHei" charset="0"/>
-                        <a:ea typeface="Microsoft JhengHei" charset="0"/>
-                        <a:cs typeface="Microsoft JhengHei" charset="0"/>
-                      </a:endParaRPr>
-                    </a:p>
-                  </a:txBody>
-                  <a:tcPr marL="101600" marR="101600" marT="50800" marB="50800" anchor="ctr">
-                    <a:lnL w="0" cap="flat" cmpd="sng" algn="ctr">
-                      <a:noFill/>
-                    </a:lnL>
-                    <a:lnR w="0" cap="flat" cmpd="sng" algn="ctr">
-                      <a:noFill/>
-                    </a:lnR>
-                    <a:lnT w="0" cap="flat" cmpd="sng" algn="ctr">
-                      <a:noFill/>
-                    </a:lnT>
-                    <a:lnB w="6350" cap="flat" cmpd="sng" algn="ctr">
-                      <a:solidFill>
-                        <a:srgbClr val="E5E7EB"/>
-                      </a:solidFill>
-                      <a:prstDash val="solid"/>
-                      <a:round/>
-                      <a:headEnd type="none" w="med" len="med"/>
-                      <a:tailEnd type="none" w="med" len="med"/>
-                    </a:lnB>
-                    <a:solidFill>
-                      <a:srgbClr val="FFFFFF"/>
-                    </a:solidFill>
-                  </a:tcPr>
-                </a:tc>
-                <a:tc>
-                  <a:txBody>
-                    <a:bodyPr/>
-                    <a:lstStyle/>
-                    <a:p>
-                      <a:pPr indent="0" marL="0">
-                        <a:buNone/>
-                      </a:pPr>
-                      <a:r>
-                        <a:rPr lang="en-US" sz="900" dirty="0">
-                          <a:solidFill>
-                            <a:srgbClr val="111118"/>
-                          </a:solidFill>
-                          <a:latin typeface="Microsoft JhengHei" pitchFamily="34" charset="0"/>
-                          <a:ea typeface="Microsoft JhengHei" pitchFamily="34" charset="-122"/>
-                          <a:cs typeface="Microsoft JhengHei" pitchFamily="34" charset="-120"/>
-                        </a:rPr>
-                        <a:t>CC BY-SA 4.0</a:t>
-                      </a:r>
-                      <a:endParaRPr lang="en-US" sz="900" dirty="0">
-                        <a:latin typeface="Microsoft JhengHei" charset="0"/>
-                        <a:ea typeface="Microsoft JhengHei" charset="0"/>
-                        <a:cs typeface="Microsoft JhengHei" charset="0"/>
-                      </a:endParaRPr>
-                    </a:p>
-                  </a:txBody>
-                  <a:tcPr marL="101600" marR="101600" marT="50800" marB="50800" anchor="ctr">
-                    <a:lnL w="0" cap="flat" cmpd="sng" algn="ctr">
-                      <a:noFill/>
-                    </a:lnL>
-                    <a:lnR w="0" cap="flat" cmpd="sng" algn="ctr">
-                      <a:noFill/>
-                    </a:lnR>
-                    <a:lnT w="0" cap="flat" cmpd="sng" algn="ctr">
-                      <a:noFill/>
-                    </a:lnT>
-                    <a:lnB w="6350" cap="flat" cmpd="sng" algn="ctr">
-                      <a:solidFill>
-                        <a:srgbClr val="E5E7EB"/>
-                      </a:solidFill>
-                      <a:prstDash val="solid"/>
-                      <a:round/>
-                      <a:headEnd type="none" w="med" len="med"/>
-                      <a:tailEnd type="none" w="med" len="med"/>
-                    </a:lnB>
-                    <a:solidFill>
-                      <a:srgbClr val="FFFFFF"/>
-                    </a:solidFill>
-                  </a:tcPr>
-                </a:tc>
-              </a:tr>
-              <a:tr h="358140">
-                <a:tc>
-                  <a:txBody>
-                    <a:bodyPr/>
-                    <a:lstStyle/>
-                    <a:p>
-                      <a:pPr indent="0" marL="0">
-                        <a:buNone/>
-                      </a:pPr>
-                      <a:r>
-                        <a:rPr lang="en-US" sz="900" dirty="0">
-                          <a:solidFill>
-                            <a:srgbClr val="111118"/>
-                          </a:solidFill>
-                          <a:latin typeface="Microsoft JhengHei" pitchFamily="34" charset="0"/>
-                          <a:ea typeface="Microsoft JhengHei" pitchFamily="34" charset="-122"/>
-                          <a:cs typeface="Microsoft JhengHei" pitchFamily="34" charset="-120"/>
-                        </a:rPr>
-                        <a:t>041</a:t>
-                      </a:r>
-                      <a:endParaRPr lang="en-US" sz="900" dirty="0">
-                        <a:latin typeface="Microsoft JhengHei" charset="0"/>
-                        <a:ea typeface="Microsoft JhengHei" charset="0"/>
-                        <a:cs typeface="Microsoft JhengHei" charset="0"/>
-                      </a:endParaRPr>
-                    </a:p>
-                  </a:txBody>
-                  <a:tcPr marL="101600" marR="101600" marT="50800" marB="50800" anchor="ctr">
-                    <a:lnL w="0" cap="flat" cmpd="sng" algn="ctr">
-                      <a:noFill/>
-                    </a:lnL>
-                    <a:lnR w="0" cap="flat" cmpd="sng" algn="ctr">
-                      <a:noFill/>
-                    </a:lnR>
-                    <a:lnT w="0" cap="flat" cmpd="sng" algn="ctr">
-                      <a:noFill/>
-                    </a:lnT>
-                    <a:lnB w="6350" cap="flat" cmpd="sng" algn="ctr">
-                      <a:solidFill>
-                        <a:srgbClr val="E5E7EB"/>
-                      </a:solidFill>
-                      <a:prstDash val="solid"/>
-                      <a:round/>
-                      <a:headEnd type="none" w="med" len="med"/>
-                      <a:tailEnd type="none" w="med" len="med"/>
-                    </a:lnB>
-                    <a:solidFill>
-                      <a:srgbClr val="FFFFFF"/>
-                    </a:solidFill>
-                  </a:tcPr>
-                </a:tc>
-                <a:tc>
-                  <a:txBody>
-                    <a:bodyPr/>
-                    <a:lstStyle/>
-                    <a:p>
-                      <a:pPr indent="0" marL="0">
-                        <a:buNone/>
-                      </a:pPr>
-                      <a:r>
-                        <a:rPr lang="en-US" sz="900" dirty="0">
-                          <a:solidFill>
-                            <a:srgbClr val="111118"/>
-                          </a:solidFill>
-                          <a:latin typeface="Microsoft JhengHei" pitchFamily="34" charset="0"/>
-                          <a:ea typeface="Microsoft JhengHei" pitchFamily="34" charset="-122"/>
-                          <a:cs typeface="Microsoft JhengHei" pitchFamily="34" charset="-120"/>
-                        </a:rPr>
-                        <a:t>Empty Streets of Paris COVID19.webm</a:t>
-                      </a:r>
-                      <a:endParaRPr lang="en-US" sz="900" dirty="0">
-                        <a:latin typeface="Microsoft JhengHei" charset="0"/>
-                        <a:ea typeface="Microsoft JhengHei" charset="0"/>
-                        <a:cs typeface="Microsoft JhengHei" charset="0"/>
-                      </a:endParaRPr>
-                    </a:p>
-                  </a:txBody>
-                  <a:tcPr marL="101600" marR="101600" marT="50800" marB="50800" anchor="ctr">
-                    <a:lnL w="0" cap="flat" cmpd="sng" algn="ctr">
-                      <a:noFill/>
-                    </a:lnL>
-                    <a:lnR w="0" cap="flat" cmpd="sng" algn="ctr">
-                      <a:noFill/>
-                    </a:lnR>
-                    <a:lnT w="0" cap="flat" cmpd="sng" algn="ctr">
-                      <a:noFill/>
-                    </a:lnT>
-                    <a:lnB w="6350" cap="flat" cmpd="sng" algn="ctr">
-                      <a:solidFill>
-                        <a:srgbClr val="E5E7EB"/>
-                      </a:solidFill>
-                      <a:prstDash val="solid"/>
-                      <a:round/>
-                      <a:headEnd type="none" w="med" len="med"/>
-                      <a:tailEnd type="none" w="med" len="med"/>
-                    </a:lnB>
-                    <a:solidFill>
-                      <a:srgbClr val="FFFFFF"/>
-                    </a:solidFill>
-                  </a:tcPr>
-                </a:tc>
-                <a:tc>
-                  <a:txBody>
-                    <a:bodyPr/>
-                    <a:lstStyle/>
-                    <a:p>
-                      <a:pPr indent="0" marL="0">
-                        <a:buNone/>
-                      </a:pPr>
-                      <a:r>
-                        <a:rPr lang="en-US" sz="900" dirty="0">
-                          <a:solidFill>
-                            <a:srgbClr val="111118"/>
-                          </a:solidFill>
-                          <a:latin typeface="Microsoft JhengHei" pitchFamily="34" charset="0"/>
-                          <a:ea typeface="Microsoft JhengHei" pitchFamily="34" charset="-122"/>
-                          <a:cs typeface="Microsoft JhengHei" pitchFamily="34" charset="-120"/>
-                        </a:rPr>
-                        <a:t>CreatorsCloud</a:t>
-                      </a:r>
-                      <a:endParaRPr lang="en-US" sz="900" dirty="0">
-                        <a:latin typeface="Microsoft JhengHei" charset="0"/>
-                        <a:ea typeface="Microsoft JhengHei" charset="0"/>
-                        <a:cs typeface="Microsoft JhengHei" charset="0"/>
-                      </a:endParaRPr>
-                    </a:p>
-                  </a:txBody>
-                  <a:tcPr marL="101600" marR="101600" marT="50800" marB="50800" anchor="ctr">
-                    <a:lnL w="0" cap="flat" cmpd="sng" algn="ctr">
-                      <a:noFill/>
-                    </a:lnL>
-                    <a:lnR w="0" cap="flat" cmpd="sng" algn="ctr">
-                      <a:noFill/>
-                    </a:lnR>
-                    <a:lnT w="0" cap="flat" cmpd="sng" algn="ctr">
-                      <a:noFill/>
-                    </a:lnT>
-                    <a:lnB w="6350" cap="flat" cmpd="sng" algn="ctr">
-                      <a:solidFill>
-                        <a:srgbClr val="E5E7EB"/>
-                      </a:solidFill>
-                      <a:prstDash val="solid"/>
-                      <a:round/>
-                      <a:headEnd type="none" w="med" len="med"/>
-                      <a:tailEnd type="none" w="med" len="med"/>
-                    </a:lnB>
-                    <a:solidFill>
-                      <a:srgbClr val="FFFFFF"/>
-                    </a:solidFill>
-                  </a:tcPr>
-                </a:tc>
-                <a:tc>
-                  <a:txBody>
-                    <a:bodyPr/>
-                    <a:lstStyle/>
-                    <a:p>
-                      <a:pPr indent="0" marL="0">
-                        <a:buNone/>
-                      </a:pPr>
-                      <a:r>
-                        <a:rPr lang="en-US" sz="900" dirty="0">
-                          <a:solidFill>
-                            <a:srgbClr val="111118"/>
-                          </a:solidFill>
-                          <a:latin typeface="Microsoft JhengHei" pitchFamily="34" charset="0"/>
-                          <a:ea typeface="Microsoft JhengHei" pitchFamily="34" charset="-122"/>
-                          <a:cs typeface="Microsoft JhengHei" pitchFamily="34" charset="-120"/>
-                        </a:rPr>
-                        <a:t>CC BY 3.0</a:t>
-                      </a:r>
-                      <a:endParaRPr lang="en-US" sz="900" dirty="0">
-                        <a:latin typeface="Microsoft JhengHei" charset="0"/>
-                        <a:ea typeface="Microsoft JhengHei" charset="0"/>
-                        <a:cs typeface="Microsoft JhengHei" charset="0"/>
-                      </a:endParaRPr>
-                    </a:p>
-                  </a:txBody>
-                  <a:tcPr marL="101600" marR="101600" marT="50800" marB="50800" anchor="ctr">
-                    <a:lnL w="0" cap="flat" cmpd="sng" algn="ctr">
-                      <a:noFill/>
-                    </a:lnL>
-                    <a:lnR w="0" cap="flat" cmpd="sng" algn="ctr">
-                      <a:noFill/>
-                    </a:lnR>
-                    <a:lnT w="0" cap="flat" cmpd="sng" algn="ctr">
-                      <a:noFill/>
-                    </a:lnT>
-                    <a:lnB w="6350" cap="flat" cmpd="sng" algn="ctr">
-                      <a:solidFill>
-                        <a:srgbClr val="E5E7EB"/>
-                      </a:solidFill>
-                      <a:prstDash val="solid"/>
-                      <a:round/>
-                      <a:headEnd type="none" w="med" len="med"/>
-                      <a:tailEnd type="none" w="med" len="med"/>
-                    </a:lnB>
-                    <a:solidFill>
-                      <a:srgbClr val="FFFFFF"/>
-                    </a:solidFill>
-                  </a:tcPr>
-                </a:tc>
-              </a:tr>
-              <a:tr h="358140">
-                <a:tc>
-                  <a:txBody>
-                    <a:bodyPr/>
-                    <a:lstStyle/>
-                    <a:p>
-                      <a:pPr indent="0" marL="0">
-                        <a:buNone/>
-                      </a:pPr>
-                      <a:r>
-                        <a:rPr lang="en-US" sz="900" dirty="0">
-                          <a:solidFill>
-                            <a:srgbClr val="111118"/>
-                          </a:solidFill>
-                          <a:latin typeface="Microsoft JhengHei" pitchFamily="34" charset="0"/>
-                          <a:ea typeface="Microsoft JhengHei" pitchFamily="34" charset="-122"/>
-                          <a:cs typeface="Microsoft JhengHei" pitchFamily="34" charset="-120"/>
-                        </a:rPr>
-                        <a:t>042</a:t>
-                      </a:r>
-                      <a:endParaRPr lang="en-US" sz="900" dirty="0">
-                        <a:latin typeface="Microsoft JhengHei" charset="0"/>
-                        <a:ea typeface="Microsoft JhengHei" charset="0"/>
-                        <a:cs typeface="Microsoft JhengHei" charset="0"/>
-                      </a:endParaRPr>
-                    </a:p>
-                  </a:txBody>
-                  <a:tcPr marL="101600" marR="101600" marT="50800" marB="50800" anchor="ctr">
-                    <a:lnL w="0" cap="flat" cmpd="sng" algn="ctr">
-                      <a:noFill/>
-                    </a:lnL>
-                    <a:lnR w="0" cap="flat" cmpd="sng" algn="ctr">
-                      <a:noFill/>
-                    </a:lnR>
-                    <a:lnT w="0" cap="flat" cmpd="sng" algn="ctr">
-                      <a:noFill/>
-                    </a:lnT>
-                    <a:lnB w="6350" cap="flat" cmpd="sng" algn="ctr">
-                      <a:solidFill>
-                        <a:srgbClr val="E5E7EB"/>
-                      </a:solidFill>
-                      <a:prstDash val="solid"/>
-                      <a:round/>
-                      <a:headEnd type="none" w="med" len="med"/>
-                      <a:tailEnd type="none" w="med" len="med"/>
-                    </a:lnB>
-                    <a:solidFill>
-                      <a:srgbClr val="FFFFFF"/>
-                    </a:solidFill>
-                  </a:tcPr>
-                </a:tc>
-                <a:tc>
-                  <a:txBody>
-                    <a:bodyPr/>
-                    <a:lstStyle/>
-                    <a:p>
-                      <a:pPr indent="0" marL="0">
-                        <a:buNone/>
-                      </a:pPr>
-                      <a:r>
-                        <a:rPr lang="en-US" sz="900" dirty="0">
-                          <a:solidFill>
-                            <a:srgbClr val="111118"/>
-                          </a:solidFill>
-                          <a:latin typeface="Microsoft JhengHei" pitchFamily="34" charset="0"/>
-                          <a:ea typeface="Microsoft JhengHei" pitchFamily="34" charset="-122"/>
-                          <a:cs typeface="Microsoft JhengHei" pitchFamily="34" charset="-120"/>
-                        </a:rPr>
-                        <a:t>IrishTraditionalMusic-IrishPub-Tokyo-2016-2-24.webm</a:t>
-                      </a:r>
-                      <a:endParaRPr lang="en-US" sz="900" dirty="0">
-                        <a:latin typeface="Microsoft JhengHei" charset="0"/>
-                        <a:ea typeface="Microsoft JhengHei" charset="0"/>
-                        <a:cs typeface="Microsoft JhengHei" charset="0"/>
-                      </a:endParaRPr>
-                    </a:p>
-                  </a:txBody>
-                  <a:tcPr marL="101600" marR="101600" marT="50800" marB="50800" anchor="ctr">
-                    <a:lnL w="0" cap="flat" cmpd="sng" algn="ctr">
-                      <a:noFill/>
-                    </a:lnL>
-                    <a:lnR w="0" cap="flat" cmpd="sng" algn="ctr">
-                      <a:noFill/>
-                    </a:lnR>
-                    <a:lnT w="0" cap="flat" cmpd="sng" algn="ctr">
-                      <a:noFill/>
-                    </a:lnT>
-                    <a:lnB w="6350" cap="flat" cmpd="sng" algn="ctr">
-                      <a:solidFill>
-                        <a:srgbClr val="E5E7EB"/>
-                      </a:solidFill>
-                      <a:prstDash val="solid"/>
-                      <a:round/>
-                      <a:headEnd type="none" w="med" len="med"/>
-                      <a:tailEnd type="none" w="med" len="med"/>
-                    </a:lnB>
-                    <a:solidFill>
-                      <a:srgbClr val="FFFFFF"/>
-                    </a:solidFill>
-                  </a:tcPr>
-                </a:tc>
-                <a:tc>
-                  <a:txBody>
-                    <a:bodyPr/>
-                    <a:lstStyle/>
-                    <a:p>
-                      <a:pPr indent="0" marL="0">
-                        <a:buNone/>
-                      </a:pPr>
-                      <a:r>
-                        <a:rPr lang="en-US" sz="900" dirty="0">
-                          <a:solidFill>
-                            <a:srgbClr val="111118"/>
-                          </a:solidFill>
-                          <a:latin typeface="Microsoft JhengHei" pitchFamily="34" charset="0"/>
-                          <a:ea typeface="Microsoft JhengHei" pitchFamily="34" charset="-122"/>
-                          <a:cs typeface="Microsoft JhengHei" pitchFamily="34" charset="-120"/>
-                        </a:rPr>
-                        <a:t>Nesnad</a:t>
-                      </a:r>
-                      <a:endParaRPr lang="en-US" sz="900" dirty="0">
-                        <a:latin typeface="Microsoft JhengHei" charset="0"/>
-                        <a:ea typeface="Microsoft JhengHei" charset="0"/>
-                        <a:cs typeface="Microsoft JhengHei" charset="0"/>
-                      </a:endParaRPr>
-                    </a:p>
-                  </a:txBody>
-                  <a:tcPr marL="101600" marR="101600" marT="50800" marB="50800" anchor="ctr">
-                    <a:lnL w="0" cap="flat" cmpd="sng" algn="ctr">
-                      <a:noFill/>
-                    </a:lnL>
-                    <a:lnR w="0" cap="flat" cmpd="sng" algn="ctr">
-                      <a:noFill/>
-                    </a:lnR>
-                    <a:lnT w="0" cap="flat" cmpd="sng" algn="ctr">
-                      <a:noFill/>
-                    </a:lnT>
-                    <a:lnB w="6350" cap="flat" cmpd="sng" algn="ctr">
-                      <a:solidFill>
-                        <a:srgbClr val="E5E7EB"/>
-                      </a:solidFill>
-                      <a:prstDash val="solid"/>
-                      <a:round/>
-                      <a:headEnd type="none" w="med" len="med"/>
-                      <a:tailEnd type="none" w="med" len="med"/>
-                    </a:lnB>
-                    <a:solidFill>
-                      <a:srgbClr val="FFFFFF"/>
-                    </a:solidFill>
-                  </a:tcPr>
-                </a:tc>
-                <a:tc>
-                  <a:txBody>
-                    <a:bodyPr/>
-                    <a:lstStyle/>
-                    <a:p>
-                      <a:pPr indent="0" marL="0">
-                        <a:buNone/>
-                      </a:pPr>
-                      <a:r>
-                        <a:rPr lang="en-US" sz="900" dirty="0">
-                          <a:solidFill>
-                            <a:srgbClr val="111118"/>
-                          </a:solidFill>
-                          <a:latin typeface="Microsoft JhengHei" pitchFamily="34" charset="0"/>
-                          <a:ea typeface="Microsoft JhengHei" pitchFamily="34" charset="-122"/>
-                          <a:cs typeface="Microsoft JhengHei" pitchFamily="34" charset="-120"/>
-                        </a:rPr>
-                        <a:t>CC BY 4.0</a:t>
-                      </a:r>
-                      <a:endParaRPr lang="en-US" sz="900" dirty="0">
-                        <a:latin typeface="Microsoft JhengHei" charset="0"/>
-                        <a:ea typeface="Microsoft JhengHei" charset="0"/>
-                        <a:cs typeface="Microsoft JhengHei" charset="0"/>
-                      </a:endParaRPr>
-                    </a:p>
-                  </a:txBody>
-                  <a:tcPr marL="101600" marR="101600" marT="50800" marB="50800" anchor="ctr">
-                    <a:lnL w="0" cap="flat" cmpd="sng" algn="ctr">
-                      <a:noFill/>
-                    </a:lnL>
-                    <a:lnR w="0" cap="flat" cmpd="sng" algn="ctr">
-                      <a:noFill/>
-                    </a:lnR>
-                    <a:lnT w="0" cap="flat" cmpd="sng" algn="ctr">
-                      <a:noFill/>
-                    </a:lnT>
-                    <a:lnB w="6350" cap="flat" cmpd="sng" algn="ctr">
-                      <a:solidFill>
-                        <a:srgbClr val="E5E7EB"/>
-                      </a:solidFill>
-                      <a:prstDash val="solid"/>
-                      <a:round/>
-                      <a:headEnd type="none" w="med" len="med"/>
-                      <a:tailEnd type="none" w="med" len="med"/>
-                    </a:lnB>
-                    <a:solidFill>
-                      <a:srgbClr val="FFFFFF"/>
-                    </a:solidFill>
-                  </a:tcPr>
-                </a:tc>
-              </a:tr>
-              <a:tr h="358140">
-                <a:tc>
-                  <a:txBody>
-                    <a:bodyPr/>
-                    <a:lstStyle/>
-                    <a:p>
-                      <a:pPr indent="0" marL="0">
-                        <a:buNone/>
-                      </a:pPr>
-                      <a:r>
-                        <a:rPr lang="en-US" sz="900" dirty="0">
-                          <a:solidFill>
-                            <a:srgbClr val="111118"/>
-                          </a:solidFill>
-                          <a:latin typeface="Microsoft JhengHei" pitchFamily="34" charset="0"/>
-                          <a:ea typeface="Microsoft JhengHei" pitchFamily="34" charset="-122"/>
-                          <a:cs typeface="Microsoft JhengHei" pitchFamily="34" charset="-120"/>
-                        </a:rPr>
-                        <a:t>043</a:t>
-                      </a:r>
-                      <a:endParaRPr lang="en-US" sz="900" dirty="0">
-                        <a:latin typeface="Microsoft JhengHei" charset="0"/>
-                        <a:ea typeface="Microsoft JhengHei" charset="0"/>
-                        <a:cs typeface="Microsoft JhengHei" charset="0"/>
-                      </a:endParaRPr>
-                    </a:p>
-                  </a:txBody>
-                  <a:tcPr marL="101600" marR="101600" marT="50800" marB="50800" anchor="ctr">
-                    <a:lnL w="0" cap="flat" cmpd="sng" algn="ctr">
-                      <a:noFill/>
-                    </a:lnL>
-                    <a:lnR w="0" cap="flat" cmpd="sng" algn="ctr">
-                      <a:noFill/>
-                    </a:lnR>
-                    <a:lnT w="0" cap="flat" cmpd="sng" algn="ctr">
-                      <a:noFill/>
-                    </a:lnT>
-                    <a:lnB w="6350" cap="flat" cmpd="sng" algn="ctr">
-                      <a:solidFill>
-                        <a:srgbClr val="E5E7EB"/>
-                      </a:solidFill>
-                      <a:prstDash val="solid"/>
-                      <a:round/>
-                      <a:headEnd type="none" w="med" len="med"/>
-                      <a:tailEnd type="none" w="med" len="med"/>
-                    </a:lnB>
-                    <a:solidFill>
-                      <a:srgbClr val="FFFFFF"/>
-                    </a:solidFill>
-                  </a:tcPr>
-                </a:tc>
-                <a:tc>
-                  <a:txBody>
-                    <a:bodyPr/>
-                    <a:lstStyle/>
-                    <a:p>
-                      <a:pPr indent="0" marL="0">
-                        <a:buNone/>
-                      </a:pPr>
-                      <a:r>
-                        <a:rPr lang="en-US" sz="900" dirty="0">
-                          <a:solidFill>
-                            <a:srgbClr val="111118"/>
-                          </a:solidFill>
-                          <a:latin typeface="Microsoft JhengHei" pitchFamily="34" charset="0"/>
-                          <a:ea typeface="Microsoft JhengHei" pitchFamily="34" charset="-122"/>
-                          <a:cs typeface="Microsoft JhengHei" pitchFamily="34" charset="-120"/>
-                        </a:rPr>
-                        <a:t>Couple holding hands.webm</a:t>
-                      </a:r>
-                      <a:endParaRPr lang="en-US" sz="900" dirty="0">
-                        <a:latin typeface="Microsoft JhengHei" charset="0"/>
-                        <a:ea typeface="Microsoft JhengHei" charset="0"/>
-                        <a:cs typeface="Microsoft JhengHei" charset="0"/>
-                      </a:endParaRPr>
-                    </a:p>
-                  </a:txBody>
-                  <a:tcPr marL="101600" marR="101600" marT="50800" marB="50800" anchor="ctr">
-                    <a:lnL w="0" cap="flat" cmpd="sng" algn="ctr">
-                      <a:noFill/>
-                    </a:lnL>
-                    <a:lnR w="0" cap="flat" cmpd="sng" algn="ctr">
-                      <a:noFill/>
-                    </a:lnR>
-                    <a:lnT w="0" cap="flat" cmpd="sng" algn="ctr">
-                      <a:noFill/>
-                    </a:lnT>
-                    <a:lnB w="6350" cap="flat" cmpd="sng" algn="ctr">
-                      <a:solidFill>
-                        <a:srgbClr val="E5E7EB"/>
-                      </a:solidFill>
-                      <a:prstDash val="solid"/>
-                      <a:round/>
-                      <a:headEnd type="none" w="med" len="med"/>
-                      <a:tailEnd type="none" w="med" len="med"/>
-                    </a:lnB>
-                    <a:solidFill>
-                      <a:srgbClr val="FFFFFF"/>
-                    </a:solidFill>
-                  </a:tcPr>
-                </a:tc>
-                <a:tc>
-                  <a:txBody>
-                    <a:bodyPr/>
-                    <a:lstStyle/>
-                    <a:p>
-                      <a:pPr indent="0" marL="0">
-                        <a:buNone/>
-                      </a:pPr>
-                      <a:r>
-                        <a:rPr lang="en-US" sz="900" dirty="0">
-                          <a:solidFill>
-                            <a:srgbClr val="111118"/>
-                          </a:solidFill>
-                          <a:latin typeface="Microsoft JhengHei" pitchFamily="34" charset="0"/>
-                          <a:ea typeface="Microsoft JhengHei" pitchFamily="34" charset="-122"/>
-                          <a:cs typeface="Microsoft JhengHei" pitchFamily="34" charset="-120"/>
-                        </a:rPr>
-                        <a:t>YouTube user “Editor”</a:t>
-                      </a:r>
-                      <a:endParaRPr lang="en-US" sz="900" dirty="0">
-                        <a:latin typeface="Microsoft JhengHei" charset="0"/>
-                        <a:ea typeface="Microsoft JhengHei" charset="0"/>
-                        <a:cs typeface="Microsoft JhengHei" charset="0"/>
-                      </a:endParaRPr>
-                    </a:p>
-                  </a:txBody>
-                  <a:tcPr marL="101600" marR="101600" marT="50800" marB="50800" anchor="ctr">
-                    <a:lnL w="0" cap="flat" cmpd="sng" algn="ctr">
-                      <a:noFill/>
-                    </a:lnL>
-                    <a:lnR w="0" cap="flat" cmpd="sng" algn="ctr">
-                      <a:noFill/>
-                    </a:lnR>
-                    <a:lnT w="0" cap="flat" cmpd="sng" algn="ctr">
-                      <a:noFill/>
-                    </a:lnT>
-                    <a:lnB w="6350" cap="flat" cmpd="sng" algn="ctr">
-                      <a:solidFill>
-                        <a:srgbClr val="E5E7EB"/>
-                      </a:solidFill>
-                      <a:prstDash val="solid"/>
-                      <a:round/>
-                      <a:headEnd type="none" w="med" len="med"/>
-                      <a:tailEnd type="none" w="med" len="med"/>
-                    </a:lnB>
-                    <a:solidFill>
-                      <a:srgbClr val="FFFFFF"/>
-                    </a:solidFill>
-                  </a:tcPr>
-                </a:tc>
-                <a:tc>
-                  <a:txBody>
-                    <a:bodyPr/>
-                    <a:lstStyle/>
-                    <a:p>
-                      <a:pPr indent="0" marL="0">
-                        <a:buNone/>
-                      </a:pPr>
-                      <a:r>
-                        <a:rPr lang="en-US" sz="900" dirty="0">
-                          <a:solidFill>
-                            <a:srgbClr val="111118"/>
-                          </a:solidFill>
-                          <a:latin typeface="Microsoft JhengHei" pitchFamily="34" charset="0"/>
-                          <a:ea typeface="Microsoft JhengHei" pitchFamily="34" charset="-122"/>
-                          <a:cs typeface="Microsoft JhengHei" pitchFamily="34" charset="-120"/>
-                        </a:rPr>
-                        <a:t>CC BY 3.0</a:t>
-                      </a:r>
-                      <a:endParaRPr lang="en-US" sz="900" dirty="0">
-                        <a:latin typeface="Microsoft JhengHei" charset="0"/>
-                        <a:ea typeface="Microsoft JhengHei" charset="0"/>
-                        <a:cs typeface="Microsoft JhengHei" charset="0"/>
-                      </a:endParaRPr>
-                    </a:p>
-                  </a:txBody>
-                  <a:tcPr marL="101600" marR="101600" marT="50800" marB="50800" anchor="ctr">
-                    <a:lnL w="0" cap="flat" cmpd="sng" algn="ctr">
-                      <a:noFill/>
-                    </a:lnL>
-                    <a:lnR w="0" cap="flat" cmpd="sng" algn="ctr">
-                      <a:noFill/>
-                    </a:lnR>
-                    <a:lnT w="0" cap="flat" cmpd="sng" algn="ctr">
-                      <a:noFill/>
-                    </a:lnT>
-                    <a:lnB w="6350" cap="flat" cmpd="sng" algn="ctr">
-                      <a:solidFill>
-                        <a:srgbClr val="E5E7EB"/>
-                      </a:solidFill>
-                      <a:prstDash val="solid"/>
-                      <a:round/>
-                      <a:headEnd type="none" w="med" len="med"/>
-                      <a:tailEnd type="none" w="med" len="med"/>
-                    </a:lnB>
-                    <a:solidFill>
-                      <a:srgbClr val="FFFFFF"/>
-                    </a:solidFill>
-                  </a:tcPr>
-                </a:tc>
-              </a:tr>
-            </a:tbl>
-          </a:graphicData>
-        </a:graphic>
-      </p:graphicFrame>
-      <p:sp>
-        <p:nvSpPr>
-          <p:cNvPr id="25" name="Slide Number Placeholder 0"/>
-          <p:cNvSpPr>
-            <a:spLocks noGrp="1"/>
-          </p:cNvSpPr>
-          <p:nvPr>
-            <p:ph type="sldNum" sz="quarter" idx="4294967295"/>
-          </p:nvPr>
-        </p:nvSpPr>
-        <p:spPr>
-          <a:xfrm>
-            <a:off x="11109960" y="6355080"/>
-            <a:ext cx="457200" cy="274320"/>
-          </a:xfrm>
-          <a:prstGeom prst="rect">
-            <a:avLst/>
-          </a:prstGeom>
-          <a:extLst>
-            <a:ext uri="{C572A759-6A51-4108-AA02-DFA0A04FC94B}">
-              <ma14:wrappingTextBoxFlag xmlns:ma14="http://schemas.microsoft.com/office/mac/drawingml/2011/main" val="0"/>
-            </a:ext>
-          </a:extLst>
-        </p:spPr>
-        <p:txBody>
-          <a:bodyPr/>
-          <a:lstStyle>
-            <a:lvl1pPr>
-              <a:defRPr sz="1000">
-                <a:solidFill>
-                  <a:srgbClr val="9CA3AF"/>
-                </a:solidFill>
-              </a:defRPr>
-            </a:lvl1pPr>
-          </a:lstStyle>
-          <a:p>
-            <a:pPr algn="r"/>
-            <a:fld id="{F7021451-1387-4CA6-816F-3879F97B5CBC}" type="slidenum">
-              <a:rPr b="0" lang="en-US"/>
-              <a:t>27</a:t>
             </a:fld>
             <a:endParaRPr lang="en-US"/>
           </a:p>
